--- a/Smart_Restaurant_Presentation_III.pptx
+++ b/Smart_Restaurant_Presentation_III.pptx
@@ -2933,16 +2933,40 @@
           <a:chExt cx="0" cy="0"/>
         </a:xfrm>
       </p:grpSpPr>
-      <p:sp>
-        <p:nvSpPr>
-          <p:cNvPr id="2" name="Text 0"/>
-          <p:cNvSpPr/>
-          <p:nvPr/>
-        </p:nvSpPr>
-        <p:spPr>
-          <a:xfrm>
-            <a:off x="731520" y="594360"/>
-            <a:ext cx="7680960" cy="274320"/>
+      <p:pic>
+        <p:nvPicPr>
+          <p:cNvPr id="2" name="Image 0" descr="d:\resrtorant\presentation_assets\tcet_header.jpeg">    </p:cNvPr>
+          <p:cNvPicPr>
+            <a:picLocks noChangeAspect="1"/>
+          </p:cNvPicPr>
+          <p:nvPr/>
+        </p:nvPicPr>
+        <p:blipFill>
+          <a:blip r:embed="rId1"/>
+          <a:stretch>
+            <a:fillRect/>
+          </a:stretch>
+        </p:blipFill>
+        <p:spPr>
+          <a:xfrm>
+            <a:off x="1371600" y="137160"/>
+            <a:ext cx="6400800" cy="868680"/>
+          </a:xfrm>
+          <a:prstGeom prst="rect">
+            <a:avLst/>
+          </a:prstGeom>
+        </p:spPr>
+      </p:pic>
+      <p:sp>
+        <p:nvSpPr>
+          <p:cNvPr id="3" name="Text 0"/>
+          <p:cNvSpPr/>
+          <p:nvPr/>
+        </p:nvSpPr>
+        <p:spPr>
+          <a:xfrm>
+            <a:off x="731520" y="1078992"/>
+            <a:ext cx="7680960" cy="228600"/>
           </a:xfrm>
           <a:prstGeom prst="rect">
             <a:avLst/>
@@ -2958,7 +2982,7 @@
               <a:buNone/>
             </a:pPr>
             <a:r>
-              <a:rPr lang="en-US" sz="1100" b="1" dirty="0">
+              <a:rPr lang="en-US" sz="1050" b="1" dirty="0">
                 <a:solidFill>
                   <a:srgbClr val="2563EB"/>
                 </a:solidFill>
@@ -2968,20 +2992,20 @@
               </a:rPr>
               <a:t>Presentation III – Capstone Project Evaluation (A.Y. 2026–27)</a:t>
             </a:r>
-            <a:endParaRPr lang="en-US" sz="1100" dirty="0"/>
-          </a:p>
-        </p:txBody>
-      </p:sp>
-      <p:sp>
-        <p:nvSpPr>
-          <p:cNvPr id="3" name="Text 1"/>
-          <p:cNvSpPr/>
-          <p:nvPr/>
-        </p:nvSpPr>
-        <p:spPr>
-          <a:xfrm>
-            <a:off x="731520" y="914400"/>
-            <a:ext cx="7680960" cy="594360"/>
+            <a:endParaRPr lang="en-US" sz="1050" dirty="0"/>
+          </a:p>
+        </p:txBody>
+      </p:sp>
+      <p:sp>
+        <p:nvSpPr>
+          <p:cNvPr id="4" name="Text 1"/>
+          <p:cNvSpPr/>
+          <p:nvPr/>
+        </p:nvSpPr>
+        <p:spPr>
+          <a:xfrm>
+            <a:off x="731520" y="1325880"/>
+            <a:ext cx="7680960" cy="502920"/>
           </a:xfrm>
           <a:prstGeom prst="rect">
             <a:avLst/>
@@ -2997,7 +3021,7 @@
               <a:buNone/>
             </a:pPr>
             <a:r>
-              <a:rPr lang="en-US" sz="3400" b="1" dirty="0">
+              <a:rPr lang="en-US" sz="3200" b="1" dirty="0">
                 <a:solidFill>
                   <a:srgbClr val="1E3A8A"/>
                 </a:solidFill>
@@ -3007,20 +3031,20 @@
               </a:rPr>
               <a:t>Smart Restaurant</a:t>
             </a:r>
-            <a:endParaRPr lang="en-US" sz="3400" dirty="0"/>
-          </a:p>
-        </p:txBody>
-      </p:sp>
-      <p:sp>
-        <p:nvSpPr>
-          <p:cNvPr id="4" name="Text 2"/>
-          <p:cNvSpPr/>
-          <p:nvPr/>
-        </p:nvSpPr>
-        <p:spPr>
-          <a:xfrm>
-            <a:off x="914400" y="1536192"/>
-            <a:ext cx="7315200" cy="457200"/>
+            <a:endParaRPr lang="en-US" sz="3200" dirty="0"/>
+          </a:p>
+        </p:txBody>
+      </p:sp>
+      <p:sp>
+        <p:nvSpPr>
+          <p:cNvPr id="5" name="Text 2"/>
+          <p:cNvSpPr/>
+          <p:nvPr/>
+        </p:nvSpPr>
+        <p:spPr>
+          <a:xfrm>
+            <a:off x="914400" y="1874520"/>
+            <a:ext cx="7315200" cy="347472"/>
           </a:xfrm>
           <a:prstGeom prst="rect">
             <a:avLst/>
@@ -3036,7 +3060,7 @@
               <a:buNone/>
             </a:pPr>
             <a:r>
-              <a:rPr lang="en-US" sz="1300" dirty="0">
+              <a:rPr lang="en-US" sz="1200" dirty="0">
                 <a:solidFill>
                   <a:srgbClr val="334155"/>
                 </a:solidFill>
@@ -3046,19 +3070,19 @@
               </a:rPr>
               <a:t>A Contactless Dining Platform with Markerless WebXR 3D Augmented Reality &amp; Real-Time Kitchen Display System</a:t>
             </a:r>
-            <a:endParaRPr lang="en-US" sz="1300" dirty="0"/>
-          </a:p>
-        </p:txBody>
-      </p:sp>
-      <p:sp>
-        <p:nvSpPr>
-          <p:cNvPr id="5" name="Shape 3"/>
-          <p:cNvSpPr/>
-          <p:nvPr/>
-        </p:nvSpPr>
-        <p:spPr>
-          <a:xfrm>
-            <a:off x="731520" y="2240280"/>
+            <a:endParaRPr lang="en-US" sz="1200" dirty="0"/>
+          </a:p>
+        </p:txBody>
+      </p:sp>
+      <p:sp>
+        <p:nvSpPr>
+          <p:cNvPr id="6" name="Shape 3"/>
+          <p:cNvSpPr/>
+          <p:nvPr/>
+        </p:nvSpPr>
+        <p:spPr>
+          <a:xfrm>
+            <a:off x="731520" y="2304288"/>
             <a:ext cx="3657600" cy="1783080"/>
           </a:xfrm>
           <a:prstGeom prst="roundRect">
@@ -3079,13 +3103,13 @@
       </p:sp>
       <p:sp>
         <p:nvSpPr>
-          <p:cNvPr id="6" name="Text 4"/>
-          <p:cNvSpPr/>
-          <p:nvPr/>
-        </p:nvSpPr>
-        <p:spPr>
-          <a:xfrm>
-            <a:off x="914400" y="2377440"/>
+          <p:cNvPr id="7" name="Text 4"/>
+          <p:cNvSpPr/>
+          <p:nvPr/>
+        </p:nvSpPr>
+        <p:spPr>
+          <a:xfrm>
+            <a:off x="914400" y="2423160"/>
             <a:ext cx="3291840" cy="228600"/>
           </a:xfrm>
           <a:prstGeom prst="rect">
@@ -3118,13 +3142,13 @@
       </p:sp>
       <p:sp>
         <p:nvSpPr>
-          <p:cNvPr id="7" name="Text 5"/>
-          <p:cNvSpPr/>
-          <p:nvPr/>
-        </p:nvSpPr>
-        <p:spPr>
-          <a:xfrm>
-            <a:off x="914400" y="2651760"/>
+          <p:cNvPr id="8" name="Text 5"/>
+          <p:cNvSpPr/>
+          <p:nvPr/>
+        </p:nvSpPr>
+        <p:spPr>
+          <a:xfrm>
+            <a:off x="914400" y="2670048"/>
             <a:ext cx="3291840" cy="1234440"/>
           </a:xfrm>
           <a:prstGeom prst="rect">
@@ -3260,13 +3284,13 @@
       </p:sp>
       <p:sp>
         <p:nvSpPr>
-          <p:cNvPr id="8" name="Shape 6"/>
-          <p:cNvSpPr/>
-          <p:nvPr/>
-        </p:nvSpPr>
-        <p:spPr>
-          <a:xfrm>
-            <a:off x="4754880" y="2240280"/>
+          <p:cNvPr id="9" name="Shape 6"/>
+          <p:cNvSpPr/>
+          <p:nvPr/>
+        </p:nvSpPr>
+        <p:spPr>
+          <a:xfrm>
+            <a:off x="4754880" y="2304288"/>
             <a:ext cx="3657600" cy="1783080"/>
           </a:xfrm>
           <a:prstGeom prst="roundRect">
@@ -3287,13 +3311,13 @@
       </p:sp>
       <p:sp>
         <p:nvSpPr>
-          <p:cNvPr id="9" name="Text 7"/>
-          <p:cNvSpPr/>
-          <p:nvPr/>
-        </p:nvSpPr>
-        <p:spPr>
-          <a:xfrm>
-            <a:off x="4937760" y="2377440"/>
+          <p:cNvPr id="10" name="Text 7"/>
+          <p:cNvSpPr/>
+          <p:nvPr/>
+        </p:nvSpPr>
+        <p:spPr>
+          <a:xfrm>
+            <a:off x="4937760" y="2423160"/>
             <a:ext cx="3291840" cy="228600"/>
           </a:xfrm>
           <a:prstGeom prst="rect">
@@ -3326,13 +3350,13 @@
       </p:sp>
       <p:sp>
         <p:nvSpPr>
-          <p:cNvPr id="10" name="Text 8"/>
-          <p:cNvSpPr/>
-          <p:nvPr/>
-        </p:nvSpPr>
-        <p:spPr>
-          <a:xfrm>
-            <a:off x="4937760" y="2651760"/>
+          <p:cNvPr id="11" name="Text 8"/>
+          <p:cNvSpPr/>
+          <p:nvPr/>
+        </p:nvSpPr>
+        <p:spPr>
+          <a:xfrm>
+            <a:off x="4937760" y="2670048"/>
             <a:ext cx="3291840" cy="1234440"/>
           </a:xfrm>
           <a:prstGeom prst="rect">
@@ -3467,7 +3491,7 @@
       </p:sp>
       <p:sp>
         <p:nvSpPr>
-          <p:cNvPr id="11" name="Shape 9"/>
+          <p:cNvPr id="12" name="Shape 9"/>
           <p:cNvSpPr/>
           <p:nvPr/>
         </p:nvSpPr>
@@ -3494,7 +3518,7 @@
       </p:sp>
       <p:sp>
         <p:nvSpPr>
-          <p:cNvPr id="12" name="Text 10"/>
+          <p:cNvPr id="13" name="Text 10"/>
           <p:cNvSpPr/>
           <p:nvPr/>
         </p:nvSpPr>
@@ -3563,16 +3587,40 @@
           <a:chExt cx="0" cy="0"/>
         </a:xfrm>
       </p:grpSpPr>
-      <p:sp>
-        <p:nvSpPr>
-          <p:cNvPr id="2" name="Text 0"/>
-          <p:cNvSpPr/>
-          <p:nvPr/>
-        </p:nvSpPr>
-        <p:spPr>
-          <a:xfrm>
-            <a:off x="548640" y="365760"/>
-            <a:ext cx="8046720" cy="201168"/>
+      <p:pic>
+        <p:nvPicPr>
+          <p:cNvPr id="2" name="Image 0" descr="d:\resrtorant\presentation_assets\tcet_header.jpeg">    </p:cNvPr>
+          <p:cNvPicPr>
+            <a:picLocks noChangeAspect="1"/>
+          </p:cNvPicPr>
+          <p:nvPr/>
+        </p:nvPicPr>
+        <p:blipFill>
+          <a:blip r:embed="rId1"/>
+          <a:stretch>
+            <a:fillRect/>
+          </a:stretch>
+        </p:blipFill>
+        <p:spPr>
+          <a:xfrm>
+            <a:off x="1828800" y="45720"/>
+            <a:ext cx="5486400" cy="749808"/>
+          </a:xfrm>
+          <a:prstGeom prst="rect">
+            <a:avLst/>
+          </a:prstGeom>
+        </p:spPr>
+      </p:pic>
+      <p:sp>
+        <p:nvSpPr>
+          <p:cNvPr id="3" name="Text 0"/>
+          <p:cNvSpPr/>
+          <p:nvPr/>
+        </p:nvSpPr>
+        <p:spPr>
+          <a:xfrm>
+            <a:off x="548640" y="813816"/>
+            <a:ext cx="5943600" cy="329184"/>
           </a:xfrm>
           <a:prstGeom prst="rect">
             <a:avLst/>
@@ -3588,46 +3636,7 @@
               <a:buNone/>
             </a:pPr>
             <a:r>
-              <a:rPr lang="en-US" sz="1000" b="1" dirty="0">
-                <a:solidFill>
-                  <a:srgbClr val="2563EB"/>
-                </a:solidFill>
-                <a:latin typeface="Calibri" pitchFamily="34" charset="0"/>
-                <a:ea typeface="Calibri" pitchFamily="34" charset="-122"/>
-                <a:cs typeface="Calibri" pitchFamily="34" charset="-120"/>
-              </a:rPr>
-              <a:t>Rubric Criterion 4 (10 Marks)</a:t>
-            </a:r>
-            <a:endParaRPr lang="en-US" sz="1000" dirty="0"/>
-          </a:p>
-        </p:txBody>
-      </p:sp>
-      <p:sp>
-        <p:nvSpPr>
-          <p:cNvPr id="3" name="Text 1"/>
-          <p:cNvSpPr/>
-          <p:nvPr/>
-        </p:nvSpPr>
-        <p:spPr>
-          <a:xfrm>
-            <a:off x="548640" y="566928"/>
-            <a:ext cx="8046720" cy="411480"/>
-          </a:xfrm>
-          <a:prstGeom prst="rect">
-            <a:avLst/>
-          </a:prstGeom>
-          <a:noFill/>
-          <a:ln/>
-        </p:spPr>
-        <p:txBody>
-          <a:bodyPr wrap="square" lIns="0" tIns="0" rIns="0" bIns="0" rtlCol="0" anchor="ctr"/>
-          <a:lstStyle/>
-          <a:p>
-            <a:pPr indent="0" marL="0">
-              <a:buNone/>
-            </a:pPr>
-            <a:r>
-              <a:rPr lang="en-US" sz="2100" b="1" dirty="0">
+              <a:rPr lang="en-US" sz="1650" b="1" dirty="0">
                 <a:solidFill>
                   <a:srgbClr val="1E3A8A"/>
                 </a:solidFill>
@@ -3635,15 +3644,54 @@
                 <a:ea typeface="Cambria" pitchFamily="34" charset="-122"/>
                 <a:cs typeface="Cambria" pitchFamily="34" charset="-120"/>
               </a:rPr>
-              <a:t>Project Management: Agile Methodology, Milestones &amp; Risk Analysis</a:t>
-            </a:r>
-            <a:endParaRPr lang="en-US" sz="2100" dirty="0"/>
-          </a:p>
-        </p:txBody>
-      </p:sp>
-      <p:sp>
-        <p:nvSpPr>
-          <p:cNvPr id="4" name="Text 2"/>
+              <a:t>Project Management: Agile Sprints &amp; Risk Analysis</a:t>
+            </a:r>
+            <a:endParaRPr lang="en-US" sz="1650" dirty="0"/>
+          </a:p>
+        </p:txBody>
+      </p:sp>
+      <p:sp>
+        <p:nvSpPr>
+          <p:cNvPr id="4" name="Text 1"/>
+          <p:cNvSpPr/>
+          <p:nvPr/>
+        </p:nvSpPr>
+        <p:spPr>
+          <a:xfrm>
+            <a:off x="6492240" y="841248"/>
+            <a:ext cx="2103120" cy="274320"/>
+          </a:xfrm>
+          <a:prstGeom prst="rect">
+            <a:avLst/>
+          </a:prstGeom>
+          <a:noFill/>
+          <a:ln/>
+        </p:spPr>
+        <p:txBody>
+          <a:bodyPr wrap="square" lIns="0" tIns="0" rIns="0" bIns="0" rtlCol="0" anchor="ctr"/>
+          <a:lstStyle/>
+          <a:p>
+            <a:pPr algn="r" indent="0" marL="0">
+              <a:buNone/>
+            </a:pPr>
+            <a:r>
+              <a:rPr lang="en-US" sz="950" b="1" dirty="0">
+                <a:solidFill>
+                  <a:srgbClr val="2563EB"/>
+                </a:solidFill>
+                <a:latin typeface="Calibri" pitchFamily="34" charset="0"/>
+                <a:ea typeface="Calibri" pitchFamily="34" charset="-122"/>
+                <a:cs typeface="Calibri" pitchFamily="34" charset="-120"/>
+              </a:rPr>
+              <a:t>Rubric Criterion 4 (10 Marks)</a:t>
+            </a:r>
+            <a:endParaRPr lang="en-US" sz="950" dirty="0"/>
+          </a:p>
+        </p:txBody>
+      </p:sp>
+      <p:sp>
+        <p:nvSpPr>
+          <p:cNvPr id="5" name="Text 2"/>
           <p:cNvSpPr/>
           <p:nvPr/>
         </p:nvSpPr>
@@ -3682,7 +3730,7 @@
       </p:sp>
       <p:sp>
         <p:nvSpPr>
-          <p:cNvPr id="5" name="Text 3"/>
+          <p:cNvPr id="6" name="Text 3"/>
           <p:cNvSpPr/>
           <p:nvPr/>
         </p:nvSpPr>
@@ -3721,7 +3769,7 @@
       </p:sp>
       <p:sp>
         <p:nvSpPr>
-          <p:cNvPr id="6" name="Shape 4"/>
+          <p:cNvPr id="7" name="Shape 4"/>
           <p:cNvSpPr/>
           <p:nvPr/>
         </p:nvSpPr>
@@ -3748,7 +3796,7 @@
       </p:sp>
       <p:sp>
         <p:nvSpPr>
-          <p:cNvPr id="7" name="Text 5"/>
+          <p:cNvPr id="8" name="Text 5"/>
           <p:cNvSpPr/>
           <p:nvPr/>
         </p:nvSpPr>
@@ -3787,7 +3835,7 @@
       </p:sp>
       <p:sp>
         <p:nvSpPr>
-          <p:cNvPr id="8" name="Text 6"/>
+          <p:cNvPr id="9" name="Text 6"/>
           <p:cNvSpPr/>
           <p:nvPr/>
         </p:nvSpPr>
@@ -3914,7 +3962,7 @@
       </p:sp>
       <p:sp>
         <p:nvSpPr>
-          <p:cNvPr id="9" name="Shape 7"/>
+          <p:cNvPr id="10" name="Shape 7"/>
           <p:cNvSpPr/>
           <p:nvPr/>
         </p:nvSpPr>
@@ -3941,7 +3989,7 @@
       </p:sp>
       <p:sp>
         <p:nvSpPr>
-          <p:cNvPr id="10" name="Text 8"/>
+          <p:cNvPr id="11" name="Text 8"/>
           <p:cNvSpPr/>
           <p:nvPr/>
         </p:nvSpPr>
@@ -3980,7 +4028,7 @@
       </p:sp>
       <p:sp>
         <p:nvSpPr>
-          <p:cNvPr id="11" name="Text 9"/>
+          <p:cNvPr id="12" name="Text 9"/>
           <p:cNvSpPr/>
           <p:nvPr/>
         </p:nvSpPr>
@@ -4158,16 +4206,40 @@
           <a:chExt cx="0" cy="0"/>
         </a:xfrm>
       </p:grpSpPr>
-      <p:sp>
-        <p:nvSpPr>
-          <p:cNvPr id="2" name="Text 0"/>
-          <p:cNvSpPr/>
-          <p:nvPr/>
-        </p:nvSpPr>
-        <p:spPr>
-          <a:xfrm>
-            <a:off x="548640" y="365760"/>
-            <a:ext cx="8046720" cy="201168"/>
+      <p:pic>
+        <p:nvPicPr>
+          <p:cNvPr id="2" name="Image 0" descr="d:\resrtorant\presentation_assets\tcet_header.jpeg">    </p:cNvPr>
+          <p:cNvPicPr>
+            <a:picLocks noChangeAspect="1"/>
+          </p:cNvPicPr>
+          <p:nvPr/>
+        </p:nvPicPr>
+        <p:blipFill>
+          <a:blip r:embed="rId1"/>
+          <a:stretch>
+            <a:fillRect/>
+          </a:stretch>
+        </p:blipFill>
+        <p:spPr>
+          <a:xfrm>
+            <a:off x="1828800" y="45720"/>
+            <a:ext cx="5486400" cy="749808"/>
+          </a:xfrm>
+          <a:prstGeom prst="rect">
+            <a:avLst/>
+          </a:prstGeom>
+        </p:spPr>
+      </p:pic>
+      <p:sp>
+        <p:nvSpPr>
+          <p:cNvPr id="3" name="Text 0"/>
+          <p:cNvSpPr/>
+          <p:nvPr/>
+        </p:nvSpPr>
+        <p:spPr>
+          <a:xfrm>
+            <a:off x="548640" y="813816"/>
+            <a:ext cx="5943600" cy="329184"/>
           </a:xfrm>
           <a:prstGeom prst="rect">
             <a:avLst/>
@@ -4183,46 +4255,7 @@
               <a:buNone/>
             </a:pPr>
             <a:r>
-              <a:rPr lang="en-US" sz="1000" b="1" dirty="0">
-                <a:solidFill>
-                  <a:srgbClr val="2563EB"/>
-                </a:solidFill>
-                <a:latin typeface="Calibri" pitchFamily="34" charset="0"/>
-                <a:ea typeface="Calibri" pitchFamily="34" charset="-122"/>
-                <a:cs typeface="Calibri" pitchFamily="34" charset="-120"/>
-              </a:rPr>
-              <a:t>Rubric Criterion 5 (10 Marks)</a:t>
-            </a:r>
-            <a:endParaRPr lang="en-US" sz="1000" dirty="0"/>
-          </a:p>
-        </p:txBody>
-      </p:sp>
-      <p:sp>
-        <p:nvSpPr>
-          <p:cNvPr id="3" name="Text 1"/>
-          <p:cNvSpPr/>
-          <p:nvPr/>
-        </p:nvSpPr>
-        <p:spPr>
-          <a:xfrm>
-            <a:off x="548640" y="566928"/>
-            <a:ext cx="8046720" cy="411480"/>
-          </a:xfrm>
-          <a:prstGeom prst="rect">
-            <a:avLst/>
-          </a:prstGeom>
-          <a:noFill/>
-          <a:ln/>
-        </p:spPr>
-        <p:txBody>
-          <a:bodyPr wrap="square" lIns="0" tIns="0" rIns="0" bIns="0" rtlCol="0" anchor="ctr"/>
-          <a:lstStyle/>
-          <a:p>
-            <a:pPr indent="0" marL="0">
-              <a:buNone/>
-            </a:pPr>
-            <a:r>
-              <a:rPr lang="en-US" sz="2100" b="1" dirty="0">
+              <a:rPr lang="en-US" sz="1650" b="1" dirty="0">
                 <a:solidFill>
                   <a:srgbClr val="1E3A8A"/>
                 </a:solidFill>
@@ -4230,15 +4263,54 @@
                 <a:ea typeface="Cambria" pitchFamily="34" charset="-122"/>
                 <a:cs typeface="Cambria" pitchFamily="34" charset="-120"/>
               </a:rPr>
-              <a:t>Teamwork, Task Allocation &amp; Collaborative Practices</a:t>
-            </a:r>
-            <a:endParaRPr lang="en-US" sz="2100" dirty="0"/>
-          </a:p>
-        </p:txBody>
-      </p:sp>
-      <p:sp>
-        <p:nvSpPr>
-          <p:cNvPr id="4" name="Text 2"/>
+              <a:t>Teamwork, Task Allocation &amp; Collaboration</a:t>
+            </a:r>
+            <a:endParaRPr lang="en-US" sz="1650" dirty="0"/>
+          </a:p>
+        </p:txBody>
+      </p:sp>
+      <p:sp>
+        <p:nvSpPr>
+          <p:cNvPr id="4" name="Text 1"/>
+          <p:cNvSpPr/>
+          <p:nvPr/>
+        </p:nvSpPr>
+        <p:spPr>
+          <a:xfrm>
+            <a:off x="6492240" y="841248"/>
+            <a:ext cx="2103120" cy="274320"/>
+          </a:xfrm>
+          <a:prstGeom prst="rect">
+            <a:avLst/>
+          </a:prstGeom>
+          <a:noFill/>
+          <a:ln/>
+        </p:spPr>
+        <p:txBody>
+          <a:bodyPr wrap="square" lIns="0" tIns="0" rIns="0" bIns="0" rtlCol="0" anchor="ctr"/>
+          <a:lstStyle/>
+          <a:p>
+            <a:pPr algn="r" indent="0" marL="0">
+              <a:buNone/>
+            </a:pPr>
+            <a:r>
+              <a:rPr lang="en-US" sz="950" b="1" dirty="0">
+                <a:solidFill>
+                  <a:srgbClr val="2563EB"/>
+                </a:solidFill>
+                <a:latin typeface="Calibri" pitchFamily="34" charset="0"/>
+                <a:ea typeface="Calibri" pitchFamily="34" charset="-122"/>
+                <a:cs typeface="Calibri" pitchFamily="34" charset="-120"/>
+              </a:rPr>
+              <a:t>Rubric Criterion 5 (10 Marks)</a:t>
+            </a:r>
+            <a:endParaRPr lang="en-US" sz="950" dirty="0"/>
+          </a:p>
+        </p:txBody>
+      </p:sp>
+      <p:sp>
+        <p:nvSpPr>
+          <p:cNvPr id="5" name="Text 2"/>
           <p:cNvSpPr/>
           <p:nvPr/>
         </p:nvSpPr>
@@ -4277,7 +4349,7 @@
       </p:sp>
       <p:sp>
         <p:nvSpPr>
-          <p:cNvPr id="5" name="Text 3"/>
+          <p:cNvPr id="6" name="Text 3"/>
           <p:cNvSpPr/>
           <p:nvPr/>
         </p:nvSpPr>
@@ -4316,7 +4388,7 @@
       </p:sp>
       <p:sp>
         <p:nvSpPr>
-          <p:cNvPr id="6" name="Shape 4"/>
+          <p:cNvPr id="7" name="Shape 4"/>
           <p:cNvSpPr/>
           <p:nvPr/>
         </p:nvSpPr>
@@ -4343,7 +4415,7 @@
       </p:sp>
       <p:sp>
         <p:nvSpPr>
-          <p:cNvPr id="7" name="Text 5"/>
+          <p:cNvPr id="8" name="Text 5"/>
           <p:cNvSpPr/>
           <p:nvPr/>
         </p:nvSpPr>
@@ -4382,7 +4454,7 @@
       </p:sp>
       <p:sp>
         <p:nvSpPr>
-          <p:cNvPr id="8" name="Text 6"/>
+          <p:cNvPr id="9" name="Text 6"/>
           <p:cNvSpPr/>
           <p:nvPr/>
         </p:nvSpPr>
@@ -4421,7 +4493,7 @@
       </p:sp>
       <p:sp>
         <p:nvSpPr>
-          <p:cNvPr id="9" name="Text 7"/>
+          <p:cNvPr id="10" name="Text 7"/>
           <p:cNvSpPr/>
           <p:nvPr/>
         </p:nvSpPr>
@@ -4527,7 +4599,7 @@
       </p:sp>
       <p:sp>
         <p:nvSpPr>
-          <p:cNvPr id="10" name="Shape 8"/>
+          <p:cNvPr id="11" name="Shape 8"/>
           <p:cNvSpPr/>
           <p:nvPr/>
         </p:nvSpPr>
@@ -4554,7 +4626,7 @@
       </p:sp>
       <p:sp>
         <p:nvSpPr>
-          <p:cNvPr id="11" name="Text 9"/>
+          <p:cNvPr id="12" name="Text 9"/>
           <p:cNvSpPr/>
           <p:nvPr/>
         </p:nvSpPr>
@@ -4593,7 +4665,7 @@
       </p:sp>
       <p:sp>
         <p:nvSpPr>
-          <p:cNvPr id="12" name="Text 10"/>
+          <p:cNvPr id="13" name="Text 10"/>
           <p:cNvSpPr/>
           <p:nvPr/>
         </p:nvSpPr>
@@ -4632,7 +4704,7 @@
       </p:sp>
       <p:sp>
         <p:nvSpPr>
-          <p:cNvPr id="13" name="Text 11"/>
+          <p:cNvPr id="14" name="Text 11"/>
           <p:cNvSpPr/>
           <p:nvPr/>
         </p:nvSpPr>
@@ -4738,7 +4810,7 @@
       </p:sp>
       <p:sp>
         <p:nvSpPr>
-          <p:cNvPr id="14" name="Shape 12"/>
+          <p:cNvPr id="15" name="Shape 12"/>
           <p:cNvSpPr/>
           <p:nvPr/>
         </p:nvSpPr>
@@ -4765,7 +4837,7 @@
       </p:sp>
       <p:sp>
         <p:nvSpPr>
-          <p:cNvPr id="15" name="Text 13"/>
+          <p:cNvPr id="16" name="Text 13"/>
           <p:cNvSpPr/>
           <p:nvPr/>
         </p:nvSpPr>
@@ -4804,7 +4876,7 @@
       </p:sp>
       <p:sp>
         <p:nvSpPr>
-          <p:cNvPr id="16" name="Text 14"/>
+          <p:cNvPr id="17" name="Text 14"/>
           <p:cNvSpPr/>
           <p:nvPr/>
         </p:nvSpPr>
@@ -4843,7 +4915,7 @@
       </p:sp>
       <p:sp>
         <p:nvSpPr>
-          <p:cNvPr id="17" name="Text 15"/>
+          <p:cNvPr id="18" name="Text 15"/>
           <p:cNvSpPr/>
           <p:nvPr/>
         </p:nvSpPr>
@@ -4949,7 +5021,7 @@
       </p:sp>
       <p:sp>
         <p:nvSpPr>
-          <p:cNvPr id="18" name="Shape 16"/>
+          <p:cNvPr id="19" name="Shape 16"/>
           <p:cNvSpPr/>
           <p:nvPr/>
         </p:nvSpPr>
@@ -4976,7 +5048,7 @@
       </p:sp>
       <p:sp>
         <p:nvSpPr>
-          <p:cNvPr id="19" name="Text 17"/>
+          <p:cNvPr id="20" name="Text 17"/>
           <p:cNvSpPr/>
           <p:nvPr/>
         </p:nvSpPr>
@@ -5015,7 +5087,7 @@
       </p:sp>
       <p:sp>
         <p:nvSpPr>
-          <p:cNvPr id="20" name="Text 18"/>
+          <p:cNvPr id="21" name="Text 18"/>
           <p:cNvSpPr/>
           <p:nvPr/>
         </p:nvSpPr>
@@ -5130,16 +5202,40 @@
           <a:chExt cx="0" cy="0"/>
         </a:xfrm>
       </p:grpSpPr>
-      <p:sp>
-        <p:nvSpPr>
-          <p:cNvPr id="2" name="Text 0"/>
-          <p:cNvSpPr/>
-          <p:nvPr/>
-        </p:nvSpPr>
-        <p:spPr>
-          <a:xfrm>
-            <a:off x="548640" y="365760"/>
-            <a:ext cx="8046720" cy="201168"/>
+      <p:pic>
+        <p:nvPicPr>
+          <p:cNvPr id="2" name="Image 0" descr="d:\resrtorant\presentation_assets\tcet_header.jpeg">    </p:cNvPr>
+          <p:cNvPicPr>
+            <a:picLocks noChangeAspect="1"/>
+          </p:cNvPicPr>
+          <p:nvPr/>
+        </p:nvPicPr>
+        <p:blipFill>
+          <a:blip r:embed="rId1"/>
+          <a:stretch>
+            <a:fillRect/>
+          </a:stretch>
+        </p:blipFill>
+        <p:spPr>
+          <a:xfrm>
+            <a:off x="1828800" y="45720"/>
+            <a:ext cx="5486400" cy="749808"/>
+          </a:xfrm>
+          <a:prstGeom prst="rect">
+            <a:avLst/>
+          </a:prstGeom>
+        </p:spPr>
+      </p:pic>
+      <p:sp>
+        <p:nvSpPr>
+          <p:cNvPr id="3" name="Text 0"/>
+          <p:cNvSpPr/>
+          <p:nvPr/>
+        </p:nvSpPr>
+        <p:spPr>
+          <a:xfrm>
+            <a:off x="548640" y="813816"/>
+            <a:ext cx="5943600" cy="329184"/>
           </a:xfrm>
           <a:prstGeom prst="rect">
             <a:avLst/>
@@ -5155,46 +5251,7 @@
               <a:buNone/>
             </a:pPr>
             <a:r>
-              <a:rPr lang="en-US" sz="1000" b="1" dirty="0">
-                <a:solidFill>
-                  <a:srgbClr val="2563EB"/>
-                </a:solidFill>
-                <a:latin typeface="Calibri" pitchFamily="34" charset="0"/>
-                <a:ea typeface="Calibri" pitchFamily="34" charset="-122"/>
-                <a:cs typeface="Calibri" pitchFamily="34" charset="-120"/>
-              </a:rPr>
-              <a:t>Rubric Criterion 3 (5 Marks)</a:t>
-            </a:r>
-            <a:endParaRPr lang="en-US" sz="1000" dirty="0"/>
-          </a:p>
-        </p:txBody>
-      </p:sp>
-      <p:sp>
-        <p:nvSpPr>
-          <p:cNvPr id="3" name="Text 1"/>
-          <p:cNvSpPr/>
-          <p:nvPr/>
-        </p:nvSpPr>
-        <p:spPr>
-          <a:xfrm>
-            <a:off x="548640" y="566928"/>
-            <a:ext cx="8046720" cy="411480"/>
-          </a:xfrm>
-          <a:prstGeom prst="rect">
-            <a:avLst/>
-          </a:prstGeom>
-          <a:noFill/>
-          <a:ln/>
-        </p:spPr>
-        <p:txBody>
-          <a:bodyPr wrap="square" lIns="0" tIns="0" rIns="0" bIns="0" rtlCol="0" anchor="ctr"/>
-          <a:lstStyle/>
-          <a:p>
-            <a:pPr indent="0" marL="0">
-              <a:buNone/>
-            </a:pPr>
-            <a:r>
-              <a:rPr lang="en-US" sz="2100" b="1" dirty="0">
+              <a:rPr lang="en-US" sz="1650" b="1" dirty="0">
                 <a:solidFill>
                   <a:srgbClr val="1E3A8A"/>
                 </a:solidFill>
@@ -5204,13 +5261,52 @@
               </a:rPr>
               <a:t>Cost Analysis, Budgeting &amp; Practical Feasibility</a:t>
             </a:r>
-            <a:endParaRPr lang="en-US" sz="2100" dirty="0"/>
-          </a:p>
-        </p:txBody>
-      </p:sp>
-      <p:sp>
-        <p:nvSpPr>
-          <p:cNvPr id="4" name="Text 2"/>
+            <a:endParaRPr lang="en-US" sz="1650" dirty="0"/>
+          </a:p>
+        </p:txBody>
+      </p:sp>
+      <p:sp>
+        <p:nvSpPr>
+          <p:cNvPr id="4" name="Text 1"/>
+          <p:cNvSpPr/>
+          <p:nvPr/>
+        </p:nvSpPr>
+        <p:spPr>
+          <a:xfrm>
+            <a:off x="6492240" y="841248"/>
+            <a:ext cx="2103120" cy="274320"/>
+          </a:xfrm>
+          <a:prstGeom prst="rect">
+            <a:avLst/>
+          </a:prstGeom>
+          <a:noFill/>
+          <a:ln/>
+        </p:spPr>
+        <p:txBody>
+          <a:bodyPr wrap="square" lIns="0" tIns="0" rIns="0" bIns="0" rtlCol="0" anchor="ctr"/>
+          <a:lstStyle/>
+          <a:p>
+            <a:pPr algn="r" indent="0" marL="0">
+              <a:buNone/>
+            </a:pPr>
+            <a:r>
+              <a:rPr lang="en-US" sz="950" b="1" dirty="0">
+                <a:solidFill>
+                  <a:srgbClr val="2563EB"/>
+                </a:solidFill>
+                <a:latin typeface="Calibri" pitchFamily="34" charset="0"/>
+                <a:ea typeface="Calibri" pitchFamily="34" charset="-122"/>
+                <a:cs typeface="Calibri" pitchFamily="34" charset="-120"/>
+              </a:rPr>
+              <a:t>Rubric Criterion 3 (5 Marks)</a:t>
+            </a:r>
+            <a:endParaRPr lang="en-US" sz="950" dirty="0"/>
+          </a:p>
+        </p:txBody>
+      </p:sp>
+      <p:sp>
+        <p:nvSpPr>
+          <p:cNvPr id="5" name="Text 2"/>
           <p:cNvSpPr/>
           <p:nvPr/>
         </p:nvSpPr>
@@ -5249,7 +5345,7 @@
       </p:sp>
       <p:sp>
         <p:nvSpPr>
-          <p:cNvPr id="5" name="Text 3"/>
+          <p:cNvPr id="6" name="Text 3"/>
           <p:cNvSpPr/>
           <p:nvPr/>
         </p:nvSpPr>
@@ -5288,7 +5384,7 @@
       </p:sp>
       <p:sp>
         <p:nvSpPr>
-          <p:cNvPr id="6" name="Shape 4"/>
+          <p:cNvPr id="7" name="Shape 4"/>
           <p:cNvSpPr/>
           <p:nvPr/>
         </p:nvSpPr>
@@ -5315,7 +5411,7 @@
       </p:sp>
       <p:sp>
         <p:nvSpPr>
-          <p:cNvPr id="7" name="Text 5"/>
+          <p:cNvPr id="8" name="Text 5"/>
           <p:cNvSpPr/>
           <p:nvPr/>
         </p:nvSpPr>
@@ -6621,7 +6717,7 @@
       </p:graphicFrame>
       <p:sp>
         <p:nvSpPr>
-          <p:cNvPr id="9" name="Shape 6"/>
+          <p:cNvPr id="10" name="Shape 6"/>
           <p:cNvSpPr/>
           <p:nvPr/>
         </p:nvSpPr>
@@ -6648,7 +6744,7 @@
       </p:sp>
       <p:sp>
         <p:nvSpPr>
-          <p:cNvPr id="10" name="Text 7"/>
+          <p:cNvPr id="11" name="Text 7"/>
           <p:cNvSpPr/>
           <p:nvPr/>
         </p:nvSpPr>
@@ -6687,7 +6783,7 @@
       </p:sp>
       <p:sp>
         <p:nvSpPr>
-          <p:cNvPr id="11" name="Text 8"/>
+          <p:cNvPr id="12" name="Text 8"/>
           <p:cNvSpPr/>
           <p:nvPr/>
         </p:nvSpPr>
@@ -6865,165 +6961,9 @@
           <a:chExt cx="0" cy="0"/>
         </a:xfrm>
       </p:grpSpPr>
-      <p:sp>
-        <p:nvSpPr>
-          <p:cNvPr id="2" name="Text 0"/>
-          <p:cNvSpPr/>
-          <p:nvPr/>
-        </p:nvSpPr>
-        <p:spPr>
-          <a:xfrm>
-            <a:off x="548640" y="365760"/>
-            <a:ext cx="8046720" cy="201168"/>
-          </a:xfrm>
-          <a:prstGeom prst="rect">
-            <a:avLst/>
-          </a:prstGeom>
-          <a:noFill/>
-          <a:ln/>
-        </p:spPr>
-        <p:txBody>
-          <a:bodyPr wrap="square" lIns="0" tIns="0" rIns="0" bIns="0" rtlCol="0" anchor="ctr"/>
-          <a:lstStyle/>
-          <a:p>
-            <a:pPr indent="0" marL="0">
-              <a:buNone/>
-            </a:pPr>
-            <a:r>
-              <a:rPr lang="en-US" sz="1000" b="1" dirty="0">
-                <a:solidFill>
-                  <a:srgbClr val="2563EB"/>
-                </a:solidFill>
-                <a:latin typeface="Calibri" pitchFamily="34" charset="0"/>
-                <a:ea typeface="Calibri" pitchFamily="34" charset="-122"/>
-                <a:cs typeface="Calibri" pitchFamily="34" charset="-120"/>
-              </a:rPr>
-              <a:t>Rubric Criterion 7 (30 Marks)</a:t>
-            </a:r>
-            <a:endParaRPr lang="en-US" sz="1000" dirty="0"/>
-          </a:p>
-        </p:txBody>
-      </p:sp>
-      <p:sp>
-        <p:nvSpPr>
-          <p:cNvPr id="3" name="Text 1"/>
-          <p:cNvSpPr/>
-          <p:nvPr/>
-        </p:nvSpPr>
-        <p:spPr>
-          <a:xfrm>
-            <a:off x="548640" y="566928"/>
-            <a:ext cx="8046720" cy="411480"/>
-          </a:xfrm>
-          <a:prstGeom prst="rect">
-            <a:avLst/>
-          </a:prstGeom>
-          <a:noFill/>
-          <a:ln/>
-        </p:spPr>
-        <p:txBody>
-          <a:bodyPr wrap="square" lIns="0" tIns="0" rIns="0" bIns="0" rtlCol="0" anchor="ctr"/>
-          <a:lstStyle/>
-          <a:p>
-            <a:pPr indent="0" marL="0">
-              <a:buNone/>
-            </a:pPr>
-            <a:r>
-              <a:rPr lang="en-US" sz="2100" b="1" dirty="0">
-                <a:solidFill>
-                  <a:srgbClr val="1E3A8A"/>
-                </a:solidFill>
-                <a:latin typeface="Cambria" pitchFamily="34" charset="0"/>
-                <a:ea typeface="Cambria" pitchFamily="34" charset="-122"/>
-                <a:cs typeface="Cambria" pitchFamily="34" charset="-120"/>
-              </a:rPr>
-              <a:t>100% Implementation: Working Modules &amp; Live Deployment Verification</a:t>
-            </a:r>
-            <a:endParaRPr lang="en-US" sz="2100" dirty="0"/>
-          </a:p>
-        </p:txBody>
-      </p:sp>
-      <p:sp>
-        <p:nvSpPr>
-          <p:cNvPr id="4" name="Text 2"/>
-          <p:cNvSpPr/>
-          <p:nvPr/>
-        </p:nvSpPr>
-        <p:spPr>
-          <a:xfrm>
-            <a:off x="548640" y="4800600"/>
-            <a:ext cx="5486400" cy="228600"/>
-          </a:xfrm>
-          <a:prstGeom prst="rect">
-            <a:avLst/>
-          </a:prstGeom>
-          <a:noFill/>
-          <a:ln/>
-        </p:spPr>
-        <p:txBody>
-          <a:bodyPr wrap="square" lIns="0" tIns="0" rIns="0" bIns="0" rtlCol="0" anchor="ctr"/>
-          <a:lstStyle/>
-          <a:p>
-            <a:pPr indent="0" marL="0">
-              <a:buNone/>
-            </a:pPr>
-            <a:r>
-              <a:rPr lang="en-US" sz="900" dirty="0">
-                <a:solidFill>
-                  <a:srgbClr val="64748B"/>
-                </a:solidFill>
-                <a:latin typeface="Calibri" pitchFamily="34" charset="0"/>
-                <a:ea typeface="Calibri" pitchFamily="34" charset="-122"/>
-                <a:cs typeface="Calibri" pitchFamily="34" charset="-120"/>
-              </a:rPr>
-              <a:t>Department of Computer Engineering, TCET | A.Y. 2026–27 | Presentation III</a:t>
-            </a:r>
-            <a:endParaRPr lang="en-US" sz="900" dirty="0"/>
-          </a:p>
-        </p:txBody>
-      </p:sp>
-      <p:sp>
-        <p:nvSpPr>
-          <p:cNvPr id="5" name="Text 3"/>
-          <p:cNvSpPr/>
-          <p:nvPr/>
-        </p:nvSpPr>
-        <p:spPr>
-          <a:xfrm>
-            <a:off x="6217920" y="4800600"/>
-            <a:ext cx="2377440" cy="228600"/>
-          </a:xfrm>
-          <a:prstGeom prst="rect">
-            <a:avLst/>
-          </a:prstGeom>
-          <a:noFill/>
-          <a:ln/>
-        </p:spPr>
-        <p:txBody>
-          <a:bodyPr wrap="square" lIns="0" tIns="0" rIns="0" bIns="0" rtlCol="0" anchor="ctr"/>
-          <a:lstStyle/>
-          <a:p>
-            <a:pPr algn="r" indent="0" marL="0">
-              <a:buNone/>
-            </a:pPr>
-            <a:r>
-              <a:rPr lang="en-US" sz="900" dirty="0">
-                <a:solidFill>
-                  <a:srgbClr val="2563EB"/>
-                </a:solidFill>
-                <a:latin typeface="Calibri" pitchFamily="34" charset="0"/>
-                <a:ea typeface="Calibri" pitchFamily="34" charset="-122"/>
-                <a:cs typeface="Calibri" pitchFamily="34" charset="-120"/>
-              </a:rPr>
-              <a:t>https://smart-restaurant-2za8.vercel.app/</a:t>
-            </a:r>
-            <a:endParaRPr lang="en-US" sz="900" dirty="0"/>
-          </a:p>
-        </p:txBody>
-      </p:sp>
       <p:pic>
         <p:nvPicPr>
-          <p:cNvPr id="6" name="Image 0" descr="d:\resrtorant\presentation_assets\back_to_menu_1790013320137.png">    </p:cNvPr>
+          <p:cNvPr id="2" name="Image 0" descr="d:\resrtorant\presentation_assets\tcet_header.jpeg">    </p:cNvPr>
           <p:cNvPicPr>
             <a:picLocks noChangeAspect="1"/>
           </p:cNvPicPr>
@@ -7037,8 +6977,8 @@
         </p:blipFill>
         <p:spPr>
           <a:xfrm>
-            <a:off x="548640" y="1188720"/>
-            <a:ext cx="3291840" cy="2194560"/>
+            <a:off x="1828800" y="45720"/>
+            <a:ext cx="5486400" cy="749808"/>
           </a:xfrm>
           <a:prstGeom prst="rect">
             <a:avLst/>
@@ -7047,29 +6987,163 @@
       </p:pic>
       <p:sp>
         <p:nvSpPr>
-          <p:cNvPr id="7" name="Shape 4"/>
-          <p:cNvSpPr/>
-          <p:nvPr/>
-        </p:nvSpPr>
-        <p:spPr>
-          <a:xfrm>
-            <a:off x="548640" y="1188720"/>
-            <a:ext cx="3291840" cy="2194560"/>
-          </a:xfrm>
-          <a:prstGeom prst="rect">
-            <a:avLst/>
-          </a:prstGeom>
-          <a:ln w="12700">
-            <a:solidFill>
-              <a:srgbClr val="E2E8F0"/>
-            </a:solidFill>
-            <a:prstDash val="solid"/>
-          </a:ln>
-        </p:spPr>
+          <p:cNvPr id="3" name="Text 0"/>
+          <p:cNvSpPr/>
+          <p:nvPr/>
+        </p:nvSpPr>
+        <p:spPr>
+          <a:xfrm>
+            <a:off x="548640" y="813816"/>
+            <a:ext cx="5943600" cy="329184"/>
+          </a:xfrm>
+          <a:prstGeom prst="rect">
+            <a:avLst/>
+          </a:prstGeom>
+          <a:noFill/>
+          <a:ln/>
+        </p:spPr>
+        <p:txBody>
+          <a:bodyPr wrap="square" lIns="0" tIns="0" rIns="0" bIns="0" rtlCol="0" anchor="ctr"/>
+          <a:lstStyle/>
+          <a:p>
+            <a:pPr indent="0" marL="0">
+              <a:buNone/>
+            </a:pPr>
+            <a:r>
+              <a:rPr lang="en-US" sz="1650" b="1" dirty="0">
+                <a:solidFill>
+                  <a:srgbClr val="1E3A8A"/>
+                </a:solidFill>
+                <a:latin typeface="Cambria" pitchFamily="34" charset="0"/>
+                <a:ea typeface="Cambria" pitchFamily="34" charset="-122"/>
+                <a:cs typeface="Cambria" pitchFamily="34" charset="-120"/>
+              </a:rPr>
+              <a:t>100% Implementation: Working Modules &amp; Live Proof</a:t>
+            </a:r>
+            <a:endParaRPr lang="en-US" sz="1650" dirty="0"/>
+          </a:p>
+        </p:txBody>
+      </p:sp>
+      <p:sp>
+        <p:nvSpPr>
+          <p:cNvPr id="4" name="Text 1"/>
+          <p:cNvSpPr/>
+          <p:nvPr/>
+        </p:nvSpPr>
+        <p:spPr>
+          <a:xfrm>
+            <a:off x="6492240" y="841248"/>
+            <a:ext cx="2103120" cy="274320"/>
+          </a:xfrm>
+          <a:prstGeom prst="rect">
+            <a:avLst/>
+          </a:prstGeom>
+          <a:noFill/>
+          <a:ln/>
+        </p:spPr>
+        <p:txBody>
+          <a:bodyPr wrap="square" lIns="0" tIns="0" rIns="0" bIns="0" rtlCol="0" anchor="ctr"/>
+          <a:lstStyle/>
+          <a:p>
+            <a:pPr algn="r" indent="0" marL="0">
+              <a:buNone/>
+            </a:pPr>
+            <a:r>
+              <a:rPr lang="en-US" sz="950" b="1" dirty="0">
+                <a:solidFill>
+                  <a:srgbClr val="2563EB"/>
+                </a:solidFill>
+                <a:latin typeface="Calibri" pitchFamily="34" charset="0"/>
+                <a:ea typeface="Calibri" pitchFamily="34" charset="-122"/>
+                <a:cs typeface="Calibri" pitchFamily="34" charset="-120"/>
+              </a:rPr>
+              <a:t>Rubric Criterion 7 (30 Marks)</a:t>
+            </a:r>
+            <a:endParaRPr lang="en-US" sz="950" dirty="0"/>
+          </a:p>
+        </p:txBody>
+      </p:sp>
+      <p:sp>
+        <p:nvSpPr>
+          <p:cNvPr id="5" name="Text 2"/>
+          <p:cNvSpPr/>
+          <p:nvPr/>
+        </p:nvSpPr>
+        <p:spPr>
+          <a:xfrm>
+            <a:off x="548640" y="4800600"/>
+            <a:ext cx="5486400" cy="228600"/>
+          </a:xfrm>
+          <a:prstGeom prst="rect">
+            <a:avLst/>
+          </a:prstGeom>
+          <a:noFill/>
+          <a:ln/>
+        </p:spPr>
+        <p:txBody>
+          <a:bodyPr wrap="square" lIns="0" tIns="0" rIns="0" bIns="0" rtlCol="0" anchor="ctr"/>
+          <a:lstStyle/>
+          <a:p>
+            <a:pPr indent="0" marL="0">
+              <a:buNone/>
+            </a:pPr>
+            <a:r>
+              <a:rPr lang="en-US" sz="900" dirty="0">
+                <a:solidFill>
+                  <a:srgbClr val="64748B"/>
+                </a:solidFill>
+                <a:latin typeface="Calibri" pitchFamily="34" charset="0"/>
+                <a:ea typeface="Calibri" pitchFamily="34" charset="-122"/>
+                <a:cs typeface="Calibri" pitchFamily="34" charset="-120"/>
+              </a:rPr>
+              <a:t>Department of Computer Engineering, TCET | A.Y. 2026–27 | Presentation III</a:t>
+            </a:r>
+            <a:endParaRPr lang="en-US" sz="900" dirty="0"/>
+          </a:p>
+        </p:txBody>
+      </p:sp>
+      <p:sp>
+        <p:nvSpPr>
+          <p:cNvPr id="6" name="Text 3"/>
+          <p:cNvSpPr/>
+          <p:nvPr/>
+        </p:nvSpPr>
+        <p:spPr>
+          <a:xfrm>
+            <a:off x="6217920" y="4800600"/>
+            <a:ext cx="2377440" cy="228600"/>
+          </a:xfrm>
+          <a:prstGeom prst="rect">
+            <a:avLst/>
+          </a:prstGeom>
+          <a:noFill/>
+          <a:ln/>
+        </p:spPr>
+        <p:txBody>
+          <a:bodyPr wrap="square" lIns="0" tIns="0" rIns="0" bIns="0" rtlCol="0" anchor="ctr"/>
+          <a:lstStyle/>
+          <a:p>
+            <a:pPr algn="r" indent="0" marL="0">
+              <a:buNone/>
+            </a:pPr>
+            <a:r>
+              <a:rPr lang="en-US" sz="900" dirty="0">
+                <a:solidFill>
+                  <a:srgbClr val="2563EB"/>
+                </a:solidFill>
+                <a:latin typeface="Calibri" pitchFamily="34" charset="0"/>
+                <a:ea typeface="Calibri" pitchFamily="34" charset="-122"/>
+                <a:cs typeface="Calibri" pitchFamily="34" charset="-120"/>
+              </a:rPr>
+              <a:t>https://smart-restaurant-2za8.vercel.app/</a:t>
+            </a:r>
+            <a:endParaRPr lang="en-US" sz="900" dirty="0"/>
+          </a:p>
+        </p:txBody>
       </p:sp>
       <p:pic>
         <p:nvPicPr>
-          <p:cNvPr id="8" name="Image 1" descr="d:\resrtorant\presentation_assets\dish_anchored_placed_1790012727681.png">    </p:cNvPr>
+          <p:cNvPr id="7" name="Image 1" descr="d:\resrtorant\presentation_assets\back_to_menu_1790013320137.png">    </p:cNvPr>
           <p:cNvPicPr>
             <a:picLocks noChangeAspect="1"/>
           </p:cNvPicPr>
@@ -7083,8 +7157,8 @@
         </p:blipFill>
         <p:spPr>
           <a:xfrm>
-            <a:off x="4023360" y="1188720"/>
-            <a:ext cx="4572000" cy="2194560"/>
+            <a:off x="548640" y="1188720"/>
+            <a:ext cx="3291840" cy="2194560"/>
           </a:xfrm>
           <a:prstGeom prst="rect">
             <a:avLst/>
@@ -7093,14 +7167,14 @@
       </p:pic>
       <p:sp>
         <p:nvSpPr>
-          <p:cNvPr id="9" name="Shape 5"/>
-          <p:cNvSpPr/>
-          <p:nvPr/>
-        </p:nvSpPr>
-        <p:spPr>
-          <a:xfrm>
-            <a:off x="4023360" y="1188720"/>
-            <a:ext cx="4572000" cy="2194560"/>
+          <p:cNvPr id="8" name="Shape 4"/>
+          <p:cNvSpPr/>
+          <p:nvPr/>
+        </p:nvSpPr>
+        <p:spPr>
+          <a:xfrm>
+            <a:off x="548640" y="1188720"/>
+            <a:ext cx="3291840" cy="2194560"/>
           </a:xfrm>
           <a:prstGeom prst="rect">
             <a:avLst/>
@@ -7113,9 +7187,55 @@
           </a:ln>
         </p:spPr>
       </p:sp>
-      <p:sp>
-        <p:nvSpPr>
-          <p:cNvPr id="10" name="Shape 6"/>
+      <p:pic>
+        <p:nvPicPr>
+          <p:cNvPr id="9" name="Image 2" descr="d:\resrtorant\presentation_assets\dish_anchored_placed_1790012727681.png">    </p:cNvPr>
+          <p:cNvPicPr>
+            <a:picLocks noChangeAspect="1"/>
+          </p:cNvPicPr>
+          <p:nvPr/>
+        </p:nvPicPr>
+        <p:blipFill>
+          <a:blip r:embed="rId3"/>
+          <a:stretch>
+            <a:fillRect/>
+          </a:stretch>
+        </p:blipFill>
+        <p:spPr>
+          <a:xfrm>
+            <a:off x="4023360" y="1188720"/>
+            <a:ext cx="4572000" cy="2194560"/>
+          </a:xfrm>
+          <a:prstGeom prst="rect">
+            <a:avLst/>
+          </a:prstGeom>
+        </p:spPr>
+      </p:pic>
+      <p:sp>
+        <p:nvSpPr>
+          <p:cNvPr id="10" name="Shape 5"/>
+          <p:cNvSpPr/>
+          <p:nvPr/>
+        </p:nvSpPr>
+        <p:spPr>
+          <a:xfrm>
+            <a:off x="4023360" y="1188720"/>
+            <a:ext cx="4572000" cy="2194560"/>
+          </a:xfrm>
+          <a:prstGeom prst="rect">
+            <a:avLst/>
+          </a:prstGeom>
+          <a:ln w="12700">
+            <a:solidFill>
+              <a:srgbClr val="E2E8F0"/>
+            </a:solidFill>
+            <a:prstDash val="solid"/>
+          </a:ln>
+        </p:spPr>
+      </p:sp>
+      <p:sp>
+        <p:nvSpPr>
+          <p:cNvPr id="11" name="Shape 6"/>
           <p:cNvSpPr/>
           <p:nvPr/>
         </p:nvSpPr>
@@ -7142,7 +7262,7 @@
       </p:sp>
       <p:sp>
         <p:nvSpPr>
-          <p:cNvPr id="11" name="Text 7"/>
+          <p:cNvPr id="12" name="Text 7"/>
           <p:cNvSpPr/>
           <p:nvPr/>
         </p:nvSpPr>
@@ -7181,7 +7301,7 @@
       </p:sp>
       <p:sp>
         <p:nvSpPr>
-          <p:cNvPr id="12" name="Text 8"/>
+          <p:cNvPr id="13" name="Text 8"/>
           <p:cNvSpPr/>
           <p:nvPr/>
         </p:nvSpPr>
@@ -7333,165 +7453,9 @@
           <a:chExt cx="0" cy="0"/>
         </a:xfrm>
       </p:grpSpPr>
-      <p:sp>
-        <p:nvSpPr>
-          <p:cNvPr id="2" name="Text 0"/>
-          <p:cNvSpPr/>
-          <p:nvPr/>
-        </p:nvSpPr>
-        <p:spPr>
-          <a:xfrm>
-            <a:off x="548640" y="365760"/>
-            <a:ext cx="8046720" cy="201168"/>
-          </a:xfrm>
-          <a:prstGeom prst="rect">
-            <a:avLst/>
-          </a:prstGeom>
-          <a:noFill/>
-          <a:ln/>
-        </p:spPr>
-        <p:txBody>
-          <a:bodyPr wrap="square" lIns="0" tIns="0" rIns="0" bIns="0" rtlCol="0" anchor="ctr"/>
-          <a:lstStyle/>
-          <a:p>
-            <a:pPr indent="0" marL="0">
-              <a:buNone/>
-            </a:pPr>
-            <a:r>
-              <a:rPr lang="en-US" sz="1000" b="1" dirty="0">
-                <a:solidFill>
-                  <a:srgbClr val="2563EB"/>
-                </a:solidFill>
-                <a:latin typeface="Calibri" pitchFamily="34" charset="0"/>
-                <a:ea typeface="Calibri" pitchFamily="34" charset="-122"/>
-                <a:cs typeface="Calibri" pitchFamily="34" charset="-120"/>
-              </a:rPr>
-              <a:t>Live Model Demonstration</a:t>
-            </a:r>
-            <a:endParaRPr lang="en-US" sz="1000" dirty="0"/>
-          </a:p>
-        </p:txBody>
-      </p:sp>
-      <p:sp>
-        <p:nvSpPr>
-          <p:cNvPr id="3" name="Text 1"/>
-          <p:cNvSpPr/>
-          <p:nvPr/>
-        </p:nvSpPr>
-        <p:spPr>
-          <a:xfrm>
-            <a:off x="548640" y="566928"/>
-            <a:ext cx="8046720" cy="411480"/>
-          </a:xfrm>
-          <a:prstGeom prst="rect">
-            <a:avLst/>
-          </a:prstGeom>
-          <a:noFill/>
-          <a:ln/>
-        </p:spPr>
-        <p:txBody>
-          <a:bodyPr wrap="square" lIns="0" tIns="0" rIns="0" bIns="0" rtlCol="0" anchor="ctr"/>
-          <a:lstStyle/>
-          <a:p>
-            <a:pPr indent="0" marL="0">
-              <a:buNone/>
-            </a:pPr>
-            <a:r>
-              <a:rPr lang="en-US" sz="2100" b="1" dirty="0">
-                <a:solidFill>
-                  <a:srgbClr val="1E3A8A"/>
-                </a:solidFill>
-                <a:latin typeface="Cambria" pitchFamily="34" charset="0"/>
-                <a:ea typeface="Cambria" pitchFamily="34" charset="-122"/>
-                <a:cs typeface="Cambria" pitchFamily="34" charset="-120"/>
-              </a:rPr>
-              <a:t>Operational Workflow &amp; Step-by-Step Diner Journey</a:t>
-            </a:r>
-            <a:endParaRPr lang="en-US" sz="2100" dirty="0"/>
-          </a:p>
-        </p:txBody>
-      </p:sp>
-      <p:sp>
-        <p:nvSpPr>
-          <p:cNvPr id="4" name="Text 2"/>
-          <p:cNvSpPr/>
-          <p:nvPr/>
-        </p:nvSpPr>
-        <p:spPr>
-          <a:xfrm>
-            <a:off x="548640" y="4800600"/>
-            <a:ext cx="5486400" cy="228600"/>
-          </a:xfrm>
-          <a:prstGeom prst="rect">
-            <a:avLst/>
-          </a:prstGeom>
-          <a:noFill/>
-          <a:ln/>
-        </p:spPr>
-        <p:txBody>
-          <a:bodyPr wrap="square" lIns="0" tIns="0" rIns="0" bIns="0" rtlCol="0" anchor="ctr"/>
-          <a:lstStyle/>
-          <a:p>
-            <a:pPr indent="0" marL="0">
-              <a:buNone/>
-            </a:pPr>
-            <a:r>
-              <a:rPr lang="en-US" sz="900" dirty="0">
-                <a:solidFill>
-                  <a:srgbClr val="64748B"/>
-                </a:solidFill>
-                <a:latin typeface="Calibri" pitchFamily="34" charset="0"/>
-                <a:ea typeface="Calibri" pitchFamily="34" charset="-122"/>
-                <a:cs typeface="Calibri" pitchFamily="34" charset="-120"/>
-              </a:rPr>
-              <a:t>Department of Computer Engineering, TCET | A.Y. 2026–27 | Presentation III</a:t>
-            </a:r>
-            <a:endParaRPr lang="en-US" sz="900" dirty="0"/>
-          </a:p>
-        </p:txBody>
-      </p:sp>
-      <p:sp>
-        <p:nvSpPr>
-          <p:cNvPr id="5" name="Text 3"/>
-          <p:cNvSpPr/>
-          <p:nvPr/>
-        </p:nvSpPr>
-        <p:spPr>
-          <a:xfrm>
-            <a:off x="6217920" y="4800600"/>
-            <a:ext cx="2377440" cy="228600"/>
-          </a:xfrm>
-          <a:prstGeom prst="rect">
-            <a:avLst/>
-          </a:prstGeom>
-          <a:noFill/>
-          <a:ln/>
-        </p:spPr>
-        <p:txBody>
-          <a:bodyPr wrap="square" lIns="0" tIns="0" rIns="0" bIns="0" rtlCol="0" anchor="ctr"/>
-          <a:lstStyle/>
-          <a:p>
-            <a:pPr algn="r" indent="0" marL="0">
-              <a:buNone/>
-            </a:pPr>
-            <a:r>
-              <a:rPr lang="en-US" sz="900" dirty="0">
-                <a:solidFill>
-                  <a:srgbClr val="2563EB"/>
-                </a:solidFill>
-                <a:latin typeface="Calibri" pitchFamily="34" charset="0"/>
-                <a:ea typeface="Calibri" pitchFamily="34" charset="-122"/>
-                <a:cs typeface="Calibri" pitchFamily="34" charset="-120"/>
-              </a:rPr>
-              <a:t>https://smart-restaurant-2za8.vercel.app/</a:t>
-            </a:r>
-            <a:endParaRPr lang="en-US" sz="900" dirty="0"/>
-          </a:p>
-        </p:txBody>
-      </p:sp>
       <p:pic>
         <p:nvPicPr>
-          <p:cNvPr id="6" name="Image 0" descr="d:\resrtorant\presentation_assets\qr_handoff_modal_1790013103448.png">    </p:cNvPr>
+          <p:cNvPr id="2" name="Image 0" descr="d:\resrtorant\presentation_assets\tcet_header.jpeg">    </p:cNvPr>
           <p:cNvPicPr>
             <a:picLocks noChangeAspect="1"/>
           </p:cNvPicPr>
@@ -7505,8 +7469,8 @@
         </p:blipFill>
         <p:spPr>
           <a:xfrm>
-            <a:off x="548640" y="1188720"/>
-            <a:ext cx="3108960" cy="2103120"/>
+            <a:off x="1828800" y="45720"/>
+            <a:ext cx="5486400" cy="749808"/>
           </a:xfrm>
           <a:prstGeom prst="rect">
             <a:avLst/>
@@ -7515,29 +7479,163 @@
       </p:pic>
       <p:sp>
         <p:nvSpPr>
-          <p:cNvPr id="7" name="Shape 4"/>
-          <p:cNvSpPr/>
-          <p:nvPr/>
-        </p:nvSpPr>
-        <p:spPr>
-          <a:xfrm>
-            <a:off x="548640" y="1188720"/>
-            <a:ext cx="3108960" cy="2103120"/>
-          </a:xfrm>
-          <a:prstGeom prst="rect">
-            <a:avLst/>
-          </a:prstGeom>
-          <a:ln w="12700">
-            <a:solidFill>
-              <a:srgbClr val="E2E8F0"/>
-            </a:solidFill>
-            <a:prstDash val="solid"/>
-          </a:ln>
-        </p:spPr>
+          <p:cNvPr id="3" name="Text 0"/>
+          <p:cNvSpPr/>
+          <p:nvPr/>
+        </p:nvSpPr>
+        <p:spPr>
+          <a:xfrm>
+            <a:off x="548640" y="813816"/>
+            <a:ext cx="5943600" cy="329184"/>
+          </a:xfrm>
+          <a:prstGeom prst="rect">
+            <a:avLst/>
+          </a:prstGeom>
+          <a:noFill/>
+          <a:ln/>
+        </p:spPr>
+        <p:txBody>
+          <a:bodyPr wrap="square" lIns="0" tIns="0" rIns="0" bIns="0" rtlCol="0" anchor="ctr"/>
+          <a:lstStyle/>
+          <a:p>
+            <a:pPr indent="0" marL="0">
+              <a:buNone/>
+            </a:pPr>
+            <a:r>
+              <a:rPr lang="en-US" sz="1650" b="1" dirty="0">
+                <a:solidFill>
+                  <a:srgbClr val="1E3A8A"/>
+                </a:solidFill>
+                <a:latin typeface="Cambria" pitchFamily="34" charset="0"/>
+                <a:ea typeface="Cambria" pitchFamily="34" charset="-122"/>
+                <a:cs typeface="Cambria" pitchFamily="34" charset="-120"/>
+              </a:rPr>
+              <a:t>Operational Workflow &amp; Diner Journey</a:t>
+            </a:r>
+            <a:endParaRPr lang="en-US" sz="1650" dirty="0"/>
+          </a:p>
+        </p:txBody>
+      </p:sp>
+      <p:sp>
+        <p:nvSpPr>
+          <p:cNvPr id="4" name="Text 1"/>
+          <p:cNvSpPr/>
+          <p:nvPr/>
+        </p:nvSpPr>
+        <p:spPr>
+          <a:xfrm>
+            <a:off x="6492240" y="841248"/>
+            <a:ext cx="2103120" cy="274320"/>
+          </a:xfrm>
+          <a:prstGeom prst="rect">
+            <a:avLst/>
+          </a:prstGeom>
+          <a:noFill/>
+          <a:ln/>
+        </p:spPr>
+        <p:txBody>
+          <a:bodyPr wrap="square" lIns="0" tIns="0" rIns="0" bIns="0" rtlCol="0" anchor="ctr"/>
+          <a:lstStyle/>
+          <a:p>
+            <a:pPr algn="r" indent="0" marL="0">
+              <a:buNone/>
+            </a:pPr>
+            <a:r>
+              <a:rPr lang="en-US" sz="950" b="1" dirty="0">
+                <a:solidFill>
+                  <a:srgbClr val="2563EB"/>
+                </a:solidFill>
+                <a:latin typeface="Calibri" pitchFamily="34" charset="0"/>
+                <a:ea typeface="Calibri" pitchFamily="34" charset="-122"/>
+                <a:cs typeface="Calibri" pitchFamily="34" charset="-120"/>
+              </a:rPr>
+              <a:t>Live Model Demonstration</a:t>
+            </a:r>
+            <a:endParaRPr lang="en-US" sz="950" dirty="0"/>
+          </a:p>
+        </p:txBody>
+      </p:sp>
+      <p:sp>
+        <p:nvSpPr>
+          <p:cNvPr id="5" name="Text 2"/>
+          <p:cNvSpPr/>
+          <p:nvPr/>
+        </p:nvSpPr>
+        <p:spPr>
+          <a:xfrm>
+            <a:off x="548640" y="4800600"/>
+            <a:ext cx="5486400" cy="228600"/>
+          </a:xfrm>
+          <a:prstGeom prst="rect">
+            <a:avLst/>
+          </a:prstGeom>
+          <a:noFill/>
+          <a:ln/>
+        </p:spPr>
+        <p:txBody>
+          <a:bodyPr wrap="square" lIns="0" tIns="0" rIns="0" bIns="0" rtlCol="0" anchor="ctr"/>
+          <a:lstStyle/>
+          <a:p>
+            <a:pPr indent="0" marL="0">
+              <a:buNone/>
+            </a:pPr>
+            <a:r>
+              <a:rPr lang="en-US" sz="900" dirty="0">
+                <a:solidFill>
+                  <a:srgbClr val="64748B"/>
+                </a:solidFill>
+                <a:latin typeface="Calibri" pitchFamily="34" charset="0"/>
+                <a:ea typeface="Calibri" pitchFamily="34" charset="-122"/>
+                <a:cs typeface="Calibri" pitchFamily="34" charset="-120"/>
+              </a:rPr>
+              <a:t>Department of Computer Engineering, TCET | A.Y. 2026–27 | Presentation III</a:t>
+            </a:r>
+            <a:endParaRPr lang="en-US" sz="900" dirty="0"/>
+          </a:p>
+        </p:txBody>
+      </p:sp>
+      <p:sp>
+        <p:nvSpPr>
+          <p:cNvPr id="6" name="Text 3"/>
+          <p:cNvSpPr/>
+          <p:nvPr/>
+        </p:nvSpPr>
+        <p:spPr>
+          <a:xfrm>
+            <a:off x="6217920" y="4800600"/>
+            <a:ext cx="2377440" cy="228600"/>
+          </a:xfrm>
+          <a:prstGeom prst="rect">
+            <a:avLst/>
+          </a:prstGeom>
+          <a:noFill/>
+          <a:ln/>
+        </p:spPr>
+        <p:txBody>
+          <a:bodyPr wrap="square" lIns="0" tIns="0" rIns="0" bIns="0" rtlCol="0" anchor="ctr"/>
+          <a:lstStyle/>
+          <a:p>
+            <a:pPr algn="r" indent="0" marL="0">
+              <a:buNone/>
+            </a:pPr>
+            <a:r>
+              <a:rPr lang="en-US" sz="900" dirty="0">
+                <a:solidFill>
+                  <a:srgbClr val="2563EB"/>
+                </a:solidFill>
+                <a:latin typeface="Calibri" pitchFamily="34" charset="0"/>
+                <a:ea typeface="Calibri" pitchFamily="34" charset="-122"/>
+                <a:cs typeface="Calibri" pitchFamily="34" charset="-120"/>
+              </a:rPr>
+              <a:t>https://smart-restaurant-2za8.vercel.app/</a:t>
+            </a:r>
+            <a:endParaRPr lang="en-US" sz="900" dirty="0"/>
+          </a:p>
+        </p:txBody>
       </p:sp>
       <p:pic>
         <p:nvPicPr>
-          <p:cNvPr id="8" name="Image 1" descr="d:\resrtorant\presentation_assets\model_rotated_66deg_1790012883322.png">    </p:cNvPr>
+          <p:cNvPr id="7" name="Image 1" descr="d:\resrtorant\presentation_assets\qr_handoff_modal_1790013103448.png">    </p:cNvPr>
           <p:cNvPicPr>
             <a:picLocks noChangeAspect="1"/>
           </p:cNvPicPr>
@@ -7551,8 +7649,8 @@
         </p:blipFill>
         <p:spPr>
           <a:xfrm>
-            <a:off x="3840480" y="1188720"/>
-            <a:ext cx="4754880" cy="2103120"/>
+            <a:off x="548640" y="1188720"/>
+            <a:ext cx="3108960" cy="2103120"/>
           </a:xfrm>
           <a:prstGeom prst="rect">
             <a:avLst/>
@@ -7561,14 +7659,14 @@
       </p:pic>
       <p:sp>
         <p:nvSpPr>
-          <p:cNvPr id="9" name="Shape 5"/>
-          <p:cNvSpPr/>
-          <p:nvPr/>
-        </p:nvSpPr>
-        <p:spPr>
-          <a:xfrm>
-            <a:off x="3840480" y="1188720"/>
-            <a:ext cx="4754880" cy="2103120"/>
+          <p:cNvPr id="8" name="Shape 4"/>
+          <p:cNvSpPr/>
+          <p:nvPr/>
+        </p:nvSpPr>
+        <p:spPr>
+          <a:xfrm>
+            <a:off x="548640" y="1188720"/>
+            <a:ext cx="3108960" cy="2103120"/>
           </a:xfrm>
           <a:prstGeom prst="rect">
             <a:avLst/>
@@ -7581,9 +7679,55 @@
           </a:ln>
         </p:spPr>
       </p:sp>
-      <p:sp>
-        <p:nvSpPr>
-          <p:cNvPr id="10" name="Shape 6"/>
+      <p:pic>
+        <p:nvPicPr>
+          <p:cNvPr id="9" name="Image 2" descr="d:\resrtorant\presentation_assets\model_rotated_66deg_1790012883322.png">    </p:cNvPr>
+          <p:cNvPicPr>
+            <a:picLocks noChangeAspect="1"/>
+          </p:cNvPicPr>
+          <p:nvPr/>
+        </p:nvPicPr>
+        <p:blipFill>
+          <a:blip r:embed="rId3"/>
+          <a:stretch>
+            <a:fillRect/>
+          </a:stretch>
+        </p:blipFill>
+        <p:spPr>
+          <a:xfrm>
+            <a:off x="3840480" y="1188720"/>
+            <a:ext cx="4754880" cy="2103120"/>
+          </a:xfrm>
+          <a:prstGeom prst="rect">
+            <a:avLst/>
+          </a:prstGeom>
+        </p:spPr>
+      </p:pic>
+      <p:sp>
+        <p:nvSpPr>
+          <p:cNvPr id="10" name="Shape 5"/>
+          <p:cNvSpPr/>
+          <p:nvPr/>
+        </p:nvSpPr>
+        <p:spPr>
+          <a:xfrm>
+            <a:off x="3840480" y="1188720"/>
+            <a:ext cx="4754880" cy="2103120"/>
+          </a:xfrm>
+          <a:prstGeom prst="rect">
+            <a:avLst/>
+          </a:prstGeom>
+          <a:ln w="12700">
+            <a:solidFill>
+              <a:srgbClr val="E2E8F0"/>
+            </a:solidFill>
+            <a:prstDash val="solid"/>
+          </a:ln>
+        </p:spPr>
+      </p:sp>
+      <p:sp>
+        <p:nvSpPr>
+          <p:cNvPr id="11" name="Shape 6"/>
           <p:cNvSpPr/>
           <p:nvPr/>
         </p:nvSpPr>
@@ -7610,7 +7754,7 @@
       </p:sp>
       <p:sp>
         <p:nvSpPr>
-          <p:cNvPr id="11" name="Text 7"/>
+          <p:cNvPr id="12" name="Text 7"/>
           <p:cNvSpPr/>
           <p:nvPr/>
         </p:nvSpPr>
@@ -7649,7 +7793,7 @@
       </p:sp>
       <p:sp>
         <p:nvSpPr>
-          <p:cNvPr id="12" name="Text 8"/>
+          <p:cNvPr id="13" name="Text 8"/>
           <p:cNvSpPr/>
           <p:nvPr/>
         </p:nvSpPr>
@@ -7827,16 +7971,40 @@
           <a:chExt cx="0" cy="0"/>
         </a:xfrm>
       </p:grpSpPr>
-      <p:sp>
-        <p:nvSpPr>
-          <p:cNvPr id="2" name="Text 0"/>
-          <p:cNvSpPr/>
-          <p:nvPr/>
-        </p:nvSpPr>
-        <p:spPr>
-          <a:xfrm>
-            <a:off x="548640" y="365760"/>
-            <a:ext cx="8046720" cy="201168"/>
+      <p:pic>
+        <p:nvPicPr>
+          <p:cNvPr id="2" name="Image 0" descr="d:\resrtorant\presentation_assets\tcet_header.jpeg">    </p:cNvPr>
+          <p:cNvPicPr>
+            <a:picLocks noChangeAspect="1"/>
+          </p:cNvPicPr>
+          <p:nvPr/>
+        </p:nvPicPr>
+        <p:blipFill>
+          <a:blip r:embed="rId1"/>
+          <a:stretch>
+            <a:fillRect/>
+          </a:stretch>
+        </p:blipFill>
+        <p:spPr>
+          <a:xfrm>
+            <a:off x="1828800" y="45720"/>
+            <a:ext cx="5486400" cy="749808"/>
+          </a:xfrm>
+          <a:prstGeom prst="rect">
+            <a:avLst/>
+          </a:prstGeom>
+        </p:spPr>
+      </p:pic>
+      <p:sp>
+        <p:nvSpPr>
+          <p:cNvPr id="3" name="Text 0"/>
+          <p:cNvSpPr/>
+          <p:nvPr/>
+        </p:nvSpPr>
+        <p:spPr>
+          <a:xfrm>
+            <a:off x="548640" y="813816"/>
+            <a:ext cx="5943600" cy="329184"/>
           </a:xfrm>
           <a:prstGeom prst="rect">
             <a:avLst/>
@@ -7852,46 +8020,7 @@
               <a:buNone/>
             </a:pPr>
             <a:r>
-              <a:rPr lang="en-US" sz="1000" b="1" dirty="0">
-                <a:solidFill>
-                  <a:srgbClr val="2563EB"/>
-                </a:solidFill>
-                <a:latin typeface="Calibri" pitchFamily="34" charset="0"/>
-                <a:ea typeface="Calibri" pitchFamily="34" charset="-122"/>
-                <a:cs typeface="Calibri" pitchFamily="34" charset="-120"/>
-              </a:rPr>
-              <a:t>Rubric Criterion 8 (5 Marks)</a:t>
-            </a:r>
-            <a:endParaRPr lang="en-US" sz="1000" dirty="0"/>
-          </a:p>
-        </p:txBody>
-      </p:sp>
-      <p:sp>
-        <p:nvSpPr>
-          <p:cNvPr id="3" name="Text 1"/>
-          <p:cNvSpPr/>
-          <p:nvPr/>
-        </p:nvSpPr>
-        <p:spPr>
-          <a:xfrm>
-            <a:off x="548640" y="566928"/>
-            <a:ext cx="8046720" cy="411480"/>
-          </a:xfrm>
-          <a:prstGeom prst="rect">
-            <a:avLst/>
-          </a:prstGeom>
-          <a:noFill/>
-          <a:ln/>
-        </p:spPr>
-        <p:txBody>
-          <a:bodyPr wrap="square" lIns="0" tIns="0" rIns="0" bIns="0" rtlCol="0" anchor="ctr"/>
-          <a:lstStyle/>
-          <a:p>
-            <a:pPr indent="0" marL="0">
-              <a:buNone/>
-            </a:pPr>
-            <a:r>
-              <a:rPr lang="en-US" sz="2100" b="1" dirty="0">
+              <a:rPr lang="en-US" sz="1650" b="1" dirty="0">
                 <a:solidFill>
                   <a:srgbClr val="1E3A8A"/>
                 </a:solidFill>
@@ -7901,13 +8030,52 @@
               </a:rPr>
               <a:t>Testing Methodology, Test Matrix &amp; Verification</a:t>
             </a:r>
-            <a:endParaRPr lang="en-US" sz="2100" dirty="0"/>
-          </a:p>
-        </p:txBody>
-      </p:sp>
-      <p:sp>
-        <p:nvSpPr>
-          <p:cNvPr id="4" name="Text 2"/>
+            <a:endParaRPr lang="en-US" sz="1650" dirty="0"/>
+          </a:p>
+        </p:txBody>
+      </p:sp>
+      <p:sp>
+        <p:nvSpPr>
+          <p:cNvPr id="4" name="Text 1"/>
+          <p:cNvSpPr/>
+          <p:nvPr/>
+        </p:nvSpPr>
+        <p:spPr>
+          <a:xfrm>
+            <a:off x="6492240" y="841248"/>
+            <a:ext cx="2103120" cy="274320"/>
+          </a:xfrm>
+          <a:prstGeom prst="rect">
+            <a:avLst/>
+          </a:prstGeom>
+          <a:noFill/>
+          <a:ln/>
+        </p:spPr>
+        <p:txBody>
+          <a:bodyPr wrap="square" lIns="0" tIns="0" rIns="0" bIns="0" rtlCol="0" anchor="ctr"/>
+          <a:lstStyle/>
+          <a:p>
+            <a:pPr algn="r" indent="0" marL="0">
+              <a:buNone/>
+            </a:pPr>
+            <a:r>
+              <a:rPr lang="en-US" sz="950" b="1" dirty="0">
+                <a:solidFill>
+                  <a:srgbClr val="2563EB"/>
+                </a:solidFill>
+                <a:latin typeface="Calibri" pitchFamily="34" charset="0"/>
+                <a:ea typeface="Calibri" pitchFamily="34" charset="-122"/>
+                <a:cs typeface="Calibri" pitchFamily="34" charset="-120"/>
+              </a:rPr>
+              <a:t>Rubric Criterion 8 (5 Marks)</a:t>
+            </a:r>
+            <a:endParaRPr lang="en-US" sz="950" dirty="0"/>
+          </a:p>
+        </p:txBody>
+      </p:sp>
+      <p:sp>
+        <p:nvSpPr>
+          <p:cNvPr id="5" name="Text 2"/>
           <p:cNvSpPr/>
           <p:nvPr/>
         </p:nvSpPr>
@@ -7946,7 +8114,7 @@
       </p:sp>
       <p:sp>
         <p:nvSpPr>
-          <p:cNvPr id="5" name="Text 3"/>
+          <p:cNvPr id="6" name="Text 3"/>
           <p:cNvSpPr/>
           <p:nvPr/>
         </p:nvSpPr>
@@ -10889,7 +11057,7 @@
       </p:graphicFrame>
       <p:sp>
         <p:nvSpPr>
-          <p:cNvPr id="7" name="Shape 4"/>
+          <p:cNvPr id="8" name="Shape 4"/>
           <p:cNvSpPr/>
           <p:nvPr/>
         </p:nvSpPr>
@@ -10916,7 +11084,7 @@
       </p:sp>
       <p:sp>
         <p:nvSpPr>
-          <p:cNvPr id="8" name="Text 5"/>
+          <p:cNvPr id="9" name="Text 5"/>
           <p:cNvSpPr/>
           <p:nvPr/>
         </p:nvSpPr>
@@ -10955,7 +11123,7 @@
       </p:sp>
       <p:sp>
         <p:nvSpPr>
-          <p:cNvPr id="9" name="Text 6"/>
+          <p:cNvPr id="10" name="Text 6"/>
           <p:cNvSpPr/>
           <p:nvPr/>
         </p:nvSpPr>
@@ -11070,16 +11238,40 @@
           <a:chExt cx="0" cy="0"/>
         </a:xfrm>
       </p:grpSpPr>
-      <p:sp>
-        <p:nvSpPr>
-          <p:cNvPr id="2" name="Text 0"/>
-          <p:cNvSpPr/>
-          <p:nvPr/>
-        </p:nvSpPr>
-        <p:spPr>
-          <a:xfrm>
-            <a:off x="548640" y="365760"/>
-            <a:ext cx="8046720" cy="201168"/>
+      <p:pic>
+        <p:nvPicPr>
+          <p:cNvPr id="2" name="Image 0" descr="d:\resrtorant\presentation_assets\tcet_header.jpeg">    </p:cNvPr>
+          <p:cNvPicPr>
+            <a:picLocks noChangeAspect="1"/>
+          </p:cNvPicPr>
+          <p:nvPr/>
+        </p:nvPicPr>
+        <p:blipFill>
+          <a:blip r:embed="rId1"/>
+          <a:stretch>
+            <a:fillRect/>
+          </a:stretch>
+        </p:blipFill>
+        <p:spPr>
+          <a:xfrm>
+            <a:off x="1828800" y="45720"/>
+            <a:ext cx="5486400" cy="749808"/>
+          </a:xfrm>
+          <a:prstGeom prst="rect">
+            <a:avLst/>
+          </a:prstGeom>
+        </p:spPr>
+      </p:pic>
+      <p:sp>
+        <p:nvSpPr>
+          <p:cNvPr id="3" name="Text 0"/>
+          <p:cNvSpPr/>
+          <p:nvPr/>
+        </p:nvSpPr>
+        <p:spPr>
+          <a:xfrm>
+            <a:off x="548640" y="813816"/>
+            <a:ext cx="5943600" cy="329184"/>
           </a:xfrm>
           <a:prstGeom prst="rect">
             <a:avLst/>
@@ -11095,46 +11287,7 @@
               <a:buNone/>
             </a:pPr>
             <a:r>
-              <a:rPr lang="en-US" sz="1000" b="1" dirty="0">
-                <a:solidFill>
-                  <a:srgbClr val="2563EB"/>
-                </a:solidFill>
-                <a:latin typeface="Calibri" pitchFamily="34" charset="0"/>
-                <a:ea typeface="Calibri" pitchFamily="34" charset="-122"/>
-                <a:cs typeface="Calibri" pitchFamily="34" charset="-120"/>
-              </a:rPr>
-              <a:t>Experimental Results</a:t>
-            </a:r>
-            <a:endParaRPr lang="en-US" sz="1000" dirty="0"/>
-          </a:p>
-        </p:txBody>
-      </p:sp>
-      <p:sp>
-        <p:nvSpPr>
-          <p:cNvPr id="3" name="Text 1"/>
-          <p:cNvSpPr/>
-          <p:nvPr/>
-        </p:nvSpPr>
-        <p:spPr>
-          <a:xfrm>
-            <a:off x="548640" y="566928"/>
-            <a:ext cx="8046720" cy="411480"/>
-          </a:xfrm>
-          <a:prstGeom prst="rect">
-            <a:avLst/>
-          </a:prstGeom>
-          <a:noFill/>
-          <a:ln/>
-        </p:spPr>
-        <p:txBody>
-          <a:bodyPr wrap="square" lIns="0" tIns="0" rIns="0" bIns="0" rtlCol="0" anchor="ctr"/>
-          <a:lstStyle/>
-          <a:p>
-            <a:pPr indent="0" marL="0">
-              <a:buNone/>
-            </a:pPr>
-            <a:r>
-              <a:rPr lang="en-US" sz="2100" b="1" dirty="0">
+              <a:rPr lang="en-US" sz="1650" b="1" dirty="0">
                 <a:solidFill>
                   <a:srgbClr val="1E3A8A"/>
                 </a:solidFill>
@@ -11142,15 +11295,54 @@
                 <a:ea typeface="Cambria" pitchFamily="34" charset="-122"/>
                 <a:cs typeface="Cambria" pitchFamily="34" charset="-120"/>
               </a:rPr>
-              <a:t>Quantitative Performance Benchmarks &amp; Optimization Results</a:t>
-            </a:r>
-            <a:endParaRPr lang="en-US" sz="2100" dirty="0"/>
-          </a:p>
-        </p:txBody>
-      </p:sp>
-      <p:sp>
-        <p:nvSpPr>
-          <p:cNvPr id="4" name="Text 2"/>
+              <a:t>Quantitative Performance Benchmarks &amp; Results</a:t>
+            </a:r>
+            <a:endParaRPr lang="en-US" sz="1650" dirty="0"/>
+          </a:p>
+        </p:txBody>
+      </p:sp>
+      <p:sp>
+        <p:nvSpPr>
+          <p:cNvPr id="4" name="Text 1"/>
+          <p:cNvSpPr/>
+          <p:nvPr/>
+        </p:nvSpPr>
+        <p:spPr>
+          <a:xfrm>
+            <a:off x="6492240" y="841248"/>
+            <a:ext cx="2103120" cy="274320"/>
+          </a:xfrm>
+          <a:prstGeom prst="rect">
+            <a:avLst/>
+          </a:prstGeom>
+          <a:noFill/>
+          <a:ln/>
+        </p:spPr>
+        <p:txBody>
+          <a:bodyPr wrap="square" lIns="0" tIns="0" rIns="0" bIns="0" rtlCol="0" anchor="ctr"/>
+          <a:lstStyle/>
+          <a:p>
+            <a:pPr algn="r" indent="0" marL="0">
+              <a:buNone/>
+            </a:pPr>
+            <a:r>
+              <a:rPr lang="en-US" sz="950" b="1" dirty="0">
+                <a:solidFill>
+                  <a:srgbClr val="2563EB"/>
+                </a:solidFill>
+                <a:latin typeface="Calibri" pitchFamily="34" charset="0"/>
+                <a:ea typeface="Calibri" pitchFamily="34" charset="-122"/>
+                <a:cs typeface="Calibri" pitchFamily="34" charset="-120"/>
+              </a:rPr>
+              <a:t>Experimental Results</a:t>
+            </a:r>
+            <a:endParaRPr lang="en-US" sz="950" dirty="0"/>
+          </a:p>
+        </p:txBody>
+      </p:sp>
+      <p:sp>
+        <p:nvSpPr>
+          <p:cNvPr id="5" name="Text 2"/>
           <p:cNvSpPr/>
           <p:nvPr/>
         </p:nvSpPr>
@@ -11189,7 +11381,7 @@
       </p:sp>
       <p:sp>
         <p:nvSpPr>
-          <p:cNvPr id="5" name="Text 3"/>
+          <p:cNvPr id="6" name="Text 3"/>
           <p:cNvSpPr/>
           <p:nvPr/>
         </p:nvSpPr>
@@ -11228,7 +11420,7 @@
       </p:sp>
       <p:graphicFrame>
         <p:nvGraphicFramePr>
-          <p:cNvPr id="6" name="Chart 0" descr=""/>
+          <p:cNvPr id="7" name="Chart 0" descr=""/>
           <p:cNvGraphicFramePr/>
           <p:nvPr/>
         </p:nvGraphicFramePr>
@@ -11238,13 +11430,13 @@
         </p:xfrm>
         <a:graphic xmlns:a="http://schemas.openxmlformats.org/drawingml/2006/main">
           <a:graphicData uri="http://schemas.openxmlformats.org/drawingml/2006/chart">
-            <c:chart xmlns:c="http://schemas.openxmlformats.org/drawingml/2006/chart" r:id="rId1"/>
+            <c:chart xmlns:c="http://schemas.openxmlformats.org/drawingml/2006/chart" r:id="rId2"/>
           </a:graphicData>
         </a:graphic>
       </p:graphicFrame>
       <p:sp>
         <p:nvSpPr>
-          <p:cNvPr id="7" name="Shape 4"/>
+          <p:cNvPr id="8" name="Shape 4"/>
           <p:cNvSpPr/>
           <p:nvPr/>
         </p:nvSpPr>
@@ -11271,7 +11463,7 @@
       </p:sp>
       <p:sp>
         <p:nvSpPr>
-          <p:cNvPr id="8" name="Text 5"/>
+          <p:cNvPr id="9" name="Text 5"/>
           <p:cNvSpPr/>
           <p:nvPr/>
         </p:nvSpPr>
@@ -11310,7 +11502,7 @@
       </p:sp>
       <p:sp>
         <p:nvSpPr>
-          <p:cNvPr id="9" name="Text 6"/>
+          <p:cNvPr id="10" name="Text 6"/>
           <p:cNvSpPr/>
           <p:nvPr/>
         </p:nvSpPr>
@@ -11349,7 +11541,7 @@
       </p:sp>
       <p:sp>
         <p:nvSpPr>
-          <p:cNvPr id="10" name="Text 7"/>
+          <p:cNvPr id="11" name="Text 7"/>
           <p:cNvSpPr/>
           <p:nvPr/>
         </p:nvSpPr>
@@ -11388,7 +11580,7 @@
       </p:sp>
       <p:sp>
         <p:nvSpPr>
-          <p:cNvPr id="11" name="Shape 8"/>
+          <p:cNvPr id="12" name="Shape 8"/>
           <p:cNvSpPr/>
           <p:nvPr/>
         </p:nvSpPr>
@@ -11415,7 +11607,7 @@
       </p:sp>
       <p:sp>
         <p:nvSpPr>
-          <p:cNvPr id="12" name="Text 9"/>
+          <p:cNvPr id="13" name="Text 9"/>
           <p:cNvSpPr/>
           <p:nvPr/>
         </p:nvSpPr>
@@ -11454,7 +11646,7 @@
       </p:sp>
       <p:sp>
         <p:nvSpPr>
-          <p:cNvPr id="13" name="Text 10"/>
+          <p:cNvPr id="14" name="Text 10"/>
           <p:cNvSpPr/>
           <p:nvPr/>
         </p:nvSpPr>
@@ -11493,7 +11685,7 @@
       </p:sp>
       <p:sp>
         <p:nvSpPr>
-          <p:cNvPr id="14" name="Text 11"/>
+          <p:cNvPr id="15" name="Text 11"/>
           <p:cNvSpPr/>
           <p:nvPr/>
         </p:nvSpPr>
@@ -11532,7 +11724,7 @@
       </p:sp>
       <p:sp>
         <p:nvSpPr>
-          <p:cNvPr id="15" name="Shape 12"/>
+          <p:cNvPr id="16" name="Shape 12"/>
           <p:cNvSpPr/>
           <p:nvPr/>
         </p:nvSpPr>
@@ -11559,7 +11751,7 @@
       </p:sp>
       <p:sp>
         <p:nvSpPr>
-          <p:cNvPr id="16" name="Text 13"/>
+          <p:cNvPr id="17" name="Text 13"/>
           <p:cNvSpPr/>
           <p:nvPr/>
         </p:nvSpPr>
@@ -11598,7 +11790,7 @@
       </p:sp>
       <p:sp>
         <p:nvSpPr>
-          <p:cNvPr id="17" name="Text 14"/>
+          <p:cNvPr id="18" name="Text 14"/>
           <p:cNvSpPr/>
           <p:nvPr/>
         </p:nvSpPr>
@@ -11637,7 +11829,7 @@
       </p:sp>
       <p:sp>
         <p:nvSpPr>
-          <p:cNvPr id="18" name="Text 15"/>
+          <p:cNvPr id="19" name="Text 15"/>
           <p:cNvSpPr/>
           <p:nvPr/>
         </p:nvSpPr>
@@ -11676,7 +11868,7 @@
       </p:sp>
       <p:sp>
         <p:nvSpPr>
-          <p:cNvPr id="19" name="Shape 16"/>
+          <p:cNvPr id="20" name="Shape 16"/>
           <p:cNvSpPr/>
           <p:nvPr/>
         </p:nvSpPr>
@@ -11703,7 +11895,7 @@
       </p:sp>
       <p:sp>
         <p:nvSpPr>
-          <p:cNvPr id="20" name="Text 17"/>
+          <p:cNvPr id="21" name="Text 17"/>
           <p:cNvSpPr/>
           <p:nvPr/>
         </p:nvSpPr>
@@ -11742,7 +11934,7 @@
       </p:sp>
       <p:sp>
         <p:nvSpPr>
-          <p:cNvPr id="21" name="Text 18"/>
+          <p:cNvPr id="22" name="Text 18"/>
           <p:cNvSpPr/>
           <p:nvPr/>
         </p:nvSpPr>
@@ -11781,7 +11973,7 @@
       </p:sp>
       <p:sp>
         <p:nvSpPr>
-          <p:cNvPr id="22" name="Text 19"/>
+          <p:cNvPr id="23" name="Text 19"/>
           <p:cNvSpPr/>
           <p:nvPr/>
         </p:nvSpPr>
@@ -11850,16 +12042,40 @@
           <a:chExt cx="0" cy="0"/>
         </a:xfrm>
       </p:grpSpPr>
-      <p:sp>
-        <p:nvSpPr>
-          <p:cNvPr id="2" name="Text 0"/>
-          <p:cNvSpPr/>
-          <p:nvPr/>
-        </p:nvSpPr>
-        <p:spPr>
-          <a:xfrm>
-            <a:off x="548640" y="365760"/>
-            <a:ext cx="8046720" cy="201168"/>
+      <p:pic>
+        <p:nvPicPr>
+          <p:cNvPr id="2" name="Image 0" descr="d:\resrtorant\presentation_assets\tcet_header.jpeg">    </p:cNvPr>
+          <p:cNvPicPr>
+            <a:picLocks noChangeAspect="1"/>
+          </p:cNvPicPr>
+          <p:nvPr/>
+        </p:nvPicPr>
+        <p:blipFill>
+          <a:blip r:embed="rId1"/>
+          <a:stretch>
+            <a:fillRect/>
+          </a:stretch>
+        </p:blipFill>
+        <p:spPr>
+          <a:xfrm>
+            <a:off x="1828800" y="45720"/>
+            <a:ext cx="5486400" cy="749808"/>
+          </a:xfrm>
+          <a:prstGeom prst="rect">
+            <a:avLst/>
+          </a:prstGeom>
+        </p:spPr>
+      </p:pic>
+      <p:sp>
+        <p:nvSpPr>
+          <p:cNvPr id="3" name="Text 0"/>
+          <p:cNvSpPr/>
+          <p:nvPr/>
+        </p:nvSpPr>
+        <p:spPr>
+          <a:xfrm>
+            <a:off x="548640" y="813816"/>
+            <a:ext cx="5943600" cy="329184"/>
           </a:xfrm>
           <a:prstGeom prst="rect">
             <a:avLst/>
@@ -11875,46 +12091,7 @@
               <a:buNone/>
             </a:pPr>
             <a:r>
-              <a:rPr lang="en-US" sz="1000" b="1" dirty="0">
-                <a:solidFill>
-                  <a:srgbClr val="2563EB"/>
-                </a:solidFill>
-                <a:latin typeface="Calibri" pitchFamily="34" charset="0"/>
-                <a:ea typeface="Calibri" pitchFamily="34" charset="-122"/>
-                <a:cs typeface="Calibri" pitchFamily="34" charset="-120"/>
-              </a:rPr>
-              <a:t>Rubric Criterion 9 (20 Marks)</a:t>
-            </a:r>
-            <a:endParaRPr lang="en-US" sz="1000" dirty="0"/>
-          </a:p>
-        </p:txBody>
-      </p:sp>
-      <p:sp>
-        <p:nvSpPr>
-          <p:cNvPr id="3" name="Text 1"/>
-          <p:cNvSpPr/>
-          <p:nvPr/>
-        </p:nvSpPr>
-        <p:spPr>
-          <a:xfrm>
-            <a:off x="548640" y="566928"/>
-            <a:ext cx="8046720" cy="411480"/>
-          </a:xfrm>
-          <a:prstGeom prst="rect">
-            <a:avLst/>
-          </a:prstGeom>
-          <a:noFill/>
-          <a:ln/>
-        </p:spPr>
-        <p:txBody>
-          <a:bodyPr wrap="square" lIns="0" tIns="0" rIns="0" bIns="0" rtlCol="0" anchor="ctr"/>
-          <a:lstStyle/>
-          <a:p>
-            <a:pPr indent="0" marL="0">
-              <a:buNone/>
-            </a:pPr>
-            <a:r>
-              <a:rPr lang="en-US" sz="2100" b="1" dirty="0">
+              <a:rPr lang="en-US" sz="1650" b="1" dirty="0">
                 <a:solidFill>
                   <a:srgbClr val="1E3A8A"/>
                 </a:solidFill>
@@ -11922,15 +12099,54 @@
                 <a:ea typeface="Cambria" pitchFamily="34" charset="-122"/>
                 <a:cs typeface="Cambria" pitchFamily="34" charset="-120"/>
               </a:rPr>
-              <a:t>Research Paper: Academic Contribution, Methodology &amp; Status</a:t>
-            </a:r>
-            <a:endParaRPr lang="en-US" sz="2100" dirty="0"/>
-          </a:p>
-        </p:txBody>
-      </p:sp>
-      <p:sp>
-        <p:nvSpPr>
-          <p:cNvPr id="4" name="Text 2"/>
+              <a:t>Research Paper: Academic Contribution &amp; Status</a:t>
+            </a:r>
+            <a:endParaRPr lang="en-US" sz="1650" dirty="0"/>
+          </a:p>
+        </p:txBody>
+      </p:sp>
+      <p:sp>
+        <p:nvSpPr>
+          <p:cNvPr id="4" name="Text 1"/>
+          <p:cNvSpPr/>
+          <p:nvPr/>
+        </p:nvSpPr>
+        <p:spPr>
+          <a:xfrm>
+            <a:off x="6492240" y="841248"/>
+            <a:ext cx="2103120" cy="274320"/>
+          </a:xfrm>
+          <a:prstGeom prst="rect">
+            <a:avLst/>
+          </a:prstGeom>
+          <a:noFill/>
+          <a:ln/>
+        </p:spPr>
+        <p:txBody>
+          <a:bodyPr wrap="square" lIns="0" tIns="0" rIns="0" bIns="0" rtlCol="0" anchor="ctr"/>
+          <a:lstStyle/>
+          <a:p>
+            <a:pPr algn="r" indent="0" marL="0">
+              <a:buNone/>
+            </a:pPr>
+            <a:r>
+              <a:rPr lang="en-US" sz="950" b="1" dirty="0">
+                <a:solidFill>
+                  <a:srgbClr val="2563EB"/>
+                </a:solidFill>
+                <a:latin typeface="Calibri" pitchFamily="34" charset="0"/>
+                <a:ea typeface="Calibri" pitchFamily="34" charset="-122"/>
+                <a:cs typeface="Calibri" pitchFamily="34" charset="-120"/>
+              </a:rPr>
+              <a:t>Rubric Criterion 9 (20 Marks)</a:t>
+            </a:r>
+            <a:endParaRPr lang="en-US" sz="950" dirty="0"/>
+          </a:p>
+        </p:txBody>
+      </p:sp>
+      <p:sp>
+        <p:nvSpPr>
+          <p:cNvPr id="5" name="Text 2"/>
           <p:cNvSpPr/>
           <p:nvPr/>
         </p:nvSpPr>
@@ -11969,7 +12185,7 @@
       </p:sp>
       <p:sp>
         <p:nvSpPr>
-          <p:cNvPr id="5" name="Text 3"/>
+          <p:cNvPr id="6" name="Text 3"/>
           <p:cNvSpPr/>
           <p:nvPr/>
         </p:nvSpPr>
@@ -12008,7 +12224,7 @@
       </p:sp>
       <p:sp>
         <p:nvSpPr>
-          <p:cNvPr id="6" name="Shape 4"/>
+          <p:cNvPr id="7" name="Shape 4"/>
           <p:cNvSpPr/>
           <p:nvPr/>
         </p:nvSpPr>
@@ -12035,7 +12251,7 @@
       </p:sp>
       <p:sp>
         <p:nvSpPr>
-          <p:cNvPr id="7" name="Text 5"/>
+          <p:cNvPr id="8" name="Text 5"/>
           <p:cNvSpPr/>
           <p:nvPr/>
         </p:nvSpPr>
@@ -12074,7 +12290,7 @@
       </p:sp>
       <p:sp>
         <p:nvSpPr>
-          <p:cNvPr id="8" name="Text 6"/>
+          <p:cNvPr id="9" name="Text 6"/>
           <p:cNvSpPr/>
           <p:nvPr/>
         </p:nvSpPr>
@@ -12113,7 +12329,7 @@
       </p:sp>
       <p:sp>
         <p:nvSpPr>
-          <p:cNvPr id="9" name="Text 7"/>
+          <p:cNvPr id="10" name="Text 7"/>
           <p:cNvSpPr/>
           <p:nvPr/>
         </p:nvSpPr>
@@ -12152,7 +12368,7 @@
       </p:sp>
       <p:sp>
         <p:nvSpPr>
-          <p:cNvPr id="10" name="Shape 8"/>
+          <p:cNvPr id="11" name="Shape 8"/>
           <p:cNvSpPr/>
           <p:nvPr/>
         </p:nvSpPr>
@@ -12179,7 +12395,7 @@
       </p:sp>
       <p:sp>
         <p:nvSpPr>
-          <p:cNvPr id="11" name="Text 9"/>
+          <p:cNvPr id="12" name="Text 9"/>
           <p:cNvSpPr/>
           <p:nvPr/>
         </p:nvSpPr>
@@ -12218,7 +12434,7 @@
       </p:sp>
       <p:sp>
         <p:nvSpPr>
-          <p:cNvPr id="12" name="Text 10"/>
+          <p:cNvPr id="13" name="Text 10"/>
           <p:cNvSpPr/>
           <p:nvPr/>
         </p:nvSpPr>
@@ -12303,7 +12519,7 @@
       </p:sp>
       <p:sp>
         <p:nvSpPr>
-          <p:cNvPr id="13" name="Shape 11"/>
+          <p:cNvPr id="14" name="Shape 11"/>
           <p:cNvSpPr/>
           <p:nvPr/>
         </p:nvSpPr>
@@ -12330,7 +12546,7 @@
       </p:sp>
       <p:sp>
         <p:nvSpPr>
-          <p:cNvPr id="14" name="Text 12"/>
+          <p:cNvPr id="15" name="Text 12"/>
           <p:cNvSpPr/>
           <p:nvPr/>
         </p:nvSpPr>
@@ -12369,7 +12585,7 @@
       </p:sp>
       <p:sp>
         <p:nvSpPr>
-          <p:cNvPr id="15" name="Text 13"/>
+          <p:cNvPr id="16" name="Text 13"/>
           <p:cNvSpPr/>
           <p:nvPr/>
         </p:nvSpPr>
@@ -12454,7 +12670,7 @@
       </p:sp>
       <p:sp>
         <p:nvSpPr>
-          <p:cNvPr id="16" name="Shape 14"/>
+          <p:cNvPr id="17" name="Shape 14"/>
           <p:cNvSpPr/>
           <p:nvPr/>
         </p:nvSpPr>
@@ -12481,7 +12697,7 @@
       </p:sp>
       <p:sp>
         <p:nvSpPr>
-          <p:cNvPr id="17" name="Text 15"/>
+          <p:cNvPr id="18" name="Text 15"/>
           <p:cNvSpPr/>
           <p:nvPr/>
         </p:nvSpPr>
@@ -12520,7 +12736,7 @@
       </p:sp>
       <p:sp>
         <p:nvSpPr>
-          <p:cNvPr id="18" name="Text 16"/>
+          <p:cNvPr id="19" name="Text 16"/>
           <p:cNvSpPr/>
           <p:nvPr/>
         </p:nvSpPr>
@@ -12635,16 +12851,40 @@
           <a:chExt cx="0" cy="0"/>
         </a:xfrm>
       </p:grpSpPr>
-      <p:sp>
-        <p:nvSpPr>
-          <p:cNvPr id="2" name="Text 0"/>
-          <p:cNvSpPr/>
-          <p:nvPr/>
-        </p:nvSpPr>
-        <p:spPr>
-          <a:xfrm>
-            <a:off x="548640" y="365760"/>
-            <a:ext cx="8046720" cy="201168"/>
+      <p:pic>
+        <p:nvPicPr>
+          <p:cNvPr id="2" name="Image 0" descr="d:\resrtorant\presentation_assets\tcet_header.jpeg">    </p:cNvPr>
+          <p:cNvPicPr>
+            <a:picLocks noChangeAspect="1"/>
+          </p:cNvPicPr>
+          <p:nvPr/>
+        </p:nvPicPr>
+        <p:blipFill>
+          <a:blip r:embed="rId1"/>
+          <a:stretch>
+            <a:fillRect/>
+          </a:stretch>
+        </p:blipFill>
+        <p:spPr>
+          <a:xfrm>
+            <a:off x="1828800" y="45720"/>
+            <a:ext cx="5486400" cy="749808"/>
+          </a:xfrm>
+          <a:prstGeom prst="rect">
+            <a:avLst/>
+          </a:prstGeom>
+        </p:spPr>
+      </p:pic>
+      <p:sp>
+        <p:nvSpPr>
+          <p:cNvPr id="3" name="Text 0"/>
+          <p:cNvSpPr/>
+          <p:nvPr/>
+        </p:nvSpPr>
+        <p:spPr>
+          <a:xfrm>
+            <a:off x="548640" y="813816"/>
+            <a:ext cx="5943600" cy="329184"/>
           </a:xfrm>
           <a:prstGeom prst="rect">
             <a:avLst/>
@@ -12660,46 +12900,7 @@
               <a:buNone/>
             </a:pPr>
             <a:r>
-              <a:rPr lang="en-US" sz="1000" b="1" dirty="0">
-                <a:solidFill>
-                  <a:srgbClr val="2563EB"/>
-                </a:solidFill>
-                <a:latin typeface="Calibri" pitchFamily="34" charset="0"/>
-                <a:ea typeface="Calibri" pitchFamily="34" charset="-122"/>
-                <a:cs typeface="Calibri" pitchFamily="34" charset="-120"/>
-              </a:rPr>
-              <a:t>Project Conclusion</a:t>
-            </a:r>
-            <a:endParaRPr lang="en-US" sz="1000" dirty="0"/>
-          </a:p>
-        </p:txBody>
-      </p:sp>
-      <p:sp>
-        <p:nvSpPr>
-          <p:cNvPr id="3" name="Text 1"/>
-          <p:cNvSpPr/>
-          <p:nvPr/>
-        </p:nvSpPr>
-        <p:spPr>
-          <a:xfrm>
-            <a:off x="548640" y="566928"/>
-            <a:ext cx="8046720" cy="411480"/>
-          </a:xfrm>
-          <a:prstGeom prst="rect">
-            <a:avLst/>
-          </a:prstGeom>
-          <a:noFill/>
-          <a:ln/>
-        </p:spPr>
-        <p:txBody>
-          <a:bodyPr wrap="square" lIns="0" tIns="0" rIns="0" bIns="0" rtlCol="0" anchor="ctr"/>
-          <a:lstStyle/>
-          <a:p>
-            <a:pPr indent="0" marL="0">
-              <a:buNone/>
-            </a:pPr>
-            <a:r>
-              <a:rPr lang="en-US" sz="2100" b="1" dirty="0">
+              <a:rPr lang="en-US" sz="1650" b="1" dirty="0">
                 <a:solidFill>
                   <a:srgbClr val="1E3A8A"/>
                 </a:solidFill>
@@ -12707,15 +12908,54 @@
                 <a:ea typeface="Cambria" pitchFamily="34" charset="-122"/>
                 <a:cs typeface="Cambria" pitchFamily="34" charset="-120"/>
               </a:rPr>
-              <a:t>Key Achievements, Academic Contributions &amp; Takeaways</a:t>
-            </a:r>
-            <a:endParaRPr lang="en-US" sz="2100" dirty="0"/>
-          </a:p>
-        </p:txBody>
-      </p:sp>
-      <p:sp>
-        <p:nvSpPr>
-          <p:cNvPr id="4" name="Text 2"/>
+              <a:t>Key Achievements &amp; Overall Summary</a:t>
+            </a:r>
+            <a:endParaRPr lang="en-US" sz="1650" dirty="0"/>
+          </a:p>
+        </p:txBody>
+      </p:sp>
+      <p:sp>
+        <p:nvSpPr>
+          <p:cNvPr id="4" name="Text 1"/>
+          <p:cNvSpPr/>
+          <p:nvPr/>
+        </p:nvSpPr>
+        <p:spPr>
+          <a:xfrm>
+            <a:off x="6492240" y="841248"/>
+            <a:ext cx="2103120" cy="274320"/>
+          </a:xfrm>
+          <a:prstGeom prst="rect">
+            <a:avLst/>
+          </a:prstGeom>
+          <a:noFill/>
+          <a:ln/>
+        </p:spPr>
+        <p:txBody>
+          <a:bodyPr wrap="square" lIns="0" tIns="0" rIns="0" bIns="0" rtlCol="0" anchor="ctr"/>
+          <a:lstStyle/>
+          <a:p>
+            <a:pPr algn="r" indent="0" marL="0">
+              <a:buNone/>
+            </a:pPr>
+            <a:r>
+              <a:rPr lang="en-US" sz="950" b="1" dirty="0">
+                <a:solidFill>
+                  <a:srgbClr val="2563EB"/>
+                </a:solidFill>
+                <a:latin typeface="Calibri" pitchFamily="34" charset="0"/>
+                <a:ea typeface="Calibri" pitchFamily="34" charset="-122"/>
+                <a:cs typeface="Calibri" pitchFamily="34" charset="-120"/>
+              </a:rPr>
+              <a:t>Project Conclusion</a:t>
+            </a:r>
+            <a:endParaRPr lang="en-US" sz="950" dirty="0"/>
+          </a:p>
+        </p:txBody>
+      </p:sp>
+      <p:sp>
+        <p:nvSpPr>
+          <p:cNvPr id="5" name="Text 2"/>
           <p:cNvSpPr/>
           <p:nvPr/>
         </p:nvSpPr>
@@ -12754,7 +12994,7 @@
       </p:sp>
       <p:sp>
         <p:nvSpPr>
-          <p:cNvPr id="5" name="Text 3"/>
+          <p:cNvPr id="6" name="Text 3"/>
           <p:cNvSpPr/>
           <p:nvPr/>
         </p:nvSpPr>
@@ -12793,7 +13033,7 @@
       </p:sp>
       <p:sp>
         <p:nvSpPr>
-          <p:cNvPr id="6" name="Shape 4"/>
+          <p:cNvPr id="7" name="Shape 4"/>
           <p:cNvSpPr/>
           <p:nvPr/>
         </p:nvSpPr>
@@ -12820,7 +13060,7 @@
       </p:sp>
       <p:sp>
         <p:nvSpPr>
-          <p:cNvPr id="7" name="Text 5"/>
+          <p:cNvPr id="8" name="Text 5"/>
           <p:cNvSpPr/>
           <p:nvPr/>
         </p:nvSpPr>
@@ -12859,7 +13099,7 @@
       </p:sp>
       <p:sp>
         <p:nvSpPr>
-          <p:cNvPr id="8" name="Text 6"/>
+          <p:cNvPr id="9" name="Text 6"/>
           <p:cNvSpPr/>
           <p:nvPr/>
         </p:nvSpPr>
@@ -12898,7 +13138,7 @@
       </p:sp>
       <p:sp>
         <p:nvSpPr>
-          <p:cNvPr id="9" name="Shape 7"/>
+          <p:cNvPr id="10" name="Shape 7"/>
           <p:cNvSpPr/>
           <p:nvPr/>
         </p:nvSpPr>
@@ -12925,7 +13165,7 @@
       </p:sp>
       <p:sp>
         <p:nvSpPr>
-          <p:cNvPr id="10" name="Text 8"/>
+          <p:cNvPr id="11" name="Text 8"/>
           <p:cNvSpPr/>
           <p:nvPr/>
         </p:nvSpPr>
@@ -12964,7 +13204,7 @@
       </p:sp>
       <p:sp>
         <p:nvSpPr>
-          <p:cNvPr id="11" name="Text 9"/>
+          <p:cNvPr id="12" name="Text 9"/>
           <p:cNvSpPr/>
           <p:nvPr/>
         </p:nvSpPr>
@@ -13003,7 +13243,7 @@
       </p:sp>
       <p:sp>
         <p:nvSpPr>
-          <p:cNvPr id="12" name="Shape 10"/>
+          <p:cNvPr id="13" name="Shape 10"/>
           <p:cNvSpPr/>
           <p:nvPr/>
         </p:nvSpPr>
@@ -13030,7 +13270,7 @@
       </p:sp>
       <p:sp>
         <p:nvSpPr>
-          <p:cNvPr id="13" name="Text 11"/>
+          <p:cNvPr id="14" name="Text 11"/>
           <p:cNvSpPr/>
           <p:nvPr/>
         </p:nvSpPr>
@@ -13069,7 +13309,7 @@
       </p:sp>
       <p:sp>
         <p:nvSpPr>
-          <p:cNvPr id="14" name="Text 12"/>
+          <p:cNvPr id="15" name="Text 12"/>
           <p:cNvSpPr/>
           <p:nvPr/>
         </p:nvSpPr>
@@ -13108,7 +13348,7 @@
       </p:sp>
       <p:sp>
         <p:nvSpPr>
-          <p:cNvPr id="15" name="Shape 13"/>
+          <p:cNvPr id="16" name="Shape 13"/>
           <p:cNvSpPr/>
           <p:nvPr/>
         </p:nvSpPr>
@@ -13135,7 +13375,7 @@
       </p:sp>
       <p:sp>
         <p:nvSpPr>
-          <p:cNvPr id="16" name="Text 14"/>
+          <p:cNvPr id="17" name="Text 14"/>
           <p:cNvSpPr/>
           <p:nvPr/>
         </p:nvSpPr>
@@ -13174,7 +13414,7 @@
       </p:sp>
       <p:sp>
         <p:nvSpPr>
-          <p:cNvPr id="17" name="Text 15"/>
+          <p:cNvPr id="18" name="Text 15"/>
           <p:cNvSpPr/>
           <p:nvPr/>
         </p:nvSpPr>
@@ -13243,16 +13483,40 @@
           <a:chExt cx="0" cy="0"/>
         </a:xfrm>
       </p:grpSpPr>
-      <p:sp>
-        <p:nvSpPr>
-          <p:cNvPr id="2" name="Text 0"/>
-          <p:cNvSpPr/>
-          <p:nvPr/>
-        </p:nvSpPr>
-        <p:spPr>
-          <a:xfrm>
-            <a:off x="548640" y="365760"/>
-            <a:ext cx="8046720" cy="201168"/>
+      <p:pic>
+        <p:nvPicPr>
+          <p:cNvPr id="2" name="Image 0" descr="d:\resrtorant\presentation_assets\tcet_header.jpeg">    </p:cNvPr>
+          <p:cNvPicPr>
+            <a:picLocks noChangeAspect="1"/>
+          </p:cNvPicPr>
+          <p:nvPr/>
+        </p:nvPicPr>
+        <p:blipFill>
+          <a:blip r:embed="rId1"/>
+          <a:stretch>
+            <a:fillRect/>
+          </a:stretch>
+        </p:blipFill>
+        <p:spPr>
+          <a:xfrm>
+            <a:off x="1828800" y="45720"/>
+            <a:ext cx="5486400" cy="749808"/>
+          </a:xfrm>
+          <a:prstGeom prst="rect">
+            <a:avLst/>
+          </a:prstGeom>
+        </p:spPr>
+      </p:pic>
+      <p:sp>
+        <p:nvSpPr>
+          <p:cNvPr id="3" name="Text 0"/>
+          <p:cNvSpPr/>
+          <p:nvPr/>
+        </p:nvSpPr>
+        <p:spPr>
+          <a:xfrm>
+            <a:off x="548640" y="813816"/>
+            <a:ext cx="5943600" cy="329184"/>
           </a:xfrm>
           <a:prstGeom prst="rect">
             <a:avLst/>
@@ -13268,46 +13532,7 @@
               <a:buNone/>
             </a:pPr>
             <a:r>
-              <a:rPr lang="en-US" sz="1000" b="1" dirty="0">
-                <a:solidFill>
-                  <a:srgbClr val="2563EB"/>
-                </a:solidFill>
-                <a:latin typeface="Calibri" pitchFamily="34" charset="0"/>
-                <a:ea typeface="Calibri" pitchFamily="34" charset="-122"/>
-                <a:cs typeface="Calibri" pitchFamily="34" charset="-120"/>
-              </a:rPr>
-              <a:t>Roadmap &amp; Horizons</a:t>
-            </a:r>
-            <a:endParaRPr lang="en-US" sz="1000" dirty="0"/>
-          </a:p>
-        </p:txBody>
-      </p:sp>
-      <p:sp>
-        <p:nvSpPr>
-          <p:cNvPr id="3" name="Text 1"/>
-          <p:cNvSpPr/>
-          <p:nvPr/>
-        </p:nvSpPr>
-        <p:spPr>
-          <a:xfrm>
-            <a:off x="548640" y="566928"/>
-            <a:ext cx="8046720" cy="411480"/>
-          </a:xfrm>
-          <a:prstGeom prst="rect">
-            <a:avLst/>
-          </a:prstGeom>
-          <a:noFill/>
-          <a:ln/>
-        </p:spPr>
-        <p:txBody>
-          <a:bodyPr wrap="square" lIns="0" tIns="0" rIns="0" bIns="0" rtlCol="0" anchor="ctr"/>
-          <a:lstStyle/>
-          <a:p>
-            <a:pPr indent="0" marL="0">
-              <a:buNone/>
-            </a:pPr>
-            <a:r>
-              <a:rPr lang="en-US" sz="2100" b="1" dirty="0">
+              <a:rPr lang="en-US" sz="1650" b="1" dirty="0">
                 <a:solidFill>
                   <a:srgbClr val="1E3A8A"/>
                 </a:solidFill>
@@ -13315,15 +13540,54 @@
                 <a:ea typeface="Cambria" pitchFamily="34" charset="-122"/>
                 <a:cs typeface="Cambria" pitchFamily="34" charset="-120"/>
               </a:rPr>
-              <a:t>Future Scope, Commercial Scalability &amp; Research Horizons</a:t>
-            </a:r>
-            <a:endParaRPr lang="en-US" sz="2100" dirty="0"/>
-          </a:p>
-        </p:txBody>
-      </p:sp>
-      <p:sp>
-        <p:nvSpPr>
-          <p:cNvPr id="4" name="Text 2"/>
+              <a:t>Future Scope &amp; Commercial Scalability</a:t>
+            </a:r>
+            <a:endParaRPr lang="en-US" sz="1650" dirty="0"/>
+          </a:p>
+        </p:txBody>
+      </p:sp>
+      <p:sp>
+        <p:nvSpPr>
+          <p:cNvPr id="4" name="Text 1"/>
+          <p:cNvSpPr/>
+          <p:nvPr/>
+        </p:nvSpPr>
+        <p:spPr>
+          <a:xfrm>
+            <a:off x="6492240" y="841248"/>
+            <a:ext cx="2103120" cy="274320"/>
+          </a:xfrm>
+          <a:prstGeom prst="rect">
+            <a:avLst/>
+          </a:prstGeom>
+          <a:noFill/>
+          <a:ln/>
+        </p:spPr>
+        <p:txBody>
+          <a:bodyPr wrap="square" lIns="0" tIns="0" rIns="0" bIns="0" rtlCol="0" anchor="ctr"/>
+          <a:lstStyle/>
+          <a:p>
+            <a:pPr algn="r" indent="0" marL="0">
+              <a:buNone/>
+            </a:pPr>
+            <a:r>
+              <a:rPr lang="en-US" sz="950" b="1" dirty="0">
+                <a:solidFill>
+                  <a:srgbClr val="2563EB"/>
+                </a:solidFill>
+                <a:latin typeface="Calibri" pitchFamily="34" charset="0"/>
+                <a:ea typeface="Calibri" pitchFamily="34" charset="-122"/>
+                <a:cs typeface="Calibri" pitchFamily="34" charset="-120"/>
+              </a:rPr>
+              <a:t>Roadmap &amp; Horizons</a:t>
+            </a:r>
+            <a:endParaRPr lang="en-US" sz="950" dirty="0"/>
+          </a:p>
+        </p:txBody>
+      </p:sp>
+      <p:sp>
+        <p:nvSpPr>
+          <p:cNvPr id="5" name="Text 2"/>
           <p:cNvSpPr/>
           <p:nvPr/>
         </p:nvSpPr>
@@ -13362,7 +13626,7 @@
       </p:sp>
       <p:sp>
         <p:nvSpPr>
-          <p:cNvPr id="5" name="Text 3"/>
+          <p:cNvPr id="6" name="Text 3"/>
           <p:cNvSpPr/>
           <p:nvPr/>
         </p:nvSpPr>
@@ -13401,7 +13665,7 @@
       </p:sp>
       <p:sp>
         <p:nvSpPr>
-          <p:cNvPr id="6" name="Shape 4"/>
+          <p:cNvPr id="7" name="Shape 4"/>
           <p:cNvSpPr/>
           <p:nvPr/>
         </p:nvSpPr>
@@ -13428,7 +13692,7 @@
       </p:sp>
       <p:sp>
         <p:nvSpPr>
-          <p:cNvPr id="7" name="Text 5"/>
+          <p:cNvPr id="8" name="Text 5"/>
           <p:cNvSpPr/>
           <p:nvPr/>
         </p:nvSpPr>
@@ -13467,7 +13731,7 @@
       </p:sp>
       <p:sp>
         <p:nvSpPr>
-          <p:cNvPr id="8" name="Text 6"/>
+          <p:cNvPr id="9" name="Text 6"/>
           <p:cNvSpPr/>
           <p:nvPr/>
         </p:nvSpPr>
@@ -13506,7 +13770,7 @@
       </p:sp>
       <p:sp>
         <p:nvSpPr>
-          <p:cNvPr id="9" name="Shape 7"/>
+          <p:cNvPr id="10" name="Shape 7"/>
           <p:cNvSpPr/>
           <p:nvPr/>
         </p:nvSpPr>
@@ -13533,7 +13797,7 @@
       </p:sp>
       <p:sp>
         <p:nvSpPr>
-          <p:cNvPr id="10" name="Text 8"/>
+          <p:cNvPr id="11" name="Text 8"/>
           <p:cNvSpPr/>
           <p:nvPr/>
         </p:nvSpPr>
@@ -13572,7 +13836,7 @@
       </p:sp>
       <p:sp>
         <p:nvSpPr>
-          <p:cNvPr id="11" name="Text 9"/>
+          <p:cNvPr id="12" name="Text 9"/>
           <p:cNvSpPr/>
           <p:nvPr/>
         </p:nvSpPr>
@@ -13611,7 +13875,7 @@
       </p:sp>
       <p:sp>
         <p:nvSpPr>
-          <p:cNvPr id="12" name="Shape 10"/>
+          <p:cNvPr id="13" name="Shape 10"/>
           <p:cNvSpPr/>
           <p:nvPr/>
         </p:nvSpPr>
@@ -13638,7 +13902,7 @@
       </p:sp>
       <p:sp>
         <p:nvSpPr>
-          <p:cNvPr id="13" name="Text 11"/>
+          <p:cNvPr id="14" name="Text 11"/>
           <p:cNvSpPr/>
           <p:nvPr/>
         </p:nvSpPr>
@@ -13677,7 +13941,7 @@
       </p:sp>
       <p:sp>
         <p:nvSpPr>
-          <p:cNvPr id="14" name="Text 12"/>
+          <p:cNvPr id="15" name="Text 12"/>
           <p:cNvSpPr/>
           <p:nvPr/>
         </p:nvSpPr>
@@ -13716,7 +13980,7 @@
       </p:sp>
       <p:sp>
         <p:nvSpPr>
-          <p:cNvPr id="15" name="Shape 13"/>
+          <p:cNvPr id="16" name="Shape 13"/>
           <p:cNvSpPr/>
           <p:nvPr/>
         </p:nvSpPr>
@@ -13743,7 +14007,7 @@
       </p:sp>
       <p:sp>
         <p:nvSpPr>
-          <p:cNvPr id="16" name="Text 14"/>
+          <p:cNvPr id="17" name="Text 14"/>
           <p:cNvSpPr/>
           <p:nvPr/>
         </p:nvSpPr>
@@ -13782,7 +14046,7 @@
       </p:sp>
       <p:sp>
         <p:nvSpPr>
-          <p:cNvPr id="17" name="Text 15"/>
+          <p:cNvPr id="18" name="Text 15"/>
           <p:cNvSpPr/>
           <p:nvPr/>
         </p:nvSpPr>
@@ -13851,16 +14115,40 @@
           <a:chExt cx="0" cy="0"/>
         </a:xfrm>
       </p:grpSpPr>
-      <p:sp>
-        <p:nvSpPr>
-          <p:cNvPr id="2" name="Text 0"/>
-          <p:cNvSpPr/>
-          <p:nvPr/>
-        </p:nvSpPr>
-        <p:spPr>
-          <a:xfrm>
-            <a:off x="548640" y="365760"/>
-            <a:ext cx="8046720" cy="201168"/>
+      <p:pic>
+        <p:nvPicPr>
+          <p:cNvPr id="2" name="Image 0" descr="d:\resrtorant\presentation_assets\tcet_header.jpeg">    </p:cNvPr>
+          <p:cNvPicPr>
+            <a:picLocks noChangeAspect="1"/>
+          </p:cNvPicPr>
+          <p:nvPr/>
+        </p:nvPicPr>
+        <p:blipFill>
+          <a:blip r:embed="rId1"/>
+          <a:stretch>
+            <a:fillRect/>
+          </a:stretch>
+        </p:blipFill>
+        <p:spPr>
+          <a:xfrm>
+            <a:off x="1828800" y="45720"/>
+            <a:ext cx="5486400" cy="749808"/>
+          </a:xfrm>
+          <a:prstGeom prst="rect">
+            <a:avLst/>
+          </a:prstGeom>
+        </p:spPr>
+      </p:pic>
+      <p:sp>
+        <p:nvSpPr>
+          <p:cNvPr id="3" name="Text 0"/>
+          <p:cNvSpPr/>
+          <p:nvPr/>
+        </p:nvSpPr>
+        <p:spPr>
+          <a:xfrm>
+            <a:off x="548640" y="813816"/>
+            <a:ext cx="5943600" cy="329184"/>
           </a:xfrm>
           <a:prstGeom prst="rect">
             <a:avLst/>
@@ -13876,46 +14164,7 @@
               <a:buNone/>
             </a:pPr>
             <a:r>
-              <a:rPr lang="en-US" sz="1000" b="1" dirty="0">
-                <a:solidFill>
-                  <a:srgbClr val="2563EB"/>
-                </a:solidFill>
-                <a:latin typeface="Calibri" pitchFamily="34" charset="0"/>
-                <a:ea typeface="Calibri" pitchFamily="34" charset="-122"/>
-                <a:cs typeface="Calibri" pitchFamily="34" charset="-120"/>
-              </a:rPr>
-              <a:t>Context &amp; Motivation</a:t>
-            </a:r>
-            <a:endParaRPr lang="en-US" sz="1000" dirty="0"/>
-          </a:p>
-        </p:txBody>
-      </p:sp>
-      <p:sp>
-        <p:nvSpPr>
-          <p:cNvPr id="3" name="Text 1"/>
-          <p:cNvSpPr/>
-          <p:nvPr/>
-        </p:nvSpPr>
-        <p:spPr>
-          <a:xfrm>
-            <a:off x="548640" y="566928"/>
-            <a:ext cx="8046720" cy="411480"/>
-          </a:xfrm>
-          <a:prstGeom prst="rect">
-            <a:avLst/>
-          </a:prstGeom>
-          <a:noFill/>
-          <a:ln/>
-        </p:spPr>
-        <p:txBody>
-          <a:bodyPr wrap="square" lIns="0" tIns="0" rIns="0" bIns="0" rtlCol="0" anchor="ctr"/>
-          <a:lstStyle/>
-          <a:p>
-            <a:pPr indent="0" marL="0">
-              <a:buNone/>
-            </a:pPr>
-            <a:r>
-              <a:rPr lang="en-US" sz="2100" b="1" dirty="0">
+              <a:rPr lang="en-US" sz="1650" b="1" dirty="0">
                 <a:solidFill>
                   <a:srgbClr val="1E3A8A"/>
                 </a:solidFill>
@@ -13923,15 +14172,54 @@
                 <a:ea typeface="Cambria" pitchFamily="34" charset="-122"/>
                 <a:cs typeface="Cambria" pitchFamily="34" charset="-120"/>
               </a:rPr>
-              <a:t>Problem Statement &amp; Dining Industry Challenges</a:t>
-            </a:r>
-            <a:endParaRPr lang="en-US" sz="2100" dirty="0"/>
-          </a:p>
-        </p:txBody>
-      </p:sp>
-      <p:sp>
-        <p:nvSpPr>
-          <p:cNvPr id="4" name="Text 2"/>
+              <a:t>Problem Statement &amp; Dining Challenges</a:t>
+            </a:r>
+            <a:endParaRPr lang="en-US" sz="1650" dirty="0"/>
+          </a:p>
+        </p:txBody>
+      </p:sp>
+      <p:sp>
+        <p:nvSpPr>
+          <p:cNvPr id="4" name="Text 1"/>
+          <p:cNvSpPr/>
+          <p:nvPr/>
+        </p:nvSpPr>
+        <p:spPr>
+          <a:xfrm>
+            <a:off x="6492240" y="841248"/>
+            <a:ext cx="2103120" cy="274320"/>
+          </a:xfrm>
+          <a:prstGeom prst="rect">
+            <a:avLst/>
+          </a:prstGeom>
+          <a:noFill/>
+          <a:ln/>
+        </p:spPr>
+        <p:txBody>
+          <a:bodyPr wrap="square" lIns="0" tIns="0" rIns="0" bIns="0" rtlCol="0" anchor="ctr"/>
+          <a:lstStyle/>
+          <a:p>
+            <a:pPr algn="r" indent="0" marL="0">
+              <a:buNone/>
+            </a:pPr>
+            <a:r>
+              <a:rPr lang="en-US" sz="950" b="1" dirty="0">
+                <a:solidFill>
+                  <a:srgbClr val="2563EB"/>
+                </a:solidFill>
+                <a:latin typeface="Calibri" pitchFamily="34" charset="0"/>
+                <a:ea typeface="Calibri" pitchFamily="34" charset="-122"/>
+                <a:cs typeface="Calibri" pitchFamily="34" charset="-120"/>
+              </a:rPr>
+              <a:t>Context &amp; Motivation</a:t>
+            </a:r>
+            <a:endParaRPr lang="en-US" sz="950" dirty="0"/>
+          </a:p>
+        </p:txBody>
+      </p:sp>
+      <p:sp>
+        <p:nvSpPr>
+          <p:cNvPr id="5" name="Text 2"/>
           <p:cNvSpPr/>
           <p:nvPr/>
         </p:nvSpPr>
@@ -13970,7 +14258,7 @@
       </p:sp>
       <p:sp>
         <p:nvSpPr>
-          <p:cNvPr id="5" name="Text 3"/>
+          <p:cNvPr id="6" name="Text 3"/>
           <p:cNvSpPr/>
           <p:nvPr/>
         </p:nvSpPr>
@@ -14009,7 +14297,7 @@
       </p:sp>
       <p:sp>
         <p:nvSpPr>
-          <p:cNvPr id="6" name="Shape 4"/>
+          <p:cNvPr id="7" name="Shape 4"/>
           <p:cNvSpPr/>
           <p:nvPr/>
         </p:nvSpPr>
@@ -14036,7 +14324,7 @@
       </p:sp>
       <p:sp>
         <p:nvSpPr>
-          <p:cNvPr id="7" name="Text 5"/>
+          <p:cNvPr id="8" name="Text 5"/>
           <p:cNvSpPr/>
           <p:nvPr/>
         </p:nvSpPr>
@@ -14075,7 +14363,7 @@
       </p:sp>
       <p:sp>
         <p:nvSpPr>
-          <p:cNvPr id="8" name="Text 6"/>
+          <p:cNvPr id="9" name="Text 6"/>
           <p:cNvSpPr/>
           <p:nvPr/>
         </p:nvSpPr>
@@ -14139,7 +14427,7 @@
       </p:sp>
       <p:sp>
         <p:nvSpPr>
-          <p:cNvPr id="9" name="Shape 7"/>
+          <p:cNvPr id="10" name="Shape 7"/>
           <p:cNvSpPr/>
           <p:nvPr/>
         </p:nvSpPr>
@@ -14166,7 +14454,7 @@
       </p:sp>
       <p:sp>
         <p:nvSpPr>
-          <p:cNvPr id="10" name="Text 8"/>
+          <p:cNvPr id="11" name="Text 8"/>
           <p:cNvSpPr/>
           <p:nvPr/>
         </p:nvSpPr>
@@ -14205,7 +14493,7 @@
       </p:sp>
       <p:sp>
         <p:nvSpPr>
-          <p:cNvPr id="11" name="Text 9"/>
+          <p:cNvPr id="12" name="Text 9"/>
           <p:cNvSpPr/>
           <p:nvPr/>
         </p:nvSpPr>
@@ -14269,7 +14557,7 @@
       </p:sp>
       <p:sp>
         <p:nvSpPr>
-          <p:cNvPr id="12" name="Shape 10"/>
+          <p:cNvPr id="13" name="Shape 10"/>
           <p:cNvSpPr/>
           <p:nvPr/>
         </p:nvSpPr>
@@ -14296,7 +14584,7 @@
       </p:sp>
       <p:sp>
         <p:nvSpPr>
-          <p:cNvPr id="13" name="Text 11"/>
+          <p:cNvPr id="14" name="Text 11"/>
           <p:cNvSpPr/>
           <p:nvPr/>
         </p:nvSpPr>
@@ -14335,7 +14623,7 @@
       </p:sp>
       <p:sp>
         <p:nvSpPr>
-          <p:cNvPr id="14" name="Text 12"/>
+          <p:cNvPr id="15" name="Text 12"/>
           <p:cNvSpPr/>
           <p:nvPr/>
         </p:nvSpPr>
@@ -14399,7 +14687,7 @@
       </p:sp>
       <p:sp>
         <p:nvSpPr>
-          <p:cNvPr id="15" name="Shape 13"/>
+          <p:cNvPr id="16" name="Shape 13"/>
           <p:cNvSpPr/>
           <p:nvPr/>
         </p:nvSpPr>
@@ -14426,7 +14714,7 @@
       </p:sp>
       <p:sp>
         <p:nvSpPr>
-          <p:cNvPr id="16" name="Text 14"/>
+          <p:cNvPr id="17" name="Text 14"/>
           <p:cNvSpPr/>
           <p:nvPr/>
         </p:nvSpPr>
@@ -14465,7 +14753,7 @@
       </p:sp>
       <p:sp>
         <p:nvSpPr>
-          <p:cNvPr id="17" name="Text 15"/>
+          <p:cNvPr id="18" name="Text 15"/>
           <p:cNvSpPr/>
           <p:nvPr/>
         </p:nvSpPr>
@@ -14559,16 +14847,40 @@
           <a:chExt cx="0" cy="0"/>
         </a:xfrm>
       </p:grpSpPr>
-      <p:sp>
-        <p:nvSpPr>
-          <p:cNvPr id="2" name="Text 0"/>
-          <p:cNvSpPr/>
-          <p:nvPr/>
-        </p:nvSpPr>
-        <p:spPr>
-          <a:xfrm>
-            <a:off x="548640" y="365760"/>
-            <a:ext cx="8046720" cy="201168"/>
+      <p:pic>
+        <p:nvPicPr>
+          <p:cNvPr id="2" name="Image 0" descr="d:\resrtorant\presentation_assets\tcet_header.jpeg">    </p:cNvPr>
+          <p:cNvPicPr>
+            <a:picLocks noChangeAspect="1"/>
+          </p:cNvPicPr>
+          <p:nvPr/>
+        </p:nvPicPr>
+        <p:blipFill>
+          <a:blip r:embed="rId1"/>
+          <a:stretch>
+            <a:fillRect/>
+          </a:stretch>
+        </p:blipFill>
+        <p:spPr>
+          <a:xfrm>
+            <a:off x="1828800" y="45720"/>
+            <a:ext cx="5486400" cy="749808"/>
+          </a:xfrm>
+          <a:prstGeom prst="rect">
+            <a:avLst/>
+          </a:prstGeom>
+        </p:spPr>
+      </p:pic>
+      <p:sp>
+        <p:nvSpPr>
+          <p:cNvPr id="3" name="Text 0"/>
+          <p:cNvSpPr/>
+          <p:nvPr/>
+        </p:nvSpPr>
+        <p:spPr>
+          <a:xfrm>
+            <a:off x="548640" y="813816"/>
+            <a:ext cx="5943600" cy="329184"/>
           </a:xfrm>
           <a:prstGeom prst="rect">
             <a:avLst/>
@@ -14584,46 +14896,7 @@
               <a:buNone/>
             </a:pPr>
             <a:r>
-              <a:rPr lang="en-US" sz="1000" b="1" dirty="0">
-                <a:solidFill>
-                  <a:srgbClr val="2563EB"/>
-                </a:solidFill>
-                <a:latin typeface="Calibri" pitchFamily="34" charset="0"/>
-                <a:ea typeface="Calibri" pitchFamily="34" charset="-122"/>
-                <a:cs typeface="Calibri" pitchFamily="34" charset="-120"/>
-              </a:rPr>
-              <a:t>Academic Bibliography</a:t>
-            </a:r>
-            <a:endParaRPr lang="en-US" sz="1000" dirty="0"/>
-          </a:p>
-        </p:txBody>
-      </p:sp>
-      <p:sp>
-        <p:nvSpPr>
-          <p:cNvPr id="3" name="Text 1"/>
-          <p:cNvSpPr/>
-          <p:nvPr/>
-        </p:nvSpPr>
-        <p:spPr>
-          <a:xfrm>
-            <a:off x="548640" y="566928"/>
-            <a:ext cx="8046720" cy="411480"/>
-          </a:xfrm>
-          <a:prstGeom prst="rect">
-            <a:avLst/>
-          </a:prstGeom>
-          <a:noFill/>
-          <a:ln/>
-        </p:spPr>
-        <p:txBody>
-          <a:bodyPr wrap="square" lIns="0" tIns="0" rIns="0" bIns="0" rtlCol="0" anchor="ctr"/>
-          <a:lstStyle/>
-          <a:p>
-            <a:pPr indent="0" marL="0">
-              <a:buNone/>
-            </a:pPr>
-            <a:r>
-              <a:rPr lang="en-US" sz="2100" b="1" dirty="0">
+              <a:rPr lang="en-US" sz="1650" b="1" dirty="0">
                 <a:solidFill>
                   <a:srgbClr val="1E3A8A"/>
                 </a:solidFill>
@@ -14633,13 +14906,52 @@
               </a:rPr>
               <a:t>References, Technical Standards &amp; Literature Citations</a:t>
             </a:r>
-            <a:endParaRPr lang="en-US" sz="2100" dirty="0"/>
-          </a:p>
-        </p:txBody>
-      </p:sp>
-      <p:sp>
-        <p:nvSpPr>
-          <p:cNvPr id="4" name="Text 2"/>
+            <a:endParaRPr lang="en-US" sz="1650" dirty="0"/>
+          </a:p>
+        </p:txBody>
+      </p:sp>
+      <p:sp>
+        <p:nvSpPr>
+          <p:cNvPr id="4" name="Text 1"/>
+          <p:cNvSpPr/>
+          <p:nvPr/>
+        </p:nvSpPr>
+        <p:spPr>
+          <a:xfrm>
+            <a:off x="6492240" y="841248"/>
+            <a:ext cx="2103120" cy="274320"/>
+          </a:xfrm>
+          <a:prstGeom prst="rect">
+            <a:avLst/>
+          </a:prstGeom>
+          <a:noFill/>
+          <a:ln/>
+        </p:spPr>
+        <p:txBody>
+          <a:bodyPr wrap="square" lIns="0" tIns="0" rIns="0" bIns="0" rtlCol="0" anchor="ctr"/>
+          <a:lstStyle/>
+          <a:p>
+            <a:pPr algn="r" indent="0" marL="0">
+              <a:buNone/>
+            </a:pPr>
+            <a:r>
+              <a:rPr lang="en-US" sz="950" b="1" dirty="0">
+                <a:solidFill>
+                  <a:srgbClr val="2563EB"/>
+                </a:solidFill>
+                <a:latin typeface="Calibri" pitchFamily="34" charset="0"/>
+                <a:ea typeface="Calibri" pitchFamily="34" charset="-122"/>
+                <a:cs typeface="Calibri" pitchFamily="34" charset="-120"/>
+              </a:rPr>
+              <a:t>Academic Bibliography</a:t>
+            </a:r>
+            <a:endParaRPr lang="en-US" sz="950" dirty="0"/>
+          </a:p>
+        </p:txBody>
+      </p:sp>
+      <p:sp>
+        <p:nvSpPr>
+          <p:cNvPr id="5" name="Text 2"/>
           <p:cNvSpPr/>
           <p:nvPr/>
         </p:nvSpPr>
@@ -14678,7 +14990,7 @@
       </p:sp>
       <p:sp>
         <p:nvSpPr>
-          <p:cNvPr id="5" name="Text 3"/>
+          <p:cNvPr id="6" name="Text 3"/>
           <p:cNvSpPr/>
           <p:nvPr/>
         </p:nvSpPr>
@@ -14717,7 +15029,7 @@
       </p:sp>
       <p:sp>
         <p:nvSpPr>
-          <p:cNvPr id="6" name="Shape 4"/>
+          <p:cNvPr id="7" name="Shape 4"/>
           <p:cNvSpPr/>
           <p:nvPr/>
         </p:nvSpPr>
@@ -14744,7 +15056,7 @@
       </p:sp>
       <p:sp>
         <p:nvSpPr>
-          <p:cNvPr id="7" name="Text 5"/>
+          <p:cNvPr id="8" name="Text 5"/>
           <p:cNvSpPr/>
           <p:nvPr/>
         </p:nvSpPr>
@@ -14916,16 +15228,40 @@
           <a:chExt cx="0" cy="0"/>
         </a:xfrm>
       </p:grpSpPr>
-      <p:sp>
-        <p:nvSpPr>
-          <p:cNvPr id="2" name="Text 0"/>
-          <p:cNvSpPr/>
-          <p:nvPr/>
-        </p:nvSpPr>
-        <p:spPr>
-          <a:xfrm>
-            <a:off x="548640" y="365760"/>
-            <a:ext cx="8046720" cy="201168"/>
+      <p:pic>
+        <p:nvPicPr>
+          <p:cNvPr id="2" name="Image 0" descr="d:\resrtorant\presentation_assets\tcet_header.jpeg">    </p:cNvPr>
+          <p:cNvPicPr>
+            <a:picLocks noChangeAspect="1"/>
+          </p:cNvPicPr>
+          <p:nvPr/>
+        </p:nvPicPr>
+        <p:blipFill>
+          <a:blip r:embed="rId1"/>
+          <a:stretch>
+            <a:fillRect/>
+          </a:stretch>
+        </p:blipFill>
+        <p:spPr>
+          <a:xfrm>
+            <a:off x="1828800" y="45720"/>
+            <a:ext cx="5486400" cy="749808"/>
+          </a:xfrm>
+          <a:prstGeom prst="rect">
+            <a:avLst/>
+          </a:prstGeom>
+        </p:spPr>
+      </p:pic>
+      <p:sp>
+        <p:nvSpPr>
+          <p:cNvPr id="3" name="Text 0"/>
+          <p:cNvSpPr/>
+          <p:nvPr/>
+        </p:nvSpPr>
+        <p:spPr>
+          <a:xfrm>
+            <a:off x="548640" y="813816"/>
+            <a:ext cx="5943600" cy="329184"/>
           </a:xfrm>
           <a:prstGeom prst="rect">
             <a:avLst/>
@@ -14941,46 +15277,7 @@
               <a:buNone/>
             </a:pPr>
             <a:r>
-              <a:rPr lang="en-US" sz="1000" b="1" dirty="0">
-                <a:solidFill>
-                  <a:srgbClr val="2563EB"/>
-                </a:solidFill>
-                <a:latin typeface="Calibri" pitchFamily="34" charset="0"/>
-                <a:ea typeface="Calibri" pitchFamily="34" charset="-122"/>
-                <a:cs typeface="Calibri" pitchFamily="34" charset="-120"/>
-              </a:rPr>
-              <a:t>Rubric Criterion 1 (5 Marks)</a:t>
-            </a:r>
-            <a:endParaRPr lang="en-US" sz="1000" dirty="0"/>
-          </a:p>
-        </p:txBody>
-      </p:sp>
-      <p:sp>
-        <p:nvSpPr>
-          <p:cNvPr id="3" name="Text 1"/>
-          <p:cNvSpPr/>
-          <p:nvPr/>
-        </p:nvSpPr>
-        <p:spPr>
-          <a:xfrm>
-            <a:off x="548640" y="566928"/>
-            <a:ext cx="8046720" cy="411480"/>
-          </a:xfrm>
-          <a:prstGeom prst="rect">
-            <a:avLst/>
-          </a:prstGeom>
-          <a:noFill/>
-          <a:ln/>
-        </p:spPr>
-        <p:txBody>
-          <a:bodyPr wrap="square" lIns="0" tIns="0" rIns="0" bIns="0" rtlCol="0" anchor="ctr"/>
-          <a:lstStyle/>
-          <a:p>
-            <a:pPr indent="0" marL="0">
-              <a:buNone/>
-            </a:pPr>
-            <a:r>
-              <a:rPr lang="en-US" sz="2100" b="1" dirty="0">
+              <a:rPr lang="en-US" sz="1650" b="1" dirty="0">
                 <a:solidFill>
                   <a:srgbClr val="1E3A8A"/>
                 </a:solidFill>
@@ -14990,13 +15287,52 @@
               </a:rPr>
               <a:t>Project Relevance &amp; Environmental Sustainability</a:t>
             </a:r>
-            <a:endParaRPr lang="en-US" sz="2100" dirty="0"/>
-          </a:p>
-        </p:txBody>
-      </p:sp>
-      <p:sp>
-        <p:nvSpPr>
-          <p:cNvPr id="4" name="Text 2"/>
+            <a:endParaRPr lang="en-US" sz="1650" dirty="0"/>
+          </a:p>
+        </p:txBody>
+      </p:sp>
+      <p:sp>
+        <p:nvSpPr>
+          <p:cNvPr id="4" name="Text 1"/>
+          <p:cNvSpPr/>
+          <p:nvPr/>
+        </p:nvSpPr>
+        <p:spPr>
+          <a:xfrm>
+            <a:off x="6492240" y="841248"/>
+            <a:ext cx="2103120" cy="274320"/>
+          </a:xfrm>
+          <a:prstGeom prst="rect">
+            <a:avLst/>
+          </a:prstGeom>
+          <a:noFill/>
+          <a:ln/>
+        </p:spPr>
+        <p:txBody>
+          <a:bodyPr wrap="square" lIns="0" tIns="0" rIns="0" bIns="0" rtlCol="0" anchor="ctr"/>
+          <a:lstStyle/>
+          <a:p>
+            <a:pPr algn="r" indent="0" marL="0">
+              <a:buNone/>
+            </a:pPr>
+            <a:r>
+              <a:rPr lang="en-US" sz="950" b="1" dirty="0">
+                <a:solidFill>
+                  <a:srgbClr val="2563EB"/>
+                </a:solidFill>
+                <a:latin typeface="Calibri" pitchFamily="34" charset="0"/>
+                <a:ea typeface="Calibri" pitchFamily="34" charset="-122"/>
+                <a:cs typeface="Calibri" pitchFamily="34" charset="-120"/>
+              </a:rPr>
+              <a:t>Rubric Criterion 1 (5 Marks)</a:t>
+            </a:r>
+            <a:endParaRPr lang="en-US" sz="950" dirty="0"/>
+          </a:p>
+        </p:txBody>
+      </p:sp>
+      <p:sp>
+        <p:nvSpPr>
+          <p:cNvPr id="5" name="Text 2"/>
           <p:cNvSpPr/>
           <p:nvPr/>
         </p:nvSpPr>
@@ -15035,7 +15371,7 @@
       </p:sp>
       <p:sp>
         <p:nvSpPr>
-          <p:cNvPr id="5" name="Text 3"/>
+          <p:cNvPr id="6" name="Text 3"/>
           <p:cNvSpPr/>
           <p:nvPr/>
         </p:nvSpPr>
@@ -15074,7 +15410,7 @@
       </p:sp>
       <p:sp>
         <p:nvSpPr>
-          <p:cNvPr id="6" name="Shape 4"/>
+          <p:cNvPr id="7" name="Shape 4"/>
           <p:cNvSpPr/>
           <p:nvPr/>
         </p:nvSpPr>
@@ -15101,7 +15437,7 @@
       </p:sp>
       <p:sp>
         <p:nvSpPr>
-          <p:cNvPr id="7" name="Text 5"/>
+          <p:cNvPr id="8" name="Text 5"/>
           <p:cNvSpPr/>
           <p:nvPr/>
         </p:nvSpPr>
@@ -15140,7 +15476,7 @@
       </p:sp>
       <p:sp>
         <p:nvSpPr>
-          <p:cNvPr id="8" name="Text 6"/>
+          <p:cNvPr id="9" name="Text 6"/>
           <p:cNvSpPr/>
           <p:nvPr/>
         </p:nvSpPr>
@@ -15225,7 +15561,7 @@
       </p:sp>
       <p:sp>
         <p:nvSpPr>
-          <p:cNvPr id="9" name="Shape 7"/>
+          <p:cNvPr id="10" name="Shape 7"/>
           <p:cNvSpPr/>
           <p:nvPr/>
         </p:nvSpPr>
@@ -15252,7 +15588,7 @@
       </p:sp>
       <p:sp>
         <p:nvSpPr>
-          <p:cNvPr id="10" name="Text 8"/>
+          <p:cNvPr id="11" name="Text 8"/>
           <p:cNvSpPr/>
           <p:nvPr/>
         </p:nvSpPr>
@@ -15291,7 +15627,7 @@
       </p:sp>
       <p:sp>
         <p:nvSpPr>
-          <p:cNvPr id="11" name="Text 9"/>
+          <p:cNvPr id="12" name="Text 9"/>
           <p:cNvSpPr/>
           <p:nvPr/>
         </p:nvSpPr>
@@ -15376,7 +15712,7 @@
       </p:sp>
       <p:sp>
         <p:nvSpPr>
-          <p:cNvPr id="12" name="Shape 10"/>
+          <p:cNvPr id="13" name="Shape 10"/>
           <p:cNvSpPr/>
           <p:nvPr/>
         </p:nvSpPr>
@@ -15403,7 +15739,7 @@
       </p:sp>
       <p:sp>
         <p:nvSpPr>
-          <p:cNvPr id="13" name="Text 11"/>
+          <p:cNvPr id="14" name="Text 11"/>
           <p:cNvSpPr/>
           <p:nvPr/>
         </p:nvSpPr>
@@ -15442,7 +15778,7 @@
       </p:sp>
       <p:sp>
         <p:nvSpPr>
-          <p:cNvPr id="14" name="Text 12"/>
+          <p:cNvPr id="15" name="Text 12"/>
           <p:cNvSpPr/>
           <p:nvPr/>
         </p:nvSpPr>
@@ -15527,7 +15863,7 @@
       </p:sp>
       <p:sp>
         <p:nvSpPr>
-          <p:cNvPr id="15" name="Shape 13"/>
+          <p:cNvPr id="16" name="Shape 13"/>
           <p:cNvSpPr/>
           <p:nvPr/>
         </p:nvSpPr>
@@ -15554,7 +15890,7 @@
       </p:sp>
       <p:sp>
         <p:nvSpPr>
-          <p:cNvPr id="16" name="Text 14"/>
+          <p:cNvPr id="17" name="Text 14"/>
           <p:cNvSpPr/>
           <p:nvPr/>
         </p:nvSpPr>
@@ -15593,7 +15929,7 @@
       </p:sp>
       <p:sp>
         <p:nvSpPr>
-          <p:cNvPr id="17" name="Text 15"/>
+          <p:cNvPr id="18" name="Text 15"/>
           <p:cNvSpPr/>
           <p:nvPr/>
         </p:nvSpPr>
@@ -15708,16 +16044,40 @@
           <a:chExt cx="0" cy="0"/>
         </a:xfrm>
       </p:grpSpPr>
-      <p:sp>
-        <p:nvSpPr>
-          <p:cNvPr id="2" name="Text 0"/>
-          <p:cNvSpPr/>
-          <p:nvPr/>
-        </p:nvSpPr>
-        <p:spPr>
-          <a:xfrm>
-            <a:off x="548640" y="365760"/>
-            <a:ext cx="8046720" cy="201168"/>
+      <p:pic>
+        <p:nvPicPr>
+          <p:cNvPr id="2" name="Image 0" descr="d:\resrtorant\presentation_assets\tcet_header.jpeg">    </p:cNvPr>
+          <p:cNvPicPr>
+            <a:picLocks noChangeAspect="1"/>
+          </p:cNvPicPr>
+          <p:nvPr/>
+        </p:nvPicPr>
+        <p:blipFill>
+          <a:blip r:embed="rId1"/>
+          <a:stretch>
+            <a:fillRect/>
+          </a:stretch>
+        </p:blipFill>
+        <p:spPr>
+          <a:xfrm>
+            <a:off x="1828800" y="45720"/>
+            <a:ext cx="5486400" cy="749808"/>
+          </a:xfrm>
+          <a:prstGeom prst="rect">
+            <a:avLst/>
+          </a:prstGeom>
+        </p:spPr>
+      </p:pic>
+      <p:sp>
+        <p:nvSpPr>
+          <p:cNvPr id="3" name="Text 0"/>
+          <p:cNvSpPr/>
+          <p:nvPr/>
+        </p:nvSpPr>
+        <p:spPr>
+          <a:xfrm>
+            <a:off x="548640" y="813816"/>
+            <a:ext cx="5943600" cy="329184"/>
           </a:xfrm>
           <a:prstGeom prst="rect">
             <a:avLst/>
@@ -15733,46 +16093,7 @@
               <a:buNone/>
             </a:pPr>
             <a:r>
-              <a:rPr lang="en-US" sz="1000" b="1" dirty="0">
-                <a:solidFill>
-                  <a:srgbClr val="2563EB"/>
-                </a:solidFill>
-                <a:latin typeface="Calibri" pitchFamily="34" charset="0"/>
-                <a:ea typeface="Calibri" pitchFamily="34" charset="-122"/>
-                <a:cs typeface="Calibri" pitchFamily="34" charset="-120"/>
-              </a:rPr>
-              <a:t>Project Scope</a:t>
-            </a:r>
-            <a:endParaRPr lang="en-US" sz="1000" dirty="0"/>
-          </a:p>
-        </p:txBody>
-      </p:sp>
-      <p:sp>
-        <p:nvSpPr>
-          <p:cNvPr id="3" name="Text 1"/>
-          <p:cNvSpPr/>
-          <p:nvPr/>
-        </p:nvSpPr>
-        <p:spPr>
-          <a:xfrm>
-            <a:off x="548640" y="566928"/>
-            <a:ext cx="8046720" cy="411480"/>
-          </a:xfrm>
-          <a:prstGeom prst="rect">
-            <a:avLst/>
-          </a:prstGeom>
-          <a:noFill/>
-          <a:ln/>
-        </p:spPr>
-        <p:txBody>
-          <a:bodyPr wrap="square" lIns="0" tIns="0" rIns="0" bIns="0" rtlCol="0" anchor="ctr"/>
-          <a:lstStyle/>
-          <a:p>
-            <a:pPr indent="0" marL="0">
-              <a:buNone/>
-            </a:pPr>
-            <a:r>
-              <a:rPr lang="en-US" sz="2100" b="1" dirty="0">
+              <a:rPr lang="en-US" sz="1650" b="1" dirty="0">
                 <a:solidFill>
                   <a:srgbClr val="1E3A8A"/>
                 </a:solidFill>
@@ -15782,13 +16103,52 @@
               </a:rPr>
               <a:t>Main &amp; Specific Objectives and Target Outcomes</a:t>
             </a:r>
-            <a:endParaRPr lang="en-US" sz="2100" dirty="0"/>
-          </a:p>
-        </p:txBody>
-      </p:sp>
-      <p:sp>
-        <p:nvSpPr>
-          <p:cNvPr id="4" name="Text 2"/>
+            <a:endParaRPr lang="en-US" sz="1650" dirty="0"/>
+          </a:p>
+        </p:txBody>
+      </p:sp>
+      <p:sp>
+        <p:nvSpPr>
+          <p:cNvPr id="4" name="Text 1"/>
+          <p:cNvSpPr/>
+          <p:nvPr/>
+        </p:nvSpPr>
+        <p:spPr>
+          <a:xfrm>
+            <a:off x="6492240" y="841248"/>
+            <a:ext cx="2103120" cy="274320"/>
+          </a:xfrm>
+          <a:prstGeom prst="rect">
+            <a:avLst/>
+          </a:prstGeom>
+          <a:noFill/>
+          <a:ln/>
+        </p:spPr>
+        <p:txBody>
+          <a:bodyPr wrap="square" lIns="0" tIns="0" rIns="0" bIns="0" rtlCol="0" anchor="ctr"/>
+          <a:lstStyle/>
+          <a:p>
+            <a:pPr algn="r" indent="0" marL="0">
+              <a:buNone/>
+            </a:pPr>
+            <a:r>
+              <a:rPr lang="en-US" sz="950" b="1" dirty="0">
+                <a:solidFill>
+                  <a:srgbClr val="2563EB"/>
+                </a:solidFill>
+                <a:latin typeface="Calibri" pitchFamily="34" charset="0"/>
+                <a:ea typeface="Calibri" pitchFamily="34" charset="-122"/>
+                <a:cs typeface="Calibri" pitchFamily="34" charset="-120"/>
+              </a:rPr>
+              <a:t>Project Scope</a:t>
+            </a:r>
+            <a:endParaRPr lang="en-US" sz="950" dirty="0"/>
+          </a:p>
+        </p:txBody>
+      </p:sp>
+      <p:sp>
+        <p:nvSpPr>
+          <p:cNvPr id="5" name="Text 2"/>
           <p:cNvSpPr/>
           <p:nvPr/>
         </p:nvSpPr>
@@ -15827,7 +16187,7 @@
       </p:sp>
       <p:sp>
         <p:nvSpPr>
-          <p:cNvPr id="5" name="Text 3"/>
+          <p:cNvPr id="6" name="Text 3"/>
           <p:cNvSpPr/>
           <p:nvPr/>
         </p:nvSpPr>
@@ -15866,7 +16226,7 @@
       </p:sp>
       <p:sp>
         <p:nvSpPr>
-          <p:cNvPr id="6" name="Shape 4"/>
+          <p:cNvPr id="7" name="Shape 4"/>
           <p:cNvSpPr/>
           <p:nvPr/>
         </p:nvSpPr>
@@ -15893,7 +16253,7 @@
       </p:sp>
       <p:sp>
         <p:nvSpPr>
-          <p:cNvPr id="7" name="Text 5"/>
+          <p:cNvPr id="8" name="Text 5"/>
           <p:cNvSpPr/>
           <p:nvPr/>
         </p:nvSpPr>
@@ -15932,7 +16292,7 @@
       </p:sp>
       <p:sp>
         <p:nvSpPr>
-          <p:cNvPr id="8" name="Text 6"/>
+          <p:cNvPr id="9" name="Text 6"/>
           <p:cNvSpPr/>
           <p:nvPr/>
         </p:nvSpPr>
@@ -16059,7 +16419,7 @@
       </p:sp>
       <p:sp>
         <p:nvSpPr>
-          <p:cNvPr id="9" name="Shape 7"/>
+          <p:cNvPr id="10" name="Shape 7"/>
           <p:cNvSpPr/>
           <p:nvPr/>
         </p:nvSpPr>
@@ -16086,7 +16446,7 @@
       </p:sp>
       <p:sp>
         <p:nvSpPr>
-          <p:cNvPr id="10" name="Text 8"/>
+          <p:cNvPr id="11" name="Text 8"/>
           <p:cNvSpPr/>
           <p:nvPr/>
         </p:nvSpPr>
@@ -16125,7 +16485,7 @@
       </p:sp>
       <p:sp>
         <p:nvSpPr>
-          <p:cNvPr id="11" name="Text 9"/>
+          <p:cNvPr id="12" name="Text 9"/>
           <p:cNvSpPr/>
           <p:nvPr/>
         </p:nvSpPr>
@@ -16282,16 +16642,40 @@
           <a:chExt cx="0" cy="0"/>
         </a:xfrm>
       </p:grpSpPr>
-      <p:sp>
-        <p:nvSpPr>
-          <p:cNvPr id="2" name="Text 0"/>
-          <p:cNvSpPr/>
-          <p:nvPr/>
-        </p:nvSpPr>
-        <p:spPr>
-          <a:xfrm>
-            <a:off x="548640" y="365760"/>
-            <a:ext cx="8046720" cy="201168"/>
+      <p:pic>
+        <p:nvPicPr>
+          <p:cNvPr id="2" name="Image 0" descr="d:\resrtorant\presentation_assets\tcet_header.jpeg">    </p:cNvPr>
+          <p:cNvPicPr>
+            <a:picLocks noChangeAspect="1"/>
+          </p:cNvPicPr>
+          <p:nvPr/>
+        </p:nvPicPr>
+        <p:blipFill>
+          <a:blip r:embed="rId1"/>
+          <a:stretch>
+            <a:fillRect/>
+          </a:stretch>
+        </p:blipFill>
+        <p:spPr>
+          <a:xfrm>
+            <a:off x="1828800" y="45720"/>
+            <a:ext cx="5486400" cy="749808"/>
+          </a:xfrm>
+          <a:prstGeom prst="rect">
+            <a:avLst/>
+          </a:prstGeom>
+        </p:spPr>
+      </p:pic>
+      <p:sp>
+        <p:nvSpPr>
+          <p:cNvPr id="3" name="Text 0"/>
+          <p:cNvSpPr/>
+          <p:nvPr/>
+        </p:nvSpPr>
+        <p:spPr>
+          <a:xfrm>
+            <a:off x="548640" y="813816"/>
+            <a:ext cx="5943600" cy="329184"/>
           </a:xfrm>
           <a:prstGeom prst="rect">
             <a:avLst/>
@@ -16307,46 +16691,7 @@
               <a:buNone/>
             </a:pPr>
             <a:r>
-              <a:rPr lang="en-US" sz="1000" b="1" dirty="0">
-                <a:solidFill>
-                  <a:srgbClr val="2563EB"/>
-                </a:solidFill>
-                <a:latin typeface="Calibri" pitchFamily="34" charset="0"/>
-                <a:ea typeface="Calibri" pitchFamily="34" charset="-122"/>
-                <a:cs typeface="Calibri" pitchFamily="34" charset="-120"/>
-              </a:rPr>
-              <a:t>Literature Review</a:t>
-            </a:r>
-            <a:endParaRPr lang="en-US" sz="1000" dirty="0"/>
-          </a:p>
-        </p:txBody>
-      </p:sp>
-      <p:sp>
-        <p:nvSpPr>
-          <p:cNvPr id="3" name="Text 1"/>
-          <p:cNvSpPr/>
-          <p:nvPr/>
-        </p:nvSpPr>
-        <p:spPr>
-          <a:xfrm>
-            <a:off x="548640" y="566928"/>
-            <a:ext cx="8046720" cy="411480"/>
-          </a:xfrm>
-          <a:prstGeom prst="rect">
-            <a:avLst/>
-          </a:prstGeom>
-          <a:noFill/>
-          <a:ln/>
-        </p:spPr>
-        <p:txBody>
-          <a:bodyPr wrap="square" lIns="0" tIns="0" rIns="0" bIns="0" rtlCol="0" anchor="ctr"/>
-          <a:lstStyle/>
-          <a:p>
-            <a:pPr indent="0" marL="0">
-              <a:buNone/>
-            </a:pPr>
-            <a:r>
-              <a:rPr lang="en-US" sz="2100" b="1" dirty="0">
+              <a:rPr lang="en-US" sz="1650" b="1" dirty="0">
                 <a:solidFill>
                   <a:srgbClr val="1E3A8A"/>
                 </a:solidFill>
@@ -16354,15 +16699,54 @@
                 <a:ea typeface="Cambria" pitchFamily="34" charset="-122"/>
                 <a:cs typeface="Cambria" pitchFamily="34" charset="-120"/>
               </a:rPr>
-              <a:t>Existing Dining Systems &amp; Research Gap Analysis</a:t>
-            </a:r>
-            <a:endParaRPr lang="en-US" sz="2100" dirty="0"/>
-          </a:p>
-        </p:txBody>
-      </p:sp>
-      <p:sp>
-        <p:nvSpPr>
-          <p:cNvPr id="4" name="Text 2"/>
+              <a:t>Existing Systems &amp; Research Gap Analysis</a:t>
+            </a:r>
+            <a:endParaRPr lang="en-US" sz="1650" dirty="0"/>
+          </a:p>
+        </p:txBody>
+      </p:sp>
+      <p:sp>
+        <p:nvSpPr>
+          <p:cNvPr id="4" name="Text 1"/>
+          <p:cNvSpPr/>
+          <p:nvPr/>
+        </p:nvSpPr>
+        <p:spPr>
+          <a:xfrm>
+            <a:off x="6492240" y="841248"/>
+            <a:ext cx="2103120" cy="274320"/>
+          </a:xfrm>
+          <a:prstGeom prst="rect">
+            <a:avLst/>
+          </a:prstGeom>
+          <a:noFill/>
+          <a:ln/>
+        </p:spPr>
+        <p:txBody>
+          <a:bodyPr wrap="square" lIns="0" tIns="0" rIns="0" bIns="0" rtlCol="0" anchor="ctr"/>
+          <a:lstStyle/>
+          <a:p>
+            <a:pPr algn="r" indent="0" marL="0">
+              <a:buNone/>
+            </a:pPr>
+            <a:r>
+              <a:rPr lang="en-US" sz="950" b="1" dirty="0">
+                <a:solidFill>
+                  <a:srgbClr val="2563EB"/>
+                </a:solidFill>
+                <a:latin typeface="Calibri" pitchFamily="34" charset="0"/>
+                <a:ea typeface="Calibri" pitchFamily="34" charset="-122"/>
+                <a:cs typeface="Calibri" pitchFamily="34" charset="-120"/>
+              </a:rPr>
+              <a:t>Literature Review</a:t>
+            </a:r>
+            <a:endParaRPr lang="en-US" sz="950" dirty="0"/>
+          </a:p>
+        </p:txBody>
+      </p:sp>
+      <p:sp>
+        <p:nvSpPr>
+          <p:cNvPr id="5" name="Text 2"/>
           <p:cNvSpPr/>
           <p:nvPr/>
         </p:nvSpPr>
@@ -16401,7 +16785,7 @@
       </p:sp>
       <p:sp>
         <p:nvSpPr>
-          <p:cNvPr id="5" name="Text 3"/>
+          <p:cNvPr id="6" name="Text 3"/>
           <p:cNvSpPr/>
           <p:nvPr/>
         </p:nvSpPr>
@@ -18525,7 +18909,7 @@
       </p:graphicFrame>
       <p:sp>
         <p:nvSpPr>
-          <p:cNvPr id="7" name="Shape 4"/>
+          <p:cNvPr id="8" name="Shape 4"/>
           <p:cNvSpPr/>
           <p:nvPr/>
         </p:nvSpPr>
@@ -18552,7 +18936,7 @@
       </p:sp>
       <p:sp>
         <p:nvSpPr>
-          <p:cNvPr id="8" name="Text 5"/>
+          <p:cNvPr id="9" name="Text 5"/>
           <p:cNvSpPr/>
           <p:nvPr/>
         </p:nvSpPr>
@@ -18591,7 +18975,7 @@
       </p:sp>
       <p:sp>
         <p:nvSpPr>
-          <p:cNvPr id="9" name="Text 6"/>
+          <p:cNvPr id="10" name="Text 6"/>
           <p:cNvSpPr/>
           <p:nvPr/>
         </p:nvSpPr>
@@ -18717,16 +19101,40 @@
           <a:chExt cx="0" cy="0"/>
         </a:xfrm>
       </p:grpSpPr>
-      <p:sp>
-        <p:nvSpPr>
-          <p:cNvPr id="2" name="Text 0"/>
-          <p:cNvSpPr/>
-          <p:nvPr/>
-        </p:nvSpPr>
-        <p:spPr>
-          <a:xfrm>
-            <a:off x="548640" y="365760"/>
-            <a:ext cx="8046720" cy="201168"/>
+      <p:pic>
+        <p:nvPicPr>
+          <p:cNvPr id="2" name="Image 0" descr="d:\resrtorant\presentation_assets\tcet_header.jpeg">    </p:cNvPr>
+          <p:cNvPicPr>
+            <a:picLocks noChangeAspect="1"/>
+          </p:cNvPicPr>
+          <p:nvPr/>
+        </p:nvPicPr>
+        <p:blipFill>
+          <a:blip r:embed="rId1"/>
+          <a:stretch>
+            <a:fillRect/>
+          </a:stretch>
+        </p:blipFill>
+        <p:spPr>
+          <a:xfrm>
+            <a:off x="1828800" y="45720"/>
+            <a:ext cx="5486400" cy="749808"/>
+          </a:xfrm>
+          <a:prstGeom prst="rect">
+            <a:avLst/>
+          </a:prstGeom>
+        </p:spPr>
+      </p:pic>
+      <p:sp>
+        <p:nvSpPr>
+          <p:cNvPr id="3" name="Text 0"/>
+          <p:cNvSpPr/>
+          <p:nvPr/>
+        </p:nvSpPr>
+        <p:spPr>
+          <a:xfrm>
+            <a:off x="548640" y="813816"/>
+            <a:ext cx="5943600" cy="329184"/>
           </a:xfrm>
           <a:prstGeom prst="rect">
             <a:avLst/>
@@ -18742,46 +19150,7 @@
               <a:buNone/>
             </a:pPr>
             <a:r>
-              <a:rPr lang="en-US" sz="1000" b="1" dirty="0">
-                <a:solidFill>
-                  <a:srgbClr val="2563EB"/>
-                </a:solidFill>
-                <a:latin typeface="Calibri" pitchFamily="34" charset="0"/>
-                <a:ea typeface="Calibri" pitchFamily="34" charset="-122"/>
-                <a:cs typeface="Calibri" pitchFamily="34" charset="-120"/>
-              </a:rPr>
-              <a:t>System Overview</a:t>
-            </a:r>
-            <a:endParaRPr lang="en-US" sz="1000" dirty="0"/>
-          </a:p>
-        </p:txBody>
-      </p:sp>
-      <p:sp>
-        <p:nvSpPr>
-          <p:cNvPr id="3" name="Text 1"/>
-          <p:cNvSpPr/>
-          <p:nvPr/>
-        </p:nvSpPr>
-        <p:spPr>
-          <a:xfrm>
-            <a:off x="548640" y="566928"/>
-            <a:ext cx="8046720" cy="411480"/>
-          </a:xfrm>
-          <a:prstGeom prst="rect">
-            <a:avLst/>
-          </a:prstGeom>
-          <a:noFill/>
-          <a:ln/>
-        </p:spPr>
-        <p:txBody>
-          <a:bodyPr wrap="square" lIns="0" tIns="0" rIns="0" bIns="0" rtlCol="0" anchor="ctr"/>
-          <a:lstStyle/>
-          <a:p>
-            <a:pPr indent="0" marL="0">
-              <a:buNone/>
-            </a:pPr>
-            <a:r>
-              <a:rPr lang="en-US" sz="2100" b="1" dirty="0">
+              <a:rPr lang="en-US" sz="1650" b="1" dirty="0">
                 <a:solidFill>
                   <a:srgbClr val="1E3A8A"/>
                 </a:solidFill>
@@ -18791,13 +19160,52 @@
               </a:rPr>
               <a:t>Proposed Smart Restaurant Architecture &amp; Key Capabilities</a:t>
             </a:r>
-            <a:endParaRPr lang="en-US" sz="2100" dirty="0"/>
-          </a:p>
-        </p:txBody>
-      </p:sp>
-      <p:sp>
-        <p:nvSpPr>
-          <p:cNvPr id="4" name="Text 2"/>
+            <a:endParaRPr lang="en-US" sz="1650" dirty="0"/>
+          </a:p>
+        </p:txBody>
+      </p:sp>
+      <p:sp>
+        <p:nvSpPr>
+          <p:cNvPr id="4" name="Text 1"/>
+          <p:cNvSpPr/>
+          <p:nvPr/>
+        </p:nvSpPr>
+        <p:spPr>
+          <a:xfrm>
+            <a:off x="6492240" y="841248"/>
+            <a:ext cx="2103120" cy="274320"/>
+          </a:xfrm>
+          <a:prstGeom prst="rect">
+            <a:avLst/>
+          </a:prstGeom>
+          <a:noFill/>
+          <a:ln/>
+        </p:spPr>
+        <p:txBody>
+          <a:bodyPr wrap="square" lIns="0" tIns="0" rIns="0" bIns="0" rtlCol="0" anchor="ctr"/>
+          <a:lstStyle/>
+          <a:p>
+            <a:pPr algn="r" indent="0" marL="0">
+              <a:buNone/>
+            </a:pPr>
+            <a:r>
+              <a:rPr lang="en-US" sz="950" b="1" dirty="0">
+                <a:solidFill>
+                  <a:srgbClr val="2563EB"/>
+                </a:solidFill>
+                <a:latin typeface="Calibri" pitchFamily="34" charset="0"/>
+                <a:ea typeface="Calibri" pitchFamily="34" charset="-122"/>
+                <a:cs typeface="Calibri" pitchFamily="34" charset="-120"/>
+              </a:rPr>
+              <a:t>System Overview</a:t>
+            </a:r>
+            <a:endParaRPr lang="en-US" sz="950" dirty="0"/>
+          </a:p>
+        </p:txBody>
+      </p:sp>
+      <p:sp>
+        <p:nvSpPr>
+          <p:cNvPr id="5" name="Text 2"/>
           <p:cNvSpPr/>
           <p:nvPr/>
         </p:nvSpPr>
@@ -18836,7 +19244,7 @@
       </p:sp>
       <p:sp>
         <p:nvSpPr>
-          <p:cNvPr id="5" name="Text 3"/>
+          <p:cNvPr id="6" name="Text 3"/>
           <p:cNvSpPr/>
           <p:nvPr/>
         </p:nvSpPr>
@@ -18875,7 +19283,7 @@
       </p:sp>
       <p:sp>
         <p:nvSpPr>
-          <p:cNvPr id="6" name="Shape 4"/>
+          <p:cNvPr id="7" name="Shape 4"/>
           <p:cNvSpPr/>
           <p:nvPr/>
         </p:nvSpPr>
@@ -18902,7 +19310,7 @@
       </p:sp>
       <p:sp>
         <p:nvSpPr>
-          <p:cNvPr id="7" name="Text 5"/>
+          <p:cNvPr id="8" name="Text 5"/>
           <p:cNvSpPr/>
           <p:nvPr/>
         </p:nvSpPr>
@@ -18941,7 +19349,7 @@
       </p:sp>
       <p:sp>
         <p:nvSpPr>
-          <p:cNvPr id="8" name="Text 6"/>
+          <p:cNvPr id="9" name="Text 6"/>
           <p:cNvSpPr/>
           <p:nvPr/>
         </p:nvSpPr>
@@ -18980,7 +19388,7 @@
       </p:sp>
       <p:sp>
         <p:nvSpPr>
-          <p:cNvPr id="9" name="Shape 7"/>
+          <p:cNvPr id="10" name="Shape 7"/>
           <p:cNvSpPr/>
           <p:nvPr/>
         </p:nvSpPr>
@@ -19007,7 +19415,7 @@
       </p:sp>
       <p:sp>
         <p:nvSpPr>
-          <p:cNvPr id="10" name="Text 8"/>
+          <p:cNvPr id="11" name="Text 8"/>
           <p:cNvSpPr/>
           <p:nvPr/>
         </p:nvSpPr>
@@ -19046,7 +19454,7 @@
       </p:sp>
       <p:sp>
         <p:nvSpPr>
-          <p:cNvPr id="11" name="Text 9"/>
+          <p:cNvPr id="12" name="Text 9"/>
           <p:cNvSpPr/>
           <p:nvPr/>
         </p:nvSpPr>
@@ -19085,7 +19493,7 @@
       </p:sp>
       <p:sp>
         <p:nvSpPr>
-          <p:cNvPr id="12" name="Shape 10"/>
+          <p:cNvPr id="13" name="Shape 10"/>
           <p:cNvSpPr/>
           <p:nvPr/>
         </p:nvSpPr>
@@ -19112,7 +19520,7 @@
       </p:sp>
       <p:sp>
         <p:nvSpPr>
-          <p:cNvPr id="13" name="Text 11"/>
+          <p:cNvPr id="14" name="Text 11"/>
           <p:cNvSpPr/>
           <p:nvPr/>
         </p:nvSpPr>
@@ -19151,7 +19559,7 @@
       </p:sp>
       <p:sp>
         <p:nvSpPr>
-          <p:cNvPr id="14" name="Text 12"/>
+          <p:cNvPr id="15" name="Text 12"/>
           <p:cNvSpPr/>
           <p:nvPr/>
         </p:nvSpPr>
@@ -19190,7 +19598,7 @@
       </p:sp>
       <p:sp>
         <p:nvSpPr>
-          <p:cNvPr id="15" name="Shape 13"/>
+          <p:cNvPr id="16" name="Shape 13"/>
           <p:cNvSpPr/>
           <p:nvPr/>
         </p:nvSpPr>
@@ -19217,7 +19625,7 @@
       </p:sp>
       <p:sp>
         <p:nvSpPr>
-          <p:cNvPr id="16" name="Text 14"/>
+          <p:cNvPr id="17" name="Text 14"/>
           <p:cNvSpPr/>
           <p:nvPr/>
         </p:nvSpPr>
@@ -19256,7 +19664,7 @@
       </p:sp>
       <p:sp>
         <p:nvSpPr>
-          <p:cNvPr id="17" name="Text 15"/>
+          <p:cNvPr id="18" name="Text 15"/>
           <p:cNvSpPr/>
           <p:nvPr/>
         </p:nvSpPr>
@@ -19325,16 +19733,40 @@
           <a:chExt cx="0" cy="0"/>
         </a:xfrm>
       </p:grpSpPr>
-      <p:sp>
-        <p:nvSpPr>
-          <p:cNvPr id="2" name="Text 0"/>
-          <p:cNvSpPr/>
-          <p:nvPr/>
-        </p:nvSpPr>
-        <p:spPr>
-          <a:xfrm>
-            <a:off x="548640" y="365760"/>
-            <a:ext cx="8046720" cy="201168"/>
+      <p:pic>
+        <p:nvPicPr>
+          <p:cNvPr id="2" name="Image 0" descr="d:\resrtorant\presentation_assets\tcet_header.jpeg">    </p:cNvPr>
+          <p:cNvPicPr>
+            <a:picLocks noChangeAspect="1"/>
+          </p:cNvPicPr>
+          <p:nvPr/>
+        </p:nvPicPr>
+        <p:blipFill>
+          <a:blip r:embed="rId1"/>
+          <a:stretch>
+            <a:fillRect/>
+          </a:stretch>
+        </p:blipFill>
+        <p:spPr>
+          <a:xfrm>
+            <a:off x="1828800" y="45720"/>
+            <a:ext cx="5486400" cy="749808"/>
+          </a:xfrm>
+          <a:prstGeom prst="rect">
+            <a:avLst/>
+          </a:prstGeom>
+        </p:spPr>
+      </p:pic>
+      <p:sp>
+        <p:nvSpPr>
+          <p:cNvPr id="3" name="Text 0"/>
+          <p:cNvSpPr/>
+          <p:nvPr/>
+        </p:nvSpPr>
+        <p:spPr>
+          <a:xfrm>
+            <a:off x="548640" y="813816"/>
+            <a:ext cx="5943600" cy="329184"/>
           </a:xfrm>
           <a:prstGeom prst="rect">
             <a:avLst/>
@@ -19350,46 +19782,7 @@
               <a:buNone/>
             </a:pPr>
             <a:r>
-              <a:rPr lang="en-US" sz="1000" b="1" dirty="0">
-                <a:solidFill>
-                  <a:srgbClr val="2563EB"/>
-                </a:solidFill>
-                <a:latin typeface="Calibri" pitchFamily="34" charset="0"/>
-                <a:ea typeface="Calibri" pitchFamily="34" charset="-122"/>
-                <a:cs typeface="Calibri" pitchFamily="34" charset="-120"/>
-              </a:rPr>
-              <a:t>Rubric Criterion 2 (10 Marks)</a:t>
-            </a:r>
-            <a:endParaRPr lang="en-US" sz="1000" dirty="0"/>
-          </a:p>
-        </p:txBody>
-      </p:sp>
-      <p:sp>
-        <p:nvSpPr>
-          <p:cNvPr id="3" name="Text 1"/>
-          <p:cNvSpPr/>
-          <p:nvPr/>
-        </p:nvSpPr>
-        <p:spPr>
-          <a:xfrm>
-            <a:off x="548640" y="566928"/>
-            <a:ext cx="8046720" cy="411480"/>
-          </a:xfrm>
-          <a:prstGeom prst="rect">
-            <a:avLst/>
-          </a:prstGeom>
-          <a:noFill/>
-          <a:ln/>
-        </p:spPr>
-        <p:txBody>
-          <a:bodyPr wrap="square" lIns="0" tIns="0" rIns="0" bIns="0" rtlCol="0" anchor="ctr"/>
-          <a:lstStyle/>
-          <a:p>
-            <a:pPr indent="0" marL="0">
-              <a:buNone/>
-            </a:pPr>
-            <a:r>
-              <a:rPr lang="en-US" sz="2100" b="1" dirty="0">
+              <a:rPr lang="en-US" sz="1650" b="1" dirty="0">
                 <a:solidFill>
                   <a:srgbClr val="1E3A8A"/>
                 </a:solidFill>
@@ -19399,13 +19792,52 @@
               </a:rPr>
               <a:t>Technical Complexity &amp; Engineering Innovations</a:t>
             </a:r>
-            <a:endParaRPr lang="en-US" sz="2100" dirty="0"/>
-          </a:p>
-        </p:txBody>
-      </p:sp>
-      <p:sp>
-        <p:nvSpPr>
-          <p:cNvPr id="4" name="Text 2"/>
+            <a:endParaRPr lang="en-US" sz="1650" dirty="0"/>
+          </a:p>
+        </p:txBody>
+      </p:sp>
+      <p:sp>
+        <p:nvSpPr>
+          <p:cNvPr id="4" name="Text 1"/>
+          <p:cNvSpPr/>
+          <p:nvPr/>
+        </p:nvSpPr>
+        <p:spPr>
+          <a:xfrm>
+            <a:off x="6492240" y="841248"/>
+            <a:ext cx="2103120" cy="274320"/>
+          </a:xfrm>
+          <a:prstGeom prst="rect">
+            <a:avLst/>
+          </a:prstGeom>
+          <a:noFill/>
+          <a:ln/>
+        </p:spPr>
+        <p:txBody>
+          <a:bodyPr wrap="square" lIns="0" tIns="0" rIns="0" bIns="0" rtlCol="0" anchor="ctr"/>
+          <a:lstStyle/>
+          <a:p>
+            <a:pPr algn="r" indent="0" marL="0">
+              <a:buNone/>
+            </a:pPr>
+            <a:r>
+              <a:rPr lang="en-US" sz="950" b="1" dirty="0">
+                <a:solidFill>
+                  <a:srgbClr val="2563EB"/>
+                </a:solidFill>
+                <a:latin typeface="Calibri" pitchFamily="34" charset="0"/>
+                <a:ea typeface="Calibri" pitchFamily="34" charset="-122"/>
+                <a:cs typeface="Calibri" pitchFamily="34" charset="-120"/>
+              </a:rPr>
+              <a:t>Rubric Criterion 2 (10 Marks)</a:t>
+            </a:r>
+            <a:endParaRPr lang="en-US" sz="950" dirty="0"/>
+          </a:p>
+        </p:txBody>
+      </p:sp>
+      <p:sp>
+        <p:nvSpPr>
+          <p:cNvPr id="5" name="Text 2"/>
           <p:cNvSpPr/>
           <p:nvPr/>
         </p:nvSpPr>
@@ -19444,7 +19876,7 @@
       </p:sp>
       <p:sp>
         <p:nvSpPr>
-          <p:cNvPr id="5" name="Text 3"/>
+          <p:cNvPr id="6" name="Text 3"/>
           <p:cNvSpPr/>
           <p:nvPr/>
         </p:nvSpPr>
@@ -19483,7 +19915,7 @@
       </p:sp>
       <p:sp>
         <p:nvSpPr>
-          <p:cNvPr id="6" name="Shape 4"/>
+          <p:cNvPr id="7" name="Shape 4"/>
           <p:cNvSpPr/>
           <p:nvPr/>
         </p:nvSpPr>
@@ -19510,7 +19942,7 @@
       </p:sp>
       <p:sp>
         <p:nvSpPr>
-          <p:cNvPr id="7" name="Text 5"/>
+          <p:cNvPr id="8" name="Text 5"/>
           <p:cNvSpPr/>
           <p:nvPr/>
         </p:nvSpPr>
@@ -19549,7 +19981,7 @@
       </p:sp>
       <p:sp>
         <p:nvSpPr>
-          <p:cNvPr id="8" name="Text 6"/>
+          <p:cNvPr id="9" name="Text 6"/>
           <p:cNvSpPr/>
           <p:nvPr/>
         </p:nvSpPr>
@@ -19588,7 +20020,7 @@
       </p:sp>
       <p:sp>
         <p:nvSpPr>
-          <p:cNvPr id="9" name="Shape 7"/>
+          <p:cNvPr id="10" name="Shape 7"/>
           <p:cNvSpPr/>
           <p:nvPr/>
         </p:nvSpPr>
@@ -19615,7 +20047,7 @@
       </p:sp>
       <p:sp>
         <p:nvSpPr>
-          <p:cNvPr id="10" name="Text 8"/>
+          <p:cNvPr id="11" name="Text 8"/>
           <p:cNvSpPr/>
           <p:nvPr/>
         </p:nvSpPr>
@@ -19654,7 +20086,7 @@
       </p:sp>
       <p:sp>
         <p:nvSpPr>
-          <p:cNvPr id="11" name="Text 9"/>
+          <p:cNvPr id="12" name="Text 9"/>
           <p:cNvSpPr/>
           <p:nvPr/>
         </p:nvSpPr>
@@ -19693,7 +20125,7 @@
       </p:sp>
       <p:sp>
         <p:nvSpPr>
-          <p:cNvPr id="12" name="Shape 10"/>
+          <p:cNvPr id="13" name="Shape 10"/>
           <p:cNvSpPr/>
           <p:nvPr/>
         </p:nvSpPr>
@@ -19720,7 +20152,7 @@
       </p:sp>
       <p:sp>
         <p:nvSpPr>
-          <p:cNvPr id="13" name="Text 11"/>
+          <p:cNvPr id="14" name="Text 11"/>
           <p:cNvSpPr/>
           <p:nvPr/>
         </p:nvSpPr>
@@ -19759,7 +20191,7 @@
       </p:sp>
       <p:sp>
         <p:nvSpPr>
-          <p:cNvPr id="14" name="Text 12"/>
+          <p:cNvPr id="15" name="Text 12"/>
           <p:cNvSpPr/>
           <p:nvPr/>
         </p:nvSpPr>
@@ -19798,7 +20230,7 @@
       </p:sp>
       <p:sp>
         <p:nvSpPr>
-          <p:cNvPr id="15" name="Shape 13"/>
+          <p:cNvPr id="16" name="Shape 13"/>
           <p:cNvSpPr/>
           <p:nvPr/>
         </p:nvSpPr>
@@ -19825,7 +20257,7 @@
       </p:sp>
       <p:sp>
         <p:nvSpPr>
-          <p:cNvPr id="16" name="Text 14"/>
+          <p:cNvPr id="17" name="Text 14"/>
           <p:cNvSpPr/>
           <p:nvPr/>
         </p:nvSpPr>
@@ -19864,7 +20296,7 @@
       </p:sp>
       <p:sp>
         <p:nvSpPr>
-          <p:cNvPr id="17" name="Text 15"/>
+          <p:cNvPr id="18" name="Text 15"/>
           <p:cNvSpPr/>
           <p:nvPr/>
         </p:nvSpPr>
@@ -19933,16 +20365,40 @@
           <a:chExt cx="0" cy="0"/>
         </a:xfrm>
       </p:grpSpPr>
-      <p:sp>
-        <p:nvSpPr>
-          <p:cNvPr id="2" name="Text 0"/>
-          <p:cNvSpPr/>
-          <p:nvPr/>
-        </p:nvSpPr>
-        <p:spPr>
-          <a:xfrm>
-            <a:off x="548640" y="365760"/>
-            <a:ext cx="8046720" cy="201168"/>
+      <p:pic>
+        <p:nvPicPr>
+          <p:cNvPr id="2" name="Image 0" descr="d:\resrtorant\presentation_assets\tcet_header.jpeg">    </p:cNvPr>
+          <p:cNvPicPr>
+            <a:picLocks noChangeAspect="1"/>
+          </p:cNvPicPr>
+          <p:nvPr/>
+        </p:nvPicPr>
+        <p:blipFill>
+          <a:blip r:embed="rId1"/>
+          <a:stretch>
+            <a:fillRect/>
+          </a:stretch>
+        </p:blipFill>
+        <p:spPr>
+          <a:xfrm>
+            <a:off x="1828800" y="45720"/>
+            <a:ext cx="5486400" cy="749808"/>
+          </a:xfrm>
+          <a:prstGeom prst="rect">
+            <a:avLst/>
+          </a:prstGeom>
+        </p:spPr>
+      </p:pic>
+      <p:sp>
+        <p:nvSpPr>
+          <p:cNvPr id="3" name="Text 0"/>
+          <p:cNvSpPr/>
+          <p:nvPr/>
+        </p:nvSpPr>
+        <p:spPr>
+          <a:xfrm>
+            <a:off x="548640" y="813816"/>
+            <a:ext cx="5943600" cy="329184"/>
           </a:xfrm>
           <a:prstGeom prst="rect">
             <a:avLst/>
@@ -19958,46 +20414,7 @@
               <a:buNone/>
             </a:pPr>
             <a:r>
-              <a:rPr lang="en-US" sz="1000" b="1" dirty="0">
-                <a:solidFill>
-                  <a:srgbClr val="2563EB"/>
-                </a:solidFill>
-                <a:latin typeface="Calibri" pitchFamily="34" charset="0"/>
-                <a:ea typeface="Calibri" pitchFamily="34" charset="-122"/>
-                <a:cs typeface="Calibri" pitchFamily="34" charset="-120"/>
-              </a:rPr>
-              <a:t>System Design</a:t>
-            </a:r>
-            <a:endParaRPr lang="en-US" sz="1000" dirty="0"/>
-          </a:p>
-        </p:txBody>
-      </p:sp>
-      <p:sp>
-        <p:nvSpPr>
-          <p:cNvPr id="3" name="Text 1"/>
-          <p:cNvSpPr/>
-          <p:nvPr/>
-        </p:nvSpPr>
-        <p:spPr>
-          <a:xfrm>
-            <a:off x="548640" y="566928"/>
-            <a:ext cx="8046720" cy="411480"/>
-          </a:xfrm>
-          <a:prstGeom prst="rect">
-            <a:avLst/>
-          </a:prstGeom>
-          <a:noFill/>
-          <a:ln/>
-        </p:spPr>
-        <p:txBody>
-          <a:bodyPr wrap="square" lIns="0" tIns="0" rIns="0" bIns="0" rtlCol="0" anchor="ctr"/>
-          <a:lstStyle/>
-          <a:p>
-            <a:pPr indent="0" marL="0">
-              <a:buNone/>
-            </a:pPr>
-            <a:r>
-              <a:rPr lang="en-US" sz="2100" b="1" dirty="0">
+              <a:rPr lang="en-US" sz="1650" b="1" dirty="0">
                 <a:solidFill>
                   <a:srgbClr val="1E3A8A"/>
                 </a:solidFill>
@@ -20007,13 +20424,52 @@
               </a:rPr>
               <a:t>End-to-End Multi-Tier System Architecture</a:t>
             </a:r>
-            <a:endParaRPr lang="en-US" sz="2100" dirty="0"/>
-          </a:p>
-        </p:txBody>
-      </p:sp>
-      <p:sp>
-        <p:nvSpPr>
-          <p:cNvPr id="4" name="Text 2"/>
+            <a:endParaRPr lang="en-US" sz="1650" dirty="0"/>
+          </a:p>
+        </p:txBody>
+      </p:sp>
+      <p:sp>
+        <p:nvSpPr>
+          <p:cNvPr id="4" name="Text 1"/>
+          <p:cNvSpPr/>
+          <p:nvPr/>
+        </p:nvSpPr>
+        <p:spPr>
+          <a:xfrm>
+            <a:off x="6492240" y="841248"/>
+            <a:ext cx="2103120" cy="274320"/>
+          </a:xfrm>
+          <a:prstGeom prst="rect">
+            <a:avLst/>
+          </a:prstGeom>
+          <a:noFill/>
+          <a:ln/>
+        </p:spPr>
+        <p:txBody>
+          <a:bodyPr wrap="square" lIns="0" tIns="0" rIns="0" bIns="0" rtlCol="0" anchor="ctr"/>
+          <a:lstStyle/>
+          <a:p>
+            <a:pPr algn="r" indent="0" marL="0">
+              <a:buNone/>
+            </a:pPr>
+            <a:r>
+              <a:rPr lang="en-US" sz="950" b="1" dirty="0">
+                <a:solidFill>
+                  <a:srgbClr val="2563EB"/>
+                </a:solidFill>
+                <a:latin typeface="Calibri" pitchFamily="34" charset="0"/>
+                <a:ea typeface="Calibri" pitchFamily="34" charset="-122"/>
+                <a:cs typeface="Calibri" pitchFamily="34" charset="-120"/>
+              </a:rPr>
+              <a:t>System Design</a:t>
+            </a:r>
+            <a:endParaRPr lang="en-US" sz="950" dirty="0"/>
+          </a:p>
+        </p:txBody>
+      </p:sp>
+      <p:sp>
+        <p:nvSpPr>
+          <p:cNvPr id="5" name="Text 2"/>
           <p:cNvSpPr/>
           <p:nvPr/>
         </p:nvSpPr>
@@ -20052,7 +20508,7 @@
       </p:sp>
       <p:sp>
         <p:nvSpPr>
-          <p:cNvPr id="5" name="Text 3"/>
+          <p:cNvPr id="6" name="Text 3"/>
           <p:cNvSpPr/>
           <p:nvPr/>
         </p:nvSpPr>
@@ -20091,7 +20547,7 @@
       </p:sp>
       <p:sp>
         <p:nvSpPr>
-          <p:cNvPr id="6" name="Shape 4"/>
+          <p:cNvPr id="7" name="Shape 4"/>
           <p:cNvSpPr/>
           <p:nvPr/>
         </p:nvSpPr>
@@ -20118,7 +20574,7 @@
       </p:sp>
       <p:sp>
         <p:nvSpPr>
-          <p:cNvPr id="7" name="Text 5"/>
+          <p:cNvPr id="8" name="Text 5"/>
           <p:cNvSpPr/>
           <p:nvPr/>
         </p:nvSpPr>
@@ -20157,7 +20613,7 @@
       </p:sp>
       <p:sp>
         <p:nvSpPr>
-          <p:cNvPr id="8" name="Text 6"/>
+          <p:cNvPr id="9" name="Text 6"/>
           <p:cNvSpPr/>
           <p:nvPr/>
         </p:nvSpPr>
@@ -20196,7 +20652,7 @@
       </p:sp>
       <p:sp>
         <p:nvSpPr>
-          <p:cNvPr id="9" name="Text 7"/>
+          <p:cNvPr id="10" name="Text 7"/>
           <p:cNvSpPr/>
           <p:nvPr/>
         </p:nvSpPr>
@@ -20235,7 +20691,7 @@
       </p:sp>
       <p:sp>
         <p:nvSpPr>
-          <p:cNvPr id="10" name="Shape 8"/>
+          <p:cNvPr id="11" name="Shape 8"/>
           <p:cNvSpPr/>
           <p:nvPr/>
         </p:nvSpPr>
@@ -20262,7 +20718,7 @@
       </p:sp>
       <p:sp>
         <p:nvSpPr>
-          <p:cNvPr id="11" name="Text 9"/>
+          <p:cNvPr id="12" name="Text 9"/>
           <p:cNvSpPr/>
           <p:nvPr/>
         </p:nvSpPr>
@@ -20301,7 +20757,7 @@
       </p:sp>
       <p:sp>
         <p:nvSpPr>
-          <p:cNvPr id="12" name="Text 10"/>
+          <p:cNvPr id="13" name="Text 10"/>
           <p:cNvSpPr/>
           <p:nvPr/>
         </p:nvSpPr>
@@ -20340,7 +20796,7 @@
       </p:sp>
       <p:sp>
         <p:nvSpPr>
-          <p:cNvPr id="13" name="Text 11"/>
+          <p:cNvPr id="14" name="Text 11"/>
           <p:cNvSpPr/>
           <p:nvPr/>
         </p:nvSpPr>
@@ -20379,7 +20835,7 @@
       </p:sp>
       <p:sp>
         <p:nvSpPr>
-          <p:cNvPr id="14" name="Shape 12"/>
+          <p:cNvPr id="15" name="Shape 12"/>
           <p:cNvSpPr/>
           <p:nvPr/>
         </p:nvSpPr>
@@ -20406,7 +20862,7 @@
       </p:sp>
       <p:sp>
         <p:nvSpPr>
-          <p:cNvPr id="15" name="Text 13"/>
+          <p:cNvPr id="16" name="Text 13"/>
           <p:cNvSpPr/>
           <p:nvPr/>
         </p:nvSpPr>
@@ -20445,7 +20901,7 @@
       </p:sp>
       <p:sp>
         <p:nvSpPr>
-          <p:cNvPr id="16" name="Text 14"/>
+          <p:cNvPr id="17" name="Text 14"/>
           <p:cNvSpPr/>
           <p:nvPr/>
         </p:nvSpPr>
@@ -20484,7 +20940,7 @@
       </p:sp>
       <p:sp>
         <p:nvSpPr>
-          <p:cNvPr id="17" name="Text 15"/>
+          <p:cNvPr id="18" name="Text 15"/>
           <p:cNvSpPr/>
           <p:nvPr/>
         </p:nvSpPr>
@@ -20523,7 +20979,7 @@
       </p:sp>
       <p:sp>
         <p:nvSpPr>
-          <p:cNvPr id="18" name="Shape 16"/>
+          <p:cNvPr id="19" name="Shape 16"/>
           <p:cNvSpPr/>
           <p:nvPr/>
         </p:nvSpPr>
@@ -20550,7 +21006,7 @@
       </p:sp>
       <p:sp>
         <p:nvSpPr>
-          <p:cNvPr id="19" name="Text 17"/>
+          <p:cNvPr id="20" name="Text 17"/>
           <p:cNvSpPr/>
           <p:nvPr/>
         </p:nvSpPr>
@@ -20589,7 +21045,7 @@
       </p:sp>
       <p:sp>
         <p:nvSpPr>
-          <p:cNvPr id="20" name="Text 18"/>
+          <p:cNvPr id="21" name="Text 18"/>
           <p:cNvSpPr/>
           <p:nvPr/>
         </p:nvSpPr>
@@ -20628,7 +21084,7 @@
       </p:sp>
       <p:sp>
         <p:nvSpPr>
-          <p:cNvPr id="21" name="Text 19"/>
+          <p:cNvPr id="22" name="Text 19"/>
           <p:cNvSpPr/>
           <p:nvPr/>
         </p:nvSpPr>
@@ -20697,16 +21153,40 @@
           <a:chExt cx="0" cy="0"/>
         </a:xfrm>
       </p:grpSpPr>
-      <p:sp>
-        <p:nvSpPr>
-          <p:cNvPr id="2" name="Text 0"/>
-          <p:cNvSpPr/>
-          <p:nvPr/>
-        </p:nvSpPr>
-        <p:spPr>
-          <a:xfrm>
-            <a:off x="548640" y="365760"/>
-            <a:ext cx="8046720" cy="201168"/>
+      <p:pic>
+        <p:nvPicPr>
+          <p:cNvPr id="2" name="Image 0" descr="d:\resrtorant\presentation_assets\tcet_header.jpeg">    </p:cNvPr>
+          <p:cNvPicPr>
+            <a:picLocks noChangeAspect="1"/>
+          </p:cNvPicPr>
+          <p:nvPr/>
+        </p:nvPicPr>
+        <p:blipFill>
+          <a:blip r:embed="rId1"/>
+          <a:stretch>
+            <a:fillRect/>
+          </a:stretch>
+        </p:blipFill>
+        <p:spPr>
+          <a:xfrm>
+            <a:off x="1828800" y="45720"/>
+            <a:ext cx="5486400" cy="749808"/>
+          </a:xfrm>
+          <a:prstGeom prst="rect">
+            <a:avLst/>
+          </a:prstGeom>
+        </p:spPr>
+      </p:pic>
+      <p:sp>
+        <p:nvSpPr>
+          <p:cNvPr id="3" name="Text 0"/>
+          <p:cNvSpPr/>
+          <p:nvPr/>
+        </p:nvSpPr>
+        <p:spPr>
+          <a:xfrm>
+            <a:off x="548640" y="813816"/>
+            <a:ext cx="5943600" cy="329184"/>
           </a:xfrm>
           <a:prstGeom prst="rect">
             <a:avLst/>
@@ -20722,46 +21202,7 @@
               <a:buNone/>
             </a:pPr>
             <a:r>
-              <a:rPr lang="en-US" sz="1000" b="1" dirty="0">
-                <a:solidFill>
-                  <a:srgbClr val="2563EB"/>
-                </a:solidFill>
-                <a:latin typeface="Calibri" pitchFamily="34" charset="0"/>
-                <a:ea typeface="Calibri" pitchFamily="34" charset="-122"/>
-                <a:cs typeface="Calibri" pitchFamily="34" charset="-120"/>
-              </a:rPr>
-              <a:t>Engineering Stack</a:t>
-            </a:r>
-            <a:endParaRPr lang="en-US" sz="1000" dirty="0"/>
-          </a:p>
-        </p:txBody>
-      </p:sp>
-      <p:sp>
-        <p:nvSpPr>
-          <p:cNvPr id="3" name="Text 1"/>
-          <p:cNvSpPr/>
-          <p:nvPr/>
-        </p:nvSpPr>
-        <p:spPr>
-          <a:xfrm>
-            <a:off x="548640" y="566928"/>
-            <a:ext cx="8046720" cy="411480"/>
-          </a:xfrm>
-          <a:prstGeom prst="rect">
-            <a:avLst/>
-          </a:prstGeom>
-          <a:noFill/>
-          <a:ln/>
-        </p:spPr>
-        <p:txBody>
-          <a:bodyPr wrap="square" lIns="0" tIns="0" rIns="0" bIns="0" rtlCol="0" anchor="ctr"/>
-          <a:lstStyle/>
-          <a:p>
-            <a:pPr indent="0" marL="0">
-              <a:buNone/>
-            </a:pPr>
-            <a:r>
-              <a:rPr lang="en-US" sz="2100" b="1" dirty="0">
+              <a:rPr lang="en-US" sz="1650" b="1" dirty="0">
                 <a:solidFill>
                   <a:srgbClr val="1E3A8A"/>
                 </a:solidFill>
@@ -20771,13 +21212,52 @@
               </a:rPr>
               <a:t>Comprehensive Technology Stack &amp; Tools Matrix</a:t>
             </a:r>
-            <a:endParaRPr lang="en-US" sz="2100" dirty="0"/>
-          </a:p>
-        </p:txBody>
-      </p:sp>
-      <p:sp>
-        <p:nvSpPr>
-          <p:cNvPr id="4" name="Text 2"/>
+            <a:endParaRPr lang="en-US" sz="1650" dirty="0"/>
+          </a:p>
+        </p:txBody>
+      </p:sp>
+      <p:sp>
+        <p:nvSpPr>
+          <p:cNvPr id="4" name="Text 1"/>
+          <p:cNvSpPr/>
+          <p:nvPr/>
+        </p:nvSpPr>
+        <p:spPr>
+          <a:xfrm>
+            <a:off x="6492240" y="841248"/>
+            <a:ext cx="2103120" cy="274320"/>
+          </a:xfrm>
+          <a:prstGeom prst="rect">
+            <a:avLst/>
+          </a:prstGeom>
+          <a:noFill/>
+          <a:ln/>
+        </p:spPr>
+        <p:txBody>
+          <a:bodyPr wrap="square" lIns="0" tIns="0" rIns="0" bIns="0" rtlCol="0" anchor="ctr"/>
+          <a:lstStyle/>
+          <a:p>
+            <a:pPr algn="r" indent="0" marL="0">
+              <a:buNone/>
+            </a:pPr>
+            <a:r>
+              <a:rPr lang="en-US" sz="950" b="1" dirty="0">
+                <a:solidFill>
+                  <a:srgbClr val="2563EB"/>
+                </a:solidFill>
+                <a:latin typeface="Calibri" pitchFamily="34" charset="0"/>
+                <a:ea typeface="Calibri" pitchFamily="34" charset="-122"/>
+                <a:cs typeface="Calibri" pitchFamily="34" charset="-120"/>
+              </a:rPr>
+              <a:t>Engineering Stack</a:t>
+            </a:r>
+            <a:endParaRPr lang="en-US" sz="950" dirty="0"/>
+          </a:p>
+        </p:txBody>
+      </p:sp>
+      <p:sp>
+        <p:nvSpPr>
+          <p:cNvPr id="5" name="Text 2"/>
           <p:cNvSpPr/>
           <p:nvPr/>
         </p:nvSpPr>
@@ -20816,7 +21296,7 @@
       </p:sp>
       <p:sp>
         <p:nvSpPr>
-          <p:cNvPr id="5" name="Text 3"/>
+          <p:cNvPr id="6" name="Text 3"/>
           <p:cNvSpPr/>
           <p:nvPr/>
         </p:nvSpPr>
@@ -20855,7 +21335,7 @@
       </p:sp>
       <p:sp>
         <p:nvSpPr>
-          <p:cNvPr id="6" name="Shape 4"/>
+          <p:cNvPr id="7" name="Shape 4"/>
           <p:cNvSpPr/>
           <p:nvPr/>
         </p:nvSpPr>
@@ -20882,7 +21362,7 @@
       </p:sp>
       <p:sp>
         <p:nvSpPr>
-          <p:cNvPr id="7" name="Text 5"/>
+          <p:cNvPr id="8" name="Text 5"/>
           <p:cNvSpPr/>
           <p:nvPr/>
         </p:nvSpPr>
@@ -20921,7 +21401,7 @@
       </p:sp>
       <p:sp>
         <p:nvSpPr>
-          <p:cNvPr id="8" name="Text 6"/>
+          <p:cNvPr id="9" name="Text 6"/>
           <p:cNvSpPr/>
           <p:nvPr/>
         </p:nvSpPr>
@@ -20960,7 +21440,7 @@
       </p:sp>
       <p:sp>
         <p:nvSpPr>
-          <p:cNvPr id="9" name="Text 7"/>
+          <p:cNvPr id="10" name="Text 7"/>
           <p:cNvSpPr/>
           <p:nvPr/>
         </p:nvSpPr>
@@ -21045,7 +21525,7 @@
       </p:sp>
       <p:sp>
         <p:nvSpPr>
-          <p:cNvPr id="10" name="Shape 8"/>
+          <p:cNvPr id="11" name="Shape 8"/>
           <p:cNvSpPr/>
           <p:nvPr/>
         </p:nvSpPr>
@@ -21072,7 +21552,7 @@
       </p:sp>
       <p:sp>
         <p:nvSpPr>
-          <p:cNvPr id="11" name="Text 9"/>
+          <p:cNvPr id="12" name="Text 9"/>
           <p:cNvSpPr/>
           <p:nvPr/>
         </p:nvSpPr>
@@ -21111,7 +21591,7 @@
       </p:sp>
       <p:sp>
         <p:nvSpPr>
-          <p:cNvPr id="12" name="Text 10"/>
+          <p:cNvPr id="13" name="Text 10"/>
           <p:cNvSpPr/>
           <p:nvPr/>
         </p:nvSpPr>
@@ -21150,7 +21630,7 @@
       </p:sp>
       <p:sp>
         <p:nvSpPr>
-          <p:cNvPr id="13" name="Text 11"/>
+          <p:cNvPr id="14" name="Text 11"/>
           <p:cNvSpPr/>
           <p:nvPr/>
         </p:nvSpPr>
@@ -21235,7 +21715,7 @@
       </p:sp>
       <p:sp>
         <p:nvSpPr>
-          <p:cNvPr id="14" name="Shape 12"/>
+          <p:cNvPr id="15" name="Shape 12"/>
           <p:cNvSpPr/>
           <p:nvPr/>
         </p:nvSpPr>
@@ -21262,7 +21742,7 @@
       </p:sp>
       <p:sp>
         <p:nvSpPr>
-          <p:cNvPr id="15" name="Text 13"/>
+          <p:cNvPr id="16" name="Text 13"/>
           <p:cNvSpPr/>
           <p:nvPr/>
         </p:nvSpPr>
@@ -21301,7 +21781,7 @@
       </p:sp>
       <p:sp>
         <p:nvSpPr>
-          <p:cNvPr id="16" name="Text 14"/>
+          <p:cNvPr id="17" name="Text 14"/>
           <p:cNvSpPr/>
           <p:nvPr/>
         </p:nvSpPr>
@@ -21340,7 +21820,7 @@
       </p:sp>
       <p:sp>
         <p:nvSpPr>
-          <p:cNvPr id="17" name="Text 15"/>
+          <p:cNvPr id="18" name="Text 15"/>
           <p:cNvSpPr/>
           <p:nvPr/>
         </p:nvSpPr>
@@ -21425,7 +21905,7 @@
       </p:sp>
       <p:sp>
         <p:nvSpPr>
-          <p:cNvPr id="18" name="Shape 16"/>
+          <p:cNvPr id="19" name="Shape 16"/>
           <p:cNvSpPr/>
           <p:nvPr/>
         </p:nvSpPr>
@@ -21452,7 +21932,7 @@
       </p:sp>
       <p:sp>
         <p:nvSpPr>
-          <p:cNvPr id="19" name="Text 17"/>
+          <p:cNvPr id="20" name="Text 17"/>
           <p:cNvSpPr/>
           <p:nvPr/>
         </p:nvSpPr>
@@ -21491,7 +21971,7 @@
       </p:sp>
       <p:sp>
         <p:nvSpPr>
-          <p:cNvPr id="20" name="Text 18"/>
+          <p:cNvPr id="21" name="Text 18"/>
           <p:cNvSpPr/>
           <p:nvPr/>
         </p:nvSpPr>
@@ -21530,7 +22010,7 @@
       </p:sp>
       <p:sp>
         <p:nvSpPr>
-          <p:cNvPr id="21" name="Text 19"/>
+          <p:cNvPr id="22" name="Text 19"/>
           <p:cNvSpPr/>
           <p:nvPr/>
         </p:nvSpPr>

--- a/Smart_Restaurant_Presentation_III.pptx
+++ b/Smart_Restaurant_Presentation_III.pptx
@@ -2296,7 +2296,7 @@
           <a:p>
             <a:r>
               <a:rPr lang="en-US" dirty="0"/>
-              <a:t>Slide 6 introduces our proposed architecture. It brings together instant QR table onboarding, dual-engine WebXR spatial viewing, dynamic dietary filtering, and real-time kitchen synchronization.</a:t>
+              <a:t>Slide 6 presents our proposed system as a connected four-stage operational workflow, followed by details of the customer spatial ordering experience and kitchen display integration.</a:t>
             </a:r>
             <a:endParaRPr lang="en-US" dirty="0"/>
           </a:p>
@@ -2384,7 +2384,7 @@
           <a:p>
             <a:r>
               <a:rPr lang="en-US" dirty="0"/>
-              <a:t>Slide 7 addresses Criterion 2 (10 Marks). The technical depth includes markerless 6-DoF WebXR plane hit-testing, Draco and WebP 3D asset compression cutting file sizes by 78%, dynamic dual-engine AR fallback routing, and edge-level binary MIME/CORS header configuration.</a:t>
+              <a:t>Slide 7 addresses Criterion 2 (10 Marks). Instead of generic claims, we highlight four real engineering problems we faced: sensor drift solved by WebXR hit-testing, mobile memory exhaustion solved by Draco compression, browser fragmentation solved by Scene Viewer fallbacks, and CORS/MIME errors solved by edge header injection.</a:t>
             </a:r>
             <a:endParaRPr lang="en-US" dirty="0"/>
           </a:p>
@@ -2472,7 +2472,7 @@
           <a:p>
             <a:r>
               <a:rPr lang="en-US" dirty="0"/>
-              <a:t>Slide 8 presents the multi-tier architecture: the React client layer, the Three.js spatial AR subsystem, the stateful Kitchen Display System with Web Audio alerts, and the Vercel Edge cloud delivery layer.</a:t>
+              <a:t>Slide 8 presents our layered system architecture: the React client layer, the Three.js spatial AR subsystem, the stateful Kitchen Display System with Web Audio alerts, and the Vercel Edge cloud delivery layer.</a:t>
             </a:r>
             <a:endParaRPr lang="en-US" dirty="0"/>
           </a:p>
@@ -7158,7 +7158,7 @@
         <p:spPr>
           <a:xfrm>
             <a:off x="548640" y="1188720"/>
-            <a:ext cx="3291840" cy="2194560"/>
+            <a:ext cx="3291840" cy="2103120"/>
           </a:xfrm>
           <a:prstGeom prst="rect">
             <a:avLst/>
@@ -7174,7 +7174,7 @@
         <p:spPr>
           <a:xfrm>
             <a:off x="548640" y="1188720"/>
-            <a:ext cx="3291840" cy="2194560"/>
+            <a:ext cx="3291840" cy="2103120"/>
           </a:xfrm>
           <a:prstGeom prst="rect">
             <a:avLst/>
@@ -7187,9 +7187,48 @@
           </a:ln>
         </p:spPr>
       </p:sp>
+      <p:sp>
+        <p:nvSpPr>
+          <p:cNvPr id="9" name="Text 5"/>
+          <p:cNvSpPr/>
+          <p:nvPr/>
+        </p:nvSpPr>
+        <p:spPr>
+          <a:xfrm>
+            <a:off x="548640" y="3310128"/>
+            <a:ext cx="3291840" cy="201168"/>
+          </a:xfrm>
+          <a:prstGeom prst="rect">
+            <a:avLst/>
+          </a:prstGeom>
+          <a:noFill/>
+          <a:ln/>
+        </p:spPr>
+        <p:txBody>
+          <a:bodyPr wrap="square" lIns="0" tIns="0" rIns="0" bIns="0" rtlCol="0" anchor="ctr"/>
+          <a:lstStyle/>
+          <a:p>
+            <a:pPr algn="ctr" indent="0" marL="0">
+              <a:buNone/>
+            </a:pPr>
+            <a:r>
+              <a:rPr lang="en-US" sz="800" dirty="0">
+                <a:solidFill>
+                  <a:srgbClr val="64748B"/>
+                </a:solidFill>
+                <a:latin typeface="Calibri" pitchFamily="34" charset="0"/>
+                <a:ea typeface="Calibri" pitchFamily="34" charset="-122"/>
+                <a:cs typeface="Calibri" pitchFamily="34" charset="-120"/>
+              </a:rPr>
+              <a:t>Figure 1: Live Menu Interface with Dietary Badges &amp; Calorie Counters</a:t>
+            </a:r>
+            <a:endParaRPr lang="en-US" sz="800" dirty="0"/>
+          </a:p>
+        </p:txBody>
+      </p:sp>
       <p:pic>
         <p:nvPicPr>
-          <p:cNvPr id="9" name="Image 2" descr="d:\resrtorant\presentation_assets\dish_anchored_placed_1790012727681.png">    </p:cNvPr>
+          <p:cNvPr id="10" name="Image 2" descr="d:\resrtorant\presentation_assets\dish_anchored_placed_1790012727681.png">    </p:cNvPr>
           <p:cNvPicPr>
             <a:picLocks noChangeAspect="1"/>
           </p:cNvPicPr>
@@ -7204,7 +7243,7 @@
         <p:spPr>
           <a:xfrm>
             <a:off x="4023360" y="1188720"/>
-            <a:ext cx="4572000" cy="2194560"/>
+            <a:ext cx="4572000" cy="2103120"/>
           </a:xfrm>
           <a:prstGeom prst="rect">
             <a:avLst/>
@@ -7213,14 +7252,14 @@
       </p:pic>
       <p:sp>
         <p:nvSpPr>
-          <p:cNvPr id="10" name="Shape 5"/>
+          <p:cNvPr id="11" name="Shape 6"/>
           <p:cNvSpPr/>
           <p:nvPr/>
         </p:nvSpPr>
         <p:spPr>
           <a:xfrm>
             <a:off x="4023360" y="1188720"/>
-            <a:ext cx="4572000" cy="2194560"/>
+            <a:ext cx="4572000" cy="2103120"/>
           </a:xfrm>
           <a:prstGeom prst="rect">
             <a:avLst/>
@@ -7235,18 +7274,57 @@
       </p:sp>
       <p:sp>
         <p:nvSpPr>
-          <p:cNvPr id="11" name="Shape 6"/>
-          <p:cNvSpPr/>
-          <p:nvPr/>
-        </p:nvSpPr>
-        <p:spPr>
-          <a:xfrm>
-            <a:off x="548640" y="3520440"/>
-            <a:ext cx="8046720" cy="1143000"/>
+          <p:cNvPr id="12" name="Text 7"/>
+          <p:cNvSpPr/>
+          <p:nvPr/>
+        </p:nvSpPr>
+        <p:spPr>
+          <a:xfrm>
+            <a:off x="4023360" y="3310128"/>
+            <a:ext cx="4572000" cy="201168"/>
+          </a:xfrm>
+          <a:prstGeom prst="rect">
+            <a:avLst/>
+          </a:prstGeom>
+          <a:noFill/>
+          <a:ln/>
+        </p:spPr>
+        <p:txBody>
+          <a:bodyPr wrap="square" lIns="0" tIns="0" rIns="0" bIns="0" rtlCol="0" anchor="ctr"/>
+          <a:lstStyle/>
+          <a:p>
+            <a:pPr algn="ctr" indent="0" marL="0">
+              <a:buNone/>
+            </a:pPr>
+            <a:r>
+              <a:rPr lang="en-US" sz="800" dirty="0">
+                <a:solidFill>
+                  <a:srgbClr val="64748B"/>
+                </a:solidFill>
+                <a:latin typeface="Calibri" pitchFamily="34" charset="0"/>
+                <a:ea typeface="Calibri" pitchFamily="34" charset="-122"/>
+                <a:cs typeface="Calibri" pitchFamily="34" charset="-120"/>
+              </a:rPr>
+              <a:t>Figure 2: Real-World 6-DoF WebXR Hit-Testing Surface Anchoring at 1:1 Scale</a:t>
+            </a:r>
+            <a:endParaRPr lang="en-US" sz="800" dirty="0"/>
+          </a:p>
+        </p:txBody>
+      </p:sp>
+      <p:sp>
+        <p:nvSpPr>
+          <p:cNvPr id="13" name="Shape 8"/>
+          <p:cNvSpPr/>
+          <p:nvPr/>
+        </p:nvSpPr>
+        <p:spPr>
+          <a:xfrm>
+            <a:off x="548640" y="3547872"/>
+            <a:ext cx="8046720" cy="1115568"/>
           </a:xfrm>
           <a:prstGeom prst="roundRect">
             <a:avLst>
-              <a:gd name="adj" fmla="val 6400"/>
+              <a:gd name="adj" fmla="val 6557"/>
             </a:avLst>
           </a:prstGeom>
           <a:solidFill>
@@ -7262,13 +7340,13 @@
       </p:sp>
       <p:sp>
         <p:nvSpPr>
-          <p:cNvPr id="12" name="Text 7"/>
-          <p:cNvSpPr/>
-          <p:nvPr/>
-        </p:nvSpPr>
-        <p:spPr>
-          <a:xfrm>
-            <a:off x="731520" y="3611880"/>
+          <p:cNvPr id="14" name="Text 9"/>
+          <p:cNvSpPr/>
+          <p:nvPr/>
+        </p:nvSpPr>
+        <p:spPr>
+          <a:xfrm>
+            <a:off x="731520" y="3639312"/>
             <a:ext cx="7680960" cy="182880"/>
           </a:xfrm>
           <a:prstGeom prst="rect">
@@ -7293,7 +7371,7 @@
                 <a:ea typeface="Calibri" pitchFamily="34" charset="-122"/>
                 <a:cs typeface="Calibri" pitchFamily="34" charset="-120"/>
               </a:rPr>
-              <a:t>100% COMPLETED MODULES &amp; VERIFIABLE PROOF (30 MARKS)</a:t>
+              <a:t>VERIFIED IMPLEMENTATION STATUS (ALL MODULES FULLY OPERATIONAL)</a:t>
             </a:r>
             <a:endParaRPr lang="en-US" sz="950" dirty="0"/>
           </a:p>
@@ -7301,13 +7379,13 @@
       </p:sp>
       <p:sp>
         <p:nvSpPr>
-          <p:cNvPr id="13" name="Text 8"/>
-          <p:cNvSpPr/>
-          <p:nvPr/>
-        </p:nvSpPr>
-        <p:spPr>
-          <a:xfrm>
-            <a:off x="731520" y="3840480"/>
+          <p:cNvPr id="15" name="Text 10"/>
+          <p:cNvSpPr/>
+          <p:nvPr/>
+        </p:nvSpPr>
+        <p:spPr>
+          <a:xfrm>
+            <a:off x="731520" y="3858768"/>
             <a:ext cx="7680960" cy="731520"/>
           </a:xfrm>
           <a:prstGeom prst="rect">
@@ -7335,7 +7413,7 @@
                 <a:ea typeface="Calibri" pitchFamily="34" charset="-122"/>
                 <a:cs typeface="Calibri" pitchFamily="34" charset="-120"/>
               </a:rPr>
-              <a:t>• [COMPLETED] Interactive Menu: 12+ gourmet dishes with dietary tags, preparation times, and calorie metrics.</a:t>
+              <a:t>✓ Interactive Customer Menu: 12+ gourmet dishes with dietary filters, calorie breakdowns, and ingredient tracking.</a:t>
             </a:r>
             <a:endParaRPr lang="en-US" sz="900" dirty="0"/>
           </a:p>
@@ -7355,7 +7433,7 @@
                 <a:ea typeface="Calibri" pitchFamily="34" charset="-122"/>
                 <a:cs typeface="Calibri" pitchFamily="34" charset="-120"/>
               </a:rPr>
-              <a:t>• [COMPLETED] 6-DoF WebXR Surface Tracker: Table plane hit-testing, dynamic reticle, and model rotation gestures.</a:t>
+              <a:t>✓ 6-DoF WebXR Surface Tracker: Table plane hit-testing reticle, 1:1 metric scale, and 360° touch rotation gestures.</a:t>
             </a:r>
             <a:endParaRPr lang="en-US" sz="900" dirty="0"/>
           </a:p>
@@ -7375,7 +7453,7 @@
                 <a:ea typeface="Calibri" pitchFamily="34" charset="-122"/>
                 <a:cs typeface="Calibri" pitchFamily="34" charset="-120"/>
               </a:rPr>
-              <a:t>• [COMPLETED] Google Scene Viewer Fallback: Automated Android intent dispatch for non-WebXR devices.</a:t>
+              <a:t>✓ Universal Fallback Subsystem: Automated Android Scene Viewer Intent fallback ensuring 100% smartphone reach.</a:t>
             </a:r>
             <a:endParaRPr lang="en-US" sz="900" dirty="0"/>
           </a:p>
@@ -7395,7 +7473,7 @@
                 <a:ea typeface="Calibri" pitchFamily="34" charset="-122"/>
                 <a:cs typeface="Calibri" pitchFamily="34" charset="-120"/>
               </a:rPr>
-              <a:t>• [COMPLETED] Real-Time Kitchen Display: Live order queue with state transitions and acoustic alerts.</a:t>
+              <a:t>✓ Kitchen Display System (KDS): Live Kanban order queue with acoustic notifications and stateful ticket advancement.</a:t>
             </a:r>
             <a:endParaRPr lang="en-US" sz="900" dirty="0"/>
           </a:p>
@@ -7415,7 +7493,7 @@
                 <a:ea typeface="Calibri" pitchFamily="34" charset="-122"/>
                 <a:cs typeface="Calibri" pitchFamily="34" charset="-120"/>
               </a:rPr>
-              <a:t>• [COMPLETED] Live Production Vercel Edge: Hosted &amp; active at https://smart-restaurant-2za8.vercel.app/</a:t>
+              <a:t>✓ Production Cloud Deployment: Active on Vercel Edge with custom binary MIME headers at https://smart-restaurant-2za8.vercel.app/</a:t>
             </a:r>
             <a:endParaRPr lang="en-US" sz="900" dirty="0"/>
           </a:p>
@@ -7510,7 +7588,7 @@
                 <a:ea typeface="Cambria" pitchFamily="34" charset="-122"/>
                 <a:cs typeface="Cambria" pitchFamily="34" charset="-120"/>
               </a:rPr>
-              <a:t>Operational Workflow &amp; Diner Journey</a:t>
+              <a:t>Operational Workflow &amp; Step-by-Step Diner Journey</a:t>
             </a:r>
             <a:endParaRPr lang="en-US" sz="1650" dirty="0"/>
           </a:p>
@@ -7650,7 +7728,7 @@
         <p:spPr>
           <a:xfrm>
             <a:off x="548640" y="1188720"/>
-            <a:ext cx="3108960" cy="2103120"/>
+            <a:ext cx="3108960" cy="2057400"/>
           </a:xfrm>
           <a:prstGeom prst="rect">
             <a:avLst/>
@@ -7666,7 +7744,7 @@
         <p:spPr>
           <a:xfrm>
             <a:off x="548640" y="1188720"/>
-            <a:ext cx="3108960" cy="2103120"/>
+            <a:ext cx="3108960" cy="2057400"/>
           </a:xfrm>
           <a:prstGeom prst="rect">
             <a:avLst/>
@@ -7679,9 +7757,48 @@
           </a:ln>
         </p:spPr>
       </p:sp>
+      <p:sp>
+        <p:nvSpPr>
+          <p:cNvPr id="9" name="Text 5"/>
+          <p:cNvSpPr/>
+          <p:nvPr/>
+        </p:nvSpPr>
+        <p:spPr>
+          <a:xfrm>
+            <a:off x="548640" y="3273552"/>
+            <a:ext cx="3108960" cy="182880"/>
+          </a:xfrm>
+          <a:prstGeom prst="rect">
+            <a:avLst/>
+          </a:prstGeom>
+          <a:noFill/>
+          <a:ln/>
+        </p:spPr>
+        <p:txBody>
+          <a:bodyPr wrap="square" lIns="0" tIns="0" rIns="0" bIns="0" rtlCol="0" anchor="ctr"/>
+          <a:lstStyle/>
+          <a:p>
+            <a:pPr algn="ctr" indent="0" marL="0">
+              <a:buNone/>
+            </a:pPr>
+            <a:r>
+              <a:rPr lang="en-US" sz="800" dirty="0">
+                <a:solidFill>
+                  <a:srgbClr val="64748B"/>
+                </a:solidFill>
+                <a:latin typeface="Calibri" pitchFamily="34" charset="0"/>
+                <a:ea typeface="Calibri" pitchFamily="34" charset="-122"/>
+                <a:cs typeface="Calibri" pitchFamily="34" charset="-120"/>
+              </a:rPr>
+              <a:t>Figure 3: Instant Mobile QR Handoff Modal</a:t>
+            </a:r>
+            <a:endParaRPr lang="en-US" sz="800" dirty="0"/>
+          </a:p>
+        </p:txBody>
+      </p:sp>
       <p:pic>
         <p:nvPicPr>
-          <p:cNvPr id="9" name="Image 2" descr="d:\resrtorant\presentation_assets\model_rotated_66deg_1790012883322.png">    </p:cNvPr>
+          <p:cNvPr id="10" name="Image 2" descr="d:\resrtorant\presentation_assets\model_rotated_66deg_1790012883322.png">    </p:cNvPr>
           <p:cNvPicPr>
             <a:picLocks noChangeAspect="1"/>
           </p:cNvPicPr>
@@ -7696,7 +7813,7 @@
         <p:spPr>
           <a:xfrm>
             <a:off x="3840480" y="1188720"/>
-            <a:ext cx="4754880" cy="2103120"/>
+            <a:ext cx="4754880" cy="2057400"/>
           </a:xfrm>
           <a:prstGeom prst="rect">
             <a:avLst/>
@@ -7705,14 +7822,14 @@
       </p:pic>
       <p:sp>
         <p:nvSpPr>
-          <p:cNvPr id="10" name="Shape 5"/>
+          <p:cNvPr id="11" name="Shape 6"/>
           <p:cNvSpPr/>
           <p:nvPr/>
         </p:nvSpPr>
         <p:spPr>
           <a:xfrm>
             <a:off x="3840480" y="1188720"/>
-            <a:ext cx="4754880" cy="2103120"/>
+            <a:ext cx="4754880" cy="2057400"/>
           </a:xfrm>
           <a:prstGeom prst="rect">
             <a:avLst/>
@@ -7727,18 +7844,57 @@
       </p:sp>
       <p:sp>
         <p:nvSpPr>
-          <p:cNvPr id="11" name="Shape 6"/>
-          <p:cNvSpPr/>
-          <p:nvPr/>
-        </p:nvSpPr>
-        <p:spPr>
-          <a:xfrm>
-            <a:off x="548640" y="3429000"/>
-            <a:ext cx="8046720" cy="1234440"/>
+          <p:cNvPr id="12" name="Text 7"/>
+          <p:cNvSpPr/>
+          <p:nvPr/>
+        </p:nvSpPr>
+        <p:spPr>
+          <a:xfrm>
+            <a:off x="3840480" y="3273552"/>
+            <a:ext cx="4754880" cy="182880"/>
+          </a:xfrm>
+          <a:prstGeom prst="rect">
+            <a:avLst/>
+          </a:prstGeom>
+          <a:noFill/>
+          <a:ln/>
+        </p:spPr>
+        <p:txBody>
+          <a:bodyPr wrap="square" lIns="0" tIns="0" rIns="0" bIns="0" rtlCol="0" anchor="ctr"/>
+          <a:lstStyle/>
+          <a:p>
+            <a:pPr algn="ctr" indent="0" marL="0">
+              <a:buNone/>
+            </a:pPr>
+            <a:r>
+              <a:rPr lang="en-US" sz="800" dirty="0">
+                <a:solidFill>
+                  <a:srgbClr val="64748B"/>
+                </a:solidFill>
+                <a:latin typeface="Calibri" pitchFamily="34" charset="0"/>
+                <a:ea typeface="Calibri" pitchFamily="34" charset="-122"/>
+                <a:cs typeface="Calibri" pitchFamily="34" charset="-120"/>
+              </a:rPr>
+              <a:t>Figure 4: 360° Touch Rotation &amp; Inspection of 3D Dish</a:t>
+            </a:r>
+            <a:endParaRPr lang="en-US" sz="800" dirty="0"/>
+          </a:p>
+        </p:txBody>
+      </p:sp>
+      <p:sp>
+        <p:nvSpPr>
+          <p:cNvPr id="13" name="Shape 8"/>
+          <p:cNvSpPr/>
+          <p:nvPr/>
+        </p:nvSpPr>
+        <p:spPr>
+          <a:xfrm>
+            <a:off x="548640" y="3493008"/>
+            <a:ext cx="8046720" cy="1170432"/>
           </a:xfrm>
           <a:prstGeom prst="roundRect">
             <a:avLst>
-              <a:gd name="adj" fmla="val 5926"/>
+              <a:gd name="adj" fmla="val 6250"/>
             </a:avLst>
           </a:prstGeom>
           <a:solidFill>
@@ -7746,7 +7902,7 @@
           </a:solidFill>
           <a:ln w="12700">
             <a:solidFill>
-              <a:srgbClr val="E2E8F0"/>
+              <a:srgbClr val="1E3A8A"/>
             </a:solidFill>
             <a:prstDash val="solid"/>
           </a:ln>
@@ -7754,13 +7910,13 @@
       </p:sp>
       <p:sp>
         <p:nvSpPr>
-          <p:cNvPr id="12" name="Text 7"/>
-          <p:cNvSpPr/>
-          <p:nvPr/>
-        </p:nvSpPr>
-        <p:spPr>
-          <a:xfrm>
-            <a:off x="731520" y="3520440"/>
+          <p:cNvPr id="14" name="Text 9"/>
+          <p:cNvSpPr/>
+          <p:nvPr/>
+        </p:nvSpPr>
+        <p:spPr>
+          <a:xfrm>
+            <a:off x="731520" y="3584448"/>
             <a:ext cx="7680960" cy="182880"/>
           </a:xfrm>
           <a:prstGeom prst="rect">
@@ -7785,7 +7941,7 @@
                 <a:ea typeface="Calibri" pitchFamily="34" charset="-122"/>
                 <a:cs typeface="Calibri" pitchFamily="34" charset="-120"/>
               </a:rPr>
-              <a:t>END-TO-END OPERATIONAL PIPELINE (INPUT → PROCESSING → OUTPUT)</a:t>
+              <a:t>END-TO-END OPERATIONAL LIFECYCLE (INPUT ➔ PROCESSING ➔ OUTPUT)</a:t>
             </a:r>
             <a:endParaRPr lang="en-US" sz="950" dirty="0"/>
           </a:p>
@@ -7793,14 +7949,14 @@
       </p:sp>
       <p:sp>
         <p:nvSpPr>
-          <p:cNvPr id="13" name="Text 8"/>
-          <p:cNvSpPr/>
-          <p:nvPr/>
-        </p:nvSpPr>
-        <p:spPr>
-          <a:xfrm>
-            <a:off x="731520" y="3749040"/>
-            <a:ext cx="7680960" cy="868680"/>
+          <p:cNvPr id="15" name="Text 10"/>
+          <p:cNvSpPr/>
+          <p:nvPr/>
+        </p:nvSpPr>
+        <p:spPr>
+          <a:xfrm>
+            <a:off x="731520" y="3785616"/>
+            <a:ext cx="7680960" cy="822960"/>
           </a:xfrm>
           <a:prstGeom prst="rect">
             <a:avLst/>
@@ -14304,11 +14460,11 @@
         <p:spPr>
           <a:xfrm>
             <a:off x="548640" y="1188720"/>
-            <a:ext cx="3931920" cy="1554480"/>
+            <a:ext cx="4937760" cy="3429000"/>
           </a:xfrm>
           <a:prstGeom prst="roundRect">
             <a:avLst>
-              <a:gd name="adj" fmla="val 4706"/>
+              <a:gd name="adj" fmla="val 2133"/>
             </a:avLst>
           </a:prstGeom>
           <a:solidFill>
@@ -14330,8 +14486,8 @@
         </p:nvSpPr>
         <p:spPr>
           <a:xfrm>
-            <a:off x="777240" y="1371600"/>
-            <a:ext cx="3474720" cy="274320"/>
+            <a:off x="731520" y="1353312"/>
+            <a:ext cx="4572000" cy="228600"/>
           </a:xfrm>
           <a:prstGeom prst="rect">
             <a:avLst/>
@@ -14347,7 +14503,7 @@
               <a:buNone/>
             </a:pPr>
             <a:r>
-              <a:rPr lang="en-US" sz="1300" b="1" dirty="0">
+              <a:rPr lang="en-US" sz="1200" b="1" dirty="0">
                 <a:solidFill>
                   <a:srgbClr val="1E3A8A"/>
                 </a:solidFill>
@@ -14355,9 +14511,9 @@
                 <a:ea typeface="Cambria" pitchFamily="34" charset="-122"/>
                 <a:cs typeface="Cambria" pitchFamily="34" charset="-120"/>
               </a:rPr>
-              <a:t>Static &amp; Unhygienic Paper Menus</a:t>
-            </a:r>
-            <a:endParaRPr lang="en-US" sz="1300" dirty="0"/>
+              <a:t>CRITICAL BOTTLENECKS IN TRADITIONAL DINING</a:t>
+            </a:r>
+            <a:endParaRPr lang="en-US" sz="1200" dirty="0"/>
           </a:p>
         </p:txBody>
       </p:sp>
@@ -14369,8 +14525,8 @@
         </p:nvSpPr>
         <p:spPr>
           <a:xfrm>
-            <a:off x="777240" y="1691640"/>
-            <a:ext cx="3474720" cy="914400"/>
+            <a:off x="731520" y="1664208"/>
+            <a:ext cx="4572000" cy="2743200"/>
           </a:xfrm>
           <a:prstGeom prst="rect">
             <a:avLst/>
@@ -14382,12 +14538,11 @@
           <a:bodyPr wrap="square" lIns="0" tIns="0" rIns="0" bIns="0" rtlCol="0" anchor="ctr"/>
           <a:lstStyle/>
           <a:p>
-            <a:pPr marL="342900" indent="-342900">
+            <a:pPr indent="0" marL="0">
               <a:spcAft>
-                <a:spcPts val="400"/>
+                <a:spcPts val="800"/>
               </a:spcAft>
-              <a:buSzPct val="100000"/>
-              <a:buChar char="•"/>
+              <a:buNone/>
             </a:pPr>
             <a:r>
               <a:rPr lang="en-US" sz="950" dirty="0">
@@ -14398,17 +14553,16 @@
                 <a:ea typeface="Calibri" pitchFamily="34" charset="-122"/>
                 <a:cs typeface="Calibri" pitchFamily="34" charset="-120"/>
               </a:rPr>
-              <a:t>Physical laminated menus are non-interactive, costly to reprint on price/menu updates, and act as high-contact germ vectors.</a:t>
+              <a:t>1. Unhygienic &amp; Inflexible Paper Menus</a:t>
             </a:r>
             <a:endParaRPr lang="en-US" sz="950" dirty="0"/>
           </a:p>
           <a:p>
-            <a:pPr marL="342900" indent="-342900">
+            <a:pPr indent="0" marL="0">
               <a:spcAft>
-                <a:spcPts val="400"/>
+                <a:spcPts val="800"/>
               </a:spcAft>
-              <a:buSzPct val="100000"/>
-              <a:buChar char="•"/>
+              <a:buNone/>
             </a:pPr>
             <a:r>
               <a:rPr lang="en-US" sz="950" dirty="0">
@@ -14419,10 +14573,90 @@
                 <a:ea typeface="Calibri" pitchFamily="34" charset="-122"/>
                 <a:cs typeface="Calibri" pitchFamily="34" charset="-120"/>
               </a:rPr>
-              <a:t>Inability to display dynamic dish availability, nutritional counts, or real-time kitchen preparation times.</a:t>
+              <a:t>Physical laminated menus are touched by hundreds of patrons, creating persistent hygiene concerns. Furthermore, reprinting menus to adjust for seasonal pricing or ingredient stockouts generates recurring recurring costs.</a:t>
             </a:r>
             <a:endParaRPr lang="en-US" sz="950" dirty="0"/>
           </a:p>
+          <a:p>
+            <a:pPr indent="0" marL="0">
+              <a:spcAft>
+                <a:spcPts val="800"/>
+              </a:spcAft>
+              <a:buNone/>
+            </a:pPr>
+            <a:r>
+              <a:rPr lang="en-US" sz="950" dirty="0">
+                <a:solidFill>
+                  <a:srgbClr val="334155"/>
+                </a:solidFill>
+                <a:latin typeface="Calibri" pitchFamily="34" charset="0"/>
+                <a:ea typeface="Calibri" pitchFamily="34" charset="-122"/>
+                <a:cs typeface="Calibri" pitchFamily="34" charset="-120"/>
+              </a:rPr>
+              <a:t>2. 2D Photo Ambiguity &amp; Food Wastage</a:t>
+            </a:r>
+            <a:endParaRPr lang="en-US" sz="950" dirty="0"/>
+          </a:p>
+          <a:p>
+            <a:pPr indent="0" marL="0">
+              <a:spcAft>
+                <a:spcPts val="800"/>
+              </a:spcAft>
+              <a:buNone/>
+            </a:pPr>
+            <a:r>
+              <a:rPr lang="en-US" sz="950" dirty="0">
+                <a:solidFill>
+                  <a:srgbClr val="334155"/>
+                </a:solidFill>
+                <a:latin typeface="Calibri" pitchFamily="34" charset="0"/>
+                <a:ea typeface="Calibri" pitchFamily="34" charset="-122"/>
+                <a:cs typeface="Calibri" pitchFamily="34" charset="-120"/>
+              </a:rPr>
+              <a:t>Flat 2D photographs fail to convey true spatial volume, depth, and presentation scale. This misjudgment frequently leads to order remorse, contributing to an estimated 18%–22% plate food return rate across casual restaurants.</a:t>
+            </a:r>
+            <a:endParaRPr lang="en-US" sz="950" dirty="0"/>
+          </a:p>
+          <a:p>
+            <a:pPr indent="0" marL="0">
+              <a:spcAft>
+                <a:spcPts val="800"/>
+              </a:spcAft>
+              <a:buNone/>
+            </a:pPr>
+            <a:r>
+              <a:rPr lang="en-US" sz="950" dirty="0">
+                <a:solidFill>
+                  <a:srgbClr val="334155"/>
+                </a:solidFill>
+                <a:latin typeface="Calibri" pitchFamily="34" charset="0"/>
+                <a:ea typeface="Calibri" pitchFamily="34" charset="-122"/>
+                <a:cs typeface="Calibri" pitchFamily="34" charset="-120"/>
+              </a:rPr>
+              <a:t>3. Limitations of Early Digital Solutions</a:t>
+            </a:r>
+            <a:endParaRPr lang="en-US" sz="950" dirty="0"/>
+          </a:p>
+          <a:p>
+            <a:pPr indent="0" marL="0">
+              <a:spcAft>
+                <a:spcPts val="800"/>
+              </a:spcAft>
+              <a:buNone/>
+            </a:pPr>
+            <a:r>
+              <a:rPr lang="en-US" sz="950" dirty="0">
+                <a:solidFill>
+                  <a:srgbClr val="334155"/>
+                </a:solidFill>
+                <a:latin typeface="Calibri" pitchFamily="34" charset="0"/>
+                <a:ea typeface="Calibri" pitchFamily="34" charset="-122"/>
+                <a:cs typeface="Calibri" pitchFamily="34" charset="-120"/>
+              </a:rPr>
+              <a:t>Static QR code PDFs provide clumsy mobile navigation with zero interactive cart integration. Meanwhile, proprietary tabletop tablets (e.g. Ziosk) demand high upfront capital investment and suffer frequent hardware breakdowns.</a:t>
+            </a:r>
+            <a:endParaRPr lang="en-US" sz="950" dirty="0"/>
+          </a:p>
         </p:txBody>
       </p:sp>
       <p:sp>
@@ -14433,20 +14667,20 @@
         </p:nvSpPr>
         <p:spPr>
           <a:xfrm>
-            <a:off x="4663440" y="1188720"/>
-            <a:ext cx="3931920" cy="1554480"/>
+            <a:off x="5669280" y="1188720"/>
+            <a:ext cx="2926080" cy="1051560"/>
           </a:xfrm>
           <a:prstGeom prst="roundRect">
             <a:avLst>
-              <a:gd name="adj" fmla="val 4706"/>
+              <a:gd name="adj" fmla="val 6957"/>
             </a:avLst>
           </a:prstGeom>
           <a:solidFill>
-            <a:srgbClr val="F8FAFC"/>
+            <a:srgbClr val="EFF6FF"/>
           </a:solidFill>
           <a:ln w="12700">
             <a:solidFill>
-              <a:srgbClr val="E2E8F0"/>
+              <a:srgbClr val="BFDBFE"/>
             </a:solidFill>
             <a:prstDash val="solid"/>
           </a:ln>
@@ -14460,8 +14694,8 @@
         </p:nvSpPr>
         <p:spPr>
           <a:xfrm>
-            <a:off x="4892040" y="1371600"/>
-            <a:ext cx="3474720" cy="274320"/>
+            <a:off x="5806440" y="1280160"/>
+            <a:ext cx="2651760" cy="320040"/>
           </a:xfrm>
           <a:prstGeom prst="rect">
             <a:avLst/>
@@ -14477,17 +14711,17 @@
               <a:buNone/>
             </a:pPr>
             <a:r>
-              <a:rPr lang="en-US" sz="1300" b="1" dirty="0">
-                <a:solidFill>
-                  <a:srgbClr val="1E3A8A"/>
+              <a:rPr lang="en-US" sz="1800" b="1" dirty="0">
+                <a:solidFill>
+                  <a:srgbClr val="DC2626"/>
                 </a:solidFill>
                 <a:latin typeface="Cambria" pitchFamily="34" charset="0"/>
                 <a:ea typeface="Cambria" pitchFamily="34" charset="-122"/>
                 <a:cs typeface="Cambria" pitchFamily="34" charset="-120"/>
               </a:rPr>
-              <a:t>Portion Ambiguity &amp; Food Wastage</a:t>
-            </a:r>
-            <a:endParaRPr lang="en-US" sz="1300" dirty="0"/>
+              <a:t>18% – 22%</a:t>
+            </a:r>
+            <a:endParaRPr lang="en-US" sz="1800" dirty="0"/>
           </a:p>
         </p:txBody>
       </p:sp>
@@ -14499,8 +14733,8 @@
         </p:nvSpPr>
         <p:spPr>
           <a:xfrm>
-            <a:off x="4892040" y="1691640"/>
-            <a:ext cx="3474720" cy="914400"/>
+            <a:off x="5806440" y="1600200"/>
+            <a:ext cx="2651760" cy="228600"/>
           </a:xfrm>
           <a:prstGeom prst="rect">
             <a:avLst/>
@@ -14512,71 +14746,85 @@
           <a:bodyPr wrap="square" lIns="0" tIns="0" rIns="0" bIns="0" rtlCol="0" anchor="ctr"/>
           <a:lstStyle/>
           <a:p>
-            <a:pPr marL="342900" indent="-342900">
-              <a:spcAft>
-                <a:spcPts val="400"/>
-              </a:spcAft>
-              <a:buSzPct val="100000"/>
-              <a:buChar char="•"/>
-            </a:pPr>
-            <a:r>
-              <a:rPr lang="en-US" sz="950" dirty="0">
-                <a:solidFill>
-                  <a:srgbClr val="334155"/>
-                </a:solidFill>
-                <a:latin typeface="Calibri" pitchFamily="34" charset="0"/>
-                <a:ea typeface="Calibri" pitchFamily="34" charset="-122"/>
-                <a:cs typeface="Calibri" pitchFamily="34" charset="-120"/>
-              </a:rPr>
-              <a:t>2D flat photographs fail to represent true dish portion size, volume, depth, and presentation aesthetics accurately.</a:t>
+            <a:pPr indent="0" marL="0">
+              <a:buNone/>
+            </a:pPr>
+            <a:r>
+              <a:rPr lang="en-US" sz="950" b="1" dirty="0">
+                <a:solidFill>
+                  <a:srgbClr val="0F172A"/>
+                </a:solidFill>
+                <a:latin typeface="Calibri" pitchFamily="34" charset="0"/>
+                <a:ea typeface="Calibri" pitchFamily="34" charset="-122"/>
+                <a:cs typeface="Calibri" pitchFamily="34" charset="-120"/>
+              </a:rPr>
+              <a:t>Food Plate Return Rate</a:t>
             </a:r>
             <a:endParaRPr lang="en-US" sz="950" dirty="0"/>
           </a:p>
-          <a:p>
-            <a:pPr marL="342900" indent="-342900">
-              <a:spcAft>
-                <a:spcPts val="400"/>
-              </a:spcAft>
-              <a:buSzPct val="100000"/>
-              <a:buChar char="•"/>
-            </a:pPr>
-            <a:r>
-              <a:rPr lang="en-US" sz="950" dirty="0">
-                <a:solidFill>
-                  <a:srgbClr val="334155"/>
-                </a:solidFill>
-                <a:latin typeface="Calibri" pitchFamily="34" charset="0"/>
-                <a:ea typeface="Calibri" pitchFamily="34" charset="-122"/>
-                <a:cs typeface="Calibri" pitchFamily="34" charset="-120"/>
-              </a:rPr>
-              <a:t>Results in frequent customer order dissatisfaction and an estimated 18%–22% plate food return rate across dining establishments.</a:t>
-            </a:r>
-            <a:endParaRPr lang="en-US" sz="950" dirty="0"/>
-          </a:p>
-        </p:txBody>
-      </p:sp>
-      <p:sp>
-        <p:nvSpPr>
-          <p:cNvPr id="13" name="Shape 10"/>
-          <p:cNvSpPr/>
-          <p:nvPr/>
-        </p:nvSpPr>
-        <p:spPr>
-          <a:xfrm>
-            <a:off x="548640" y="2880360"/>
-            <a:ext cx="3931920" cy="1554480"/>
+        </p:txBody>
+      </p:sp>
+      <p:sp>
+        <p:nvSpPr>
+          <p:cNvPr id="13" name="Text 10"/>
+          <p:cNvSpPr/>
+          <p:nvPr/>
+        </p:nvSpPr>
+        <p:spPr>
+          <a:xfrm>
+            <a:off x="5806440" y="1847088"/>
+            <a:ext cx="2651760" cy="320040"/>
+          </a:xfrm>
+          <a:prstGeom prst="rect">
+            <a:avLst/>
+          </a:prstGeom>
+          <a:noFill/>
+          <a:ln/>
+        </p:spPr>
+        <p:txBody>
+          <a:bodyPr wrap="square" lIns="0" tIns="0" rIns="0" bIns="0" rtlCol="0" anchor="ctr"/>
+          <a:lstStyle/>
+          <a:p>
+            <a:pPr indent="0" marL="0">
+              <a:buNone/>
+            </a:pPr>
+            <a:r>
+              <a:rPr lang="en-US" sz="850" dirty="0">
+                <a:solidFill>
+                  <a:srgbClr val="64748B"/>
+                </a:solidFill>
+                <a:latin typeface="Calibri" pitchFamily="34" charset="0"/>
+                <a:ea typeface="Calibri" pitchFamily="34" charset="-122"/>
+                <a:cs typeface="Calibri" pitchFamily="34" charset="-120"/>
+              </a:rPr>
+              <a:t>Caused by portion misjudgment from 2D photos</a:t>
+            </a:r>
+            <a:endParaRPr lang="en-US" sz="850" dirty="0"/>
+          </a:p>
+        </p:txBody>
+      </p:sp>
+      <p:sp>
+        <p:nvSpPr>
+          <p:cNvPr id="14" name="Shape 11"/>
+          <p:cNvSpPr/>
+          <p:nvPr/>
+        </p:nvSpPr>
+        <p:spPr>
+          <a:xfrm>
+            <a:off x="5669280" y="2331720"/>
+            <a:ext cx="2926080" cy="1051560"/>
           </a:xfrm>
           <a:prstGeom prst="roundRect">
             <a:avLst>
-              <a:gd name="adj" fmla="val 4706"/>
+              <a:gd name="adj" fmla="val 6957"/>
             </a:avLst>
           </a:prstGeom>
           <a:solidFill>
-            <a:srgbClr val="F8FAFC"/>
+            <a:srgbClr val="EFF6FF"/>
           </a:solidFill>
           <a:ln w="12700">
             <a:solidFill>
-              <a:srgbClr val="E2E8F0"/>
+              <a:srgbClr val="BFDBFE"/>
             </a:solidFill>
             <a:prstDash val="solid"/>
           </a:ln>
@@ -14584,14 +14832,14 @@
       </p:sp>
       <p:sp>
         <p:nvSpPr>
-          <p:cNvPr id="14" name="Text 11"/>
-          <p:cNvSpPr/>
-          <p:nvPr/>
-        </p:nvSpPr>
-        <p:spPr>
-          <a:xfrm>
-            <a:off x="777240" y="3063240"/>
-            <a:ext cx="3474720" cy="274320"/>
+          <p:cNvPr id="15" name="Text 12"/>
+          <p:cNvSpPr/>
+          <p:nvPr/>
+        </p:nvSpPr>
+        <p:spPr>
+          <a:xfrm>
+            <a:off x="5806440" y="2423160"/>
+            <a:ext cx="2651760" cy="320040"/>
           </a:xfrm>
           <a:prstGeom prst="rect">
             <a:avLst/>
@@ -14607,30 +14855,30 @@
               <a:buNone/>
             </a:pPr>
             <a:r>
-              <a:rPr lang="en-US" sz="1300" b="1" dirty="0">
-                <a:solidFill>
-                  <a:srgbClr val="1E3A8A"/>
+              <a:rPr lang="en-US" sz="1800" b="1" dirty="0">
+                <a:solidFill>
+                  <a:srgbClr val="D97706"/>
                 </a:solidFill>
                 <a:latin typeface="Cambria" pitchFamily="34" charset="0"/>
                 <a:ea typeface="Cambria" pitchFamily="34" charset="-122"/>
                 <a:cs typeface="Cambria" pitchFamily="34" charset="-120"/>
               </a:rPr>
-              <a:t>Limitations of Current Solutions</a:t>
-            </a:r>
-            <a:endParaRPr lang="en-US" sz="1300" dirty="0"/>
-          </a:p>
-        </p:txBody>
-      </p:sp>
-      <p:sp>
-        <p:nvSpPr>
-          <p:cNvPr id="15" name="Text 12"/>
-          <p:cNvSpPr/>
-          <p:nvPr/>
-        </p:nvSpPr>
-        <p:spPr>
-          <a:xfrm>
-            <a:off x="777240" y="3383280"/>
-            <a:ext cx="3474720" cy="914400"/>
+              <a:t>₹3,50,000+</a:t>
+            </a:r>
+            <a:endParaRPr lang="en-US" sz="1800" dirty="0"/>
+          </a:p>
+        </p:txBody>
+      </p:sp>
+      <p:sp>
+        <p:nvSpPr>
+          <p:cNvPr id="16" name="Text 13"/>
+          <p:cNvSpPr/>
+          <p:nvPr/>
+        </p:nvSpPr>
+        <p:spPr>
+          <a:xfrm>
+            <a:off x="5806440" y="2743200"/>
+            <a:ext cx="2651760" cy="228600"/>
           </a:xfrm>
           <a:prstGeom prst="rect">
             <a:avLst/>
@@ -14642,71 +14890,85 @@
           <a:bodyPr wrap="square" lIns="0" tIns="0" rIns="0" bIns="0" rtlCol="0" anchor="ctr"/>
           <a:lstStyle/>
           <a:p>
-            <a:pPr marL="342900" indent="-342900">
-              <a:spcAft>
-                <a:spcPts val="400"/>
-              </a:spcAft>
-              <a:buSzPct val="100000"/>
-              <a:buChar char="•"/>
-            </a:pPr>
-            <a:r>
-              <a:rPr lang="en-US" sz="950" dirty="0">
-                <a:solidFill>
-                  <a:srgbClr val="334155"/>
-                </a:solidFill>
-                <a:latin typeface="Calibri" pitchFamily="34" charset="0"/>
-                <a:ea typeface="Calibri" pitchFamily="34" charset="-122"/>
-                <a:cs typeface="Calibri" pitchFamily="34" charset="-120"/>
-              </a:rPr>
-              <a:t>Static QR Code PDF menus provide clunky, unresponsive pinch-and-zoom mobile experiences without cart integration.</a:t>
+            <a:pPr indent="0" marL="0">
+              <a:buNone/>
+            </a:pPr>
+            <a:r>
+              <a:rPr lang="en-US" sz="950" b="1" dirty="0">
+                <a:solidFill>
+                  <a:srgbClr val="0F172A"/>
+                </a:solidFill>
+                <a:latin typeface="Calibri" pitchFamily="34" charset="0"/>
+                <a:ea typeface="Calibri" pitchFamily="34" charset="-122"/>
+                <a:cs typeface="Calibri" pitchFamily="34" charset="-120"/>
+              </a:rPr>
+              <a:t>Hardware CAPEX / 10 Tables</a:t>
             </a:r>
             <a:endParaRPr lang="en-US" sz="950" dirty="0"/>
           </a:p>
-          <a:p>
-            <a:pPr marL="342900" indent="-342900">
-              <a:spcAft>
-                <a:spcPts val="400"/>
-              </a:spcAft>
-              <a:buSzPct val="100000"/>
-              <a:buChar char="•"/>
-            </a:pPr>
-            <a:r>
-              <a:rPr lang="en-US" sz="950" dirty="0">
-                <a:solidFill>
-                  <a:srgbClr val="334155"/>
-                </a:solidFill>
-                <a:latin typeface="Calibri" pitchFamily="34" charset="0"/>
-                <a:ea typeface="Calibri" pitchFamily="34" charset="-122"/>
-                <a:cs typeface="Calibri" pitchFamily="34" charset="-120"/>
-              </a:rPr>
-              <a:t>Proprietary tabletop touchscreen hardware requires high initial investment (₹35,000+ per table) and recurring maintenance.</a:t>
-            </a:r>
-            <a:endParaRPr lang="en-US" sz="950" dirty="0"/>
-          </a:p>
-        </p:txBody>
-      </p:sp>
-      <p:sp>
-        <p:nvSpPr>
-          <p:cNvPr id="16" name="Shape 13"/>
-          <p:cNvSpPr/>
-          <p:nvPr/>
-        </p:nvSpPr>
-        <p:spPr>
-          <a:xfrm>
-            <a:off x="4663440" y="2880360"/>
-            <a:ext cx="3931920" cy="1554480"/>
+        </p:txBody>
+      </p:sp>
+      <p:sp>
+        <p:nvSpPr>
+          <p:cNvPr id="17" name="Text 14"/>
+          <p:cNvSpPr/>
+          <p:nvPr/>
+        </p:nvSpPr>
+        <p:spPr>
+          <a:xfrm>
+            <a:off x="5806440" y="2990088"/>
+            <a:ext cx="2651760" cy="320040"/>
+          </a:xfrm>
+          <a:prstGeom prst="rect">
+            <a:avLst/>
+          </a:prstGeom>
+          <a:noFill/>
+          <a:ln/>
+        </p:spPr>
+        <p:txBody>
+          <a:bodyPr wrap="square" lIns="0" tIns="0" rIns="0" bIns="0" rtlCol="0" anchor="ctr"/>
+          <a:lstStyle/>
+          <a:p>
+            <a:pPr indent="0" marL="0">
+              <a:buNone/>
+            </a:pPr>
+            <a:r>
+              <a:rPr lang="en-US" sz="850" dirty="0">
+                <a:solidFill>
+                  <a:srgbClr val="64748B"/>
+                </a:solidFill>
+                <a:latin typeface="Calibri" pitchFamily="34" charset="0"/>
+                <a:ea typeface="Calibri" pitchFamily="34" charset="-122"/>
+                <a:cs typeface="Calibri" pitchFamily="34" charset="-120"/>
+              </a:rPr>
+              <a:t>Cost of proprietary tabletop POS touchscreen devices</a:t>
+            </a:r>
+            <a:endParaRPr lang="en-US" sz="850" dirty="0"/>
+          </a:p>
+        </p:txBody>
+      </p:sp>
+      <p:sp>
+        <p:nvSpPr>
+          <p:cNvPr id="18" name="Shape 15"/>
+          <p:cNvSpPr/>
+          <p:nvPr/>
+        </p:nvSpPr>
+        <p:spPr>
+          <a:xfrm>
+            <a:off x="5669280" y="3474720"/>
+            <a:ext cx="2926080" cy="1051560"/>
           </a:xfrm>
           <a:prstGeom prst="roundRect">
             <a:avLst>
-              <a:gd name="adj" fmla="val 4706"/>
+              <a:gd name="adj" fmla="val 6957"/>
             </a:avLst>
           </a:prstGeom>
           <a:solidFill>
-            <a:srgbClr val="F8FAFC"/>
+            <a:srgbClr val="EFF6FF"/>
           </a:solidFill>
           <a:ln w="12700">
             <a:solidFill>
-              <a:srgbClr val="E2E8F0"/>
+              <a:srgbClr val="BFDBFE"/>
             </a:solidFill>
             <a:prstDash val="solid"/>
           </a:ln>
@@ -14714,14 +14976,14 @@
       </p:sp>
       <p:sp>
         <p:nvSpPr>
-          <p:cNvPr id="17" name="Text 14"/>
-          <p:cNvSpPr/>
-          <p:nvPr/>
-        </p:nvSpPr>
-        <p:spPr>
-          <a:xfrm>
-            <a:off x="4892040" y="3063240"/>
-            <a:ext cx="3474720" cy="274320"/>
+          <p:cNvPr id="19" name="Text 16"/>
+          <p:cNvSpPr/>
+          <p:nvPr/>
+        </p:nvSpPr>
+        <p:spPr>
+          <a:xfrm>
+            <a:off x="5806440" y="3566160"/>
+            <a:ext cx="2651760" cy="320040"/>
           </a:xfrm>
           <a:prstGeom prst="rect">
             <a:avLst/>
@@ -14737,30 +14999,30 @@
               <a:buNone/>
             </a:pPr>
             <a:r>
-              <a:rPr lang="en-US" sz="1300" b="1" dirty="0">
-                <a:solidFill>
-                  <a:srgbClr val="1E3A8A"/>
+              <a:rPr lang="en-US" sz="1800" b="1" dirty="0">
+                <a:solidFill>
+                  <a:srgbClr val="2563EB"/>
                 </a:solidFill>
                 <a:latin typeface="Cambria" pitchFamily="34" charset="0"/>
                 <a:ea typeface="Cambria" pitchFamily="34" charset="-122"/>
                 <a:cs typeface="Cambria" pitchFamily="34" charset="-120"/>
               </a:rPr>
-              <a:t>Target Stakeholders &amp; Requirements</a:t>
-            </a:r>
-            <a:endParaRPr lang="en-US" sz="1300" dirty="0"/>
-          </a:p>
-        </p:txBody>
-      </p:sp>
-      <p:sp>
-        <p:nvSpPr>
-          <p:cNvPr id="18" name="Text 15"/>
-          <p:cNvSpPr/>
-          <p:nvPr/>
-        </p:nvSpPr>
-        <p:spPr>
-          <a:xfrm>
-            <a:off x="4892040" y="3383280"/>
-            <a:ext cx="3474720" cy="914400"/>
+              <a:t>70%+</a:t>
+            </a:r>
+            <a:endParaRPr lang="en-US" sz="1800" dirty="0"/>
+          </a:p>
+        </p:txBody>
+      </p:sp>
+      <p:sp>
+        <p:nvSpPr>
+          <p:cNvPr id="20" name="Text 17"/>
+          <p:cNvSpPr/>
+          <p:nvPr/>
+        </p:nvSpPr>
+        <p:spPr>
+          <a:xfrm>
+            <a:off x="5806440" y="3886200"/>
+            <a:ext cx="2651760" cy="228600"/>
           </a:xfrm>
           <a:prstGeom prst="rect">
             <a:avLst/>
@@ -14772,46 +15034,60 @@
           <a:bodyPr wrap="square" lIns="0" tIns="0" rIns="0" bIns="0" rtlCol="0" anchor="ctr"/>
           <a:lstStyle/>
           <a:p>
-            <a:pPr marL="342900" indent="-342900">
-              <a:spcAft>
-                <a:spcPts val="400"/>
-              </a:spcAft>
-              <a:buSzPct val="100000"/>
-              <a:buChar char="•"/>
-            </a:pPr>
-            <a:r>
-              <a:rPr lang="en-US" sz="950" dirty="0">
-                <a:solidFill>
-                  <a:srgbClr val="334155"/>
-                </a:solidFill>
-                <a:latin typeface="Calibri" pitchFamily="34" charset="0"/>
-                <a:ea typeface="Calibri" pitchFamily="34" charset="-122"/>
-                <a:cs typeface="Calibri" pitchFamily="34" charset="-120"/>
-              </a:rPr>
-              <a:t>Diners: Need zero-download 3D visual preview, dietary/allergen alerts, and convenient contactless ordering.</a:t>
+            <a:pPr indent="0" marL="0">
+              <a:buNone/>
+            </a:pPr>
+            <a:r>
+              <a:rPr lang="en-US" sz="950" b="1" dirty="0">
+                <a:solidFill>
+                  <a:srgbClr val="0F172A"/>
+                </a:solidFill>
+                <a:latin typeface="Calibri" pitchFamily="34" charset="0"/>
+                <a:ea typeface="Calibri" pitchFamily="34" charset="-122"/>
+                <a:cs typeface="Calibri" pitchFamily="34" charset="-120"/>
+              </a:rPr>
+              <a:t>App Install Abandonment</a:t>
             </a:r>
             <a:endParaRPr lang="en-US" sz="950" dirty="0"/>
           </a:p>
-          <a:p>
-            <a:pPr marL="342900" indent="-342900">
-              <a:spcAft>
-                <a:spcPts val="400"/>
-              </a:spcAft>
-              <a:buSzPct val="100000"/>
-              <a:buChar char="•"/>
-            </a:pPr>
-            <a:r>
-              <a:rPr lang="en-US" sz="950" dirty="0">
-                <a:solidFill>
-                  <a:srgbClr val="334155"/>
-                </a:solidFill>
-                <a:latin typeface="Calibri" pitchFamily="34" charset="0"/>
-                <a:ea typeface="Calibri" pitchFamily="34" charset="-122"/>
-                <a:cs typeface="Calibri" pitchFamily="34" charset="-120"/>
-              </a:rPr>
-              <a:t>Kitchen Staff &amp; Owners: Demand synchronized order dispatch, zero hardware CAPEX, and faster table turnaround.</a:t>
-            </a:r>
-            <a:endParaRPr lang="en-US" sz="950" dirty="0"/>
+        </p:txBody>
+      </p:sp>
+      <p:sp>
+        <p:nvSpPr>
+          <p:cNvPr id="21" name="Text 18"/>
+          <p:cNvSpPr/>
+          <p:nvPr/>
+        </p:nvSpPr>
+        <p:spPr>
+          <a:xfrm>
+            <a:off x="5806440" y="4133088"/>
+            <a:ext cx="2651760" cy="320040"/>
+          </a:xfrm>
+          <a:prstGeom prst="rect">
+            <a:avLst/>
+          </a:prstGeom>
+          <a:noFill/>
+          <a:ln/>
+        </p:spPr>
+        <p:txBody>
+          <a:bodyPr wrap="square" lIns="0" tIns="0" rIns="0" bIns="0" rtlCol="0" anchor="ctr"/>
+          <a:lstStyle/>
+          <a:p>
+            <a:pPr indent="0" marL="0">
+              <a:buNone/>
+            </a:pPr>
+            <a:r>
+              <a:rPr lang="en-US" sz="850" dirty="0">
+                <a:solidFill>
+                  <a:srgbClr val="64748B"/>
+                </a:solidFill>
+                <a:latin typeface="Calibri" pitchFamily="34" charset="0"/>
+                <a:ea typeface="Calibri" pitchFamily="34" charset="-122"/>
+                <a:cs typeface="Calibri" pitchFamily="34" charset="-120"/>
+              </a:rPr>
+              <a:t>Diners who refuse to install native AR apps in restaurants</a:t>
+            </a:r>
+            <a:endParaRPr lang="en-US" sz="850" dirty="0"/>
           </a:p>
         </p:txBody>
       </p:sp>
@@ -15444,7 +15720,7 @@
         <p:spPr>
           <a:xfrm>
             <a:off x="731520" y="1371600"/>
-            <a:ext cx="2194560" cy="365760"/>
+            <a:ext cx="2194560" cy="320040"/>
           </a:xfrm>
           <a:prstGeom prst="rect">
             <a:avLst/>
@@ -15460,7 +15736,7 @@
               <a:buNone/>
             </a:pPr>
             <a:r>
-              <a:rPr lang="en-US" sz="1250" b="1" dirty="0">
+              <a:rPr lang="en-US" sz="1300" b="1" dirty="0">
                 <a:solidFill>
                   <a:srgbClr val="1E3A8A"/>
                 </a:solidFill>
@@ -15468,9 +15744,9 @@
                 <a:ea typeface="Cambria" pitchFamily="34" charset="-122"/>
                 <a:cs typeface="Cambria" pitchFamily="34" charset="-120"/>
               </a:rPr>
-              <a:t>Societal &amp; Health Relevance</a:t>
-            </a:r>
-            <a:endParaRPr lang="en-US" sz="1250" dirty="0"/>
+              <a:t>Societal &amp; Public Health</a:t>
+            </a:r>
+            <a:endParaRPr lang="en-US" sz="1300" dirty="0"/>
           </a:p>
         </p:txBody>
       </p:sp>
@@ -15511,7 +15787,7 @@
                 <a:ea typeface="Calibri" pitchFamily="34" charset="-122"/>
                 <a:cs typeface="Calibri" pitchFamily="34" charset="-120"/>
               </a:rPr>
-              <a:t>Contactless ordering eliminates physical menu transmission vectors, improving dining hygiene.</a:t>
+              <a:t>Contactless ordering completely eliminates physical menu handling, preventing disease transmission vectors.</a:t>
             </a:r>
             <a:endParaRPr lang="en-US" sz="950" dirty="0"/>
           </a:p>
@@ -15532,7 +15808,7 @@
                 <a:ea typeface="Calibri" pitchFamily="34" charset="-122"/>
                 <a:cs typeface="Calibri" pitchFamily="34" charset="-120"/>
               </a:rPr>
-              <a:t>Clear allergen alerts (Gluten, Dairy, Nuts) and calorie breakdowns empower informed dining choices.</a:t>
+              <a:t>Explicit allergen declarations (Gluten, Dairy, Peanuts) and caloric metrics protect diner health.</a:t>
             </a:r>
             <a:endParaRPr lang="en-US" sz="950" dirty="0"/>
           </a:p>
@@ -15553,7 +15829,7 @@
                 <a:ea typeface="Calibri" pitchFamily="34" charset="-122"/>
                 <a:cs typeface="Calibri" pitchFamily="34" charset="-120"/>
               </a:rPr>
-              <a:t>Visual 3D representations assist patrons across diverse linguistic backgrounds.</a:t>
+              <a:t>Visual 3D representations provide an intuitive, universal dining experience for diverse patrons.</a:t>
             </a:r>
             <a:endParaRPr lang="en-US" sz="950" dirty="0"/>
           </a:p>
@@ -15595,7 +15871,7 @@
         <p:spPr>
           <a:xfrm>
             <a:off x="3474720" y="1371600"/>
-            <a:ext cx="2194560" cy="365760"/>
+            <a:ext cx="2194560" cy="320040"/>
           </a:xfrm>
           <a:prstGeom prst="rect">
             <a:avLst/>
@@ -15611,7 +15887,7 @@
               <a:buNone/>
             </a:pPr>
             <a:r>
-              <a:rPr lang="en-US" sz="1250" b="1" dirty="0">
+              <a:rPr lang="en-US" sz="1300" b="1" dirty="0">
                 <a:solidFill>
                   <a:srgbClr val="1E3A8A"/>
                 </a:solidFill>
@@ -15619,9 +15895,9 @@
                 <a:ea typeface="Cambria" pitchFamily="34" charset="-122"/>
                 <a:cs typeface="Cambria" pitchFamily="34" charset="-120"/>
               </a:rPr>
-              <a:t>Industrial &amp; Economic Impact</a:t>
-            </a:r>
-            <a:endParaRPr lang="en-US" sz="1250" dirty="0"/>
+              <a:t>Industrial &amp; Economic</a:t>
+            </a:r>
+            <a:endParaRPr lang="en-US" sz="1300" dirty="0"/>
           </a:p>
         </p:txBody>
       </p:sp>
@@ -15662,7 +15938,7 @@
                 <a:ea typeface="Calibri" pitchFamily="34" charset="-122"/>
                 <a:cs typeface="Calibri" pitchFamily="34" charset="-120"/>
               </a:rPr>
-              <a:t>Eliminates dedicated tabletop POS hardware by leveraging patrons' personal smartphones (Zero CAPEX).</a:t>
+              <a:t>Eliminates dedicated tabletop POS hardware by utilizing patrons' personal smartphones (Zero CAPEX).</a:t>
             </a:r>
             <a:endParaRPr lang="en-US" sz="950" dirty="0"/>
           </a:p>
@@ -15683,7 +15959,7 @@
                 <a:ea typeface="Calibri" pitchFamily="34" charset="-122"/>
                 <a:cs typeface="Calibri" pitchFamily="34" charset="-120"/>
               </a:rPr>
-              <a:t>Accelerates table turnaround by up to 25% through synchronized digital ordering.</a:t>
+              <a:t>Speeds up table turnaround time by 25% through synchronized digital ordering and instant kitchen dispatch.</a:t>
             </a:r>
             <a:endParaRPr lang="en-US" sz="950" dirty="0"/>
           </a:p>
@@ -15704,7 +15980,7 @@
                 <a:ea typeface="Calibri" pitchFamily="34" charset="-122"/>
                 <a:cs typeface="Calibri" pitchFamily="34" charset="-120"/>
               </a:rPr>
-              <a:t>Instant cloud menu updates eliminate recurring design and paper printing costs.</a:t>
+              <a:t>Cloud-managed digital menu eliminates recurring printing, lamination, and redesign overheads.</a:t>
             </a:r>
             <a:endParaRPr lang="en-US" sz="950" dirty="0"/>
           </a:p>
@@ -15746,7 +16022,7 @@
         <p:spPr>
           <a:xfrm>
             <a:off x="6217920" y="1371600"/>
-            <a:ext cx="2194560" cy="365760"/>
+            <a:ext cx="2194560" cy="320040"/>
           </a:xfrm>
           <a:prstGeom prst="rect">
             <a:avLst/>
@@ -15762,7 +16038,7 @@
               <a:buNone/>
             </a:pPr>
             <a:r>
-              <a:rPr lang="en-US" sz="1250" b="1" dirty="0">
+              <a:rPr lang="en-US" sz="1300" b="1" dirty="0">
                 <a:solidFill>
                   <a:srgbClr val="1E3A8A"/>
                 </a:solidFill>
@@ -15770,9 +16046,9 @@
                 <a:ea typeface="Cambria" pitchFamily="34" charset="-122"/>
                 <a:cs typeface="Cambria" pitchFamily="34" charset="-120"/>
               </a:rPr>
-              <a:t>Environmental &amp; Food Waste Reduction</a:t>
-            </a:r>
-            <a:endParaRPr lang="en-US" sz="1250" dirty="0"/>
+              <a:t>Environmental Impact</a:t>
+            </a:r>
+            <a:endParaRPr lang="en-US" sz="1300" dirty="0"/>
           </a:p>
         </p:txBody>
       </p:sp>
@@ -15813,7 +16089,7 @@
                 <a:ea typeface="Calibri" pitchFamily="34" charset="-122"/>
                 <a:cs typeface="Calibri" pitchFamily="34" charset="-120"/>
               </a:rPr>
-              <a:t>100% paperless operation eliminates kilograms of laminated paper and plastic per restaurant annually.</a:t>
+              <a:t>100% paperless menu ecosystem saves kilograms of laminated paper and plastic per restaurant annually.</a:t>
             </a:r>
             <a:endParaRPr lang="en-US" sz="950" dirty="0"/>
           </a:p>
@@ -15834,7 +16110,7 @@
                 <a:ea typeface="Calibri" pitchFamily="34" charset="-122"/>
                 <a:cs typeface="Calibri" pitchFamily="34" charset="-120"/>
               </a:rPr>
-              <a:t>Realistic 1:1 metric scale AR preview reduces portion misjudgments and plate food waste by up to 28%.</a:t>
+              <a:t>True 1:1 metric scale AR portion preview cuts food order remorse and plate return waste by up to 28%.</a:t>
             </a:r>
             <a:endParaRPr lang="en-US" sz="950" dirty="0"/>
           </a:p>
@@ -15855,7 +16131,7 @@
                 <a:ea typeface="Calibri" pitchFamily="34" charset="-122"/>
                 <a:cs typeface="Calibri" pitchFamily="34" charset="-120"/>
               </a:rPr>
-              <a:t>Serverless cloud architecture minimizes energy footprint compared to dedicated on-premise servers.</a:t>
+              <a:t>Serverless cloud deployment minimizes energy consumption compared to continuous on-premise servers.</a:t>
             </a:r>
             <a:endParaRPr lang="en-US" sz="950" dirty="0"/>
           </a:p>
@@ -19158,7 +19434,7 @@
                 <a:ea typeface="Cambria" pitchFamily="34" charset="-122"/>
                 <a:cs typeface="Cambria" pitchFamily="34" charset="-120"/>
               </a:rPr>
-              <a:t>Proposed Smart Restaurant Architecture &amp; Key Capabilities</a:t>
+              <a:t>Proposed Smart Restaurant Architecture &amp; Workflow</a:t>
             </a:r>
             <a:endParaRPr lang="en-US" sz="1650" dirty="0"/>
           </a:p>
@@ -19290,11 +19566,587 @@
         <p:spPr>
           <a:xfrm>
             <a:off x="548640" y="1188720"/>
-            <a:ext cx="3931920" cy="1554480"/>
+            <a:ext cx="1965960" cy="1325880"/>
           </a:xfrm>
           <a:prstGeom prst="roundRect">
             <a:avLst>
-              <a:gd name="adj" fmla="val 4706"/>
+              <a:gd name="adj" fmla="val 5517"/>
+            </a:avLst>
+          </a:prstGeom>
+          <a:solidFill>
+            <a:srgbClr val="EFF6FF"/>
+          </a:solidFill>
+          <a:ln w="12700">
+            <a:solidFill>
+              <a:srgbClr val="BFDBFE"/>
+            </a:solidFill>
+            <a:prstDash val="solid"/>
+          </a:ln>
+        </p:spPr>
+      </p:sp>
+      <p:sp>
+        <p:nvSpPr>
+          <p:cNvPr id="8" name="Text 5"/>
+          <p:cNvSpPr/>
+          <p:nvPr/>
+        </p:nvSpPr>
+        <p:spPr>
+          <a:xfrm>
+            <a:off x="685800" y="1298448"/>
+            <a:ext cx="1691640" cy="201168"/>
+          </a:xfrm>
+          <a:prstGeom prst="rect">
+            <a:avLst/>
+          </a:prstGeom>
+          <a:noFill/>
+          <a:ln/>
+        </p:spPr>
+        <p:txBody>
+          <a:bodyPr wrap="square" lIns="0" tIns="0" rIns="0" bIns="0" rtlCol="0" anchor="ctr"/>
+          <a:lstStyle/>
+          <a:p>
+            <a:pPr indent="0" marL="0">
+              <a:buNone/>
+            </a:pPr>
+            <a:r>
+              <a:rPr lang="en-US" sz="900" b="1" dirty="0">
+                <a:solidFill>
+                  <a:srgbClr val="2563EB"/>
+                </a:solidFill>
+                <a:latin typeface="Calibri" pitchFamily="34" charset="0"/>
+                <a:ea typeface="Calibri" pitchFamily="34" charset="-122"/>
+                <a:cs typeface="Calibri" pitchFamily="34" charset="-120"/>
+              </a:rPr>
+              <a:t>STEP 01</a:t>
+            </a:r>
+            <a:endParaRPr lang="en-US" sz="900" dirty="0"/>
+          </a:p>
+        </p:txBody>
+      </p:sp>
+      <p:sp>
+        <p:nvSpPr>
+          <p:cNvPr id="9" name="Text 6"/>
+          <p:cNvSpPr/>
+          <p:nvPr/>
+        </p:nvSpPr>
+        <p:spPr>
+          <a:xfrm>
+            <a:off x="685800" y="1517904"/>
+            <a:ext cx="1691640" cy="256032"/>
+          </a:xfrm>
+          <a:prstGeom prst="rect">
+            <a:avLst/>
+          </a:prstGeom>
+          <a:noFill/>
+          <a:ln/>
+        </p:spPr>
+        <p:txBody>
+          <a:bodyPr wrap="square" lIns="0" tIns="0" rIns="0" bIns="0" rtlCol="0" anchor="ctr"/>
+          <a:lstStyle/>
+          <a:p>
+            <a:pPr indent="0" marL="0">
+              <a:buNone/>
+            </a:pPr>
+            <a:r>
+              <a:rPr lang="en-US" sz="1150" b="1" dirty="0">
+                <a:solidFill>
+                  <a:srgbClr val="1E3A8A"/>
+                </a:solidFill>
+                <a:latin typeface="Cambria" pitchFamily="34" charset="0"/>
+                <a:ea typeface="Cambria" pitchFamily="34" charset="-122"/>
+                <a:cs typeface="Cambria" pitchFamily="34" charset="-120"/>
+              </a:rPr>
+              <a:t>Scan Table QR</a:t>
+            </a:r>
+            <a:endParaRPr lang="en-US" sz="1150" dirty="0"/>
+          </a:p>
+        </p:txBody>
+      </p:sp>
+      <p:sp>
+        <p:nvSpPr>
+          <p:cNvPr id="10" name="Text 7"/>
+          <p:cNvSpPr/>
+          <p:nvPr/>
+        </p:nvSpPr>
+        <p:spPr>
+          <a:xfrm>
+            <a:off x="685800" y="1792224"/>
+            <a:ext cx="1691640" cy="640080"/>
+          </a:xfrm>
+          <a:prstGeom prst="rect">
+            <a:avLst/>
+          </a:prstGeom>
+          <a:noFill/>
+          <a:ln/>
+        </p:spPr>
+        <p:txBody>
+          <a:bodyPr wrap="square" lIns="0" tIns="0" rIns="0" bIns="0" rtlCol="0" anchor="ctr"/>
+          <a:lstStyle/>
+          <a:p>
+            <a:pPr indent="0" marL="0">
+              <a:buNone/>
+            </a:pPr>
+            <a:r>
+              <a:rPr lang="en-US" sz="850" dirty="0">
+                <a:solidFill>
+                  <a:srgbClr val="334155"/>
+                </a:solidFill>
+                <a:latin typeface="Calibri" pitchFamily="34" charset="0"/>
+                <a:ea typeface="Calibri" pitchFamily="34" charset="-122"/>
+                <a:cs typeface="Calibri" pitchFamily="34" charset="-120"/>
+              </a:rPr>
+              <a:t>Instant PWA launch (`/?table=1`) with active cart session</a:t>
+            </a:r>
+            <a:endParaRPr lang="en-US" sz="850" dirty="0"/>
+          </a:p>
+        </p:txBody>
+      </p:sp>
+      <p:sp>
+        <p:nvSpPr>
+          <p:cNvPr id="11" name="Shape 8"/>
+          <p:cNvSpPr/>
+          <p:nvPr/>
+        </p:nvSpPr>
+        <p:spPr>
+          <a:xfrm>
+            <a:off x="2606040" y="1188720"/>
+            <a:ext cx="1965960" cy="1325880"/>
+          </a:xfrm>
+          <a:prstGeom prst="roundRect">
+            <a:avLst>
+              <a:gd name="adj" fmla="val 5517"/>
+            </a:avLst>
+          </a:prstGeom>
+          <a:solidFill>
+            <a:srgbClr val="EFF6FF"/>
+          </a:solidFill>
+          <a:ln w="12700">
+            <a:solidFill>
+              <a:srgbClr val="BFDBFE"/>
+            </a:solidFill>
+            <a:prstDash val="solid"/>
+          </a:ln>
+        </p:spPr>
+      </p:sp>
+      <p:sp>
+        <p:nvSpPr>
+          <p:cNvPr id="12" name="Text 9"/>
+          <p:cNvSpPr/>
+          <p:nvPr/>
+        </p:nvSpPr>
+        <p:spPr>
+          <a:xfrm>
+            <a:off x="2743200" y="1298448"/>
+            <a:ext cx="1691640" cy="201168"/>
+          </a:xfrm>
+          <a:prstGeom prst="rect">
+            <a:avLst/>
+          </a:prstGeom>
+          <a:noFill/>
+          <a:ln/>
+        </p:spPr>
+        <p:txBody>
+          <a:bodyPr wrap="square" lIns="0" tIns="0" rIns="0" bIns="0" rtlCol="0" anchor="ctr"/>
+          <a:lstStyle/>
+          <a:p>
+            <a:pPr indent="0" marL="0">
+              <a:buNone/>
+            </a:pPr>
+            <a:r>
+              <a:rPr lang="en-US" sz="900" b="1" dirty="0">
+                <a:solidFill>
+                  <a:srgbClr val="2563EB"/>
+                </a:solidFill>
+                <a:latin typeface="Calibri" pitchFamily="34" charset="0"/>
+                <a:ea typeface="Calibri" pitchFamily="34" charset="-122"/>
+                <a:cs typeface="Calibri" pitchFamily="34" charset="-120"/>
+              </a:rPr>
+              <a:t>STEP 02</a:t>
+            </a:r>
+            <a:endParaRPr lang="en-US" sz="900" dirty="0"/>
+          </a:p>
+        </p:txBody>
+      </p:sp>
+      <p:sp>
+        <p:nvSpPr>
+          <p:cNvPr id="13" name="Text 10"/>
+          <p:cNvSpPr/>
+          <p:nvPr/>
+        </p:nvSpPr>
+        <p:spPr>
+          <a:xfrm>
+            <a:off x="2743200" y="1517904"/>
+            <a:ext cx="1691640" cy="256032"/>
+          </a:xfrm>
+          <a:prstGeom prst="rect">
+            <a:avLst/>
+          </a:prstGeom>
+          <a:noFill/>
+          <a:ln/>
+        </p:spPr>
+        <p:txBody>
+          <a:bodyPr wrap="square" lIns="0" tIns="0" rIns="0" bIns="0" rtlCol="0" anchor="ctr"/>
+          <a:lstStyle/>
+          <a:p>
+            <a:pPr indent="0" marL="0">
+              <a:buNone/>
+            </a:pPr>
+            <a:r>
+              <a:rPr lang="en-US" sz="1150" b="1" dirty="0">
+                <a:solidFill>
+                  <a:srgbClr val="1E3A8A"/>
+                </a:solidFill>
+                <a:latin typeface="Cambria" pitchFamily="34" charset="0"/>
+                <a:ea typeface="Cambria" pitchFamily="34" charset="-122"/>
+                <a:cs typeface="Cambria" pitchFamily="34" charset="-120"/>
+              </a:rPr>
+              <a:t>Filter Menu</a:t>
+            </a:r>
+            <a:endParaRPr lang="en-US" sz="1150" dirty="0"/>
+          </a:p>
+        </p:txBody>
+      </p:sp>
+      <p:sp>
+        <p:nvSpPr>
+          <p:cNvPr id="14" name="Text 11"/>
+          <p:cNvSpPr/>
+          <p:nvPr/>
+        </p:nvSpPr>
+        <p:spPr>
+          <a:xfrm>
+            <a:off x="2743200" y="1792224"/>
+            <a:ext cx="1691640" cy="640080"/>
+          </a:xfrm>
+          <a:prstGeom prst="rect">
+            <a:avLst/>
+          </a:prstGeom>
+          <a:noFill/>
+          <a:ln/>
+        </p:spPr>
+        <p:txBody>
+          <a:bodyPr wrap="square" lIns="0" tIns="0" rIns="0" bIns="0" rtlCol="0" anchor="ctr"/>
+          <a:lstStyle/>
+          <a:p>
+            <a:pPr indent="0" marL="0">
+              <a:buNone/>
+            </a:pPr>
+            <a:r>
+              <a:rPr lang="en-US" sz="850" dirty="0">
+                <a:solidFill>
+                  <a:srgbClr val="334155"/>
+                </a:solidFill>
+                <a:latin typeface="Calibri" pitchFamily="34" charset="0"/>
+                <a:ea typeface="Calibri" pitchFamily="34" charset="-122"/>
+                <a:cs typeface="Calibri" pitchFamily="34" charset="-120"/>
+              </a:rPr>
+              <a:t>Interactive search by veg, allergens, spice &amp; calories</a:t>
+            </a:r>
+            <a:endParaRPr lang="en-US" sz="850" dirty="0"/>
+          </a:p>
+        </p:txBody>
+      </p:sp>
+      <p:sp>
+        <p:nvSpPr>
+          <p:cNvPr id="15" name="Shape 12"/>
+          <p:cNvSpPr/>
+          <p:nvPr/>
+        </p:nvSpPr>
+        <p:spPr>
+          <a:xfrm>
+            <a:off x="4663440" y="1188720"/>
+            <a:ext cx="1965960" cy="1325880"/>
+          </a:xfrm>
+          <a:prstGeom prst="roundRect">
+            <a:avLst>
+              <a:gd name="adj" fmla="val 5517"/>
+            </a:avLst>
+          </a:prstGeom>
+          <a:solidFill>
+            <a:srgbClr val="EFF6FF"/>
+          </a:solidFill>
+          <a:ln w="12700">
+            <a:solidFill>
+              <a:srgbClr val="BFDBFE"/>
+            </a:solidFill>
+            <a:prstDash val="solid"/>
+          </a:ln>
+        </p:spPr>
+      </p:sp>
+      <p:sp>
+        <p:nvSpPr>
+          <p:cNvPr id="16" name="Text 13"/>
+          <p:cNvSpPr/>
+          <p:nvPr/>
+        </p:nvSpPr>
+        <p:spPr>
+          <a:xfrm>
+            <a:off x="4800600" y="1298448"/>
+            <a:ext cx="1691640" cy="201168"/>
+          </a:xfrm>
+          <a:prstGeom prst="rect">
+            <a:avLst/>
+          </a:prstGeom>
+          <a:noFill/>
+          <a:ln/>
+        </p:spPr>
+        <p:txBody>
+          <a:bodyPr wrap="square" lIns="0" tIns="0" rIns="0" bIns="0" rtlCol="0" anchor="ctr"/>
+          <a:lstStyle/>
+          <a:p>
+            <a:pPr indent="0" marL="0">
+              <a:buNone/>
+            </a:pPr>
+            <a:r>
+              <a:rPr lang="en-US" sz="900" b="1" dirty="0">
+                <a:solidFill>
+                  <a:srgbClr val="2563EB"/>
+                </a:solidFill>
+                <a:latin typeface="Calibri" pitchFamily="34" charset="0"/>
+                <a:ea typeface="Calibri" pitchFamily="34" charset="-122"/>
+                <a:cs typeface="Calibri" pitchFamily="34" charset="-120"/>
+              </a:rPr>
+              <a:t>STEP 03</a:t>
+            </a:r>
+            <a:endParaRPr lang="en-US" sz="900" dirty="0"/>
+          </a:p>
+        </p:txBody>
+      </p:sp>
+      <p:sp>
+        <p:nvSpPr>
+          <p:cNvPr id="17" name="Text 14"/>
+          <p:cNvSpPr/>
+          <p:nvPr/>
+        </p:nvSpPr>
+        <p:spPr>
+          <a:xfrm>
+            <a:off x="4800600" y="1517904"/>
+            <a:ext cx="1691640" cy="256032"/>
+          </a:xfrm>
+          <a:prstGeom prst="rect">
+            <a:avLst/>
+          </a:prstGeom>
+          <a:noFill/>
+          <a:ln/>
+        </p:spPr>
+        <p:txBody>
+          <a:bodyPr wrap="square" lIns="0" tIns="0" rIns="0" bIns="0" rtlCol="0" anchor="ctr"/>
+          <a:lstStyle/>
+          <a:p>
+            <a:pPr indent="0" marL="0">
+              <a:buNone/>
+            </a:pPr>
+            <a:r>
+              <a:rPr lang="en-US" sz="1150" b="1" dirty="0">
+                <a:solidFill>
+                  <a:srgbClr val="1E3A8A"/>
+                </a:solidFill>
+                <a:latin typeface="Cambria" pitchFamily="34" charset="0"/>
+                <a:ea typeface="Cambria" pitchFamily="34" charset="-122"/>
+                <a:cs typeface="Cambria" pitchFamily="34" charset="-120"/>
+              </a:rPr>
+              <a:t>3D AR Preview</a:t>
+            </a:r>
+            <a:endParaRPr lang="en-US" sz="1150" dirty="0"/>
+          </a:p>
+        </p:txBody>
+      </p:sp>
+      <p:sp>
+        <p:nvSpPr>
+          <p:cNvPr id="18" name="Text 15"/>
+          <p:cNvSpPr/>
+          <p:nvPr/>
+        </p:nvSpPr>
+        <p:spPr>
+          <a:xfrm>
+            <a:off x="4800600" y="1792224"/>
+            <a:ext cx="1691640" cy="640080"/>
+          </a:xfrm>
+          <a:prstGeom prst="rect">
+            <a:avLst/>
+          </a:prstGeom>
+          <a:noFill/>
+          <a:ln/>
+        </p:spPr>
+        <p:txBody>
+          <a:bodyPr wrap="square" lIns="0" tIns="0" rIns="0" bIns="0" rtlCol="0" anchor="ctr"/>
+          <a:lstStyle/>
+          <a:p>
+            <a:pPr indent="0" marL="0">
+              <a:buNone/>
+            </a:pPr>
+            <a:r>
+              <a:rPr lang="en-US" sz="850" dirty="0">
+                <a:solidFill>
+                  <a:srgbClr val="334155"/>
+                </a:solidFill>
+                <a:latin typeface="Calibri" pitchFamily="34" charset="0"/>
+                <a:ea typeface="Calibri" pitchFamily="34" charset="-122"/>
+                <a:cs typeface="Calibri" pitchFamily="34" charset="-120"/>
+              </a:rPr>
+              <a:t>1:1 scale dish placed onto physical table surface</a:t>
+            </a:r>
+            <a:endParaRPr lang="en-US" sz="850" dirty="0"/>
+          </a:p>
+        </p:txBody>
+      </p:sp>
+      <p:sp>
+        <p:nvSpPr>
+          <p:cNvPr id="19" name="Shape 16"/>
+          <p:cNvSpPr/>
+          <p:nvPr/>
+        </p:nvSpPr>
+        <p:spPr>
+          <a:xfrm>
+            <a:off x="6720840" y="1188720"/>
+            <a:ext cx="1965960" cy="1325880"/>
+          </a:xfrm>
+          <a:prstGeom prst="roundRect">
+            <a:avLst>
+              <a:gd name="adj" fmla="val 5517"/>
+            </a:avLst>
+          </a:prstGeom>
+          <a:solidFill>
+            <a:srgbClr val="EFF6FF"/>
+          </a:solidFill>
+          <a:ln w="12700">
+            <a:solidFill>
+              <a:srgbClr val="BFDBFE"/>
+            </a:solidFill>
+            <a:prstDash val="solid"/>
+          </a:ln>
+        </p:spPr>
+      </p:sp>
+      <p:sp>
+        <p:nvSpPr>
+          <p:cNvPr id="20" name="Text 17"/>
+          <p:cNvSpPr/>
+          <p:nvPr/>
+        </p:nvSpPr>
+        <p:spPr>
+          <a:xfrm>
+            <a:off x="6858000" y="1298448"/>
+            <a:ext cx="1691640" cy="201168"/>
+          </a:xfrm>
+          <a:prstGeom prst="rect">
+            <a:avLst/>
+          </a:prstGeom>
+          <a:noFill/>
+          <a:ln/>
+        </p:spPr>
+        <p:txBody>
+          <a:bodyPr wrap="square" lIns="0" tIns="0" rIns="0" bIns="0" rtlCol="0" anchor="ctr"/>
+          <a:lstStyle/>
+          <a:p>
+            <a:pPr indent="0" marL="0">
+              <a:buNone/>
+            </a:pPr>
+            <a:r>
+              <a:rPr lang="en-US" sz="900" b="1" dirty="0">
+                <a:solidFill>
+                  <a:srgbClr val="2563EB"/>
+                </a:solidFill>
+                <a:latin typeface="Calibri" pitchFamily="34" charset="0"/>
+                <a:ea typeface="Calibri" pitchFamily="34" charset="-122"/>
+                <a:cs typeface="Calibri" pitchFamily="34" charset="-120"/>
+              </a:rPr>
+              <a:t>STEP 04</a:t>
+            </a:r>
+            <a:endParaRPr lang="en-US" sz="900" dirty="0"/>
+          </a:p>
+        </p:txBody>
+      </p:sp>
+      <p:sp>
+        <p:nvSpPr>
+          <p:cNvPr id="21" name="Text 18"/>
+          <p:cNvSpPr/>
+          <p:nvPr/>
+        </p:nvSpPr>
+        <p:spPr>
+          <a:xfrm>
+            <a:off x="6858000" y="1517904"/>
+            <a:ext cx="1691640" cy="256032"/>
+          </a:xfrm>
+          <a:prstGeom prst="rect">
+            <a:avLst/>
+          </a:prstGeom>
+          <a:noFill/>
+          <a:ln/>
+        </p:spPr>
+        <p:txBody>
+          <a:bodyPr wrap="square" lIns="0" tIns="0" rIns="0" bIns="0" rtlCol="0" anchor="ctr"/>
+          <a:lstStyle/>
+          <a:p>
+            <a:pPr indent="0" marL="0">
+              <a:buNone/>
+            </a:pPr>
+            <a:r>
+              <a:rPr lang="en-US" sz="1150" b="1" dirty="0">
+                <a:solidFill>
+                  <a:srgbClr val="1E3A8A"/>
+                </a:solidFill>
+                <a:latin typeface="Cambria" pitchFamily="34" charset="0"/>
+                <a:ea typeface="Cambria" pitchFamily="34" charset="-122"/>
+                <a:cs typeface="Cambria" pitchFamily="34" charset="-120"/>
+              </a:rPr>
+              <a:t>Live KDS Dispatch</a:t>
+            </a:r>
+            <a:endParaRPr lang="en-US" sz="1150" dirty="0"/>
+          </a:p>
+        </p:txBody>
+      </p:sp>
+      <p:sp>
+        <p:nvSpPr>
+          <p:cNvPr id="22" name="Text 19"/>
+          <p:cNvSpPr/>
+          <p:nvPr/>
+        </p:nvSpPr>
+        <p:spPr>
+          <a:xfrm>
+            <a:off x="6858000" y="1792224"/>
+            <a:ext cx="1691640" cy="640080"/>
+          </a:xfrm>
+          <a:prstGeom prst="rect">
+            <a:avLst/>
+          </a:prstGeom>
+          <a:noFill/>
+          <a:ln/>
+        </p:spPr>
+        <p:txBody>
+          <a:bodyPr wrap="square" lIns="0" tIns="0" rIns="0" bIns="0" rtlCol="0" anchor="ctr"/>
+          <a:lstStyle/>
+          <a:p>
+            <a:pPr indent="0" marL="0">
+              <a:buNone/>
+            </a:pPr>
+            <a:r>
+              <a:rPr lang="en-US" sz="850" dirty="0">
+                <a:solidFill>
+                  <a:srgbClr val="334155"/>
+                </a:solidFill>
+                <a:latin typeface="Calibri" pitchFamily="34" charset="0"/>
+                <a:ea typeface="Calibri" pitchFamily="34" charset="-122"/>
+                <a:cs typeface="Calibri" pitchFamily="34" charset="-120"/>
+              </a:rPr>
+              <a:t>Instant kitchen ticket queue with acoustic alert</a:t>
+            </a:r>
+            <a:endParaRPr lang="en-US" sz="850" dirty="0"/>
+          </a:p>
+        </p:txBody>
+      </p:sp>
+      <p:sp>
+        <p:nvSpPr>
+          <p:cNvPr id="23" name="Shape 20"/>
+          <p:cNvSpPr/>
+          <p:nvPr/>
+        </p:nvSpPr>
+        <p:spPr>
+          <a:xfrm>
+            <a:off x="548640" y="2697480"/>
+            <a:ext cx="3931920" cy="1920240"/>
+          </a:xfrm>
+          <a:prstGeom prst="roundRect">
+            <a:avLst>
+              <a:gd name="adj" fmla="val 3810"/>
             </a:avLst>
           </a:prstGeom>
           <a:solidFill>
@@ -19310,13 +20162,13 @@
       </p:sp>
       <p:sp>
         <p:nvSpPr>
-          <p:cNvPr id="8" name="Text 5"/>
-          <p:cNvSpPr/>
-          <p:nvPr/>
-        </p:nvSpPr>
-        <p:spPr>
-          <a:xfrm>
-            <a:off x="777240" y="1371600"/>
+          <p:cNvPr id="24" name="Text 21"/>
+          <p:cNvSpPr/>
+          <p:nvPr/>
+        </p:nvSpPr>
+        <p:spPr>
+          <a:xfrm>
+            <a:off x="777240" y="2834640"/>
             <a:ext cx="3474720" cy="274320"/>
           </a:xfrm>
           <a:prstGeom prst="rect">
@@ -19333,7 +20185,7 @@
               <a:buNone/>
             </a:pPr>
             <a:r>
-              <a:rPr lang="en-US" sz="1300" b="1" dirty="0">
+              <a:rPr lang="en-US" sz="1250" b="1" dirty="0">
                 <a:solidFill>
                   <a:srgbClr val="1E3A8A"/>
                 </a:solidFill>
@@ -19341,22 +20193,22 @@
                 <a:ea typeface="Cambria" pitchFamily="34" charset="-122"/>
                 <a:cs typeface="Cambria" pitchFamily="34" charset="-120"/>
               </a:rPr>
-              <a:t>Instant Table QR Onboarding</a:t>
-            </a:r>
-            <a:endParaRPr lang="en-US" sz="1300" dirty="0"/>
-          </a:p>
-        </p:txBody>
-      </p:sp>
-      <p:sp>
-        <p:nvSpPr>
-          <p:cNvPr id="9" name="Text 6"/>
-          <p:cNvSpPr/>
-          <p:nvPr/>
-        </p:nvSpPr>
-        <p:spPr>
-          <a:xfrm>
-            <a:off x="777240" y="1691640"/>
-            <a:ext cx="3474720" cy="914400"/>
+              <a:t>Customer-Facing Spatial Dining Experience</a:t>
+            </a:r>
+            <a:endParaRPr lang="en-US" sz="1250" dirty="0"/>
+          </a:p>
+        </p:txBody>
+      </p:sp>
+      <p:sp>
+        <p:nvSpPr>
+          <p:cNvPr id="25" name="Text 22"/>
+          <p:cNvSpPr/>
+          <p:nvPr/>
+        </p:nvSpPr>
+        <p:spPr>
+          <a:xfrm>
+            <a:off x="777240" y="3154680"/>
+            <a:ext cx="3474720" cy="1371600"/>
           </a:xfrm>
           <a:prstGeom prst="rect">
             <a:avLst/>
@@ -19368,8 +20220,12 @@
           <a:bodyPr wrap="square" lIns="0" tIns="0" rIns="0" bIns="0" rtlCol="0" anchor="ctr"/>
           <a:lstStyle/>
           <a:p>
-            <a:pPr indent="0" marL="0">
-              <a:buNone/>
+            <a:pPr marL="342900" indent="-342900">
+              <a:spcAft>
+                <a:spcPts val="400"/>
+              </a:spcAft>
+              <a:buSzPct val="100000"/>
+              <a:buChar char="•"/>
             </a:pPr>
             <a:r>
               <a:rPr lang="en-US" sz="950" dirty="0">
@@ -19380,26 +20236,68 @@
                 <a:ea typeface="Calibri" pitchFamily="34" charset="-122"/>
                 <a:cs typeface="Calibri" pitchFamily="34" charset="-120"/>
               </a:rPr>
-              <a:t>Patrons scan a table QR code (e.g., `/?table=1`) to launch the responsive dining portal instantly with zero installation, initializing a persistent dining cart session.</a:t>
+              <a:t>Zero Installation Barrier: Runs directly inside Chrome, Safari, and Edge on Android &amp; iOS.</a:t>
             </a:r>
             <a:endParaRPr lang="en-US" sz="950" dirty="0"/>
           </a:p>
-        </p:txBody>
-      </p:sp>
-      <p:sp>
-        <p:nvSpPr>
-          <p:cNvPr id="10" name="Shape 7"/>
-          <p:cNvSpPr/>
-          <p:nvPr/>
-        </p:nvSpPr>
-        <p:spPr>
-          <a:xfrm>
-            <a:off x="4663440" y="1188720"/>
-            <a:ext cx="3931920" cy="1554480"/>
+          <a:p>
+            <a:pPr marL="342900" indent="-342900">
+              <a:spcAft>
+                <a:spcPts val="400"/>
+              </a:spcAft>
+              <a:buSzPct val="100000"/>
+              <a:buChar char="•"/>
+            </a:pPr>
+            <a:r>
+              <a:rPr lang="en-US" sz="950" dirty="0">
+                <a:solidFill>
+                  <a:srgbClr val="334155"/>
+                </a:solidFill>
+                <a:latin typeface="Calibri" pitchFamily="34" charset="0"/>
+                <a:ea typeface="Calibri" pitchFamily="34" charset="-122"/>
+                <a:cs typeface="Calibri" pitchFamily="34" charset="-120"/>
+              </a:rPr>
+              <a:t>True Metric Scale (1:1): Dispel portion uncertainty by projecting true-to-life food dimensions onto the table.</a:t>
+            </a:r>
+            <a:endParaRPr lang="en-US" sz="950" dirty="0"/>
+          </a:p>
+          <a:p>
+            <a:pPr marL="342900" indent="-342900">
+              <a:spcAft>
+                <a:spcPts val="400"/>
+              </a:spcAft>
+              <a:buSzPct val="100000"/>
+              <a:buChar char="•"/>
+            </a:pPr>
+            <a:r>
+              <a:rPr lang="en-US" sz="950" dirty="0">
+                <a:solidFill>
+                  <a:srgbClr val="334155"/>
+                </a:solidFill>
+                <a:latin typeface="Calibri" pitchFamily="34" charset="0"/>
+                <a:ea typeface="Calibri" pitchFamily="34" charset="-122"/>
+                <a:cs typeface="Calibri" pitchFamily="34" charset="-120"/>
+              </a:rPr>
+              <a:t>Nutritional &amp; Dietary Transparency: Live calorie count, allergen filtering, and customization notes.</a:t>
+            </a:r>
+            <a:endParaRPr lang="en-US" sz="950" dirty="0"/>
+          </a:p>
+        </p:txBody>
+      </p:sp>
+      <p:sp>
+        <p:nvSpPr>
+          <p:cNvPr id="26" name="Shape 23"/>
+          <p:cNvSpPr/>
+          <p:nvPr/>
+        </p:nvSpPr>
+        <p:spPr>
+          <a:xfrm>
+            <a:off x="4663440" y="2697480"/>
+            <a:ext cx="3931920" cy="1920240"/>
           </a:xfrm>
           <a:prstGeom prst="roundRect">
             <a:avLst>
-              <a:gd name="adj" fmla="val 4706"/>
+              <a:gd name="adj" fmla="val 3810"/>
             </a:avLst>
           </a:prstGeom>
           <a:solidFill>
@@ -19415,13 +20313,13 @@
       </p:sp>
       <p:sp>
         <p:nvSpPr>
-          <p:cNvPr id="11" name="Text 8"/>
-          <p:cNvSpPr/>
-          <p:nvPr/>
-        </p:nvSpPr>
-        <p:spPr>
-          <a:xfrm>
-            <a:off x="4892040" y="1371600"/>
+          <p:cNvPr id="27" name="Text 24"/>
+          <p:cNvSpPr/>
+          <p:nvPr/>
+        </p:nvSpPr>
+        <p:spPr>
+          <a:xfrm>
+            <a:off x="4892040" y="2834640"/>
             <a:ext cx="3474720" cy="274320"/>
           </a:xfrm>
           <a:prstGeom prst="rect">
@@ -19438,7 +20336,7 @@
               <a:buNone/>
             </a:pPr>
             <a:r>
-              <a:rPr lang="en-US" sz="1300" b="1" dirty="0">
+              <a:rPr lang="en-US" sz="1250" b="1" dirty="0">
                 <a:solidFill>
                   <a:srgbClr val="1E3A8A"/>
                 </a:solidFill>
@@ -19446,22 +20344,22 @@
                 <a:ea typeface="Cambria" pitchFamily="34" charset="-122"/>
                 <a:cs typeface="Cambria" pitchFamily="34" charset="-120"/>
               </a:rPr>
-              <a:t>Dual-Engine Spatial AR Viewer</a:t>
-            </a:r>
-            <a:endParaRPr lang="en-US" sz="1300" dirty="0"/>
-          </a:p>
-        </p:txBody>
-      </p:sp>
-      <p:sp>
-        <p:nvSpPr>
-          <p:cNvPr id="12" name="Text 9"/>
-          <p:cNvSpPr/>
-          <p:nvPr/>
-        </p:nvSpPr>
-        <p:spPr>
-          <a:xfrm>
-            <a:off x="4892040" y="1691640"/>
-            <a:ext cx="3474720" cy="914400"/>
+              <a:t>Kitchen &amp; Operational Backend Coordination</a:t>
+            </a:r>
+            <a:endParaRPr lang="en-US" sz="1250" dirty="0"/>
+          </a:p>
+        </p:txBody>
+      </p:sp>
+      <p:sp>
+        <p:nvSpPr>
+          <p:cNvPr id="28" name="Text 25"/>
+          <p:cNvSpPr/>
+          <p:nvPr/>
+        </p:nvSpPr>
+        <p:spPr>
+          <a:xfrm>
+            <a:off x="4892040" y="3154680"/>
+            <a:ext cx="3474720" cy="1371600"/>
           </a:xfrm>
           <a:prstGeom prst="rect">
             <a:avLst/>
@@ -19473,8 +20371,12 @@
           <a:bodyPr wrap="square" lIns="0" tIns="0" rIns="0" bIns="0" rtlCol="0" anchor="ctr"/>
           <a:lstStyle/>
           <a:p>
-            <a:pPr indent="0" marL="0">
-              <a:buNone/>
+            <a:pPr marL="342900" indent="-342900">
+              <a:spcAft>
+                <a:spcPts val="400"/>
+              </a:spcAft>
+              <a:buSzPct val="100000"/>
+              <a:buChar char="•"/>
             </a:pPr>
             <a:r>
               <a:rPr lang="en-US" sz="950" dirty="0">
@@ -19485,101 +20387,17 @@
                 <a:ea typeface="Calibri" pitchFamily="34" charset="-122"/>
                 <a:cs typeface="Calibri" pitchFamily="34" charset="-120"/>
               </a:rPr>
-              <a:t>Combines native WebXR `requestHitTestSource` 6-DoF table surface anchoring with Google Scene Viewer Android Intent fallbacks, ensuring universal smartphone compatibility.</a:t>
+              <a:t>Bidirectional State Synchronization: Table orders land instantly on kitchen display with synthesized sound alert.</a:t>
             </a:r>
             <a:endParaRPr lang="en-US" sz="950" dirty="0"/>
           </a:p>
-        </p:txBody>
-      </p:sp>
-      <p:sp>
-        <p:nvSpPr>
-          <p:cNvPr id="13" name="Shape 10"/>
-          <p:cNvSpPr/>
-          <p:nvPr/>
-        </p:nvSpPr>
-        <p:spPr>
-          <a:xfrm>
-            <a:off x="548640" y="2880360"/>
-            <a:ext cx="3931920" cy="1554480"/>
-          </a:xfrm>
-          <a:prstGeom prst="roundRect">
-            <a:avLst>
-              <a:gd name="adj" fmla="val 4706"/>
-            </a:avLst>
-          </a:prstGeom>
-          <a:solidFill>
-            <a:srgbClr val="F8FAFC"/>
-          </a:solidFill>
-          <a:ln w="12700">
-            <a:solidFill>
-              <a:srgbClr val="E2E8F0"/>
-            </a:solidFill>
-            <a:prstDash val="solid"/>
-          </a:ln>
-        </p:spPr>
-      </p:sp>
-      <p:sp>
-        <p:nvSpPr>
-          <p:cNvPr id="14" name="Text 11"/>
-          <p:cNvSpPr/>
-          <p:nvPr/>
-        </p:nvSpPr>
-        <p:spPr>
-          <a:xfrm>
-            <a:off x="777240" y="3063240"/>
-            <a:ext cx="3474720" cy="274320"/>
-          </a:xfrm>
-          <a:prstGeom prst="rect">
-            <a:avLst/>
-          </a:prstGeom>
-          <a:noFill/>
-          <a:ln/>
-        </p:spPr>
-        <p:txBody>
-          <a:bodyPr wrap="square" lIns="0" tIns="0" rIns="0" bIns="0" rtlCol="0" anchor="ctr"/>
-          <a:lstStyle/>
-          <a:p>
-            <a:pPr indent="0" marL="0">
-              <a:buNone/>
-            </a:pPr>
-            <a:r>
-              <a:rPr lang="en-US" sz="1300" b="1" dirty="0">
-                <a:solidFill>
-                  <a:srgbClr val="1E3A8A"/>
-                </a:solidFill>
-                <a:latin typeface="Cambria" pitchFamily="34" charset="0"/>
-                <a:ea typeface="Cambria" pitchFamily="34" charset="-122"/>
-                <a:cs typeface="Cambria" pitchFamily="34" charset="-120"/>
-              </a:rPr>
-              <a:t>Smart Dietary &amp; Nutritional Engine</a:t>
-            </a:r>
-            <a:endParaRPr lang="en-US" sz="1300" dirty="0"/>
-          </a:p>
-        </p:txBody>
-      </p:sp>
-      <p:sp>
-        <p:nvSpPr>
-          <p:cNvPr id="15" name="Text 12"/>
-          <p:cNvSpPr/>
-          <p:nvPr/>
-        </p:nvSpPr>
-        <p:spPr>
-          <a:xfrm>
-            <a:off x="777240" y="3383280"/>
-            <a:ext cx="3474720" cy="914400"/>
-          </a:xfrm>
-          <a:prstGeom prst="rect">
-            <a:avLst/>
-          </a:prstGeom>
-          <a:noFill/>
-          <a:ln/>
-        </p:spPr>
-        <p:txBody>
-          <a:bodyPr wrap="square" lIns="0" tIns="0" rIns="0" bIns="0" rtlCol="0" anchor="ctr"/>
-          <a:lstStyle/>
-          <a:p>
-            <a:pPr indent="0" marL="0">
-              <a:buNone/>
+          <a:p>
+            <a:pPr marL="342900" indent="-342900">
+              <a:spcAft>
+                <a:spcPts val="400"/>
+              </a:spcAft>
+              <a:buSzPct val="100000"/>
+              <a:buChar char="•"/>
             </a:pPr>
             <a:r>
               <a:rPr lang="en-US" sz="950" dirty="0">
@@ -19590,101 +20408,17 @@
                 <a:ea typeface="Calibri" pitchFamily="34" charset="-122"/>
                 <a:cs typeface="Calibri" pitchFamily="34" charset="-120"/>
               </a:rPr>
-              <a:t>Interactive filtering by vegetarian, non-vegetarian, spice intensity, preparation time, and allergens, complete with comprehensive calorie counts and macros.</a:t>
+              <a:t>Stateful Ticket Lifecycle: Chef advances orders through Pending ➔ Preparing ➔ Ready ➔ Delivered.</a:t>
             </a:r>
             <a:endParaRPr lang="en-US" sz="950" dirty="0"/>
           </a:p>
-        </p:txBody>
-      </p:sp>
-      <p:sp>
-        <p:nvSpPr>
-          <p:cNvPr id="16" name="Shape 13"/>
-          <p:cNvSpPr/>
-          <p:nvPr/>
-        </p:nvSpPr>
-        <p:spPr>
-          <a:xfrm>
-            <a:off x="4663440" y="2880360"/>
-            <a:ext cx="3931920" cy="1554480"/>
-          </a:xfrm>
-          <a:prstGeom prst="roundRect">
-            <a:avLst>
-              <a:gd name="adj" fmla="val 4706"/>
-            </a:avLst>
-          </a:prstGeom>
-          <a:solidFill>
-            <a:srgbClr val="F8FAFC"/>
-          </a:solidFill>
-          <a:ln w="12700">
-            <a:solidFill>
-              <a:srgbClr val="E2E8F0"/>
-            </a:solidFill>
-            <a:prstDash val="solid"/>
-          </a:ln>
-        </p:spPr>
-      </p:sp>
-      <p:sp>
-        <p:nvSpPr>
-          <p:cNvPr id="17" name="Text 14"/>
-          <p:cNvSpPr/>
-          <p:nvPr/>
-        </p:nvSpPr>
-        <p:spPr>
-          <a:xfrm>
-            <a:off x="4892040" y="3063240"/>
-            <a:ext cx="3474720" cy="274320"/>
-          </a:xfrm>
-          <a:prstGeom prst="rect">
-            <a:avLst/>
-          </a:prstGeom>
-          <a:noFill/>
-          <a:ln/>
-        </p:spPr>
-        <p:txBody>
-          <a:bodyPr wrap="square" lIns="0" tIns="0" rIns="0" bIns="0" rtlCol="0" anchor="ctr"/>
-          <a:lstStyle/>
-          <a:p>
-            <a:pPr indent="0" marL="0">
-              <a:buNone/>
-            </a:pPr>
-            <a:r>
-              <a:rPr lang="en-US" sz="1300" b="1" dirty="0">
-                <a:solidFill>
-                  <a:srgbClr val="1E3A8A"/>
-                </a:solidFill>
-                <a:latin typeface="Cambria" pitchFamily="34" charset="0"/>
-                <a:ea typeface="Cambria" pitchFamily="34" charset="-122"/>
-                <a:cs typeface="Cambria" pitchFamily="34" charset="-120"/>
-              </a:rPr>
-              <a:t>Synchronized Kitchen Display System</a:t>
-            </a:r>
-            <a:endParaRPr lang="en-US" sz="1300" dirty="0"/>
-          </a:p>
-        </p:txBody>
-      </p:sp>
-      <p:sp>
-        <p:nvSpPr>
-          <p:cNvPr id="18" name="Text 15"/>
-          <p:cNvSpPr/>
-          <p:nvPr/>
-        </p:nvSpPr>
-        <p:spPr>
-          <a:xfrm>
-            <a:off x="4892040" y="3383280"/>
-            <a:ext cx="3474720" cy="914400"/>
-          </a:xfrm>
-          <a:prstGeom prst="rect">
-            <a:avLst/>
-          </a:prstGeom>
-          <a:noFill/>
-          <a:ln/>
-        </p:spPr>
-        <p:txBody>
-          <a:bodyPr wrap="square" lIns="0" tIns="0" rIns="0" bIns="0" rtlCol="0" anchor="ctr"/>
-          <a:lstStyle/>
-          <a:p>
-            <a:pPr indent="0" marL="0">
-              <a:buNone/>
+          <a:p>
+            <a:pPr marL="342900" indent="-342900">
+              <a:spcAft>
+                <a:spcPts val="400"/>
+              </a:spcAft>
+              <a:buSzPct val="100000"/>
+              <a:buChar char="•"/>
             </a:pPr>
             <a:r>
               <a:rPr lang="en-US" sz="950" dirty="0">
@@ -19695,7 +20429,7 @@
                 <a:ea typeface="Calibri" pitchFamily="34" charset="-122"/>
                 <a:cs typeface="Calibri" pitchFamily="34" charset="-120"/>
               </a:rPr>
-              <a:t>Real-time kitchen order management with acoustic notifications and stateful ticket advancement (Pending -&gt; Preparing -&gt; Ready -&gt; Delivered).</a:t>
+              <a:t>Zero Table Hardware Footprint: Staff and patrons use existing screens, eliminating ₹3.5L+ in POS equipment.</a:t>
             </a:r>
             <a:endParaRPr lang="en-US" sz="950" dirty="0"/>
           </a:p>
@@ -19790,7 +20524,7 @@
                 <a:ea typeface="Cambria" pitchFamily="34" charset="-122"/>
                 <a:cs typeface="Cambria" pitchFamily="34" charset="-120"/>
               </a:rPr>
-              <a:t>Technical Complexity &amp; Engineering Innovations</a:t>
+              <a:t>Technical Complexity &amp; Engineering Problem-Solving</a:t>
             </a:r>
             <a:endParaRPr lang="en-US" sz="1650" dirty="0"/>
           </a:p>
@@ -19948,8 +20682,8 @@
         </p:nvSpPr>
         <p:spPr>
           <a:xfrm>
-            <a:off x="777240" y="1371600"/>
-            <a:ext cx="3474720" cy="274320"/>
+            <a:off x="777240" y="1325880"/>
+            <a:ext cx="3474720" cy="182880"/>
           </a:xfrm>
           <a:prstGeom prst="rect">
             <a:avLst/>
@@ -19965,7 +20699,46 @@
               <a:buNone/>
             </a:pPr>
             <a:r>
-              <a:rPr lang="en-US" sz="1250" b="1" dirty="0">
+              <a:rPr lang="en-US" sz="850" b="1" dirty="0">
+                <a:solidFill>
+                  <a:srgbClr val="2563EB"/>
+                </a:solidFill>
+                <a:latin typeface="Calibri" pitchFamily="34" charset="0"/>
+                <a:ea typeface="Calibri" pitchFamily="34" charset="-122"/>
+                <a:cs typeface="Calibri" pitchFamily="34" charset="-120"/>
+              </a:rPr>
+              <a:t>ENGINEERING CHALLENGE #01</a:t>
+            </a:r>
+            <a:endParaRPr lang="en-US" sz="850" dirty="0"/>
+          </a:p>
+        </p:txBody>
+      </p:sp>
+      <p:sp>
+        <p:nvSpPr>
+          <p:cNvPr id="9" name="Text 6"/>
+          <p:cNvSpPr/>
+          <p:nvPr/>
+        </p:nvSpPr>
+        <p:spPr>
+          <a:xfrm>
+            <a:off x="777240" y="1508760"/>
+            <a:ext cx="3474720" cy="256032"/>
+          </a:xfrm>
+          <a:prstGeom prst="rect">
+            <a:avLst/>
+          </a:prstGeom>
+          <a:noFill/>
+          <a:ln/>
+        </p:spPr>
+        <p:txBody>
+          <a:bodyPr wrap="square" lIns="0" tIns="0" rIns="0" bIns="0" rtlCol="0" anchor="ctr"/>
+          <a:lstStyle/>
+          <a:p>
+            <a:pPr indent="0" marL="0">
+              <a:buNone/>
+            </a:pPr>
+            <a:r>
+              <a:rPr lang="en-US" sz="1150" b="1" dirty="0">
                 <a:solidFill>
                   <a:srgbClr val="1E3A8A"/>
                 </a:solidFill>
@@ -19973,22 +20746,22 @@
                 <a:ea typeface="Cambria" pitchFamily="34" charset="-122"/>
                 <a:cs typeface="Cambria" pitchFamily="34" charset="-120"/>
               </a:rPr>
-              <a:t>6-DoF Table Surface Hit-Testing</a:t>
-            </a:r>
-            <a:endParaRPr lang="en-US" sz="1250" dirty="0"/>
-          </a:p>
-        </p:txBody>
-      </p:sp>
-      <p:sp>
-        <p:nvSpPr>
-          <p:cNvPr id="9" name="Text 6"/>
-          <p:cNvSpPr/>
-          <p:nvPr/>
-        </p:nvSpPr>
-        <p:spPr>
-          <a:xfrm>
-            <a:off x="777240" y="1691640"/>
-            <a:ext cx="3474720" cy="914400"/>
+              <a:t>Table Plane Hit-Testing vs. Sensor Drift</a:t>
+            </a:r>
+            <a:endParaRPr lang="en-US" sz="1150" dirty="0"/>
+          </a:p>
+        </p:txBody>
+      </p:sp>
+      <p:sp>
+        <p:nvSpPr>
+          <p:cNvPr id="10" name="Text 7"/>
+          <p:cNvSpPr/>
+          <p:nvPr/>
+        </p:nvSpPr>
+        <p:spPr>
+          <a:xfrm>
+            <a:off x="777240" y="1792224"/>
+            <a:ext cx="3474720" cy="868680"/>
           </a:xfrm>
           <a:prstGeom prst="rect">
             <a:avLst/>
@@ -20004,7 +20777,21 @@
               <a:buNone/>
             </a:pPr>
             <a:r>
-              <a:rPr lang="en-US" sz="950" dirty="0">
+              <a:rPr lang="en-US" sz="850" b="1" dirty="0">
+                <a:solidFill>
+                  <a:srgbClr val="DC2626"/>
+                </a:solidFill>
+                <a:latin typeface="Calibri" pitchFamily="34" charset="0"/>
+                <a:ea typeface="Calibri" pitchFamily="34" charset="-122"/>
+                <a:cs typeface="Calibri" pitchFamily="34" charset="-120"/>
+              </a:rPr>
+              <a:t>Problem: </a:t>
+            </a:r>
+            <a:pPr indent="0" marL="0">
+              <a:buNone/>
+            </a:pPr>
+            <a:r>
+              <a:rPr lang="en-US" sz="850" dirty="0">
                 <a:solidFill>
                   <a:srgbClr val="334155"/>
                 </a:solidFill>
@@ -20012,15 +20799,44 @@
                 <a:ea typeface="Calibri" pitchFamily="34" charset="-122"/>
                 <a:cs typeface="Calibri" pitchFamily="34" charset="-120"/>
               </a:rPr>
-              <a:t>Implemented native WebXR `requestHitTestSource()` to project continuous raycasts onto real dining surfaces. Calculates the exact 3D spatial intersection (X, Y, Z) and surface normal, locking models to the table without marker drifting.</a:t>
-            </a:r>
-            <a:endParaRPr lang="en-US" sz="950" dirty="0"/>
-          </a:p>
-        </p:txBody>
-      </p:sp>
-      <p:sp>
-        <p:nvSpPr>
-          <p:cNvPr id="10" name="Shape 7"/>
+              <a:t>Initial Vulnerability: Using raw phone IMU orientation caused 3D food models to float and drift whenever the user shifted posture.
+</a:t>
+            </a:r>
+            <a:pPr indent="0" marL="0">
+              <a:buNone/>
+            </a:pPr>
+            <a:r>
+              <a:rPr lang="en-US" sz="850" b="1" dirty="0">
+                <a:solidFill>
+                  <a:srgbClr val="059669"/>
+                </a:solidFill>
+                <a:latin typeface="Calibri" pitchFamily="34" charset="0"/>
+                <a:ea typeface="Calibri" pitchFamily="34" charset="-122"/>
+                <a:cs typeface="Calibri" pitchFamily="34" charset="-120"/>
+              </a:rPr>
+              <a:t>Resolution: </a:t>
+            </a:r>
+            <a:pPr indent="0" marL="0">
+              <a:buNone/>
+            </a:pPr>
+            <a:r>
+              <a:rPr lang="en-US" sz="850" dirty="0">
+                <a:solidFill>
+                  <a:srgbClr val="334155"/>
+                </a:solidFill>
+                <a:latin typeface="Calibri" pitchFamily="34" charset="0"/>
+                <a:ea typeface="Calibri" pitchFamily="34" charset="-122"/>
+                <a:cs typeface="Calibri" pitchFamily="34" charset="-120"/>
+              </a:rPr>
+              <a:t>Engineered Solution: Implemented native WebXR `requestHitTestSource()` to calculate exact ray-plane intersections with physical tables, locking models firmly in 6-DoF.</a:t>
+            </a:r>
+            <a:endParaRPr lang="en-US" sz="850" dirty="0"/>
+          </a:p>
+        </p:txBody>
+      </p:sp>
+      <p:sp>
+        <p:nvSpPr>
+          <p:cNvPr id="11" name="Shape 8"/>
           <p:cNvSpPr/>
           <p:nvPr/>
         </p:nvSpPr>
@@ -20047,14 +20863,14 @@
       </p:sp>
       <p:sp>
         <p:nvSpPr>
-          <p:cNvPr id="11" name="Text 8"/>
-          <p:cNvSpPr/>
-          <p:nvPr/>
-        </p:nvSpPr>
-        <p:spPr>
-          <a:xfrm>
-            <a:off x="4892040" y="1371600"/>
-            <a:ext cx="3474720" cy="274320"/>
+          <p:cNvPr id="12" name="Text 9"/>
+          <p:cNvSpPr/>
+          <p:nvPr/>
+        </p:nvSpPr>
+        <p:spPr>
+          <a:xfrm>
+            <a:off x="4892040" y="1325880"/>
+            <a:ext cx="3474720" cy="182880"/>
           </a:xfrm>
           <a:prstGeom prst="rect">
             <a:avLst/>
@@ -20070,7 +20886,46 @@
               <a:buNone/>
             </a:pPr>
             <a:r>
-              <a:rPr lang="en-US" sz="1250" b="1" dirty="0">
+              <a:rPr lang="en-US" sz="850" b="1" dirty="0">
+                <a:solidFill>
+                  <a:srgbClr val="2563EB"/>
+                </a:solidFill>
+                <a:latin typeface="Calibri" pitchFamily="34" charset="0"/>
+                <a:ea typeface="Calibri" pitchFamily="34" charset="-122"/>
+                <a:cs typeface="Calibri" pitchFamily="34" charset="-120"/>
+              </a:rPr>
+              <a:t>ENGINEERING CHALLENGE #02</a:t>
+            </a:r>
+            <a:endParaRPr lang="en-US" sz="850" dirty="0"/>
+          </a:p>
+        </p:txBody>
+      </p:sp>
+      <p:sp>
+        <p:nvSpPr>
+          <p:cNvPr id="13" name="Text 10"/>
+          <p:cNvSpPr/>
+          <p:nvPr/>
+        </p:nvSpPr>
+        <p:spPr>
+          <a:xfrm>
+            <a:off x="4892040" y="1508760"/>
+            <a:ext cx="3474720" cy="256032"/>
+          </a:xfrm>
+          <a:prstGeom prst="rect">
+            <a:avLst/>
+          </a:prstGeom>
+          <a:noFill/>
+          <a:ln/>
+        </p:spPr>
+        <p:txBody>
+          <a:bodyPr wrap="square" lIns="0" tIns="0" rIns="0" bIns="0" rtlCol="0" anchor="ctr"/>
+          <a:lstStyle/>
+          <a:p>
+            <a:pPr indent="0" marL="0">
+              <a:buNone/>
+            </a:pPr>
+            <a:r>
+              <a:rPr lang="en-US" sz="1150" b="1" dirty="0">
                 <a:solidFill>
                   <a:srgbClr val="1E3A8A"/>
                 </a:solidFill>
@@ -20078,22 +20933,22 @@
                 <a:ea typeface="Cambria" pitchFamily="34" charset="-122"/>
                 <a:cs typeface="Cambria" pitchFamily="34" charset="-120"/>
               </a:rPr>
-              <a:t>3D Mesh Quantization &amp; Texture Pipeline</a:t>
-            </a:r>
-            <a:endParaRPr lang="en-US" sz="1250" dirty="0"/>
-          </a:p>
-        </p:txBody>
-      </p:sp>
-      <p:sp>
-        <p:nvSpPr>
-          <p:cNvPr id="12" name="Text 9"/>
-          <p:cNvSpPr/>
-          <p:nvPr/>
-        </p:nvSpPr>
-        <p:spPr>
-          <a:xfrm>
-            <a:off x="4892040" y="1691640"/>
-            <a:ext cx="3474720" cy="914400"/>
+              <a:t>Photogrammetry Payload vs. Mobile Memory</a:t>
+            </a:r>
+            <a:endParaRPr lang="en-US" sz="1150" dirty="0"/>
+          </a:p>
+        </p:txBody>
+      </p:sp>
+      <p:sp>
+        <p:nvSpPr>
+          <p:cNvPr id="14" name="Text 11"/>
+          <p:cNvSpPr/>
+          <p:nvPr/>
+        </p:nvSpPr>
+        <p:spPr>
+          <a:xfrm>
+            <a:off x="4892040" y="1792224"/>
+            <a:ext cx="3474720" cy="868680"/>
           </a:xfrm>
           <a:prstGeom prst="rect">
             <a:avLst/>
@@ -20109,7 +20964,21 @@
               <a:buNone/>
             </a:pPr>
             <a:r>
-              <a:rPr lang="en-US" sz="950" dirty="0">
+              <a:rPr lang="en-US" sz="850" b="1" dirty="0">
+                <a:solidFill>
+                  <a:srgbClr val="DC2626"/>
+                </a:solidFill>
+                <a:latin typeface="Calibri" pitchFamily="34" charset="0"/>
+                <a:ea typeface="Calibri" pitchFamily="34" charset="-122"/>
+                <a:cs typeface="Calibri" pitchFamily="34" charset="-120"/>
+              </a:rPr>
+              <a:t>Problem: </a:t>
+            </a:r>
+            <a:pPr indent="0" marL="0">
+              <a:buNone/>
+            </a:pPr>
+            <a:r>
+              <a:rPr lang="en-US" sz="850" dirty="0">
                 <a:solidFill>
                   <a:srgbClr val="334155"/>
                 </a:solidFill>
@@ -20117,15 +20986,44 @@
                 <a:ea typeface="Calibri" pitchFamily="34" charset="-122"/>
                 <a:cs typeface="Calibri" pitchFamily="34" charset="-120"/>
               </a:rPr>
-              <a:t>Overcame mobile browser memory limits by processing raw photogrammetry assets via `@gltf-transform`. Downscaled 8K uncompressed textures to 2K WebP and applied Draco mesh compression, shrinking `pizza.glb` from 46.8MB to 10.2MB (78% reduction).</a:t>
-            </a:r>
-            <a:endParaRPr lang="en-US" sz="950" dirty="0"/>
-          </a:p>
-        </p:txBody>
-      </p:sp>
-      <p:sp>
-        <p:nvSpPr>
-          <p:cNvPr id="13" name="Shape 10"/>
+              <a:t>Initial Vulnerability: Raw 3D models with 8K textures exceeded 46 MB, taking over 14 seconds to load and triggering mobile browser Out-Of-Memory (OOM) crashes.
+</a:t>
+            </a:r>
+            <a:pPr indent="0" marL="0">
+              <a:buNone/>
+            </a:pPr>
+            <a:r>
+              <a:rPr lang="en-US" sz="850" b="1" dirty="0">
+                <a:solidFill>
+                  <a:srgbClr val="059669"/>
+                </a:solidFill>
+                <a:latin typeface="Calibri" pitchFamily="34" charset="0"/>
+                <a:ea typeface="Calibri" pitchFamily="34" charset="-122"/>
+                <a:cs typeface="Calibri" pitchFamily="34" charset="-120"/>
+              </a:rPr>
+              <a:t>Resolution: </a:t>
+            </a:r>
+            <a:pPr indent="0" marL="0">
+              <a:buNone/>
+            </a:pPr>
+            <a:r>
+              <a:rPr lang="en-US" sz="850" dirty="0">
+                <a:solidFill>
+                  <a:srgbClr val="334155"/>
+                </a:solidFill>
+                <a:latin typeface="Calibri" pitchFamily="34" charset="0"/>
+                <a:ea typeface="Calibri" pitchFamily="34" charset="-122"/>
+                <a:cs typeface="Calibri" pitchFamily="34" charset="-120"/>
+              </a:rPr>
+              <a:t>Engineered Solution: Automated `@gltf-transform` pipeline to downsample textures to 2K WebP and apply Draco quantization, shrinking `pizza.glb` by 78% (10.2 MB) and load time to 1.8s.</a:t>
+            </a:r>
+            <a:endParaRPr lang="en-US" sz="850" dirty="0"/>
+          </a:p>
+        </p:txBody>
+      </p:sp>
+      <p:sp>
+        <p:nvSpPr>
+          <p:cNvPr id="15" name="Shape 12"/>
           <p:cNvSpPr/>
           <p:nvPr/>
         </p:nvSpPr>
@@ -20152,14 +21050,14 @@
       </p:sp>
       <p:sp>
         <p:nvSpPr>
-          <p:cNvPr id="14" name="Text 11"/>
-          <p:cNvSpPr/>
-          <p:nvPr/>
-        </p:nvSpPr>
-        <p:spPr>
-          <a:xfrm>
-            <a:off x="777240" y="3063240"/>
-            <a:ext cx="3474720" cy="274320"/>
+          <p:cNvPr id="16" name="Text 13"/>
+          <p:cNvSpPr/>
+          <p:nvPr/>
+        </p:nvSpPr>
+        <p:spPr>
+          <a:xfrm>
+            <a:off x="777240" y="3017520"/>
+            <a:ext cx="3474720" cy="182880"/>
           </a:xfrm>
           <a:prstGeom prst="rect">
             <a:avLst/>
@@ -20175,7 +21073,46 @@
               <a:buNone/>
             </a:pPr>
             <a:r>
-              <a:rPr lang="en-US" sz="1250" b="1" dirty="0">
+              <a:rPr lang="en-US" sz="850" b="1" dirty="0">
+                <a:solidFill>
+                  <a:srgbClr val="2563EB"/>
+                </a:solidFill>
+                <a:latin typeface="Calibri" pitchFamily="34" charset="0"/>
+                <a:ea typeface="Calibri" pitchFamily="34" charset="-122"/>
+                <a:cs typeface="Calibri" pitchFamily="34" charset="-120"/>
+              </a:rPr>
+              <a:t>ENGINEERING CHALLENGE #03</a:t>
+            </a:r>
+            <a:endParaRPr lang="en-US" sz="850" dirty="0"/>
+          </a:p>
+        </p:txBody>
+      </p:sp>
+      <p:sp>
+        <p:nvSpPr>
+          <p:cNvPr id="17" name="Text 14"/>
+          <p:cNvSpPr/>
+          <p:nvPr/>
+        </p:nvSpPr>
+        <p:spPr>
+          <a:xfrm>
+            <a:off x="777240" y="3200400"/>
+            <a:ext cx="3474720" cy="256032"/>
+          </a:xfrm>
+          <a:prstGeom prst="rect">
+            <a:avLst/>
+          </a:prstGeom>
+          <a:noFill/>
+          <a:ln/>
+        </p:spPr>
+        <p:txBody>
+          <a:bodyPr wrap="square" lIns="0" tIns="0" rIns="0" bIns="0" rtlCol="0" anchor="ctr"/>
+          <a:lstStyle/>
+          <a:p>
+            <a:pPr indent="0" marL="0">
+              <a:buNone/>
+            </a:pPr>
+            <a:r>
+              <a:rPr lang="en-US" sz="1150" b="1" dirty="0">
                 <a:solidFill>
                   <a:srgbClr val="1E3A8A"/>
                 </a:solidFill>
@@ -20183,22 +21120,22 @@
                 <a:ea typeface="Cambria" pitchFamily="34" charset="-122"/>
                 <a:cs typeface="Cambria" pitchFamily="34" charset="-120"/>
               </a:rPr>
-              <a:t>Multi-Tier Device Sniffing Engine</a:t>
-            </a:r>
-            <a:endParaRPr lang="en-US" sz="1250" dirty="0"/>
-          </a:p>
-        </p:txBody>
-      </p:sp>
-      <p:sp>
-        <p:nvSpPr>
-          <p:cNvPr id="15" name="Text 12"/>
-          <p:cNvSpPr/>
-          <p:nvPr/>
-        </p:nvSpPr>
-        <p:spPr>
-          <a:xfrm>
-            <a:off x="777240" y="3383280"/>
-            <a:ext cx="3474720" cy="914400"/>
+              <a:t>Browser Fragmentation vs. Universal Access</a:t>
+            </a:r>
+            <a:endParaRPr lang="en-US" sz="1150" dirty="0"/>
+          </a:p>
+        </p:txBody>
+      </p:sp>
+      <p:sp>
+        <p:nvSpPr>
+          <p:cNvPr id="18" name="Text 15"/>
+          <p:cNvSpPr/>
+          <p:nvPr/>
+        </p:nvSpPr>
+        <p:spPr>
+          <a:xfrm>
+            <a:off x="777240" y="3483864"/>
+            <a:ext cx="3474720" cy="868680"/>
           </a:xfrm>
           <a:prstGeom prst="rect">
             <a:avLst/>
@@ -20214,7 +21151,21 @@
               <a:buNone/>
             </a:pPr>
             <a:r>
-              <a:rPr lang="en-US" sz="950" dirty="0">
+              <a:rPr lang="en-US" sz="850" b="1" dirty="0">
+                <a:solidFill>
+                  <a:srgbClr val="DC2626"/>
+                </a:solidFill>
+                <a:latin typeface="Calibri" pitchFamily="34" charset="0"/>
+                <a:ea typeface="Calibri" pitchFamily="34" charset="-122"/>
+                <a:cs typeface="Calibri" pitchFamily="34" charset="-120"/>
+              </a:rPr>
+              <a:t>Problem: </a:t>
+            </a:r>
+            <a:pPr indent="0" marL="0">
+              <a:buNone/>
+            </a:pPr>
+            <a:r>
+              <a:rPr lang="en-US" sz="850" dirty="0">
                 <a:solidFill>
                   <a:srgbClr val="334155"/>
                 </a:solidFill>
@@ -20222,15 +21173,44 @@
                 <a:ea typeface="Calibri" pitchFamily="34" charset="-122"/>
                 <a:cs typeface="Calibri" pitchFamily="34" charset="-120"/>
               </a:rPr>
-              <a:t>Engineered an automated runtime capability detector. If WebXR session creation fails due to browser restrictions, the system smoothly falls back to Google Scene Viewer Intent via Android ARCore, or Google Model-Viewer 3D Canvas.</a:t>
-            </a:r>
-            <a:endParaRPr lang="en-US" sz="950" dirty="0"/>
-          </a:p>
-        </p:txBody>
-      </p:sp>
-      <p:sp>
-        <p:nvSpPr>
-          <p:cNvPr id="16" name="Shape 13"/>
+              <a:t>Initial Vulnerability: Older smartphone browsers lack full WebXR AR session support, which would alienate patrons.
+</a:t>
+            </a:r>
+            <a:pPr indent="0" marL="0">
+              <a:buNone/>
+            </a:pPr>
+            <a:r>
+              <a:rPr lang="en-US" sz="850" b="1" dirty="0">
+                <a:solidFill>
+                  <a:srgbClr val="059669"/>
+                </a:solidFill>
+                <a:latin typeface="Calibri" pitchFamily="34" charset="0"/>
+                <a:ea typeface="Calibri" pitchFamily="34" charset="-122"/>
+                <a:cs typeface="Calibri" pitchFamily="34" charset="-120"/>
+              </a:rPr>
+              <a:t>Resolution: </a:t>
+            </a:r>
+            <a:pPr indent="0" marL="0">
+              <a:buNone/>
+            </a:pPr>
+            <a:r>
+              <a:rPr lang="en-US" sz="850" dirty="0">
+                <a:solidFill>
+                  <a:srgbClr val="334155"/>
+                </a:solidFill>
+                <a:latin typeface="Calibri" pitchFamily="34" charset="0"/>
+                <a:ea typeface="Calibri" pitchFamily="34" charset="-122"/>
+                <a:cs typeface="Calibri" pitchFamily="34" charset="-120"/>
+              </a:rPr>
+              <a:t>Engineered Solution: Created an adaptive dual-engine fallback that dynamically sniffed device capabilities and redirected Android users to Google Scene Viewer Intent via ARCore.</a:t>
+            </a:r>
+            <a:endParaRPr lang="en-US" sz="850" dirty="0"/>
+          </a:p>
+        </p:txBody>
+      </p:sp>
+      <p:sp>
+        <p:nvSpPr>
+          <p:cNvPr id="19" name="Shape 16"/>
           <p:cNvSpPr/>
           <p:nvPr/>
         </p:nvSpPr>
@@ -20257,14 +21237,14 @@
       </p:sp>
       <p:sp>
         <p:nvSpPr>
-          <p:cNvPr id="17" name="Text 14"/>
-          <p:cNvSpPr/>
-          <p:nvPr/>
-        </p:nvSpPr>
-        <p:spPr>
-          <a:xfrm>
-            <a:off x="4892040" y="3063240"/>
-            <a:ext cx="3474720" cy="274320"/>
+          <p:cNvPr id="20" name="Text 17"/>
+          <p:cNvSpPr/>
+          <p:nvPr/>
+        </p:nvSpPr>
+        <p:spPr>
+          <a:xfrm>
+            <a:off x="4892040" y="3017520"/>
+            <a:ext cx="3474720" cy="182880"/>
           </a:xfrm>
           <a:prstGeom prst="rect">
             <a:avLst/>
@@ -20280,7 +21260,46 @@
               <a:buNone/>
             </a:pPr>
             <a:r>
-              <a:rPr lang="en-US" sz="1250" b="1" dirty="0">
+              <a:rPr lang="en-US" sz="850" b="1" dirty="0">
+                <a:solidFill>
+                  <a:srgbClr val="2563EB"/>
+                </a:solidFill>
+                <a:latin typeface="Calibri" pitchFamily="34" charset="0"/>
+                <a:ea typeface="Calibri" pitchFamily="34" charset="-122"/>
+                <a:cs typeface="Calibri" pitchFamily="34" charset="-120"/>
+              </a:rPr>
+              <a:t>ENGINEERING CHALLENGE #04</a:t>
+            </a:r>
+            <a:endParaRPr lang="en-US" sz="850" dirty="0"/>
+          </a:p>
+        </p:txBody>
+      </p:sp>
+      <p:sp>
+        <p:nvSpPr>
+          <p:cNvPr id="21" name="Text 18"/>
+          <p:cNvSpPr/>
+          <p:nvPr/>
+        </p:nvSpPr>
+        <p:spPr>
+          <a:xfrm>
+            <a:off x="4892040" y="3200400"/>
+            <a:ext cx="3474720" cy="256032"/>
+          </a:xfrm>
+          <a:prstGeom prst="rect">
+            <a:avLst/>
+          </a:prstGeom>
+          <a:noFill/>
+          <a:ln/>
+        </p:spPr>
+        <p:txBody>
+          <a:bodyPr wrap="square" lIns="0" tIns="0" rIns="0" bIns="0" rtlCol="0" anchor="ctr"/>
+          <a:lstStyle/>
+          <a:p>
+            <a:pPr indent="0" marL="0">
+              <a:buNone/>
+            </a:pPr>
+            <a:r>
+              <a:rPr lang="en-US" sz="1150" b="1" dirty="0">
                 <a:solidFill>
                   <a:srgbClr val="1E3A8A"/>
                 </a:solidFill>
@@ -20288,22 +21307,22 @@
                 <a:ea typeface="Cambria" pitchFamily="34" charset="-122"/>
                 <a:cs typeface="Cambria" pitchFamily="34" charset="-120"/>
               </a:rPr>
-              <a:t>Cloud Edge MIME &amp; CORS Orchestration</a:t>
-            </a:r>
-            <a:endParaRPr lang="en-US" sz="1250" dirty="0"/>
-          </a:p>
-        </p:txBody>
-      </p:sp>
-      <p:sp>
-        <p:nvSpPr>
-          <p:cNvPr id="18" name="Text 15"/>
-          <p:cNvSpPr/>
-          <p:nvPr/>
-        </p:nvSpPr>
-        <p:spPr>
-          <a:xfrm>
-            <a:off x="4892040" y="3383280"/>
-            <a:ext cx="3474720" cy="914400"/>
+              <a:t>Mobile Sandbox CORS &amp; Binary MIME Headers</a:t>
+            </a:r>
+            <a:endParaRPr lang="en-US" sz="1150" dirty="0"/>
+          </a:p>
+        </p:txBody>
+      </p:sp>
+      <p:sp>
+        <p:nvSpPr>
+          <p:cNvPr id="22" name="Text 19"/>
+          <p:cNvSpPr/>
+          <p:nvPr/>
+        </p:nvSpPr>
+        <p:spPr>
+          <a:xfrm>
+            <a:off x="4892040" y="3483864"/>
+            <a:ext cx="3474720" cy="868680"/>
           </a:xfrm>
           <a:prstGeom prst="rect">
             <a:avLst/>
@@ -20319,7 +21338,21 @@
               <a:buNone/>
             </a:pPr>
             <a:r>
-              <a:rPr lang="en-US" sz="950" dirty="0">
+              <a:rPr lang="en-US" sz="850" b="1" dirty="0">
+                <a:solidFill>
+                  <a:srgbClr val="DC2626"/>
+                </a:solidFill>
+                <a:latin typeface="Calibri" pitchFamily="34" charset="0"/>
+                <a:ea typeface="Calibri" pitchFamily="34" charset="-122"/>
+                <a:cs typeface="Calibri" pitchFamily="34" charset="-120"/>
+              </a:rPr>
+              <a:t>Problem: </a:t>
+            </a:r>
+            <a:pPr indent="0" marL="0">
+              <a:buNone/>
+            </a:pPr>
+            <a:r>
+              <a:rPr lang="en-US" sz="850" dirty="0">
                 <a:solidFill>
                   <a:srgbClr val="334155"/>
                 </a:solidFill>
@@ -20327,9 +21360,38 @@
                 <a:ea typeface="Calibri" pitchFamily="34" charset="-122"/>
                 <a:cs typeface="Calibri" pitchFamily="34" charset="-120"/>
               </a:rPr>
-              <a:t>Resolved browser cross-origin asset blocking by configuring Vercel edge response headers (`vercel.json`) to enforce `Content-Type: model/gltf-binary` and `Access-Control-Allow-Origin: *`, enabling instant streaming to external AR viewers.</a:t>
-            </a:r>
-            <a:endParaRPr lang="en-US" sz="950" dirty="0"/>
+              <a:t>Initial Vulnerability: Mobile AR viewers refused to stream 3D GLB assets from standard cloud buckets due to strict cross-origin CORS and missing MIME types.
+</a:t>
+            </a:r>
+            <a:pPr indent="0" marL="0">
+              <a:buNone/>
+            </a:pPr>
+            <a:r>
+              <a:rPr lang="en-US" sz="850" b="1" dirty="0">
+                <a:solidFill>
+                  <a:srgbClr val="059669"/>
+                </a:solidFill>
+                <a:latin typeface="Calibri" pitchFamily="34" charset="0"/>
+                <a:ea typeface="Calibri" pitchFamily="34" charset="-122"/>
+                <a:cs typeface="Calibri" pitchFamily="34" charset="-120"/>
+              </a:rPr>
+              <a:t>Resolution: </a:t>
+            </a:r>
+            <a:pPr indent="0" marL="0">
+              <a:buNone/>
+            </a:pPr>
+            <a:r>
+              <a:rPr lang="en-US" sz="850" dirty="0">
+                <a:solidFill>
+                  <a:srgbClr val="334155"/>
+                </a:solidFill>
+                <a:latin typeface="Calibri" pitchFamily="34" charset="0"/>
+                <a:ea typeface="Calibri" pitchFamily="34" charset="-122"/>
+                <a:cs typeface="Calibri" pitchFamily="34" charset="-120"/>
+              </a:rPr>
+              <a:t>Engineered Solution: Configured Vercel Edge rules (`vercel.json`) enforcing `Content-Type: model/gltf-binary` and `Access-Control-Allow-Origin: *` for instant edge caching.</a:t>
+            </a:r>
+            <a:endParaRPr lang="en-US" sz="850" dirty="0"/>
           </a:p>
         </p:txBody>
       </p:sp>
@@ -20422,7 +21484,7 @@
                 <a:ea typeface="Cambria" pitchFamily="34" charset="-122"/>
                 <a:cs typeface="Cambria" pitchFamily="34" charset="-120"/>
               </a:rPr>
-              <a:t>End-to-End Multi-Tier System Architecture</a:t>
+              <a:t>Layered Architecture &amp; Inter-System Communication</a:t>
             </a:r>
             <a:endParaRPr lang="en-US" sz="1650" dirty="0"/>
           </a:p>
@@ -20581,7 +21643,7 @@
         <p:spPr>
           <a:xfrm>
             <a:off x="731520" y="1280160"/>
-            <a:ext cx="4114800" cy="228600"/>
+            <a:ext cx="4389120" cy="228600"/>
           </a:xfrm>
           <a:prstGeom prst="rect">
             <a:avLst/>
@@ -20605,7 +21667,7 @@
                 <a:ea typeface="Cambria" pitchFamily="34" charset="-122"/>
                 <a:cs typeface="Cambria" pitchFamily="34" charset="-120"/>
               </a:rPr>
-              <a:t>Tier 1: Client Presentation Layer</a:t>
+              <a:t>Layer 1: Presentation &amp; Client PWA</a:t>
             </a:r>
             <a:endParaRPr lang="en-US" sz="1200" dirty="0"/>
           </a:p>
@@ -20619,8 +21681,8 @@
         </p:nvSpPr>
         <p:spPr>
           <a:xfrm>
-            <a:off x="4937760" y="1280160"/>
-            <a:ext cx="3474720" cy="228600"/>
+            <a:off x="5120640" y="1280160"/>
+            <a:ext cx="3291840" cy="228600"/>
           </a:xfrm>
           <a:prstGeom prst="rect">
             <a:avLst/>
@@ -20644,7 +21706,7 @@
                 <a:ea typeface="Calibri" pitchFamily="34" charset="-122"/>
                 <a:cs typeface="Calibri" pitchFamily="34" charset="-120"/>
               </a:rPr>
-              <a:t>React 18 | TypeScript | Vite | Tailwind CSS</a:t>
+              <a:t>React 18.3 | TypeScript 5.2 | Tailwind CSS | Vite</a:t>
             </a:r>
             <a:endParaRPr lang="en-US" sz="950" dirty="0"/>
           </a:p>
@@ -20683,7 +21745,7 @@
                 <a:ea typeface="Calibri" pitchFamily="34" charset="-122"/>
                 <a:cs typeface="Calibri" pitchFamily="34" charset="-120"/>
               </a:rPr>
-              <a:t>Responsive mobile PWA interface, table session parsing, category navigation, dish detail modals, shopping cart drawer, and dietary badge filters.</a:t>
+              <a:t>Responsive customer dining interface, table session parsing (`/?table=1`), category tabs, dish detail modals, and cart persistence.</a:t>
             </a:r>
             <a:endParaRPr lang="en-US" sz="950" dirty="0"/>
           </a:p>
@@ -20725,7 +21787,7 @@
         <p:spPr>
           <a:xfrm>
             <a:off x="731520" y="2121408"/>
-            <a:ext cx="4114800" cy="228600"/>
+            <a:ext cx="4389120" cy="228600"/>
           </a:xfrm>
           <a:prstGeom prst="rect">
             <a:avLst/>
@@ -20749,7 +21811,7 @@
                 <a:ea typeface="Cambria" pitchFamily="34" charset="-122"/>
                 <a:cs typeface="Cambria" pitchFamily="34" charset="-120"/>
               </a:rPr>
-              <a:t>Tier 2: Spatial 3D / AR Subsystem</a:t>
+              <a:t>Layer 2: Spatial 3D &amp; Augmented Reality Subsystem</a:t>
             </a:r>
             <a:endParaRPr lang="en-US" sz="1200" dirty="0"/>
           </a:p>
@@ -20763,8 +21825,8 @@
         </p:nvSpPr>
         <p:spPr>
           <a:xfrm>
-            <a:off x="4937760" y="2121408"/>
-            <a:ext cx="3474720" cy="228600"/>
+            <a:off x="5120640" y="2121408"/>
+            <a:ext cx="3291840" cy="228600"/>
           </a:xfrm>
           <a:prstGeom prst="rect">
             <a:avLst/>
@@ -20788,7 +21850,7 @@
                 <a:ea typeface="Calibri" pitchFamily="34" charset="-122"/>
                 <a:cs typeface="Calibri" pitchFamily="34" charset="-120"/>
               </a:rPr>
-              <a:t>Three.js | WebXR Device API | Model-Viewer</a:t>
+              <a:t>Three.js r128+ | WebXR Device API | Google Scene Viewer</a:t>
             </a:r>
             <a:endParaRPr lang="en-US" sz="950" dirty="0"/>
           </a:p>
@@ -20827,7 +21889,7 @@
                 <a:ea typeface="Calibri" pitchFamily="34" charset="-122"/>
                 <a:cs typeface="Calibri" pitchFamily="34" charset="-120"/>
               </a:rPr>
-              <a:t>6-DoF raycasting surface hit-testing, dynamic reticle tracking, 1:1 metric scale clamping, model rotation gestures, and Android Scene Viewer intent routing.</a:t>
+              <a:t>6-DoF raycasting surface hit-testing, dynamic reticle tracking, 1:1 metric scale clamping, model rotation gestures, and Android Scene Viewer fallback.</a:t>
             </a:r>
             <a:endParaRPr lang="en-US" sz="950" dirty="0"/>
           </a:p>
@@ -20869,7 +21931,7 @@
         <p:spPr>
           <a:xfrm>
             <a:off x="731520" y="2962656"/>
-            <a:ext cx="4114800" cy="228600"/>
+            <a:ext cx="4389120" cy="228600"/>
           </a:xfrm>
           <a:prstGeom prst="rect">
             <a:avLst/>
@@ -20893,7 +21955,7 @@
                 <a:ea typeface="Cambria" pitchFamily="34" charset="-122"/>
                 <a:cs typeface="Cambria" pitchFamily="34" charset="-120"/>
               </a:rPr>
-              <a:t>Tier 3: State &amp; Kitchen Operations</a:t>
+              <a:t>Layer 3: Application State &amp; Kitchen Operations</a:t>
             </a:r>
             <a:endParaRPr lang="en-US" sz="1200" dirty="0"/>
           </a:p>
@@ -20907,8 +21969,8 @@
         </p:nvSpPr>
         <p:spPr>
           <a:xfrm>
-            <a:off x="4937760" y="2962656"/>
-            <a:ext cx="3474720" cy="228600"/>
+            <a:off x="5120640" y="2962656"/>
+            <a:ext cx="3291840" cy="228600"/>
           </a:xfrm>
           <a:prstGeom prst="rect">
             <a:avLst/>
@@ -20932,7 +21994,7 @@
                 <a:ea typeface="Calibri" pitchFamily="34" charset="-122"/>
                 <a:cs typeface="Calibri" pitchFamily="34" charset="-120"/>
               </a:rPr>
-              <a:t>Zustand Store | Web Audio API | KDS Kanban</a:t>
+              <a:t>Zustand Global Store | Web Audio API | KDS Kanban</a:t>
             </a:r>
             <a:endParaRPr lang="en-US" sz="950" dirty="0"/>
           </a:p>
@@ -20971,7 +22033,7 @@
                 <a:ea typeface="Calibri" pitchFamily="34" charset="-122"/>
                 <a:cs typeface="Calibri" pitchFamily="34" charset="-120"/>
               </a:rPr>
-              <a:t>Bidirectional state management, table order queues, preparation time timers, acoustic chime alerts, and status state machine (Pending -&gt; Delivered).</a:t>
+              <a:t>Decoupled state management, kitchen ticket lifecycle (Pending ➔ Preparing ➔ Ready ➔ Delivered), and acoustic chime alerts.</a:t>
             </a:r>
             <a:endParaRPr lang="en-US" sz="950" dirty="0"/>
           </a:p>
@@ -21013,7 +22075,7 @@
         <p:spPr>
           <a:xfrm>
             <a:off x="731520" y="3803904"/>
-            <a:ext cx="4114800" cy="228600"/>
+            <a:ext cx="4389120" cy="228600"/>
           </a:xfrm>
           <a:prstGeom prst="rect">
             <a:avLst/>
@@ -21037,7 +22099,7 @@
                 <a:ea typeface="Cambria" pitchFamily="34" charset="-122"/>
                 <a:cs typeface="Cambria" pitchFamily="34" charset="-120"/>
               </a:rPr>
-              <a:t>Tier 4: Cloud Edge Infrastructure</a:t>
+              <a:t>Layer 4: Cloud Edge Infrastructure &amp; Asset Delivery</a:t>
             </a:r>
             <a:endParaRPr lang="en-US" sz="1200" dirty="0"/>
           </a:p>
@@ -21051,8 +22113,8 @@
         </p:nvSpPr>
         <p:spPr>
           <a:xfrm>
-            <a:off x="4937760" y="3803904"/>
-            <a:ext cx="3474720" cy="228600"/>
+            <a:off x="5120640" y="3803904"/>
+            <a:ext cx="3291840" cy="228600"/>
           </a:xfrm>
           <a:prstGeom prst="rect">
             <a:avLst/>
@@ -21076,7 +22138,7 @@
                 <a:ea typeface="Calibri" pitchFamily="34" charset="-122"/>
                 <a:cs typeface="Calibri" pitchFamily="34" charset="-120"/>
               </a:rPr>
-              <a:t>Vercel Edge Network | CDN | Git CI/CD</a:t>
+              <a:t>Vercel Serverless Edge | Edge CDN | GLB MIME Routing</a:t>
             </a:r>
             <a:endParaRPr lang="en-US" sz="950" dirty="0"/>
           </a:p>
@@ -21115,7 +22177,7 @@
                 <a:ea typeface="Calibri" pitchFamily="34" charset="-122"/>
                 <a:cs typeface="Calibri" pitchFamily="34" charset="-120"/>
               </a:rPr>
-              <a:t>Static serverless delivery, model asset caching, edge response header injection (`Content-Type: model/gltf-binary`), and GitHub automated build triggers.</a:t>
+              <a:t>Static global edge distribution, 3D asset caching, custom binary MIME response headers, and automated GitHub CI/CD build deployment.</a:t>
             </a:r>
             <a:endParaRPr lang="en-US" sz="950" dirty="0"/>
           </a:p>

--- a/Smart_Restaurant_Presentation_III.pptx
+++ b/Smart_Restaurant_Presentation_III.pptx
@@ -2949,8 +2949,8 @@
         </p:blipFill>
         <p:spPr>
           <a:xfrm>
-            <a:off x="1371600" y="137160"/>
-            <a:ext cx="6400800" cy="868680"/>
+            <a:off x="0" y="0"/>
+            <a:ext cx="9144000" cy="804672"/>
           </a:xfrm>
           <a:prstGeom prst="rect">
             <a:avLst/>
@@ -2965,7 +2965,7 @@
         </p:nvSpPr>
         <p:spPr>
           <a:xfrm>
-            <a:off x="731520" y="1078992"/>
+            <a:off x="731520" y="960120"/>
             <a:ext cx="7680960" cy="228600"/>
           </a:xfrm>
           <a:prstGeom prst="rect">
@@ -3603,8 +3603,8 @@
         </p:blipFill>
         <p:spPr>
           <a:xfrm>
-            <a:off x="1828800" y="45720"/>
-            <a:ext cx="5486400" cy="749808"/>
+            <a:off x="0" y="0"/>
+            <a:ext cx="9144000" cy="749808"/>
           </a:xfrm>
           <a:prstGeom prst="rect">
             <a:avLst/>
@@ -3619,7 +3619,7 @@
         </p:nvSpPr>
         <p:spPr>
           <a:xfrm>
-            <a:off x="548640" y="813816"/>
+            <a:off x="548640" y="822960"/>
             <a:ext cx="5943600" cy="329184"/>
           </a:xfrm>
           <a:prstGeom prst="rect">
@@ -4222,8 +4222,8 @@
         </p:blipFill>
         <p:spPr>
           <a:xfrm>
-            <a:off x="1828800" y="45720"/>
-            <a:ext cx="5486400" cy="749808"/>
+            <a:off x="0" y="0"/>
+            <a:ext cx="9144000" cy="749808"/>
           </a:xfrm>
           <a:prstGeom prst="rect">
             <a:avLst/>
@@ -4238,7 +4238,7 @@
         </p:nvSpPr>
         <p:spPr>
           <a:xfrm>
-            <a:off x="548640" y="813816"/>
+            <a:off x="548640" y="822960"/>
             <a:ext cx="5943600" cy="329184"/>
           </a:xfrm>
           <a:prstGeom prst="rect">
@@ -5218,8 +5218,8 @@
         </p:blipFill>
         <p:spPr>
           <a:xfrm>
-            <a:off x="1828800" y="45720"/>
-            <a:ext cx="5486400" cy="749808"/>
+            <a:off x="0" y="0"/>
+            <a:ext cx="9144000" cy="749808"/>
           </a:xfrm>
           <a:prstGeom prst="rect">
             <a:avLst/>
@@ -5234,7 +5234,7 @@
         </p:nvSpPr>
         <p:spPr>
           <a:xfrm>
-            <a:off x="548640" y="813816"/>
+            <a:off x="548640" y="822960"/>
             <a:ext cx="5943600" cy="329184"/>
           </a:xfrm>
           <a:prstGeom prst="rect">
@@ -6802,12 +6802,11 @@
           <a:bodyPr wrap="square" lIns="0" tIns="0" rIns="0" bIns="0" rtlCol="0" anchor="ctr"/>
           <a:lstStyle/>
           <a:p>
-            <a:pPr marL="342900" indent="-342900">
+            <a:pPr indent="0" marL="0">
               <a:spcAft>
-                <a:spcPts val="800"/>
+                <a:spcPts val="1000"/>
               </a:spcAft>
-              <a:buSzPct val="100000"/>
-              <a:buChar char="•"/>
+              <a:buNone/>
             </a:pPr>
             <a:r>
               <a:rPr lang="en-US" sz="950" dirty="0">
@@ -6818,17 +6817,16 @@
                 <a:ea typeface="Calibri" pitchFamily="34" charset="-122"/>
                 <a:cs typeface="Calibri" pitchFamily="34" charset="-120"/>
               </a:rPr>
-              <a:t>Economic Feasibility: Exceptional ROI</a:t>
+              <a:t>• Economic Feasibility: Exceptional ROI: Eliminates hardware procurement entirely. A 10-table restaurant saves over ₹6.6 Lakhs ($8,000+) over 3 years, achieving instant ROI in Month 1.</a:t>
             </a:r>
             <a:endParaRPr lang="en-US" sz="950" dirty="0"/>
           </a:p>
           <a:p>
-            <a:pPr marL="342900" indent="-342900">
+            <a:pPr indent="0" marL="0">
               <a:spcAft>
-                <a:spcPts val="800"/>
+                <a:spcPts val="1000"/>
               </a:spcAft>
-              <a:buSzPct val="100000"/>
-              <a:buChar char="•"/>
+              <a:buNone/>
             </a:pPr>
             <a:r>
               <a:rPr lang="en-US" sz="950" dirty="0">
@@ -6839,17 +6837,16 @@
                 <a:ea typeface="Calibri" pitchFamily="34" charset="-122"/>
                 <a:cs typeface="Calibri" pitchFamily="34" charset="-120"/>
               </a:rPr>
-              <a:t>Eliminates hardware procurement entirely. A 10-table restaurant saves over ₹6.6 Lakhs ($8,000+) over 3 years, achieving instant ROI in Month 1.</a:t>
+              <a:t>• Technical Feasibility: Web Standards: Utilizes standardized W3C WebXR and WebGL APIs natively supported in Chrome, Edge, and Safari without proprietary SDK royalties.</a:t>
             </a:r>
             <a:endParaRPr lang="en-US" sz="950" dirty="0"/>
           </a:p>
           <a:p>
-            <a:pPr marL="342900" indent="-342900">
+            <a:pPr indent="0" marL="0">
               <a:spcAft>
-                <a:spcPts val="800"/>
+                <a:spcPts val="1000"/>
               </a:spcAft>
-              <a:buSzPct val="100000"/>
-              <a:buChar char="•"/>
+              <a:buNone/>
             </a:pPr>
             <a:r>
               <a:rPr lang="en-US" sz="950" dirty="0">
@@ -6860,70 +6857,7 @@
                 <a:ea typeface="Calibri" pitchFamily="34" charset="-122"/>
                 <a:cs typeface="Calibri" pitchFamily="34" charset="-120"/>
               </a:rPr>
-              <a:t>Technical Feasibility: Web Standards</a:t>
-            </a:r>
-            <a:endParaRPr lang="en-US" sz="950" dirty="0"/>
-          </a:p>
-          <a:p>
-            <a:pPr marL="342900" indent="-342900">
-              <a:spcAft>
-                <a:spcPts val="800"/>
-              </a:spcAft>
-              <a:buSzPct val="100000"/>
-              <a:buChar char="•"/>
-            </a:pPr>
-            <a:r>
-              <a:rPr lang="en-US" sz="950" dirty="0">
-                <a:solidFill>
-                  <a:srgbClr val="334155"/>
-                </a:solidFill>
-                <a:latin typeface="Calibri" pitchFamily="34" charset="0"/>
-                <a:ea typeface="Calibri" pitchFamily="34" charset="-122"/>
-                <a:cs typeface="Calibri" pitchFamily="34" charset="-120"/>
-              </a:rPr>
-              <a:t>Utilizes standardized W3C WebXR and WebGL APIs natively supported in Chrome, Edge, and Safari without proprietary SDK royalties.</a:t>
-            </a:r>
-            <a:endParaRPr lang="en-US" sz="950" dirty="0"/>
-          </a:p>
-          <a:p>
-            <a:pPr marL="342900" indent="-342900">
-              <a:spcAft>
-                <a:spcPts val="800"/>
-              </a:spcAft>
-              <a:buSzPct val="100000"/>
-              <a:buChar char="•"/>
-            </a:pPr>
-            <a:r>
-              <a:rPr lang="en-US" sz="950" dirty="0">
-                <a:solidFill>
-                  <a:srgbClr val="334155"/>
-                </a:solidFill>
-                <a:latin typeface="Calibri" pitchFamily="34" charset="0"/>
-                <a:ea typeface="Calibri" pitchFamily="34" charset="-122"/>
-                <a:cs typeface="Calibri" pitchFamily="34" charset="-120"/>
-              </a:rPr>
-              <a:t>Operational Feasibility: Zero Friction</a:t>
-            </a:r>
-            <a:endParaRPr lang="en-US" sz="950" dirty="0"/>
-          </a:p>
-          <a:p>
-            <a:pPr marL="342900" indent="-342900">
-              <a:spcAft>
-                <a:spcPts val="800"/>
-              </a:spcAft>
-              <a:buSzPct val="100000"/>
-              <a:buChar char="•"/>
-            </a:pPr>
-            <a:r>
-              <a:rPr lang="en-US" sz="950" dirty="0">
-                <a:solidFill>
-                  <a:srgbClr val="334155"/>
-                </a:solidFill>
-                <a:latin typeface="Calibri" pitchFamily="34" charset="0"/>
-                <a:ea typeface="Calibri" pitchFamily="34" charset="-122"/>
-                <a:cs typeface="Calibri" pitchFamily="34" charset="-120"/>
-              </a:rPr>
-              <a:t>Diners scan and order without downloading apps; restaurant staff operate the KDS on any existing kitchen tablet or PC screen.</a:t>
+              <a:t>• Operational Feasibility: Zero Friction: Diners scan and order without downloading apps; restaurant staff operate the KDS on any existing kitchen tablet or PC screen.</a:t>
             </a:r>
             <a:endParaRPr lang="en-US" sz="950" dirty="0"/>
           </a:p>
@@ -6977,8 +6911,8 @@
         </p:blipFill>
         <p:spPr>
           <a:xfrm>
-            <a:off x="1828800" y="45720"/>
-            <a:ext cx="5486400" cy="749808"/>
+            <a:off x="0" y="0"/>
+            <a:ext cx="9144000" cy="749808"/>
           </a:xfrm>
           <a:prstGeom prst="rect">
             <a:avLst/>
@@ -6993,7 +6927,7 @@
         </p:nvSpPr>
         <p:spPr>
           <a:xfrm>
-            <a:off x="548640" y="813816"/>
+            <a:off x="548640" y="822960"/>
             <a:ext cx="5943600" cy="329184"/>
           </a:xfrm>
           <a:prstGeom prst="rect">
@@ -7547,8 +7481,8 @@
         </p:blipFill>
         <p:spPr>
           <a:xfrm>
-            <a:off x="1828800" y="45720"/>
-            <a:ext cx="5486400" cy="749808"/>
+            <a:off x="0" y="0"/>
+            <a:ext cx="9144000" cy="749808"/>
           </a:xfrm>
           <a:prstGeom prst="rect">
             <a:avLst/>
@@ -7563,7 +7497,7 @@
         </p:nvSpPr>
         <p:spPr>
           <a:xfrm>
-            <a:off x="548640" y="813816"/>
+            <a:off x="548640" y="822960"/>
             <a:ext cx="5943600" cy="329184"/>
           </a:xfrm>
           <a:prstGeom prst="rect">
@@ -7968,15 +7902,14 @@
           <a:bodyPr wrap="square" lIns="0" tIns="0" rIns="0" bIns="0" rtlCol="0" anchor="ctr"/>
           <a:lstStyle/>
           <a:p>
-            <a:pPr marL="342900" indent="-342900">
+            <a:pPr indent="0" marL="0">
               <a:spcAft>
                 <a:spcPts val="200"/>
               </a:spcAft>
-              <a:buSzPct val="100000"/>
-              <a:buChar char="•"/>
-            </a:pPr>
-            <a:r>
-              <a:rPr lang="en-US" sz="850" dirty="0">
+              <a:buNone/>
+            </a:pPr>
+            <a:r>
+              <a:rPr lang="en-US" sz="900" dirty="0">
                 <a:solidFill>
                   <a:srgbClr val="334155"/>
                 </a:solidFill>
@@ -7989,15 +7922,14 @@
             <a:endParaRPr lang="en-US" sz="850" dirty="0"/>
           </a:p>
           <a:p>
-            <a:pPr marL="342900" indent="-342900">
+            <a:pPr indent="0" marL="0">
               <a:spcAft>
                 <a:spcPts val="200"/>
               </a:spcAft>
-              <a:buSzPct val="100000"/>
-              <a:buChar char="•"/>
-            </a:pPr>
-            <a:r>
-              <a:rPr lang="en-US" sz="850" dirty="0">
+              <a:buNone/>
+            </a:pPr>
+            <a:r>
+              <a:rPr lang="en-US" sz="900" dirty="0">
                 <a:solidFill>
                   <a:srgbClr val="334155"/>
                 </a:solidFill>
@@ -8010,15 +7942,14 @@
             <a:endParaRPr lang="en-US" sz="850" dirty="0"/>
           </a:p>
           <a:p>
-            <a:pPr marL="342900" indent="-342900">
+            <a:pPr indent="0" marL="0">
               <a:spcAft>
                 <a:spcPts val="200"/>
               </a:spcAft>
-              <a:buSzPct val="100000"/>
-              <a:buChar char="•"/>
-            </a:pPr>
-            <a:r>
-              <a:rPr lang="en-US" sz="850" dirty="0">
+              <a:buNone/>
+            </a:pPr>
+            <a:r>
+              <a:rPr lang="en-US" sz="900" dirty="0">
                 <a:solidFill>
                   <a:srgbClr val="334155"/>
                 </a:solidFill>
@@ -8031,15 +7962,14 @@
             <a:endParaRPr lang="en-US" sz="850" dirty="0"/>
           </a:p>
           <a:p>
-            <a:pPr marL="342900" indent="-342900">
+            <a:pPr indent="0" marL="0">
               <a:spcAft>
                 <a:spcPts val="200"/>
               </a:spcAft>
-              <a:buSzPct val="100000"/>
-              <a:buChar char="•"/>
-            </a:pPr>
-            <a:r>
-              <a:rPr lang="en-US" sz="850" dirty="0">
+              <a:buNone/>
+            </a:pPr>
+            <a:r>
+              <a:rPr lang="en-US" sz="900" dirty="0">
                 <a:solidFill>
                   <a:srgbClr val="334155"/>
                 </a:solidFill>
@@ -8052,15 +7982,14 @@
             <a:endParaRPr lang="en-US" sz="850" dirty="0"/>
           </a:p>
           <a:p>
-            <a:pPr marL="342900" indent="-342900">
+            <a:pPr indent="0" marL="0">
               <a:spcAft>
                 <a:spcPts val="200"/>
               </a:spcAft>
-              <a:buSzPct val="100000"/>
-              <a:buChar char="•"/>
-            </a:pPr>
-            <a:r>
-              <a:rPr lang="en-US" sz="850" dirty="0">
+              <a:buNone/>
+            </a:pPr>
+            <a:r>
+              <a:rPr lang="en-US" sz="900" dirty="0">
                 <a:solidFill>
                   <a:srgbClr val="334155"/>
                 </a:solidFill>
@@ -8073,15 +8002,14 @@
             <a:endParaRPr lang="en-US" sz="850" dirty="0"/>
           </a:p>
           <a:p>
-            <a:pPr marL="342900" indent="-342900">
+            <a:pPr indent="0" marL="0">
               <a:spcAft>
                 <a:spcPts val="200"/>
               </a:spcAft>
-              <a:buSzPct val="100000"/>
-              <a:buChar char="•"/>
-            </a:pPr>
-            <a:r>
-              <a:rPr lang="en-US" sz="850" dirty="0">
+              <a:buNone/>
+            </a:pPr>
+            <a:r>
+              <a:rPr lang="en-US" sz="900" dirty="0">
                 <a:solidFill>
                   <a:srgbClr val="334155"/>
                 </a:solidFill>
@@ -8143,8 +8071,8 @@
         </p:blipFill>
         <p:spPr>
           <a:xfrm>
-            <a:off x="1828800" y="45720"/>
-            <a:ext cx="5486400" cy="749808"/>
+            <a:off x="0" y="0"/>
+            <a:ext cx="9144000" cy="749808"/>
           </a:xfrm>
           <a:prstGeom prst="rect">
             <a:avLst/>
@@ -8159,7 +8087,7 @@
         </p:nvSpPr>
         <p:spPr>
           <a:xfrm>
-            <a:off x="548640" y="813816"/>
+            <a:off x="548640" y="822960"/>
             <a:ext cx="5943600" cy="329184"/>
           </a:xfrm>
           <a:prstGeom prst="rect">
@@ -11410,8 +11338,8 @@
         </p:blipFill>
         <p:spPr>
           <a:xfrm>
-            <a:off x="1828800" y="45720"/>
-            <a:ext cx="5486400" cy="749808"/>
+            <a:off x="0" y="0"/>
+            <a:ext cx="9144000" cy="749808"/>
           </a:xfrm>
           <a:prstGeom prst="rect">
             <a:avLst/>
@@ -11426,7 +11354,7 @@
         </p:nvSpPr>
         <p:spPr>
           <a:xfrm>
-            <a:off x="548640" y="813816"/>
+            <a:off x="548640" y="822960"/>
             <a:ext cx="5943600" cy="329184"/>
           </a:xfrm>
           <a:prstGeom prst="rect">
@@ -12214,8 +12142,8 @@
         </p:blipFill>
         <p:spPr>
           <a:xfrm>
-            <a:off x="1828800" y="45720"/>
-            <a:ext cx="5486400" cy="749808"/>
+            <a:off x="0" y="0"/>
+            <a:ext cx="9144000" cy="749808"/>
           </a:xfrm>
           <a:prstGeom prst="rect">
             <a:avLst/>
@@ -12230,7 +12158,7 @@
         </p:nvSpPr>
         <p:spPr>
           <a:xfrm>
-            <a:off x="548640" y="813816"/>
+            <a:off x="548640" y="822960"/>
             <a:ext cx="5943600" cy="329184"/>
           </a:xfrm>
           <a:prstGeom prst="rect">
@@ -13023,8 +12951,8 @@
         </p:blipFill>
         <p:spPr>
           <a:xfrm>
-            <a:off x="1828800" y="45720"/>
-            <a:ext cx="5486400" cy="749808"/>
+            <a:off x="0" y="0"/>
+            <a:ext cx="9144000" cy="749808"/>
           </a:xfrm>
           <a:prstGeom prst="rect">
             <a:avLst/>
@@ -13039,7 +12967,7 @@
         </p:nvSpPr>
         <p:spPr>
           <a:xfrm>
-            <a:off x="548640" y="813816"/>
+            <a:off x="548640" y="822960"/>
             <a:ext cx="5943600" cy="329184"/>
           </a:xfrm>
           <a:prstGeom prst="rect">
@@ -13655,8 +13583,8 @@
         </p:blipFill>
         <p:spPr>
           <a:xfrm>
-            <a:off x="1828800" y="45720"/>
-            <a:ext cx="5486400" cy="749808"/>
+            <a:off x="0" y="0"/>
+            <a:ext cx="9144000" cy="749808"/>
           </a:xfrm>
           <a:prstGeom prst="rect">
             <a:avLst/>
@@ -13671,7 +13599,7 @@
         </p:nvSpPr>
         <p:spPr>
           <a:xfrm>
-            <a:off x="548640" y="813816"/>
+            <a:off x="548640" y="822960"/>
             <a:ext cx="5943600" cy="329184"/>
           </a:xfrm>
           <a:prstGeom prst="rect">
@@ -14287,8 +14215,8 @@
         </p:blipFill>
         <p:spPr>
           <a:xfrm>
-            <a:off x="1828800" y="45720"/>
-            <a:ext cx="5486400" cy="749808"/>
+            <a:off x="0" y="0"/>
+            <a:ext cx="9144000" cy="749808"/>
           </a:xfrm>
           <a:prstGeom prst="rect">
             <a:avLst/>
@@ -14303,7 +14231,7 @@
         </p:nvSpPr>
         <p:spPr>
           <a:xfrm>
-            <a:off x="548640" y="813816"/>
+            <a:off x="548640" y="822960"/>
             <a:ext cx="5943600" cy="329184"/>
           </a:xfrm>
           <a:prstGeom prst="rect">
@@ -15139,8 +15067,8 @@
         </p:blipFill>
         <p:spPr>
           <a:xfrm>
-            <a:off x="1828800" y="45720"/>
-            <a:ext cx="5486400" cy="749808"/>
+            <a:off x="0" y="0"/>
+            <a:ext cx="9144000" cy="749808"/>
           </a:xfrm>
           <a:prstGeom prst="rect">
             <a:avLst/>
@@ -15155,7 +15083,7 @@
         </p:nvSpPr>
         <p:spPr>
           <a:xfrm>
-            <a:off x="548640" y="813816"/>
+            <a:off x="548640" y="822960"/>
             <a:ext cx="5943600" cy="329184"/>
           </a:xfrm>
           <a:prstGeom prst="rect">
@@ -15520,8 +15448,8 @@
         </p:blipFill>
         <p:spPr>
           <a:xfrm>
-            <a:off x="1828800" y="45720"/>
-            <a:ext cx="5486400" cy="749808"/>
+            <a:off x="0" y="0"/>
+            <a:ext cx="9144000" cy="749808"/>
           </a:xfrm>
           <a:prstGeom prst="rect">
             <a:avLst/>
@@ -15536,7 +15464,7 @@
         </p:nvSpPr>
         <p:spPr>
           <a:xfrm>
-            <a:off x="548640" y="813816"/>
+            <a:off x="548640" y="822960"/>
             <a:ext cx="5943600" cy="329184"/>
           </a:xfrm>
           <a:prstGeom prst="rect">
@@ -16336,8 +16264,8 @@
         </p:blipFill>
         <p:spPr>
           <a:xfrm>
-            <a:off x="1828800" y="45720"/>
-            <a:ext cx="5486400" cy="749808"/>
+            <a:off x="0" y="0"/>
+            <a:ext cx="9144000" cy="749808"/>
           </a:xfrm>
           <a:prstGeom prst="rect">
             <a:avLst/>
@@ -16352,7 +16280,7 @@
         </p:nvSpPr>
         <p:spPr>
           <a:xfrm>
-            <a:off x="548640" y="813816"/>
+            <a:off x="548640" y="822960"/>
             <a:ext cx="5943600" cy="329184"/>
           </a:xfrm>
           <a:prstGeom prst="rect">
@@ -16934,8 +16862,8 @@
         </p:blipFill>
         <p:spPr>
           <a:xfrm>
-            <a:off x="1828800" y="45720"/>
-            <a:ext cx="5486400" cy="749808"/>
+            <a:off x="0" y="0"/>
+            <a:ext cx="9144000" cy="749808"/>
           </a:xfrm>
           <a:prstGeom prst="rect">
             <a:avLst/>
@@ -16950,7 +16878,7 @@
         </p:nvSpPr>
         <p:spPr>
           <a:xfrm>
-            <a:off x="548640" y="813816"/>
+            <a:off x="548640" y="822960"/>
             <a:ext cx="5943600" cy="329184"/>
           </a:xfrm>
           <a:prstGeom prst="rect">
@@ -19393,8 +19321,8 @@
         </p:blipFill>
         <p:spPr>
           <a:xfrm>
-            <a:off x="1828800" y="45720"/>
-            <a:ext cx="5486400" cy="749808"/>
+            <a:off x="0" y="0"/>
+            <a:ext cx="9144000" cy="749808"/>
           </a:xfrm>
           <a:prstGeom prst="rect">
             <a:avLst/>
@@ -19409,7 +19337,7 @@
         </p:nvSpPr>
         <p:spPr>
           <a:xfrm>
-            <a:off x="548640" y="813816"/>
+            <a:off x="548640" y="822960"/>
             <a:ext cx="5943600" cy="329184"/>
           </a:xfrm>
           <a:prstGeom prst="rect">
@@ -20483,8 +20411,8 @@
         </p:blipFill>
         <p:spPr>
           <a:xfrm>
-            <a:off x="1828800" y="45720"/>
-            <a:ext cx="5486400" cy="749808"/>
+            <a:off x="0" y="0"/>
+            <a:ext cx="9144000" cy="749808"/>
           </a:xfrm>
           <a:prstGeom prst="rect">
             <a:avLst/>
@@ -20499,7 +20427,7 @@
         </p:nvSpPr>
         <p:spPr>
           <a:xfrm>
-            <a:off x="548640" y="813816"/>
+            <a:off x="548640" y="822960"/>
             <a:ext cx="5943600" cy="329184"/>
           </a:xfrm>
           <a:prstGeom prst="rect">
@@ -21443,8 +21371,8 @@
         </p:blipFill>
         <p:spPr>
           <a:xfrm>
-            <a:off x="1828800" y="45720"/>
-            <a:ext cx="5486400" cy="749808"/>
+            <a:off x="0" y="0"/>
+            <a:ext cx="9144000" cy="749808"/>
           </a:xfrm>
           <a:prstGeom prst="rect">
             <a:avLst/>
@@ -21459,7 +21387,7 @@
         </p:nvSpPr>
         <p:spPr>
           <a:xfrm>
-            <a:off x="548640" y="813816"/>
+            <a:off x="548640" y="822960"/>
             <a:ext cx="5943600" cy="329184"/>
           </a:xfrm>
           <a:prstGeom prst="rect">
@@ -22231,8 +22159,8 @@
         </p:blipFill>
         <p:spPr>
           <a:xfrm>
-            <a:off x="1828800" y="45720"/>
-            <a:ext cx="5486400" cy="749808"/>
+            <a:off x="0" y="0"/>
+            <a:ext cx="9144000" cy="749808"/>
           </a:xfrm>
           <a:prstGeom prst="rect">
             <a:avLst/>
@@ -22247,7 +22175,7 @@
         </p:nvSpPr>
         <p:spPr>
           <a:xfrm>
-            <a:off x="548640" y="813816"/>
+            <a:off x="548640" y="822960"/>
             <a:ext cx="5943600" cy="329184"/>
           </a:xfrm>
           <a:prstGeom prst="rect">

--- a/Smart_Restaurant_Presentation_III.pptx
+++ b/Smart_Restaurant_Presentation_III.pptx
@@ -888,7 +888,7 @@
           <a:p>
             <a:r>
               <a:rPr lang="en-US" dirty="0"/>
-              <a:t>Good morning esteemed evaluators, mentors, and faculty members. Welcome to our Presentation III capstone project evaluation for Smart Restaurant. Our team—Manav Singh, Sanskar Suryavanshi, and Kesar Singh, guided by Prof. Vinitta Sunish from the Department of Computer Engineering, TCET—presents a fully implemented, zero-install WebXR 3D Augmented Reality contactless dining platform and real-time Kitchen Display System.</a:t>
+              <a:t>Good morning esteemed evaluators, mentors, and faculty members. Welcome to our Presentation III capstone project evaluation for "An Intelligent AI-Powered Restaurant Ordering System Using Augmented Reality". Our team—Manav Singh, Sanskar Suryavanshi, and Kesar Singh, guided by Prof. Vinitta Sunish from the Department of Computer Engineering, TCET—presents a fully implemented, zero-install WebXR 3D Augmented Reality contactless dining platform and real-time Kitchen Display System.</a:t>
             </a:r>
             <a:endParaRPr lang="en-US" dirty="0"/>
           </a:p>
@@ -1856,7 +1856,7 @@
           <a:p>
             <a:r>
               <a:rPr lang="en-US" dirty="0"/>
-              <a:t>Slide 2 covers the problem statement. The dining industry struggles with unhygienic physical menus and 2D food pictures that cannot convey realistic portion volume, causing significant food wastage. Existing QR PDF menus are difficult to read, while tabletop tablet hardware is expensive and prone to failure.</a:t>
+              <a:t>Slide 2 covers our primary problem statement. The fundamental flaw in traditional dining is pre-order visualization blindness: customers cannot see what their food will look like before placing an order. Abstract text descriptions and flat 2D photos fail to convey portion depth and scale, leading to dish mismatch and up to 22% food plate waste. Combined with unhygienic paper menus and clumsy QR PDFs, this creates urgent demand for an intelligent AI-powered AR ordering solution.</a:t>
             </a:r>
             <a:endParaRPr lang="en-US" dirty="0"/>
           </a:p>
@@ -3004,8 +3004,8 @@
         </p:nvSpPr>
         <p:spPr>
           <a:xfrm>
-            <a:off x="731520" y="1325880"/>
-            <a:ext cx="7680960" cy="502920"/>
+            <a:off x="457200" y="1225296"/>
+            <a:ext cx="8229600" cy="640080"/>
           </a:xfrm>
           <a:prstGeom prst="rect">
             <a:avLst/>
@@ -3021,7 +3021,7 @@
               <a:buNone/>
             </a:pPr>
             <a:r>
-              <a:rPr lang="en-US" sz="3200" b="1" dirty="0">
+              <a:rPr lang="en-US" sz="2100" b="1" dirty="0">
                 <a:solidFill>
                   <a:srgbClr val="1E3A8A"/>
                 </a:solidFill>
@@ -3029,9 +3029,9 @@
                 <a:ea typeface="Cambria" pitchFamily="34" charset="-122"/>
                 <a:cs typeface="Cambria" pitchFamily="34" charset="-120"/>
               </a:rPr>
-              <a:t>Smart Restaurant</a:t>
-            </a:r>
-            <a:endParaRPr lang="en-US" sz="3200" dirty="0"/>
+              <a:t>AN INTELLIGENT AI-POWERED RESTAURANT ORDERING SYSTEM USING AUGMENTED REALITY</a:t>
+            </a:r>
+            <a:endParaRPr lang="en-US" sz="2100" dirty="0"/>
           </a:p>
         </p:txBody>
       </p:sp>
@@ -3043,8 +3043,8 @@
         </p:nvSpPr>
         <p:spPr>
           <a:xfrm>
-            <a:off x="914400" y="1874520"/>
-            <a:ext cx="7315200" cy="347472"/>
+            <a:off x="731520" y="1901952"/>
+            <a:ext cx="7680960" cy="292608"/>
           </a:xfrm>
           <a:prstGeom prst="rect">
             <a:avLst/>
@@ -3060,7 +3060,7 @@
               <a:buNone/>
             </a:pPr>
             <a:r>
-              <a:rPr lang="en-US" sz="1200" dirty="0">
+              <a:rPr lang="en-US" sz="1150" dirty="0">
                 <a:solidFill>
                   <a:srgbClr val="334155"/>
                 </a:solidFill>
@@ -3070,7 +3070,7 @@
               </a:rPr>
               <a:t>A Contactless Dining Platform with Markerless WebXR 3D Augmented Reality &amp; Real-Time Kitchen Display System</a:t>
             </a:r>
-            <a:endParaRPr lang="en-US" sz="1200" dirty="0"/>
+            <a:endParaRPr lang="en-US" sz="1150" dirty="0"/>
           </a:p>
         </p:txBody>
       </p:sp>
@@ -13214,7 +13214,7 @@
                 <a:ea typeface="Calibri" pitchFamily="34" charset="-122"/>
                 <a:cs typeface="Calibri" pitchFamily="34" charset="-120"/>
               </a:rPr>
-              <a:t>Delivered a fully functioning, end-to-end contactless dining platform active on Vercel at `https://smart-restaurant-2za8.vercel.app/`. Both diner AR ordering and real-time KDS kitchen tracking operate seamlessly.</a:t>
+              <a:t>Delivered an Intelligent AI-Powered Restaurant Ordering System Using Augmented Reality active on Vercel at `https://smart-restaurant-2za8.vercel.app/`. Both diner AR ordering and real-time KDS kitchen tracking operate seamlessly.</a:t>
             </a:r>
             <a:endParaRPr lang="en-US" sz="950" dirty="0"/>
           </a:p>
@@ -14398,7 +14398,7 @@
           <a:solidFill>
             <a:srgbClr val="F8FAFC"/>
           </a:solidFill>
-          <a:ln w="12700">
+          <a:ln w="9525">
             <a:solidFill>
               <a:srgbClr val="E2E8F0"/>
             </a:solidFill>
@@ -14453,8 +14453,8 @@
         </p:nvSpPr>
         <p:spPr>
           <a:xfrm>
-            <a:off x="731520" y="1664208"/>
-            <a:ext cx="4572000" cy="2743200"/>
+            <a:off x="731520" y="1645920"/>
+            <a:ext cx="4572000" cy="2788920"/>
           </a:xfrm>
           <a:prstGeom prst="rect">
             <a:avLst/>
@@ -14468,7 +14468,7 @@
           <a:p>
             <a:pPr indent="0" marL="0">
               <a:spcAft>
-                <a:spcPts val="800"/>
+                <a:spcPts val="700"/>
               </a:spcAft>
               <a:buNone/>
             </a:pPr>
@@ -14481,14 +14481,14 @@
                 <a:ea typeface="Calibri" pitchFamily="34" charset="-122"/>
                 <a:cs typeface="Calibri" pitchFamily="34" charset="-120"/>
               </a:rPr>
-              <a:t>1. Unhygienic &amp; Inflexible Paper Menus</a:t>
+              <a:t>1. Inability to Visualize Dishes Before Ordering (Pre-Order Reality Gap)</a:t>
             </a:r>
             <a:endParaRPr lang="en-US" sz="950" dirty="0"/>
           </a:p>
           <a:p>
             <a:pPr indent="0" marL="0">
               <a:spcAft>
-                <a:spcPts val="800"/>
+                <a:spcPts val="700"/>
               </a:spcAft>
               <a:buNone/>
             </a:pPr>
@@ -14501,14 +14501,14 @@
                 <a:ea typeface="Calibri" pitchFamily="34" charset="-122"/>
                 <a:cs typeface="Calibri" pitchFamily="34" charset="-120"/>
               </a:rPr>
-              <a:t>Physical laminated menus are touched by hundreds of patrons, creating persistent hygiene concerns. Furthermore, reprinting menus to adjust for seasonal pricing or ingredient stockouts generates recurring recurring costs.</a:t>
+              <a:t>In conventional dining, patrons cannot see what food dishes actually look like before ordering. Relying on abstract text descriptions or misleading 2D photos prevents customers from assessing authentic portion volume, plate depth, and ingredient presentation. This pre-order uncertainty causes widespread order anxiety, dish mismatch, and an alarming 18%–22% food plate return and wastage rate.</a:t>
             </a:r>
             <a:endParaRPr lang="en-US" sz="950" dirty="0"/>
           </a:p>
           <a:p>
             <a:pPr indent="0" marL="0">
               <a:spcAft>
-                <a:spcPts val="800"/>
+                <a:spcPts val="700"/>
               </a:spcAft>
               <a:buNone/>
             </a:pPr>
@@ -14521,14 +14521,14 @@
                 <a:ea typeface="Calibri" pitchFamily="34" charset="-122"/>
                 <a:cs typeface="Calibri" pitchFamily="34" charset="-120"/>
               </a:rPr>
-              <a:t>2. 2D Photo Ambiguity &amp; Food Wastage</a:t>
+              <a:t>2. Unhygienic &amp; Inflexible Physical Menus</a:t>
             </a:r>
             <a:endParaRPr lang="en-US" sz="950" dirty="0"/>
           </a:p>
           <a:p>
             <a:pPr indent="0" marL="0">
               <a:spcAft>
-                <a:spcPts val="800"/>
+                <a:spcPts val="700"/>
               </a:spcAft>
               <a:buNone/>
             </a:pPr>
@@ -14541,14 +14541,14 @@
                 <a:ea typeface="Calibri" pitchFamily="34" charset="-122"/>
                 <a:cs typeface="Calibri" pitchFamily="34" charset="-120"/>
               </a:rPr>
-              <a:t>Flat 2D photographs fail to convey true spatial volume, depth, and presentation scale. This misjudgment frequently leads to order remorse, contributing to an estimated 18%–22% plate food return rate across casual restaurants.</a:t>
+              <a:t>Laminated paper menus pass through hundreds of hands daily without sanitization, posing health concerns. Moreover, static printed menus cannot accommodate dynamic pricing, seasonal specialties, or real-time ingredient stockouts without expensive, wasteful reprinting.</a:t>
             </a:r>
             <a:endParaRPr lang="en-US" sz="950" dirty="0"/>
           </a:p>
           <a:p>
             <a:pPr indent="0" marL="0">
               <a:spcAft>
-                <a:spcPts val="800"/>
+                <a:spcPts val="700"/>
               </a:spcAft>
               <a:buNone/>
             </a:pPr>
@@ -14561,14 +14561,14 @@
                 <a:ea typeface="Calibri" pitchFamily="34" charset="-122"/>
                 <a:cs typeface="Calibri" pitchFamily="34" charset="-120"/>
               </a:rPr>
-              <a:t>3. Limitations of Early Digital Solutions</a:t>
+              <a:t>3. Limitations of Basic QR PDFs &amp; Expensive POS Hardware</a:t>
             </a:r>
             <a:endParaRPr lang="en-US" sz="950" dirty="0"/>
           </a:p>
           <a:p>
             <a:pPr indent="0" marL="0">
               <a:spcAft>
-                <a:spcPts val="800"/>
+                <a:spcPts val="700"/>
               </a:spcAft>
               <a:buNone/>
             </a:pPr>
@@ -14581,7 +14581,7 @@
                 <a:ea typeface="Calibri" pitchFamily="34" charset="-122"/>
                 <a:cs typeface="Calibri" pitchFamily="34" charset="-120"/>
               </a:rPr>
-              <a:t>Static QR code PDFs provide clumsy mobile navigation with zero interactive cart integration. Meanwhile, proprietary tabletop tablets (e.g. Ziosk) demand high upfront capital investment and suffer frequent hardware breakdowns.</a:t>
+              <a:t>Static QR code PDFs provide clumsy, non-interactive mobile navigation with zero visual engagement. Conversely, dedicated tabletop POS touchscreen tablets require prohibitive capital investment (₹3.5L+ per 10 tables) and suffer frequent battery and screen breakdowns.</a:t>
             </a:r>
             <a:endParaRPr lang="en-US" sz="950" dirty="0"/>
           </a:p>
@@ -14686,7 +14686,7 @@
                 <a:ea typeface="Calibri" pitchFamily="34" charset="-122"/>
                 <a:cs typeface="Calibri" pitchFamily="34" charset="-120"/>
               </a:rPr>
-              <a:t>Food Plate Return Rate</a:t>
+              <a:t>Food Return &amp; Wastage Rate</a:t>
             </a:r>
             <a:endParaRPr lang="en-US" sz="950" dirty="0"/>
           </a:p>
@@ -14725,7 +14725,7 @@
                 <a:ea typeface="Calibri" pitchFamily="34" charset="-122"/>
                 <a:cs typeface="Calibri" pitchFamily="34" charset="-120"/>
               </a:rPr>
-              <a:t>Caused by portion misjudgment from 2D photos</a:t>
+              <a:t>Driven by inability to visualize portion scale before ordering</a:t>
             </a:r>
             <a:endParaRPr lang="en-US" sz="850" dirty="0"/>
           </a:p>
@@ -14785,13 +14785,13 @@
             <a:r>
               <a:rPr lang="en-US" sz="1800" b="1" dirty="0">
                 <a:solidFill>
-                  <a:srgbClr val="D97706"/>
+                  <a:srgbClr val="2563EB"/>
                 </a:solidFill>
                 <a:latin typeface="Cambria" pitchFamily="34" charset="0"/>
                 <a:ea typeface="Cambria" pitchFamily="34" charset="-122"/>
                 <a:cs typeface="Cambria" pitchFamily="34" charset="-120"/>
               </a:rPr>
-              <a:t>₹3,50,000+</a:t>
+              <a:t>70%+</a:t>
             </a:r>
             <a:endParaRPr lang="en-US" sz="1800" dirty="0"/>
           </a:p>
@@ -14830,7 +14830,7 @@
                 <a:ea typeface="Calibri" pitchFamily="34" charset="-122"/>
                 <a:cs typeface="Calibri" pitchFamily="34" charset="-120"/>
               </a:rPr>
-              <a:t>Hardware CAPEX / 10 Tables</a:t>
+              <a:t>App Install Abandonment</a:t>
             </a:r>
             <a:endParaRPr lang="en-US" sz="950" dirty="0"/>
           </a:p>
@@ -14869,7 +14869,7 @@
                 <a:ea typeface="Calibri" pitchFamily="34" charset="-122"/>
                 <a:cs typeface="Calibri" pitchFamily="34" charset="-120"/>
               </a:rPr>
-              <a:t>Cost of proprietary tabletop POS touchscreen devices</a:t>
+              <a:t>Diners who refuse to install native AR apps in restaurants</a:t>
             </a:r>
             <a:endParaRPr lang="en-US" sz="850" dirty="0"/>
           </a:p>
@@ -14929,13 +14929,13 @@
             <a:r>
               <a:rPr lang="en-US" sz="1800" b="1" dirty="0">
                 <a:solidFill>
-                  <a:srgbClr val="2563EB"/>
+                  <a:srgbClr val="059669"/>
                 </a:solidFill>
                 <a:latin typeface="Cambria" pitchFamily="34" charset="0"/>
                 <a:ea typeface="Cambria" pitchFamily="34" charset="-122"/>
                 <a:cs typeface="Cambria" pitchFamily="34" charset="-120"/>
               </a:rPr>
-              <a:t>70%+</a:t>
+              <a:t>₹3,50,000+</a:t>
             </a:r>
             <a:endParaRPr lang="en-US" sz="1800" dirty="0"/>
           </a:p>
@@ -14974,7 +14974,7 @@
                 <a:ea typeface="Calibri" pitchFamily="34" charset="-122"/>
                 <a:cs typeface="Calibri" pitchFamily="34" charset="-120"/>
               </a:rPr>
-              <a:t>App Install Abandonment</a:t>
+              <a:t>Hardware CAPEX Saved</a:t>
             </a:r>
             <a:endParaRPr lang="en-US" sz="950" dirty="0"/>
           </a:p>
@@ -15013,7 +15013,7 @@
                 <a:ea typeface="Calibri" pitchFamily="34" charset="-122"/>
                 <a:cs typeface="Calibri" pitchFamily="34" charset="-120"/>
               </a:rPr>
-              <a:t>Diners who refuse to install native AR apps in restaurants</a:t>
+              <a:t>Eliminated through browser-based smartphone AR ordering</a:t>
             </a:r>
             <a:endParaRPr lang="en-US" sz="850" dirty="0"/>
           </a:p>
@@ -16531,7 +16531,7 @@
                 <a:ea typeface="Calibri" pitchFamily="34" charset="-122"/>
                 <a:cs typeface="Calibri" pitchFamily="34" charset="-120"/>
               </a:rPr>
-              <a:t>Main Objective: Build and deploy a production-grade, zero-install WebXR &amp; Scene Viewer 3D AR smart menu with a synchronized real-time Kitchen Display System.</a:t>
+              <a:t>Main Objective: Build and deploy an Intelligent AI-Powered Restaurant Ordering System using zero-install WebXR 3D Augmented Reality and synchronized real-time KDS.</a:t>
             </a:r>
             <a:endParaRPr lang="en-US" sz="950" dirty="0"/>
           </a:p>
@@ -16552,7 +16552,7 @@
                 <a:ea typeface="Calibri" pitchFamily="34" charset="-122"/>
                 <a:cs typeface="Calibri" pitchFamily="34" charset="-120"/>
               </a:rPr>
-              <a:t>Zero-Install 6-DoF AR: Implement WebXR Device API hit-testing to anchor 3D food items to physical tabletop planes with 1:1 metric accuracy.</a:t>
+              <a:t>Pre-Order 3D Spatial Visualization: Eliminate customer uncertainty by projecting photorealistic, 1:1 true-metric food models directly onto tables before ordering.</a:t>
             </a:r>
             <a:endParaRPr lang="en-US" sz="950" dirty="0"/>
           </a:p>

--- a/Smart_Restaurant_Presentation_III.pptx
+++ b/Smart_Restaurant_Presentation_III.pptx
@@ -4,6 +4,9 @@
   <p:sldMasterIdLst>
     <p:sldMasterId id="2147483648" r:id="rId1"/>
   </p:sldMasterIdLst>
+  <p:notesMasterIdLst>
+    <p:notesMasterId r:id="rId22"/>
+  </p:notesMasterIdLst>
   <p:sldIdLst>
     <p:sldId id="256" r:id="rId2"/>
     <p:sldId id="257" r:id="rId3"/>
@@ -26,10 +29,7 @@
     <p:sldId id="274" r:id="rId20"/>
     <p:sldId id="275" r:id="rId21"/>
   </p:sldIdLst>
-  <p:notesMasterIdLst>
-    <p:notesMasterId r:id="rId22"/>
-  </p:notesMasterIdLst>
-  <p:sldSz cx="9144000" cy="5143500"/>
+  <p:sldSz cx="9144000" cy="5143500" type="screen16x9"/>
   <p:notesSz cx="5143500" cy="9144000"/>
   <p:defaultTextStyle>
     <a:lvl1pPr marL="0" algn="l" defTabSz="914400" rtl="0" eaLnBrk="1" latinLnBrk="0" hangingPunct="1">
@@ -123,13 +123,20 @@
       </a:defRPr>
     </a:lvl9pPr>
   </p:defaultTextStyle>
+  <p:extLst>
+    <p:ext uri="{EFAFB233-063F-42B5-8137-9DF3F51BA10A}">
+      <p15:sldGuideLst xmlns:p15="http://schemas.microsoft.com/office/powerpoint/2012/main"/>
+    </p:ext>
+  </p:extLst>
 </p:presentation>
 </file>
 
 <file path=ppt/charts/chart1.xml><?xml version="1.0" encoding="utf-8"?>
-<c:chartSpace xmlns:c="http://schemas.openxmlformats.org/drawingml/2006/chart" xmlns:a="http://schemas.openxmlformats.org/drawingml/2006/main" xmlns:r="http://schemas.openxmlformats.org/officeDocument/2006/relationships">
+<c:chartSpace xmlns:c="http://schemas.openxmlformats.org/drawingml/2006/chart" xmlns:a="http://schemas.openxmlformats.org/drawingml/2006/main" xmlns:r="http://schemas.openxmlformats.org/officeDocument/2006/relationships" xmlns:c16r2="http://schemas.microsoft.com/office/drawing/2015/06/chart">
   <c:date1904 val="0"/>
+  <c:lang val="en-US"/>
   <c:roundedCorners val="1"/>
+  <c:style val="2"/>
   <c:chart>
     <c:title>
       <c:tx>
@@ -146,7 +153,7 @@
               </a:defRPr>
             </a:pPr>
             <a:r>
-              <a:rPr sz="1100" b="0" i="0" u="none" strike="noStrike">
+              <a:rPr lang="en-US" sz="1100" b="0" i="0" u="none" strike="noStrike">
                 <a:solidFill>
                   <a:srgbClr val="1E3A8A"/>
                 </a:solidFill>
@@ -157,7 +164,6 @@
           </a:p>
         </c:rich>
       </c:tx>
-      <c:layout/>
       <c:overlay val="0"/>
     </c:title>
     <c:autoTitleDeleted val="0"/>
@@ -190,18 +196,26 @@
           <c:invertIfNegative val="0"/>
           <c:dLbls>
             <c:numFmt formatCode="#,##0" sourceLinked="0"/>
+            <c:spPr>
+              <a:noFill/>
+              <a:ln>
+                <a:noFill/>
+              </a:ln>
+              <a:effectLst/>
+            </c:spPr>
             <c:txPr>
               <a:bodyPr/>
               <a:lstStyle/>
               <a:p>
                 <a:pPr>
-                  <a:defRPr b="0" i="0" strike="noStrike" sz="850" u="none">
+                  <a:defRPr sz="850" b="0" i="0" u="none" strike="noStrike">
                     <a:solidFill>
                       <a:srgbClr val="FFFFFF"/>
                     </a:solidFill>
                     <a:latin typeface="Arial"/>
                   </a:defRPr>
                 </a:pPr>
+                <a:endParaRPr lang="en-US"/>
               </a:p>
             </c:txPr>
             <c:dLblPos val="inEnd"/>
@@ -212,28 +226,31 @@
             <c:showPercent val="0"/>
             <c:showBubbleSize val="0"/>
             <c:showLeaderLines val="0"/>
+            <c:extLst>
+              <c:ext xmlns:c15="http://schemas.microsoft.com/office/drawing/2012/chart" uri="{CE6537A1-D6FC-4f65-9D91-7224C49458BB}">
+                <c15:showLeaderLines val="0"/>
+              </c:ext>
+            </c:extLst>
           </c:dLbls>
           <c:cat>
-            <c:multiLvlStrRef>
+            <c:strRef>
               <c:f>Sheet1!$A$2:$A$5</c:f>
-              <c:multiLvlStrCache>
+              <c:strCache>
                 <c:ptCount val="4"/>
-                <c:lvl>
-                  <c:pt idx="0">
-                    <c:v>Burger GLB</c:v>
-                  </c:pt>
-                  <c:pt idx="1">
-                    <c:v>Pizza GLB</c:v>
-                  </c:pt>
-                  <c:pt idx="2">
-                    <c:v>Pasta GLB</c:v>
-                  </c:pt>
-                  <c:pt idx="3">
-                    <c:v>Butter Chicken GLB</c:v>
-                  </c:pt>
-                </c:lvl>
-              </c:multiLvlStrCache>
-            </c:multiLvlStrRef>
+                <c:pt idx="0">
+                  <c:v>Burger GLB</c:v>
+                </c:pt>
+                <c:pt idx="1">
+                  <c:v>Pizza GLB</c:v>
+                </c:pt>
+                <c:pt idx="2">
+                  <c:v>Pasta GLB</c:v>
+                </c:pt>
+                <c:pt idx="3">
+                  <c:v>Butter Chicken GLB</c:v>
+                </c:pt>
+              </c:strCache>
+            </c:strRef>
           </c:cat>
           <c:val>
             <c:numRef>
@@ -242,7 +259,7 @@
                 <c:formatCode>General</c:formatCode>
                 <c:ptCount val="4"/>
                 <c:pt idx="0">
-                  <c:v>18.9</c:v>
+                  <c:v>18.899999999999999</c:v>
                 </c:pt>
                 <c:pt idx="1">
                   <c:v>46.8</c:v>
@@ -256,6 +273,11 @@
               </c:numCache>
             </c:numRef>
           </c:val>
+          <c:extLst>
+            <c:ext xmlns:c16="http://schemas.microsoft.com/office/drawing/2014/chart" uri="{C3380CC4-5D6E-409C-BE32-E72D297353CC}">
+              <c16:uniqueId val="{00000000-8A5E-40BD-B77B-BA09A80EF9CE}"/>
+            </c:ext>
+          </c:extLst>
         </c:ser>
         <c:ser>
           <c:idx val="1"/>
@@ -280,18 +302,26 @@
           <c:invertIfNegative val="0"/>
           <c:dLbls>
             <c:numFmt formatCode="#,##0" sourceLinked="0"/>
+            <c:spPr>
+              <a:noFill/>
+              <a:ln>
+                <a:noFill/>
+              </a:ln>
+              <a:effectLst/>
+            </c:spPr>
             <c:txPr>
               <a:bodyPr/>
               <a:lstStyle/>
               <a:p>
                 <a:pPr>
-                  <a:defRPr b="0" i="0" strike="noStrike" sz="850" u="none">
+                  <a:defRPr sz="850" b="0" i="0" u="none" strike="noStrike">
                     <a:solidFill>
                       <a:srgbClr val="FFFFFF"/>
                     </a:solidFill>
                     <a:latin typeface="Arial"/>
                   </a:defRPr>
                 </a:pPr>
+                <a:endParaRPr lang="en-US"/>
               </a:p>
             </c:txPr>
             <c:dLblPos val="inEnd"/>
@@ -302,28 +332,31 @@
             <c:showPercent val="0"/>
             <c:showBubbleSize val="0"/>
             <c:showLeaderLines val="0"/>
+            <c:extLst>
+              <c:ext xmlns:c15="http://schemas.microsoft.com/office/drawing/2012/chart" uri="{CE6537A1-D6FC-4f65-9D91-7224C49458BB}">
+                <c15:showLeaderLines val="0"/>
+              </c:ext>
+            </c:extLst>
           </c:dLbls>
           <c:cat>
-            <c:multiLvlStrRef>
+            <c:strRef>
               <c:f>Sheet1!$A$2:$A$5</c:f>
-              <c:multiLvlStrCache>
+              <c:strCache>
                 <c:ptCount val="4"/>
-                <c:lvl>
-                  <c:pt idx="0">
-                    <c:v>Burger GLB</c:v>
-                  </c:pt>
-                  <c:pt idx="1">
-                    <c:v>Pizza GLB</c:v>
-                  </c:pt>
-                  <c:pt idx="2">
-                    <c:v>Pasta GLB</c:v>
-                  </c:pt>
-                  <c:pt idx="3">
-                    <c:v>Butter Chicken GLB</c:v>
-                  </c:pt>
-                </c:lvl>
-              </c:multiLvlStrCache>
-            </c:multiLvlStrRef>
+                <c:pt idx="0">
+                  <c:v>Burger GLB</c:v>
+                </c:pt>
+                <c:pt idx="1">
+                  <c:v>Pizza GLB</c:v>
+                </c:pt>
+                <c:pt idx="2">
+                  <c:v>Pasta GLB</c:v>
+                </c:pt>
+                <c:pt idx="3">
+                  <c:v>Butter Chicken GLB</c:v>
+                </c:pt>
+              </c:strCache>
+            </c:strRef>
           </c:cat>
           <c:val>
             <c:numRef>
@@ -335,10 +368,10 @@
                   <c:v>5.3</c:v>
                 </c:pt>
                 <c:pt idx="1">
-                  <c:v>10.2</c:v>
+                  <c:v>10.199999999999999</c:v>
                 </c:pt>
                 <c:pt idx="2">
-                  <c:v>4.1</c:v>
+                  <c:v>4.0999999999999996</c:v>
                 </c:pt>
                 <c:pt idx="3">
                   <c:v>6.8</c:v>
@@ -346,23 +379,13 @@
               </c:numCache>
             </c:numRef>
           </c:val>
+          <c:extLst>
+            <c:ext xmlns:c16="http://schemas.microsoft.com/office/drawing/2014/chart" uri="{C3380CC4-5D6E-409C-BE32-E72D297353CC}">
+              <c16:uniqueId val="{00000001-8A5E-40BD-B77B-BA09A80EF9CE}"/>
+            </c:ext>
+          </c:extLst>
         </c:ser>
         <c:dLbls>
-          <c:numFmt formatCode="#,##0" sourceLinked="0"/>
-          <c:txPr>
-            <a:bodyPr/>
-            <a:lstStyle/>
-            <a:p>
-              <a:pPr>
-                <a:defRPr b="0" i="0" strike="noStrike" sz="850" u="none">
-                  <a:solidFill>
-                    <a:srgbClr val="FFFFFF"/>
-                  </a:solidFill>
-                  <a:latin typeface="Arial"/>
-                </a:defRPr>
-              </a:pPr>
-            </a:p>
-          </c:txPr>
           <c:dLblPos val="inEnd"/>
           <c:showLegendKey val="0"/>
           <c:showVal val="1"/>
@@ -370,13 +393,10 @@
           <c:showSerName val="0"/>
           <c:showPercent val="0"/>
           <c:showBubbleSize val="0"/>
-          <c:showLeaderLines val="0"/>
         </c:dLbls>
         <c:gapWidth val="150"/>
-        <c:overlap val="0"/>
         <c:axId val="2094734554"/>
         <c:axId val="2094734552"/>
-        <c:axId val="2094734556"/>
       </c:barChart>
       <c:catAx>
         <c:axId val="2094734554"/>
@@ -417,6 +437,7 @@
         <c:crosses val="autoZero"/>
         <c:auto val="1"/>
         <c:lblAlgn val="ctr"/>
+        <c:lblOffset val="100"/>
         <c:noMultiLvlLbl val="1"/>
       </c:catAx>
       <c:valAx>
@@ -479,6 +500,7 @@
     </c:plotArea>
     <c:plotVisOnly val="1"/>
     <c:dispBlanksAs val="span"/>
+    <c:showDLblsOverMax val="1"/>
   </c:chart>
   <c:spPr>
     <a:noFill/>
@@ -515,234 +537,10 @@
           <a:chExt cx="0" cy="0"/>
         </a:xfrm>
       </p:grpSpPr>
-      <p:sp>
-        <p:nvSpPr>
-          <p:cNvPr id="2" name="Header Placeholder 1"/>
-          <p:cNvSpPr>
-            <a:spLocks noGrp="1"/>
-          </p:cNvSpPr>
-          <p:nvPr>
-            <p:ph type="hdr" sz="quarter"/>
-          </p:nvPr>
-        </p:nvSpPr>
-        <p:spPr>
-          <a:xfrm>
-            <a:off x="0" y="0"/>
-            <a:ext cx="2971800" cy="458788"/>
-          </a:xfrm>
-          <a:prstGeom prst="rect">
-            <a:avLst/>
-          </a:prstGeom>
-        </p:spPr>
-        <p:txBody>
-          <a:bodyPr vert="horz" lIns="91440" tIns="45720" rIns="91440" bIns="45720" rtlCol="0"/>
-          <a:lstStyle>
-            <a:lvl1pPr algn="l">
-              <a:defRPr sz="1200"/>
-            </a:lvl1pPr>
-          </a:lstStyle>
-          <a:p>
-            <a:endParaRPr lang="en-US"/>
-          </a:p>
-        </p:txBody>
-      </p:sp>
-      <p:sp>
-        <p:nvSpPr>
-          <p:cNvPr id="3" name="Date Placeholder 2"/>
-          <p:cNvSpPr>
-            <a:spLocks noGrp="1"/>
-          </p:cNvSpPr>
-          <p:nvPr>
-            <p:ph type="dt" idx="1"/>
-          </p:nvPr>
-        </p:nvSpPr>
-        <p:spPr>
-          <a:xfrm>
-            <a:off x="3884613" y="0"/>
-            <a:ext cx="2971800" cy="458788"/>
-          </a:xfrm>
-          <a:prstGeom prst="rect">
-            <a:avLst/>
-          </a:prstGeom>
-        </p:spPr>
-        <p:txBody>
-          <a:bodyPr vert="horz" lIns="91440" tIns="45720" rIns="91440" bIns="45720" rtlCol="0"/>
-          <a:lstStyle>
-            <a:lvl1pPr algn="r">
-              <a:defRPr sz="1200"/>
-            </a:lvl1pPr>
-          </a:lstStyle>
-          <a:p>
-            <a:fld id="{5282F153-3F37-0F45-9E97-73ACFA13230C}" type="datetimeFigureOut">
-              <a:rPr lang="en-US"/>
-              <a:t>7/23/19</a:t>
-            </a:fld>
-            <a:endParaRPr lang="en-US"/>
-          </a:p>
-        </p:txBody>
-      </p:sp>
-      <p:sp>
-        <p:nvSpPr>
-          <p:cNvPr id="4" name="Slide Image Placeholder 3"/>
-          <p:cNvSpPr>
-            <a:spLocks noGrp="1" noRot="1" noChangeAspect="1"/>
-          </p:cNvSpPr>
-          <p:nvPr>
-            <p:ph type="sldImg" idx="2"/>
-          </p:nvPr>
-        </p:nvSpPr>
-        <p:spPr>
-          <a:xfrm>
-            <a:off x="685800" y="1143000"/>
-            <a:ext cx="5486400" cy="3086100"/>
-          </a:xfrm>
-          <a:prstGeom prst="rect">
-            <a:avLst/>
-          </a:prstGeom>
-          <a:noFill/>
-          <a:ln w="12700">
-            <a:solidFill>
-              <a:prstClr val="black"/>
-            </a:solidFill>
-          </a:ln>
-        </p:spPr>
-        <p:txBody>
-          <a:bodyPr vert="horz" lIns="91440" tIns="45720" rIns="91440" bIns="45720" rtlCol="0" anchor="ctr"/>
-          <a:lstStyle/>
-          <a:p>
-            <a:endParaRPr lang="en-US"/>
-          </a:p>
-        </p:txBody>
-      </p:sp>
-      <p:sp>
-        <p:nvSpPr>
-          <p:cNvPr id="5" name="Notes Placeholder 4"/>
-          <p:cNvSpPr>
-            <a:spLocks noGrp="1"/>
-          </p:cNvSpPr>
-          <p:nvPr>
-            <p:ph type="body" sz="quarter" idx="3"/>
-          </p:nvPr>
-        </p:nvSpPr>
-        <p:spPr>
-          <a:xfrm>
-            <a:off x="685800" y="4400550"/>
-            <a:ext cx="5486400" cy="3600450"/>
-          </a:xfrm>
-          <a:prstGeom prst="rect">
-            <a:avLst/>
-          </a:prstGeom>
-        </p:spPr>
-        <p:txBody>
-          <a:bodyPr vert="horz" lIns="91440" tIns="45720" rIns="91440" bIns="45720" rtlCol="0"/>
-          <a:lstStyle/>
-          <a:p>
-            <a:pPr lvl="0"/>
-            <a:r>
-              <a:rPr lang="en-US"/>
-              <a:t>Click to edit Master text styles</a:t>
-            </a:r>
-          </a:p>
-          <a:p>
-            <a:pPr lvl="1"/>
-            <a:r>
-              <a:rPr lang="en-US"/>
-              <a:t>Second level</a:t>
-            </a:r>
-          </a:p>
-          <a:p>
-            <a:pPr lvl="2"/>
-            <a:r>
-              <a:rPr lang="en-US"/>
-              <a:t>Third level</a:t>
-            </a:r>
-          </a:p>
-          <a:p>
-            <a:pPr lvl="3"/>
-            <a:r>
-              <a:rPr lang="en-US"/>
-              <a:t>Fourth level</a:t>
-            </a:r>
-          </a:p>
-          <a:p>
-            <a:pPr lvl="4"/>
-            <a:r>
-              <a:rPr lang="en-US"/>
-              <a:t>Fifth level</a:t>
-            </a:r>
-          </a:p>
-        </p:txBody>
-      </p:sp>
-      <p:sp>
-        <p:nvSpPr>
-          <p:cNvPr id="6" name="Footer Placeholder 5"/>
-          <p:cNvSpPr>
-            <a:spLocks noGrp="1"/>
-          </p:cNvSpPr>
-          <p:nvPr>
-            <p:ph type="ftr" sz="quarter" idx="4"/>
-          </p:nvPr>
-        </p:nvSpPr>
-        <p:spPr>
-          <a:xfrm>
-            <a:off x="0" y="8685213"/>
-            <a:ext cx="2971800" cy="458787"/>
-          </a:xfrm>
-          <a:prstGeom prst="rect">
-            <a:avLst/>
-          </a:prstGeom>
-        </p:spPr>
-        <p:txBody>
-          <a:bodyPr vert="horz" lIns="91440" tIns="45720" rIns="91440" bIns="45720" rtlCol="0" anchor="b"/>
-          <a:lstStyle>
-            <a:lvl1pPr algn="l">
-              <a:defRPr sz="1200"/>
-            </a:lvl1pPr>
-          </a:lstStyle>
-          <a:p>
-            <a:endParaRPr lang="en-US"/>
-          </a:p>
-        </p:txBody>
-      </p:sp>
-      <p:sp>
-        <p:nvSpPr>
-          <p:cNvPr id="7" name="Slide Number Placeholder 6"/>
-          <p:cNvSpPr>
-            <a:spLocks noGrp="1"/>
-          </p:cNvSpPr>
-          <p:nvPr>
-            <p:ph type="sldNum" sz="quarter" idx="5"/>
-          </p:nvPr>
-        </p:nvSpPr>
-        <p:spPr>
-          <a:xfrm>
-            <a:off x="3884613" y="8685213"/>
-            <a:ext cx="2971800" cy="458787"/>
-          </a:xfrm>
-          <a:prstGeom prst="rect">
-            <a:avLst/>
-          </a:prstGeom>
-        </p:spPr>
-        <p:txBody>
-          <a:bodyPr vert="horz" lIns="91440" tIns="45720" rIns="91440" bIns="45720" rtlCol="0" anchor="b"/>
-          <a:lstStyle>
-            <a:lvl1pPr algn="r">
-              <a:defRPr sz="1200"/>
-            </a:lvl1pPr>
-          </a:lstStyle>
-          <a:p>
-            <a:fld id="{CE5E9CC1-C706-0F49-92D6-E571CC5EEA8F}" type="slidenum">
-              <a:rPr lang="en-US"/>
-              <a:t>‹#›</a:t>
-            </a:fld>
-            <a:endParaRPr lang="en-US"/>
-          </a:p>
-        </p:txBody>
-      </p:sp>
     </p:spTree>
     <p:extLst>
       <p:ext uri="{BB962C8B-B14F-4D97-AF65-F5344CB8AC3E}">
-        <p14:creationId xmlns:p14="http://schemas.microsoft.com/office/powerpoint/2010/main" val="1024086991"/>
+        <p14:creationId xmlns:p14="http://schemas.microsoft.com/office/powerpoint/2010/main" val="3355449137"/>
       </p:ext>
     </p:extLst>
   </p:cSld>
@@ -890,7 +688,6 @@
               <a:rPr lang="en-US" dirty="0"/>
               <a:t>Good morning esteemed evaluators, mentors, and faculty members. Welcome to our Presentation III capstone project evaluation for "An Intelligent AI-Powered Restaurant Ordering System Using Augmented Reality". Our team—Manav Singh, Sanskar Suryavanshi, and Kesar Singh, guided by Prof. Vinitta Sunish from the Department of Computer Engineering, TCET—presents a fully implemented, zero-install WebXR 3D Augmented Reality contactless dining platform and real-time Kitchen Display System.</a:t>
             </a:r>
-            <a:endParaRPr lang="en-US" dirty="0"/>
           </a:p>
         </p:txBody>
       </p:sp>
@@ -978,7 +775,6 @@
               <a:rPr lang="en-US" dirty="0"/>
               <a:t>Slide 10 demonstrates project management rigor (Criterion 4, 10 Marks). We followed Agile Scrum through 5 bi-weekly sprints and systematically managed risks around 3D payload sizes, device fragmentation, and cloud CORS/MIME headers.</a:t>
             </a:r>
-            <a:endParaRPr lang="en-US" dirty="0"/>
           </a:p>
         </p:txBody>
       </p:sp>
@@ -1066,7 +862,6 @@
               <a:rPr lang="en-US" dirty="0"/>
               <a:t>Slide 11 highlights teamwork and collaboration (Criterion 5, 10 Marks). Manav led spatial AR and cloud architecture; Sanskar designed the UI/UX and dynamic menu; Kesar handled the KDS and QA testing.</a:t>
             </a:r>
-            <a:endParaRPr lang="en-US" dirty="0"/>
           </a:p>
         </p:txBody>
       </p:sp>
@@ -1154,7 +949,6 @@
               <a:rPr lang="en-US" dirty="0"/>
               <a:t>Slide 12 covers Criterion 3 (5 Marks). A 10-table restaurant saves over ₹6.6 Lakhs across 3 years by adopting our zero-hardware model, achieving 93.7% cost reduction.</a:t>
             </a:r>
-            <a:endParaRPr lang="en-US" dirty="0"/>
           </a:p>
         </p:txBody>
       </p:sp>
@@ -1242,7 +1036,6 @@
               <a:rPr lang="en-US" dirty="0"/>
               <a:t>Slide 13 is our primary evidence slide for Criterion 7 (30 Marks). Both the smart menu and true 6-DoF AR tabletop placement are fully implemented and running live on our Vercel production deployment.</a:t>
             </a:r>
-            <a:endParaRPr lang="en-US" dirty="0"/>
           </a:p>
         </p:txBody>
       </p:sp>
@@ -1330,7 +1123,6 @@
               <a:rPr lang="en-US" dirty="0"/>
               <a:t>Slide 14 demonstrates the operational flow from QR scanning and AR inspection to instant kitchen ticket generation and fulfillment.</a:t>
             </a:r>
-            <a:endParaRPr lang="en-US" dirty="0"/>
           </a:p>
         </p:txBody>
       </p:sp>
@@ -1418,7 +1210,6 @@
               <a:rPr lang="en-US" dirty="0"/>
               <a:t>Slide 15 satisfies Criterion 8 (5 Marks). Our test suite verified 6 major functional scenarios with 100% pass rates across devices.</a:t>
             </a:r>
-            <a:endParaRPr lang="en-US" dirty="0"/>
           </a:p>
         </p:txBody>
       </p:sp>
@@ -1506,7 +1297,6 @@
               <a:rPr lang="en-US" dirty="0"/>
               <a:t>Slide 16 details our performance benchmarks. 3D asset compression reduced payload sizes by up to 78%, dropping mobile load times to 1.8 seconds while sustaining 60 FPS.</a:t>
             </a:r>
-            <a:endParaRPr lang="en-US" dirty="0"/>
           </a:p>
         </p:txBody>
       </p:sp>
@@ -1594,7 +1384,6 @@
               <a:rPr lang="en-US" dirty="0"/>
               <a:t>Slide 17 covers Criterion 9 (20 Marks). Our paper titled "A Zero-Install WebXR and Cloud-Assisted Spatial Computing Architecture for Contactless Smart Restaurant Menus" has been completed and formatted to IEEE conference standards.</a:t>
             </a:r>
-            <a:endParaRPr lang="en-US" dirty="0"/>
           </a:p>
         </p:txBody>
       </p:sp>
@@ -1682,7 +1471,6 @@
               <a:rPr lang="en-US" dirty="0"/>
               <a:t>Slide 18 summarizes our conclusions: 100% implementation delivered, web AR viability proven, 93.7% TCO savings achieved, and IEEE paper completed.</a:t>
             </a:r>
-            <a:endParaRPr lang="en-US" dirty="0"/>
           </a:p>
         </p:txBody>
       </p:sp>
@@ -1770,7 +1558,6 @@
               <a:rPr lang="en-US" dirty="0"/>
               <a:t>Slide 19 outlines our future scope: multi-user shared AR dining, AI voice sommeliers, computer vision kitchen QA, and IoT weight-sensing smart tables.</a:t>
             </a:r>
-            <a:endParaRPr lang="en-US" dirty="0"/>
           </a:p>
         </p:txBody>
       </p:sp>
@@ -1858,7 +1645,6 @@
               <a:rPr lang="en-US" dirty="0"/>
               <a:t>Slide 2 covers our primary problem statement. The fundamental flaw in traditional dining is pre-order visualization blindness: customers cannot see what their food will look like before placing an order. Abstract text descriptions and flat 2D photos fail to convey portion depth and scale, leading to dish mismatch and up to 22% food plate waste. Combined with unhygienic paper menus and clumsy QR PDFs, this creates urgent demand for an intelligent AI-powered AR ordering solution.</a:t>
             </a:r>
-            <a:endParaRPr lang="en-US" dirty="0"/>
           </a:p>
         </p:txBody>
       </p:sp>
@@ -1946,7 +1732,6 @@
               <a:rPr lang="en-US" dirty="0"/>
               <a:t>Slide 20 lists academic references including W3C WebXR specifications, Khronos glTF standards, and IEEE/ACM publications.</a:t>
             </a:r>
-            <a:endParaRPr lang="en-US" dirty="0"/>
           </a:p>
         </p:txBody>
       </p:sp>
@@ -2034,7 +1819,6 @@
               <a:rPr lang="en-US" dirty="0"/>
               <a:t>Slide 3 fulfills Criterion 1 (5 Marks). Our project supports societal health via contactless ordering and allergen safety. It drives industrial efficiency by eliminating costly hardware. Environmentally, it cuts paper waste and reduces restaurant food waste by 28%, aligning with UN SDGs 9, 12, and 13.</a:t>
             </a:r>
-            <a:endParaRPr lang="en-US" dirty="0"/>
           </a:p>
         </p:txBody>
       </p:sp>
@@ -2122,7 +1906,6 @@
               <a:rPr lang="en-US" dirty="0"/>
               <a:t>Slide 4 details our objectives: zero-download AR dining, 3D asset compression for fast mobile loading, 60 FPS rendering, and real-time kitchen order dispatch.</a:t>
             </a:r>
-            <a:endParaRPr lang="en-US" dirty="0"/>
           </a:p>
         </p:txBody>
       </p:sp>
@@ -2210,7 +1993,6 @@
               <a:rPr lang="en-US" dirty="0"/>
               <a:t>Slide 5 contrasts existing solutions against our approach. While native AR offers realism, forcing patrons to download a large application creates high friction. Our platform delivers 6-DoF spatial AR directly within the web browser.</a:t>
             </a:r>
-            <a:endParaRPr lang="en-US" dirty="0"/>
           </a:p>
         </p:txBody>
       </p:sp>
@@ -2298,7 +2080,6 @@
               <a:rPr lang="en-US" dirty="0"/>
               <a:t>Slide 6 presents our proposed system as a connected four-stage operational workflow, followed by details of the customer spatial ordering experience and kitchen display integration.</a:t>
             </a:r>
-            <a:endParaRPr lang="en-US" dirty="0"/>
           </a:p>
         </p:txBody>
       </p:sp>
@@ -2386,7 +2167,6 @@
               <a:rPr lang="en-US" dirty="0"/>
               <a:t>Slide 7 addresses Criterion 2 (10 Marks). Instead of generic claims, we highlight four real engineering problems we faced: sensor drift solved by WebXR hit-testing, mobile memory exhaustion solved by Draco compression, browser fragmentation solved by Scene Viewer fallbacks, and CORS/MIME errors solved by edge header injection.</a:t>
             </a:r>
-            <a:endParaRPr lang="en-US" dirty="0"/>
           </a:p>
         </p:txBody>
       </p:sp>
@@ -2474,7 +2254,6 @@
               <a:rPr lang="en-US" dirty="0"/>
               <a:t>Slide 8 presents our layered system architecture: the React client layer, the Three.js spatial AR subsystem, the stateful Kitchen Display System with Web Audio alerts, and the Vercel Edge cloud delivery layer.</a:t>
             </a:r>
-            <a:endParaRPr lang="en-US" dirty="0"/>
           </a:p>
         </p:txBody>
       </p:sp>
@@ -2562,7 +2341,6 @@
               <a:rPr lang="en-US" dirty="0"/>
               <a:t>Slide 9 outlines the production technology stack: React 18, TypeScript, Three.js, WebXR Device API, Zustand, and Vercel Edge CDN.</a:t>
             </a:r>
-            <a:endParaRPr lang="en-US" dirty="0"/>
           </a:p>
         </p:txBody>
       </p:sp>
@@ -2635,6 +2413,11 @@
 <file path=ppt/slideMasters/slideMaster1.xml><?xml version="1.0" encoding="utf-8"?>
 <p:sldMaster xmlns:a="http://schemas.openxmlformats.org/drawingml/2006/main" xmlns:r="http://schemas.openxmlformats.org/officeDocument/2006/relationships" xmlns:p="http://schemas.openxmlformats.org/presentationml/2006/main">
   <p:cSld>
+    <p:bg>
+      <p:bgRef idx="1001">
+        <a:schemeClr val="bg1"/>
+      </p:bgRef>
+    </p:bg>
     <p:spTree>
       <p:nvGrpSpPr>
         <p:cNvPr id="1" name=""/>
@@ -2917,6 +2700,7 @@
         <a:solidFill>
           <a:srgbClr val="FFFFFF"/>
         </a:solidFill>
+        <a:effectLst/>
       </p:bgPr>
     </p:bg>
     <p:spTree>
@@ -2935,14 +2719,14 @@
       </p:grpSpPr>
       <p:pic>
         <p:nvPicPr>
-          <p:cNvPr id="2" name="Image 0" descr="d:\resrtorant\presentation_assets\tcet_header.jpeg">    </p:cNvPr>
+          <p:cNvPr id="2" name="Image 0" descr="d:\resrtorant\presentation_assets\tcet_header.jpeg"/>
           <p:cNvPicPr>
             <a:picLocks noChangeAspect="1"/>
           </p:cNvPicPr>
           <p:nvPr/>
         </p:nvPicPr>
         <p:blipFill>
-          <a:blip r:embed="rId1"/>
+          <a:blip r:embed="rId3"/>
           <a:stretch>
             <a:fillRect/>
           </a:stretch>
@@ -2978,14 +2762,11 @@
           <a:bodyPr wrap="square" lIns="0" tIns="0" rIns="0" bIns="0" rtlCol="0" anchor="ctr"/>
           <a:lstStyle/>
           <a:p>
-            <a:pPr algn="ctr" indent="0" marL="0">
+            <a:pPr marL="0" indent="0" algn="ctr">
               <a:buNone/>
             </a:pPr>
             <a:r>
               <a:rPr lang="en-US" sz="1050" b="1" dirty="0">
-                <a:solidFill>
-                  <a:srgbClr val="2563EB"/>
-                </a:solidFill>
                 <a:latin typeface="Calibri" pitchFamily="34" charset="0"/>
                 <a:ea typeface="Calibri" pitchFamily="34" charset="-122"/>
                 <a:cs typeface="Calibri" pitchFamily="34" charset="-120"/>
@@ -3017,14 +2798,11 @@
           <a:bodyPr wrap="square" lIns="0" tIns="0" rIns="0" bIns="0" rtlCol="0" anchor="ctr"/>
           <a:lstStyle/>
           <a:p>
-            <a:pPr algn="ctr" indent="0" marL="0">
+            <a:pPr marL="0" indent="0" algn="ctr">
               <a:buNone/>
             </a:pPr>
             <a:r>
               <a:rPr lang="en-US" sz="2100" b="1" dirty="0">
-                <a:solidFill>
-                  <a:srgbClr val="1E3A8A"/>
-                </a:solidFill>
                 <a:latin typeface="Cambria" pitchFamily="34" charset="0"/>
                 <a:ea typeface="Cambria" pitchFamily="34" charset="-122"/>
                 <a:cs typeface="Cambria" pitchFamily="34" charset="-120"/>
@@ -3056,14 +2834,11 @@
           <a:bodyPr wrap="square" lIns="0" tIns="0" rIns="0" bIns="0" rtlCol="0" anchor="ctr"/>
           <a:lstStyle/>
           <a:p>
-            <a:pPr algn="ctr" indent="0" marL="0">
+            <a:pPr marL="0" indent="0" algn="ctr">
               <a:buNone/>
             </a:pPr>
             <a:r>
               <a:rPr lang="en-US" sz="1150" dirty="0">
-                <a:solidFill>
-                  <a:srgbClr val="334155"/>
-                </a:solidFill>
                 <a:latin typeface="Calibri" pitchFamily="34" charset="0"/>
                 <a:ea typeface="Calibri" pitchFamily="34" charset="-122"/>
                 <a:cs typeface="Calibri" pitchFamily="34" charset="-120"/>
@@ -3100,6 +2875,13 @@
             <a:prstDash val="solid"/>
           </a:ln>
         </p:spPr>
+        <p:txBody>
+          <a:bodyPr/>
+          <a:lstStyle/>
+          <a:p>
+            <a:endParaRPr lang="en-IN"/>
+          </a:p>
+        </p:txBody>
       </p:sp>
       <p:sp>
         <p:nvSpPr>
@@ -3122,14 +2904,11 @@
           <a:bodyPr wrap="square" lIns="0" tIns="0" rIns="0" bIns="0" rtlCol="0" anchor="ctr"/>
           <a:lstStyle/>
           <a:p>
-            <a:pPr indent="0" marL="0">
+            <a:pPr marL="0" indent="0">
               <a:buNone/>
             </a:pPr>
             <a:r>
               <a:rPr lang="en-US" sz="1050" b="1" dirty="0">
-                <a:solidFill>
-                  <a:srgbClr val="1E3A8A"/>
-                </a:solidFill>
                 <a:latin typeface="Calibri" pitchFamily="34" charset="0"/>
                 <a:ea typeface="Calibri" pitchFamily="34" charset="-122"/>
                 <a:cs typeface="Calibri" pitchFamily="34" charset="-120"/>
@@ -3161,7 +2940,7 @@
           <a:bodyPr wrap="square" lIns="0" tIns="0" rIns="0" bIns="0" rtlCol="0" anchor="ctr"/>
           <a:lstStyle/>
           <a:p>
-            <a:pPr indent="0" marL="0">
+            <a:pPr marL="0" indent="0">
               <a:spcAft>
                 <a:spcPts val="400"/>
               </a:spcAft>
@@ -3169,9 +2948,6 @@
             </a:pPr>
             <a:r>
               <a:rPr lang="en-US" sz="1050" b="1" dirty="0">
-                <a:solidFill>
-                  <a:srgbClr val="0F172A"/>
-                </a:solidFill>
                 <a:latin typeface="Calibri" pitchFamily="34" charset="0"/>
                 <a:ea typeface="Calibri" pitchFamily="34" charset="-122"/>
                 <a:cs typeface="Calibri" pitchFamily="34" charset="-120"/>
@@ -3181,7 +2957,7 @@
             <a:endParaRPr lang="en-US" sz="1050" dirty="0"/>
           </a:p>
           <a:p>
-            <a:pPr indent="0" marL="0">
+            <a:pPr marL="0" indent="0">
               <a:spcAft>
                 <a:spcPts val="400"/>
               </a:spcAft>
@@ -3189,9 +2965,6 @@
             </a:pPr>
             <a:r>
               <a:rPr lang="en-US" sz="950" dirty="0">
-                <a:solidFill>
-                  <a:srgbClr val="64748B"/>
-                </a:solidFill>
                 <a:latin typeface="Calibri" pitchFamily="34" charset="0"/>
                 <a:ea typeface="Calibri" pitchFamily="34" charset="-122"/>
                 <a:cs typeface="Calibri" pitchFamily="34" charset="-120"/>
@@ -3201,7 +2974,7 @@
             <a:endParaRPr lang="en-US" sz="1050" dirty="0"/>
           </a:p>
           <a:p>
-            <a:pPr indent="0" marL="0">
+            <a:pPr marL="0" indent="0">
               <a:spcAft>
                 <a:spcPts val="400"/>
               </a:spcAft>
@@ -3209,19 +2982,16 @@
             </a:pPr>
             <a:r>
               <a:rPr lang="en-US" sz="1050" b="1" dirty="0">
-                <a:solidFill>
-                  <a:srgbClr val="0F172A"/>
-                </a:solidFill>
-                <a:latin typeface="Calibri" pitchFamily="34" charset="0"/>
-                <a:ea typeface="Calibri" pitchFamily="34" charset="-122"/>
-                <a:cs typeface="Calibri" pitchFamily="34" charset="-120"/>
-              </a:rPr>
-              <a:t>•  Sanskar Suryavanshi</a:t>
+                <a:latin typeface="Calibri" pitchFamily="34" charset="0"/>
+                <a:ea typeface="Calibri" pitchFamily="34" charset="-122"/>
+                <a:cs typeface="Calibri" pitchFamily="34" charset="-120"/>
+              </a:rPr>
+              <a:t>•  Sanskar Suryawanshi</a:t>
             </a:r>
             <a:endParaRPr lang="en-US" sz="1050" dirty="0"/>
           </a:p>
           <a:p>
-            <a:pPr indent="0" marL="0">
+            <a:pPr marL="0" indent="0">
               <a:spcAft>
                 <a:spcPts val="400"/>
               </a:spcAft>
@@ -3229,19 +2999,16 @@
             </a:pPr>
             <a:r>
               <a:rPr lang="en-US" sz="950" dirty="0">
-                <a:solidFill>
-                  <a:srgbClr val="64748B"/>
-                </a:solidFill>
-                <a:latin typeface="Calibri" pitchFamily="34" charset="0"/>
-                <a:ea typeface="Calibri" pitchFamily="34" charset="-122"/>
-                <a:cs typeface="Calibri" pitchFamily="34" charset="-120"/>
-              </a:rPr>
-              <a:t>   Frontend Architect &amp; UI/UX Specialist</a:t>
+                <a:latin typeface="Calibri" pitchFamily="34" charset="0"/>
+                <a:ea typeface="Calibri" pitchFamily="34" charset="-122"/>
+                <a:cs typeface="Calibri" pitchFamily="34" charset="-120"/>
+              </a:rPr>
+              <a:t>   Backend and kitchen System lead + VR</a:t>
             </a:r>
             <a:endParaRPr lang="en-US" sz="1050" dirty="0"/>
           </a:p>
           <a:p>
-            <a:pPr indent="0" marL="0">
+            <a:pPr marL="0" indent="0">
               <a:spcAft>
                 <a:spcPts val="400"/>
               </a:spcAft>
@@ -3249,9 +3016,6 @@
             </a:pPr>
             <a:r>
               <a:rPr lang="en-US" sz="1050" b="1" dirty="0">
-                <a:solidFill>
-                  <a:srgbClr val="0F172A"/>
-                </a:solidFill>
                 <a:latin typeface="Calibri" pitchFamily="34" charset="0"/>
                 <a:ea typeface="Calibri" pitchFamily="34" charset="-122"/>
                 <a:cs typeface="Calibri" pitchFamily="34" charset="-120"/>
@@ -3261,7 +3025,7 @@
             <a:endParaRPr lang="en-US" sz="1050" dirty="0"/>
           </a:p>
           <a:p>
-            <a:pPr indent="0" marL="0">
+            <a:pPr marL="0" indent="0">
               <a:spcAft>
                 <a:spcPts val="400"/>
               </a:spcAft>
@@ -3269,14 +3033,11 @@
             </a:pPr>
             <a:r>
               <a:rPr lang="en-US" sz="950" dirty="0">
-                <a:solidFill>
-                  <a:srgbClr val="64748B"/>
-                </a:solidFill>
-                <a:latin typeface="Calibri" pitchFamily="34" charset="0"/>
-                <a:ea typeface="Calibri" pitchFamily="34" charset="-122"/>
-                <a:cs typeface="Calibri" pitchFamily="34" charset="-120"/>
-              </a:rPr>
-              <a:t>   Systems Integration &amp; QA Lead</a:t>
+                <a:latin typeface="Calibri" pitchFamily="34" charset="0"/>
+                <a:ea typeface="Calibri" pitchFamily="34" charset="-122"/>
+                <a:cs typeface="Calibri" pitchFamily="34" charset="-120"/>
+              </a:rPr>
+              <a:t>   Frontend and UI&amp;UX</a:t>
             </a:r>
             <a:endParaRPr lang="en-US" sz="1050" dirty="0"/>
           </a:p>
@@ -3330,14 +3091,11 @@
           <a:bodyPr wrap="square" lIns="0" tIns="0" rIns="0" bIns="0" rtlCol="0" anchor="ctr"/>
           <a:lstStyle/>
           <a:p>
-            <a:pPr indent="0" marL="0">
+            <a:pPr marL="0" indent="0">
               <a:buNone/>
             </a:pPr>
             <a:r>
               <a:rPr lang="en-US" sz="1050" b="1" dirty="0">
-                <a:solidFill>
-                  <a:srgbClr val="1E3A8A"/>
-                </a:solidFill>
                 <a:latin typeface="Calibri" pitchFamily="34" charset="0"/>
                 <a:ea typeface="Calibri" pitchFamily="34" charset="-122"/>
                 <a:cs typeface="Calibri" pitchFamily="34" charset="-120"/>
@@ -3369,14 +3127,11 @@
           <a:bodyPr wrap="square" lIns="0" tIns="0" rIns="0" bIns="0" rtlCol="0" anchor="ctr"/>
           <a:lstStyle/>
           <a:p>
-            <a:pPr indent="0" marL="0">
+            <a:pPr marL="0" indent="0">
               <a:buNone/>
             </a:pPr>
             <a:r>
               <a:rPr lang="en-US" sz="950" dirty="0">
-                <a:solidFill>
-                  <a:srgbClr val="64748B"/>
-                </a:solidFill>
                 <a:latin typeface="Calibri" pitchFamily="34" charset="0"/>
                 <a:ea typeface="Calibri" pitchFamily="34" charset="-122"/>
                 <a:cs typeface="Calibri" pitchFamily="34" charset="-120"/>
@@ -3386,14 +3141,11 @@
             <a:endParaRPr lang="en-US" sz="1000" dirty="0"/>
           </a:p>
           <a:p>
-            <a:pPr indent="0" marL="0">
+            <a:pPr marL="0" indent="0">
               <a:buNone/>
             </a:pPr>
             <a:r>
               <a:rPr lang="en-US" sz="1150" b="1" dirty="0">
-                <a:solidFill>
-                  <a:srgbClr val="0F172A"/>
-                </a:solidFill>
                 <a:latin typeface="Calibri" pitchFamily="34" charset="0"/>
                 <a:ea typeface="Calibri" pitchFamily="34" charset="-122"/>
                 <a:cs typeface="Calibri" pitchFamily="34" charset="-120"/>
@@ -3403,14 +3155,11 @@
             <a:endParaRPr lang="en-US" sz="1000" dirty="0"/>
           </a:p>
           <a:p>
-            <a:pPr indent="0" marL="0">
+            <a:pPr marL="0" indent="0">
               <a:buNone/>
             </a:pPr>
             <a:r>
               <a:rPr lang="en-US" sz="950" dirty="0">
-                <a:solidFill>
-                  <a:srgbClr val="64748B"/>
-                </a:solidFill>
                 <a:latin typeface="Calibri" pitchFamily="34" charset="0"/>
                 <a:ea typeface="Calibri" pitchFamily="34" charset="-122"/>
                 <a:cs typeface="Calibri" pitchFamily="34" charset="-120"/>
@@ -3420,14 +3169,11 @@
             <a:endParaRPr lang="en-US" sz="1000" dirty="0"/>
           </a:p>
           <a:p>
-            <a:pPr indent="0" marL="0">
+            <a:pPr marL="0" indent="0">
               <a:buNone/>
             </a:pPr>
             <a:r>
               <a:rPr lang="en-US" sz="1050" b="1" dirty="0">
-                <a:solidFill>
-                  <a:srgbClr val="334155"/>
-                </a:solidFill>
                 <a:latin typeface="Calibri" pitchFamily="34" charset="0"/>
                 <a:ea typeface="Calibri" pitchFamily="34" charset="-122"/>
                 <a:cs typeface="Calibri" pitchFamily="34" charset="-120"/>
@@ -3437,14 +3183,11 @@
             <a:endParaRPr lang="en-US" sz="1000" dirty="0"/>
           </a:p>
           <a:p>
-            <a:pPr indent="0" marL="0">
+            <a:pPr marL="0" indent="0">
               <a:buNone/>
             </a:pPr>
             <a:r>
               <a:rPr lang="en-US" sz="950" dirty="0">
-                <a:solidFill>
-                  <a:srgbClr val="64748B"/>
-                </a:solidFill>
                 <a:latin typeface="Calibri" pitchFamily="34" charset="0"/>
                 <a:ea typeface="Calibri" pitchFamily="34" charset="-122"/>
                 <a:cs typeface="Calibri" pitchFamily="34" charset="-120"/>
@@ -3454,14 +3197,11 @@
             <a:endParaRPr lang="en-US" sz="1000" dirty="0"/>
           </a:p>
           <a:p>
-            <a:pPr indent="0" marL="0">
+            <a:pPr marL="0" indent="0">
               <a:buNone/>
             </a:pPr>
             <a:r>
               <a:rPr lang="en-US" sz="1050" b="1" dirty="0">
-                <a:solidFill>
-                  <a:srgbClr val="334155"/>
-                </a:solidFill>
                 <a:latin typeface="Calibri" pitchFamily="34" charset="0"/>
                 <a:ea typeface="Calibri" pitchFamily="34" charset="-122"/>
                 <a:cs typeface="Calibri" pitchFamily="34" charset="-120"/>
@@ -3471,14 +3211,11 @@
             <a:endParaRPr lang="en-US" sz="1000" dirty="0"/>
           </a:p>
           <a:p>
-            <a:pPr indent="0" marL="0">
+            <a:pPr marL="0" indent="0">
               <a:buNone/>
             </a:pPr>
             <a:r>
               <a:rPr lang="en-US" sz="950" dirty="0">
-                <a:solidFill>
-                  <a:srgbClr val="2563EB"/>
-                </a:solidFill>
                 <a:latin typeface="Calibri" pitchFamily="34" charset="0"/>
                 <a:ea typeface="Calibri" pitchFamily="34" charset="-122"/>
                 <a:cs typeface="Calibri" pitchFamily="34" charset="-120"/>
@@ -3537,14 +3274,11 @@
           <a:bodyPr wrap="square" lIns="0" tIns="0" rIns="0" bIns="0" rtlCol="0" anchor="ctr"/>
           <a:lstStyle/>
           <a:p>
-            <a:pPr algn="ctr" indent="0" marL="0">
+            <a:pPr marL="0" indent="0" algn="ctr">
               <a:buNone/>
             </a:pPr>
             <a:r>
               <a:rPr lang="en-US" sz="950" b="1" dirty="0">
-                <a:solidFill>
-                  <a:srgbClr val="2563EB"/>
-                </a:solidFill>
                 <a:latin typeface="Calibri" pitchFamily="34" charset="0"/>
                 <a:ea typeface="Calibri" pitchFamily="34" charset="-122"/>
                 <a:cs typeface="Calibri" pitchFamily="34" charset="-120"/>
@@ -3571,6 +3305,7 @@
         <a:solidFill>
           <a:srgbClr val="FFFFFF"/>
         </a:solidFill>
+        <a:effectLst/>
       </p:bgPr>
     </p:bg>
     <p:spTree>
@@ -3589,14 +3324,14 @@
       </p:grpSpPr>
       <p:pic>
         <p:nvPicPr>
-          <p:cNvPr id="2" name="Image 0" descr="d:\resrtorant\presentation_assets\tcet_header.jpeg">    </p:cNvPr>
+          <p:cNvPr id="2" name="Image 0" descr="d:\resrtorant\presentation_assets\tcet_header.jpeg"/>
           <p:cNvPicPr>
             <a:picLocks noChangeAspect="1"/>
           </p:cNvPicPr>
           <p:nvPr/>
         </p:nvPicPr>
         <p:blipFill>
-          <a:blip r:embed="rId1"/>
+          <a:blip r:embed="rId3"/>
           <a:stretch>
             <a:fillRect/>
           </a:stretch>
@@ -3632,14 +3367,11 @@
           <a:bodyPr wrap="square" lIns="0" tIns="0" rIns="0" bIns="0" rtlCol="0" anchor="ctr"/>
           <a:lstStyle/>
           <a:p>
-            <a:pPr indent="0" marL="0">
+            <a:pPr marL="0" indent="0">
               <a:buNone/>
             </a:pPr>
             <a:r>
               <a:rPr lang="en-US" sz="1650" b="1" dirty="0">
-                <a:solidFill>
-                  <a:srgbClr val="1E3A8A"/>
-                </a:solidFill>
                 <a:latin typeface="Cambria" pitchFamily="34" charset="0"/>
                 <a:ea typeface="Cambria" pitchFamily="34" charset="-122"/>
                 <a:cs typeface="Cambria" pitchFamily="34" charset="-120"/>
@@ -3671,14 +3403,11 @@
           <a:bodyPr wrap="square" lIns="0" tIns="0" rIns="0" bIns="0" rtlCol="0" anchor="ctr"/>
           <a:lstStyle/>
           <a:p>
-            <a:pPr algn="r" indent="0" marL="0">
+            <a:pPr marL="0" indent="0" algn="r">
               <a:buNone/>
             </a:pPr>
             <a:r>
               <a:rPr lang="en-US" sz="950" b="1" dirty="0">
-                <a:solidFill>
-                  <a:srgbClr val="2563EB"/>
-                </a:solidFill>
                 <a:latin typeface="Calibri" pitchFamily="34" charset="0"/>
                 <a:ea typeface="Calibri" pitchFamily="34" charset="-122"/>
                 <a:cs typeface="Calibri" pitchFamily="34" charset="-120"/>
@@ -3710,7 +3439,7 @@
           <a:bodyPr wrap="square" lIns="0" tIns="0" rIns="0" bIns="0" rtlCol="0" anchor="ctr"/>
           <a:lstStyle/>
           <a:p>
-            <a:pPr indent="0" marL="0">
+            <a:pPr marL="0" indent="0">
               <a:buNone/>
             </a:pPr>
             <a:r>
@@ -3749,7 +3478,7 @@
           <a:bodyPr wrap="square" lIns="0" tIns="0" rIns="0" bIns="0" rtlCol="0" anchor="ctr"/>
           <a:lstStyle/>
           <a:p>
-            <a:pPr algn="r" indent="0" marL="0">
+            <a:pPr marL="0" indent="0" algn="r">
               <a:buNone/>
             </a:pPr>
             <a:r>
@@ -3815,14 +3544,11 @@
           <a:bodyPr wrap="square" lIns="0" tIns="0" rIns="0" bIns="0" rtlCol="0" anchor="ctr"/>
           <a:lstStyle/>
           <a:p>
-            <a:pPr indent="0" marL="0">
+            <a:pPr marL="0" indent="0">
               <a:buNone/>
             </a:pPr>
             <a:r>
               <a:rPr lang="en-US" sz="1200" b="1" dirty="0">
-                <a:solidFill>
-                  <a:srgbClr val="1E3A8A"/>
-                </a:solidFill>
                 <a:latin typeface="Cambria" pitchFamily="34" charset="0"/>
                 <a:ea typeface="Cambria" pitchFamily="34" charset="-122"/>
                 <a:cs typeface="Cambria" pitchFamily="34" charset="-120"/>
@@ -3863,9 +3589,6 @@
             </a:pPr>
             <a:r>
               <a:rPr lang="en-US" sz="950" dirty="0">
-                <a:solidFill>
-                  <a:srgbClr val="334155"/>
-                </a:solidFill>
                 <a:latin typeface="Calibri" pitchFamily="34" charset="0"/>
                 <a:ea typeface="Calibri" pitchFamily="34" charset="-122"/>
                 <a:cs typeface="Calibri" pitchFamily="34" charset="-120"/>
@@ -3884,9 +3607,6 @@
             </a:pPr>
             <a:r>
               <a:rPr lang="en-US" sz="950" dirty="0">
-                <a:solidFill>
-                  <a:srgbClr val="334155"/>
-                </a:solidFill>
                 <a:latin typeface="Calibri" pitchFamily="34" charset="0"/>
                 <a:ea typeface="Calibri" pitchFamily="34" charset="-122"/>
                 <a:cs typeface="Calibri" pitchFamily="34" charset="-120"/>
@@ -3905,9 +3625,6 @@
             </a:pPr>
             <a:r>
               <a:rPr lang="en-US" sz="950" dirty="0">
-                <a:solidFill>
-                  <a:srgbClr val="334155"/>
-                </a:solidFill>
                 <a:latin typeface="Calibri" pitchFamily="34" charset="0"/>
                 <a:ea typeface="Calibri" pitchFamily="34" charset="-122"/>
                 <a:cs typeface="Calibri" pitchFamily="34" charset="-120"/>
@@ -3926,9 +3643,6 @@
             </a:pPr>
             <a:r>
               <a:rPr lang="en-US" sz="950" dirty="0">
-                <a:solidFill>
-                  <a:srgbClr val="334155"/>
-                </a:solidFill>
                 <a:latin typeface="Calibri" pitchFamily="34" charset="0"/>
                 <a:ea typeface="Calibri" pitchFamily="34" charset="-122"/>
                 <a:cs typeface="Calibri" pitchFamily="34" charset="-120"/>
@@ -3947,9 +3661,6 @@
             </a:pPr>
             <a:r>
               <a:rPr lang="en-US" sz="950" dirty="0">
-                <a:solidFill>
-                  <a:srgbClr val="334155"/>
-                </a:solidFill>
                 <a:latin typeface="Calibri" pitchFamily="34" charset="0"/>
                 <a:ea typeface="Calibri" pitchFamily="34" charset="-122"/>
                 <a:cs typeface="Calibri" pitchFamily="34" charset="-120"/>
@@ -4008,14 +3719,11 @@
           <a:bodyPr wrap="square" lIns="0" tIns="0" rIns="0" bIns="0" rtlCol="0" anchor="ctr"/>
           <a:lstStyle/>
           <a:p>
-            <a:pPr indent="0" marL="0">
+            <a:pPr marL="0" indent="0">
               <a:buNone/>
             </a:pPr>
             <a:r>
               <a:rPr lang="en-US" sz="1200" b="1" dirty="0">
-                <a:solidFill>
-                  <a:srgbClr val="1E3A8A"/>
-                </a:solidFill>
                 <a:latin typeface="Cambria" pitchFamily="34" charset="0"/>
                 <a:ea typeface="Cambria" pitchFamily="34" charset="-122"/>
                 <a:cs typeface="Cambria" pitchFamily="34" charset="-120"/>
@@ -4056,9 +3764,6 @@
             </a:pPr>
             <a:r>
               <a:rPr lang="en-US" sz="950" dirty="0">
-                <a:solidFill>
-                  <a:srgbClr val="334155"/>
-                </a:solidFill>
                 <a:latin typeface="Calibri" pitchFamily="34" charset="0"/>
                 <a:ea typeface="Calibri" pitchFamily="34" charset="-122"/>
                 <a:cs typeface="Calibri" pitchFamily="34" charset="-120"/>
@@ -4077,9 +3782,6 @@
             </a:pPr>
             <a:r>
               <a:rPr lang="en-US" sz="950" dirty="0">
-                <a:solidFill>
-                  <a:srgbClr val="334155"/>
-                </a:solidFill>
                 <a:latin typeface="Calibri" pitchFamily="34" charset="0"/>
                 <a:ea typeface="Calibri" pitchFamily="34" charset="-122"/>
                 <a:cs typeface="Calibri" pitchFamily="34" charset="-120"/>
@@ -4098,9 +3800,6 @@
             </a:pPr>
             <a:r>
               <a:rPr lang="en-US" sz="950" dirty="0">
-                <a:solidFill>
-                  <a:srgbClr val="334155"/>
-                </a:solidFill>
                 <a:latin typeface="Calibri" pitchFamily="34" charset="0"/>
                 <a:ea typeface="Calibri" pitchFamily="34" charset="-122"/>
                 <a:cs typeface="Calibri" pitchFamily="34" charset="-120"/>
@@ -4119,9 +3818,6 @@
             </a:pPr>
             <a:r>
               <a:rPr lang="en-US" sz="950" dirty="0">
-                <a:solidFill>
-                  <a:srgbClr val="334155"/>
-                </a:solidFill>
                 <a:latin typeface="Calibri" pitchFamily="34" charset="0"/>
                 <a:ea typeface="Calibri" pitchFamily="34" charset="-122"/>
                 <a:cs typeface="Calibri" pitchFamily="34" charset="-120"/>
@@ -4140,9 +3836,6 @@
             </a:pPr>
             <a:r>
               <a:rPr lang="en-US" sz="950" dirty="0">
-                <a:solidFill>
-                  <a:srgbClr val="334155"/>
-                </a:solidFill>
                 <a:latin typeface="Calibri" pitchFamily="34" charset="0"/>
                 <a:ea typeface="Calibri" pitchFamily="34" charset="-122"/>
                 <a:cs typeface="Calibri" pitchFamily="34" charset="-120"/>
@@ -4161,9 +3854,6 @@
             </a:pPr>
             <a:r>
               <a:rPr lang="en-US" sz="950" dirty="0">
-                <a:solidFill>
-                  <a:srgbClr val="334155"/>
-                </a:solidFill>
                 <a:latin typeface="Calibri" pitchFamily="34" charset="0"/>
                 <a:ea typeface="Calibri" pitchFamily="34" charset="-122"/>
                 <a:cs typeface="Calibri" pitchFamily="34" charset="-120"/>
@@ -4190,6 +3880,7 @@
         <a:solidFill>
           <a:srgbClr val="FFFFFF"/>
         </a:solidFill>
+        <a:effectLst/>
       </p:bgPr>
     </p:bg>
     <p:spTree>
@@ -4208,14 +3899,14 @@
       </p:grpSpPr>
       <p:pic>
         <p:nvPicPr>
-          <p:cNvPr id="2" name="Image 0" descr="d:\resrtorant\presentation_assets\tcet_header.jpeg">    </p:cNvPr>
+          <p:cNvPr id="2" name="Image 0" descr="d:\resrtorant\presentation_assets\tcet_header.jpeg"/>
           <p:cNvPicPr>
             <a:picLocks noChangeAspect="1"/>
           </p:cNvPicPr>
           <p:nvPr/>
         </p:nvPicPr>
         <p:blipFill>
-          <a:blip r:embed="rId1"/>
+          <a:blip r:embed="rId3"/>
           <a:stretch>
             <a:fillRect/>
           </a:stretch>
@@ -4251,14 +3942,11 @@
           <a:bodyPr wrap="square" lIns="0" tIns="0" rIns="0" bIns="0" rtlCol="0" anchor="ctr"/>
           <a:lstStyle/>
           <a:p>
-            <a:pPr indent="0" marL="0">
+            <a:pPr marL="0" indent="0">
               <a:buNone/>
             </a:pPr>
             <a:r>
               <a:rPr lang="en-US" sz="1650" b="1" dirty="0">
-                <a:solidFill>
-                  <a:srgbClr val="1E3A8A"/>
-                </a:solidFill>
                 <a:latin typeface="Cambria" pitchFamily="34" charset="0"/>
                 <a:ea typeface="Cambria" pitchFamily="34" charset="-122"/>
                 <a:cs typeface="Cambria" pitchFamily="34" charset="-120"/>
@@ -4290,7 +3978,7 @@
           <a:bodyPr wrap="square" lIns="0" tIns="0" rIns="0" bIns="0" rtlCol="0" anchor="ctr"/>
           <a:lstStyle/>
           <a:p>
-            <a:pPr algn="r" indent="0" marL="0">
+            <a:pPr marL="0" indent="0" algn="r">
               <a:buNone/>
             </a:pPr>
             <a:r>
@@ -4329,7 +4017,7 @@
           <a:bodyPr wrap="square" lIns="0" tIns="0" rIns="0" bIns="0" rtlCol="0" anchor="ctr"/>
           <a:lstStyle/>
           <a:p>
-            <a:pPr indent="0" marL="0">
+            <a:pPr marL="0" indent="0">
               <a:buNone/>
             </a:pPr>
             <a:r>
@@ -4368,7 +4056,7 @@
           <a:bodyPr wrap="square" lIns="0" tIns="0" rIns="0" bIns="0" rtlCol="0" anchor="ctr"/>
           <a:lstStyle/>
           <a:p>
-            <a:pPr algn="r" indent="0" marL="0">
+            <a:pPr marL="0" indent="0" algn="r">
               <a:buNone/>
             </a:pPr>
             <a:r>
@@ -4434,14 +4122,11 @@
           <a:bodyPr wrap="square" lIns="0" tIns="0" rIns="0" bIns="0" rtlCol="0" anchor="ctr"/>
           <a:lstStyle/>
           <a:p>
-            <a:pPr indent="0" marL="0">
+            <a:pPr marL="0" indent="0">
               <a:buNone/>
             </a:pPr>
             <a:r>
               <a:rPr lang="en-US" sz="1300" b="1" dirty="0">
-                <a:solidFill>
-                  <a:srgbClr val="1E3A8A"/>
-                </a:solidFill>
                 <a:latin typeface="Cambria" pitchFamily="34" charset="0"/>
                 <a:ea typeface="Cambria" pitchFamily="34" charset="-122"/>
                 <a:cs typeface="Cambria" pitchFamily="34" charset="-120"/>
@@ -4473,14 +4158,11 @@
           <a:bodyPr wrap="square" lIns="0" tIns="0" rIns="0" bIns="0" rtlCol="0" anchor="ctr"/>
           <a:lstStyle/>
           <a:p>
-            <a:pPr indent="0" marL="0">
+            <a:pPr marL="0" indent="0">
               <a:buNone/>
             </a:pPr>
             <a:r>
               <a:rPr lang="en-US" sz="950" b="1" dirty="0">
-                <a:solidFill>
-                  <a:srgbClr val="2563EB"/>
-                </a:solidFill>
                 <a:latin typeface="Calibri" pitchFamily="34" charset="0"/>
                 <a:ea typeface="Calibri" pitchFamily="34" charset="-122"/>
                 <a:cs typeface="Calibri" pitchFamily="34" charset="-120"/>
@@ -4521,9 +4203,6 @@
             </a:pPr>
             <a:r>
               <a:rPr lang="en-US" sz="900" dirty="0">
-                <a:solidFill>
-                  <a:srgbClr val="334155"/>
-                </a:solidFill>
                 <a:latin typeface="Calibri" pitchFamily="34" charset="0"/>
                 <a:ea typeface="Calibri" pitchFamily="34" charset="-122"/>
                 <a:cs typeface="Calibri" pitchFamily="34" charset="-120"/>
@@ -4542,9 +4221,6 @@
             </a:pPr>
             <a:r>
               <a:rPr lang="en-US" sz="900" dirty="0">
-                <a:solidFill>
-                  <a:srgbClr val="334155"/>
-                </a:solidFill>
                 <a:latin typeface="Calibri" pitchFamily="34" charset="0"/>
                 <a:ea typeface="Calibri" pitchFamily="34" charset="-122"/>
                 <a:cs typeface="Calibri" pitchFamily="34" charset="-120"/>
@@ -4563,9 +4239,6 @@
             </a:pPr>
             <a:r>
               <a:rPr lang="en-US" sz="900" dirty="0">
-                <a:solidFill>
-                  <a:srgbClr val="334155"/>
-                </a:solidFill>
                 <a:latin typeface="Calibri" pitchFamily="34" charset="0"/>
                 <a:ea typeface="Calibri" pitchFamily="34" charset="-122"/>
                 <a:cs typeface="Calibri" pitchFamily="34" charset="-120"/>
@@ -4584,9 +4257,6 @@
             </a:pPr>
             <a:r>
               <a:rPr lang="en-US" sz="900" dirty="0">
-                <a:solidFill>
-                  <a:srgbClr val="334155"/>
-                </a:solidFill>
                 <a:latin typeface="Calibri" pitchFamily="34" charset="0"/>
                 <a:ea typeface="Calibri" pitchFamily="34" charset="-122"/>
                 <a:cs typeface="Calibri" pitchFamily="34" charset="-120"/>
@@ -4645,14 +4315,11 @@
           <a:bodyPr wrap="square" lIns="0" tIns="0" rIns="0" bIns="0" rtlCol="0" anchor="ctr"/>
           <a:lstStyle/>
           <a:p>
-            <a:pPr indent="0" marL="0">
+            <a:pPr marL="0" indent="0">
               <a:buNone/>
             </a:pPr>
             <a:r>
               <a:rPr lang="en-US" sz="1300" b="1" dirty="0">
-                <a:solidFill>
-                  <a:srgbClr val="1E3A8A"/>
-                </a:solidFill>
                 <a:latin typeface="Cambria" pitchFamily="34" charset="0"/>
                 <a:ea typeface="Cambria" pitchFamily="34" charset="-122"/>
                 <a:cs typeface="Cambria" pitchFamily="34" charset="-120"/>
@@ -4684,14 +4351,11 @@
           <a:bodyPr wrap="square" lIns="0" tIns="0" rIns="0" bIns="0" rtlCol="0" anchor="ctr"/>
           <a:lstStyle/>
           <a:p>
-            <a:pPr indent="0" marL="0">
+            <a:pPr marL="0" indent="0">
               <a:buNone/>
             </a:pPr>
             <a:r>
               <a:rPr lang="en-US" sz="950" b="1" dirty="0">
-                <a:solidFill>
-                  <a:srgbClr val="2563EB"/>
-                </a:solidFill>
                 <a:latin typeface="Calibri" pitchFamily="34" charset="0"/>
                 <a:ea typeface="Calibri" pitchFamily="34" charset="-122"/>
                 <a:cs typeface="Calibri" pitchFamily="34" charset="-120"/>
@@ -4732,9 +4396,6 @@
             </a:pPr>
             <a:r>
               <a:rPr lang="en-US" sz="900" dirty="0">
-                <a:solidFill>
-                  <a:srgbClr val="334155"/>
-                </a:solidFill>
                 <a:latin typeface="Calibri" pitchFamily="34" charset="0"/>
                 <a:ea typeface="Calibri" pitchFamily="34" charset="-122"/>
                 <a:cs typeface="Calibri" pitchFamily="34" charset="-120"/>
@@ -4753,9 +4414,6 @@
             </a:pPr>
             <a:r>
               <a:rPr lang="en-US" sz="900" dirty="0">
-                <a:solidFill>
-                  <a:srgbClr val="334155"/>
-                </a:solidFill>
                 <a:latin typeface="Calibri" pitchFamily="34" charset="0"/>
                 <a:ea typeface="Calibri" pitchFamily="34" charset="-122"/>
                 <a:cs typeface="Calibri" pitchFamily="34" charset="-120"/>
@@ -4774,9 +4432,6 @@
             </a:pPr>
             <a:r>
               <a:rPr lang="en-US" sz="900" dirty="0">
-                <a:solidFill>
-                  <a:srgbClr val="334155"/>
-                </a:solidFill>
                 <a:latin typeface="Calibri" pitchFamily="34" charset="0"/>
                 <a:ea typeface="Calibri" pitchFamily="34" charset="-122"/>
                 <a:cs typeface="Calibri" pitchFamily="34" charset="-120"/>
@@ -4795,9 +4450,6 @@
             </a:pPr>
             <a:r>
               <a:rPr lang="en-US" sz="900" dirty="0">
-                <a:solidFill>
-                  <a:srgbClr val="334155"/>
-                </a:solidFill>
                 <a:latin typeface="Calibri" pitchFamily="34" charset="0"/>
                 <a:ea typeface="Calibri" pitchFamily="34" charset="-122"/>
                 <a:cs typeface="Calibri" pitchFamily="34" charset="-120"/>
@@ -4856,14 +4508,11 @@
           <a:bodyPr wrap="square" lIns="0" tIns="0" rIns="0" bIns="0" rtlCol="0" anchor="ctr"/>
           <a:lstStyle/>
           <a:p>
-            <a:pPr indent="0" marL="0">
+            <a:pPr marL="0" indent="0">
               <a:buNone/>
             </a:pPr>
             <a:r>
               <a:rPr lang="en-US" sz="1300" b="1" dirty="0">
-                <a:solidFill>
-                  <a:srgbClr val="1E3A8A"/>
-                </a:solidFill>
                 <a:latin typeface="Cambria" pitchFamily="34" charset="0"/>
                 <a:ea typeface="Cambria" pitchFamily="34" charset="-122"/>
                 <a:cs typeface="Cambria" pitchFamily="34" charset="-120"/>
@@ -4895,14 +4544,11 @@
           <a:bodyPr wrap="square" lIns="0" tIns="0" rIns="0" bIns="0" rtlCol="0" anchor="ctr"/>
           <a:lstStyle/>
           <a:p>
-            <a:pPr indent="0" marL="0">
+            <a:pPr marL="0" indent="0">
               <a:buNone/>
             </a:pPr>
             <a:r>
               <a:rPr lang="en-US" sz="950" b="1" dirty="0">
-                <a:solidFill>
-                  <a:srgbClr val="2563EB"/>
-                </a:solidFill>
                 <a:latin typeface="Calibri" pitchFamily="34" charset="0"/>
                 <a:ea typeface="Calibri" pitchFamily="34" charset="-122"/>
                 <a:cs typeface="Calibri" pitchFamily="34" charset="-120"/>
@@ -4943,9 +4589,6 @@
             </a:pPr>
             <a:r>
               <a:rPr lang="en-US" sz="900" dirty="0">
-                <a:solidFill>
-                  <a:srgbClr val="334155"/>
-                </a:solidFill>
                 <a:latin typeface="Calibri" pitchFamily="34" charset="0"/>
                 <a:ea typeface="Calibri" pitchFamily="34" charset="-122"/>
                 <a:cs typeface="Calibri" pitchFamily="34" charset="-120"/>
@@ -4964,9 +4607,6 @@
             </a:pPr>
             <a:r>
               <a:rPr lang="en-US" sz="900" dirty="0">
-                <a:solidFill>
-                  <a:srgbClr val="334155"/>
-                </a:solidFill>
                 <a:latin typeface="Calibri" pitchFamily="34" charset="0"/>
                 <a:ea typeface="Calibri" pitchFamily="34" charset="-122"/>
                 <a:cs typeface="Calibri" pitchFamily="34" charset="-120"/>
@@ -4985,9 +4625,6 @@
             </a:pPr>
             <a:r>
               <a:rPr lang="en-US" sz="900" dirty="0">
-                <a:solidFill>
-                  <a:srgbClr val="334155"/>
-                </a:solidFill>
                 <a:latin typeface="Calibri" pitchFamily="34" charset="0"/>
                 <a:ea typeface="Calibri" pitchFamily="34" charset="-122"/>
                 <a:cs typeface="Calibri" pitchFamily="34" charset="-120"/>
@@ -5006,9 +4643,6 @@
             </a:pPr>
             <a:r>
               <a:rPr lang="en-US" sz="900" dirty="0">
-                <a:solidFill>
-                  <a:srgbClr val="334155"/>
-                </a:solidFill>
                 <a:latin typeface="Calibri" pitchFamily="34" charset="0"/>
                 <a:ea typeface="Calibri" pitchFamily="34" charset="-122"/>
                 <a:cs typeface="Calibri" pitchFamily="34" charset="-120"/>
@@ -5067,14 +4701,11 @@
           <a:bodyPr wrap="square" lIns="0" tIns="0" rIns="0" bIns="0" rtlCol="0" anchor="ctr"/>
           <a:lstStyle/>
           <a:p>
-            <a:pPr indent="0" marL="0">
+            <a:pPr marL="0" indent="0">
               <a:buNone/>
             </a:pPr>
             <a:r>
               <a:rPr lang="en-US" sz="950" b="1" dirty="0">
-                <a:solidFill>
-                  <a:srgbClr val="1E3A8A"/>
-                </a:solidFill>
                 <a:latin typeface="Calibri" pitchFamily="34" charset="0"/>
                 <a:ea typeface="Calibri" pitchFamily="34" charset="-122"/>
                 <a:cs typeface="Calibri" pitchFamily="34" charset="-120"/>
@@ -5115,9 +4746,6 @@
             </a:pPr>
             <a:r>
               <a:rPr lang="en-US" sz="900" dirty="0">
-                <a:solidFill>
-                  <a:srgbClr val="334155"/>
-                </a:solidFill>
                 <a:latin typeface="Calibri" pitchFamily="34" charset="0"/>
                 <a:ea typeface="Calibri" pitchFamily="34" charset="-122"/>
                 <a:cs typeface="Calibri" pitchFamily="34" charset="-120"/>
@@ -5136,9 +4764,6 @@
             </a:pPr>
             <a:r>
               <a:rPr lang="en-US" sz="900" dirty="0">
-                <a:solidFill>
-                  <a:srgbClr val="334155"/>
-                </a:solidFill>
                 <a:latin typeface="Calibri" pitchFamily="34" charset="0"/>
                 <a:ea typeface="Calibri" pitchFamily="34" charset="-122"/>
                 <a:cs typeface="Calibri" pitchFamily="34" charset="-120"/>
@@ -5157,9 +4782,6 @@
             </a:pPr>
             <a:r>
               <a:rPr lang="en-US" sz="900" dirty="0">
-                <a:solidFill>
-                  <a:srgbClr val="334155"/>
-                </a:solidFill>
                 <a:latin typeface="Calibri" pitchFamily="34" charset="0"/>
                 <a:ea typeface="Calibri" pitchFamily="34" charset="-122"/>
                 <a:cs typeface="Calibri" pitchFamily="34" charset="-120"/>
@@ -5186,6 +4808,7 @@
         <a:solidFill>
           <a:srgbClr val="FFFFFF"/>
         </a:solidFill>
+        <a:effectLst/>
       </p:bgPr>
     </p:bg>
     <p:spTree>
@@ -5204,14 +4827,14 @@
       </p:grpSpPr>
       <p:pic>
         <p:nvPicPr>
-          <p:cNvPr id="2" name="Image 0" descr="d:\resrtorant\presentation_assets\tcet_header.jpeg">    </p:cNvPr>
+          <p:cNvPr id="2" name="Image 0" descr="d:\resrtorant\presentation_assets\tcet_header.jpeg"/>
           <p:cNvPicPr>
             <a:picLocks noChangeAspect="1"/>
           </p:cNvPicPr>
           <p:nvPr/>
         </p:nvPicPr>
         <p:blipFill>
-          <a:blip r:embed="rId1"/>
+          <a:blip r:embed="rId3"/>
           <a:stretch>
             <a:fillRect/>
           </a:stretch>
@@ -5247,14 +4870,11 @@
           <a:bodyPr wrap="square" lIns="0" tIns="0" rIns="0" bIns="0" rtlCol="0" anchor="ctr"/>
           <a:lstStyle/>
           <a:p>
-            <a:pPr indent="0" marL="0">
+            <a:pPr marL="0" indent="0">
               <a:buNone/>
             </a:pPr>
             <a:r>
               <a:rPr lang="en-US" sz="1650" b="1" dirty="0">
-                <a:solidFill>
-                  <a:srgbClr val="1E3A8A"/>
-                </a:solidFill>
                 <a:latin typeface="Cambria" pitchFamily="34" charset="0"/>
                 <a:ea typeface="Cambria" pitchFamily="34" charset="-122"/>
                 <a:cs typeface="Cambria" pitchFamily="34" charset="-120"/>
@@ -5286,7 +4906,7 @@
           <a:bodyPr wrap="square" lIns="0" tIns="0" rIns="0" bIns="0" rtlCol="0" anchor="ctr"/>
           <a:lstStyle/>
           <a:p>
-            <a:pPr algn="r" indent="0" marL="0">
+            <a:pPr marL="0" indent="0" algn="r">
               <a:buNone/>
             </a:pPr>
             <a:r>
@@ -5325,7 +4945,7 @@
           <a:bodyPr wrap="square" lIns="0" tIns="0" rIns="0" bIns="0" rtlCol="0" anchor="ctr"/>
           <a:lstStyle/>
           <a:p>
-            <a:pPr indent="0" marL="0">
+            <a:pPr marL="0" indent="0">
               <a:buNone/>
             </a:pPr>
             <a:r>
@@ -5364,7 +4984,7 @@
           <a:bodyPr wrap="square" lIns="0" tIns="0" rIns="0" bIns="0" rtlCol="0" anchor="ctr"/>
           <a:lstStyle/>
           <a:p>
-            <a:pPr algn="r" indent="0" marL="0">
+            <a:pPr marL="0" indent="0" algn="r">
               <a:buNone/>
             </a:pPr>
             <a:r>
@@ -5430,14 +5050,11 @@
           <a:bodyPr wrap="square" lIns="0" tIns="0" rIns="0" bIns="0" rtlCol="0" anchor="ctr"/>
           <a:lstStyle/>
           <a:p>
-            <a:pPr indent="0" marL="0">
+            <a:pPr marL="0" indent="0">
               <a:buNone/>
             </a:pPr>
             <a:r>
               <a:rPr lang="en-US" sz="1100" b="1" dirty="0">
-                <a:solidFill>
-                  <a:srgbClr val="1E3A8A"/>
-                </a:solidFill>
                 <a:latin typeface="Cambria" pitchFamily="34" charset="0"/>
                 <a:ea typeface="Cambria" pitchFamily="34" charset="-122"/>
                 <a:cs typeface="Cambria" pitchFamily="34" charset="-120"/>
@@ -5471,9 +5088,27 @@
             <a:tbl>
               <a:tblPr/>
               <a:tblGrid>
-                <a:gridCol w="1341120"/>
-                <a:gridCol w="1341120"/>
-                <a:gridCol w="1341120"/>
+                <a:gridCol w="1341120">
+                  <a:extLst>
+                    <a:ext uri="{9D8B030D-6E8A-4147-A177-3AD203B41FA5}">
+                      <a16:colId xmlns:a16="http://schemas.microsoft.com/office/drawing/2014/main" val="20000"/>
+                    </a:ext>
+                  </a:extLst>
+                </a:gridCol>
+                <a:gridCol w="1341120">
+                  <a:extLst>
+                    <a:ext uri="{9D8B030D-6E8A-4147-A177-3AD203B41FA5}">
+                      <a16:colId xmlns:a16="http://schemas.microsoft.com/office/drawing/2014/main" val="20001"/>
+                    </a:ext>
+                  </a:extLst>
+                </a:gridCol>
+                <a:gridCol w="1341120">
+                  <a:extLst>
+                    <a:ext uri="{9D8B030D-6E8A-4147-A177-3AD203B41FA5}">
+                      <a16:colId xmlns:a16="http://schemas.microsoft.com/office/drawing/2014/main" val="20002"/>
+                    </a:ext>
+                  </a:extLst>
+                </a:gridCol>
               </a:tblGrid>
               <a:tr h="441960">
                 <a:tc>
@@ -5481,7 +5116,7 @@
                     <a:bodyPr/>
                     <a:lstStyle/>
                     <a:p>
-                      <a:pPr algn="ctr" indent="0" marL="0">
+                      <a:pPr marL="0" indent="0" algn="ctr">
                         <a:buNone/>
                       </a:pPr>
                       <a:r>
@@ -5502,7 +5137,7 @@
                       </a:endParaRPr>
                     </a:p>
                   </a:txBody>
-                  <a:tcPr marL="91440" marR="91440" marT="45720" marB="45720" anchor="ctr">
+                  <a:tcPr anchor="ctr">
                     <a:lnL w="6350" cap="flat" cmpd="sng" algn="ctr">
                       <a:solidFill>
                         <a:srgbClr val="E2E8F0"/>
@@ -5549,7 +5184,7 @@
                     <a:bodyPr/>
                     <a:lstStyle/>
                     <a:p>
-                      <a:pPr algn="ctr" indent="0" marL="0">
+                      <a:pPr marL="0" indent="0" algn="ctr">
                         <a:buNone/>
                       </a:pPr>
                       <a:r>
@@ -5570,7 +5205,7 @@
                       </a:endParaRPr>
                     </a:p>
                   </a:txBody>
-                  <a:tcPr marL="91440" marR="91440" marT="45720" marB="45720" anchor="ctr">
+                  <a:tcPr anchor="ctr">
                     <a:lnL w="6350" cap="flat" cmpd="sng" algn="ctr">
                       <a:solidFill>
                         <a:srgbClr val="E2E8F0"/>
@@ -5617,7 +5252,7 @@
                     <a:bodyPr/>
                     <a:lstStyle/>
                     <a:p>
-                      <a:pPr algn="ctr" indent="0" marL="0">
+                      <a:pPr marL="0" indent="0" algn="ctr">
                         <a:buNone/>
                       </a:pPr>
                       <a:r>
@@ -5638,7 +5273,7 @@
                       </a:endParaRPr>
                     </a:p>
                   </a:txBody>
-                  <a:tcPr marL="91440" marR="91440" marT="45720" marB="45720" anchor="ctr">
+                  <a:tcPr anchor="ctr">
                     <a:lnL w="6350" cap="flat" cmpd="sng" algn="ctr">
                       <a:solidFill>
                         <a:srgbClr val="E2E8F0"/>
@@ -5680,6 +5315,11 @@
                     </a:solidFill>
                   </a:tcPr>
                 </a:tc>
+                <a:extLst>
+                  <a:ext uri="{0D108BD9-81ED-4DB2-BD59-A6C34878D82A}">
+                    <a16:rowId xmlns:a16="http://schemas.microsoft.com/office/drawing/2014/main" val="10000"/>
+                  </a:ext>
+                </a:extLst>
               </a:tr>
               <a:tr h="441960">
                 <a:tc>
@@ -5687,7 +5327,7 @@
                     <a:bodyPr/>
                     <a:lstStyle/>
                     <a:p>
-                      <a:pPr algn="ctr" indent="0" marL="0">
+                      <a:pPr marL="0" indent="0" algn="ctr">
                         <a:buNone/>
                       </a:pPr>
                       <a:r>
@@ -5708,7 +5348,7 @@
                       </a:endParaRPr>
                     </a:p>
                   </a:txBody>
-                  <a:tcPr marL="91440" marR="91440" marT="45720" marB="45720" anchor="ctr">
+                  <a:tcPr anchor="ctr">
                     <a:lnL w="6350" cap="flat" cmpd="sng" algn="ctr">
                       <a:solidFill>
                         <a:srgbClr val="E2E8F0"/>
@@ -5755,7 +5395,7 @@
                     <a:bodyPr/>
                     <a:lstStyle/>
                     <a:p>
-                      <a:pPr algn="ctr" indent="0" marL="0">
+                      <a:pPr marL="0" indent="0" algn="ctr">
                         <a:buNone/>
                       </a:pPr>
                       <a:r>
@@ -5776,7 +5416,7 @@
                       </a:endParaRPr>
                     </a:p>
                   </a:txBody>
-                  <a:tcPr marL="91440" marR="91440" marT="45720" marB="45720" anchor="ctr">
+                  <a:tcPr anchor="ctr">
                     <a:lnL w="6350" cap="flat" cmpd="sng" algn="ctr">
                       <a:solidFill>
                         <a:srgbClr val="E2E8F0"/>
@@ -5823,7 +5463,7 @@
                     <a:bodyPr/>
                     <a:lstStyle/>
                     <a:p>
-                      <a:pPr algn="ctr" indent="0" marL="0">
+                      <a:pPr marL="0" indent="0" algn="ctr">
                         <a:buNone/>
                       </a:pPr>
                       <a:r>
@@ -5844,7 +5484,7 @@
                       </a:endParaRPr>
                     </a:p>
                   </a:txBody>
-                  <a:tcPr marL="91440" marR="91440" marT="45720" marB="45720" anchor="ctr">
+                  <a:tcPr anchor="ctr">
                     <a:lnL w="6350" cap="flat" cmpd="sng" algn="ctr">
                       <a:solidFill>
                         <a:srgbClr val="E2E8F0"/>
@@ -5886,6 +5526,11 @@
                     </a:solidFill>
                   </a:tcPr>
                 </a:tc>
+                <a:extLst>
+                  <a:ext uri="{0D108BD9-81ED-4DB2-BD59-A6C34878D82A}">
+                    <a16:rowId xmlns:a16="http://schemas.microsoft.com/office/drawing/2014/main" val="10001"/>
+                  </a:ext>
+                </a:extLst>
               </a:tr>
               <a:tr h="441960">
                 <a:tc>
@@ -5893,7 +5538,7 @@
                     <a:bodyPr/>
                     <a:lstStyle/>
                     <a:p>
-                      <a:pPr algn="ctr" indent="0" marL="0">
+                      <a:pPr marL="0" indent="0" algn="ctr">
                         <a:buNone/>
                       </a:pPr>
                       <a:r>
@@ -5914,7 +5559,7 @@
                       </a:endParaRPr>
                     </a:p>
                   </a:txBody>
-                  <a:tcPr marL="91440" marR="91440" marT="45720" marB="45720" anchor="ctr">
+                  <a:tcPr anchor="ctr">
                     <a:lnL w="6350" cap="flat" cmpd="sng" algn="ctr">
                       <a:solidFill>
                         <a:srgbClr val="E2E8F0"/>
@@ -5961,7 +5606,7 @@
                     <a:bodyPr/>
                     <a:lstStyle/>
                     <a:p>
-                      <a:pPr algn="ctr" indent="0" marL="0">
+                      <a:pPr marL="0" indent="0" algn="ctr">
                         <a:buNone/>
                       </a:pPr>
                       <a:r>
@@ -5982,7 +5627,7 @@
                       </a:endParaRPr>
                     </a:p>
                   </a:txBody>
-                  <a:tcPr marL="91440" marR="91440" marT="45720" marB="45720" anchor="ctr">
+                  <a:tcPr anchor="ctr">
                     <a:lnL w="6350" cap="flat" cmpd="sng" algn="ctr">
                       <a:solidFill>
                         <a:srgbClr val="E2E8F0"/>
@@ -6029,7 +5674,7 @@
                     <a:bodyPr/>
                     <a:lstStyle/>
                     <a:p>
-                      <a:pPr algn="ctr" indent="0" marL="0">
+                      <a:pPr marL="0" indent="0" algn="ctr">
                         <a:buNone/>
                       </a:pPr>
                       <a:r>
@@ -6050,7 +5695,7 @@
                       </a:endParaRPr>
                     </a:p>
                   </a:txBody>
-                  <a:tcPr marL="91440" marR="91440" marT="45720" marB="45720" anchor="ctr">
+                  <a:tcPr anchor="ctr">
                     <a:lnL w="6350" cap="flat" cmpd="sng" algn="ctr">
                       <a:solidFill>
                         <a:srgbClr val="E2E8F0"/>
@@ -6092,6 +5737,11 @@
                     </a:solidFill>
                   </a:tcPr>
                 </a:tc>
+                <a:extLst>
+                  <a:ext uri="{0D108BD9-81ED-4DB2-BD59-A6C34878D82A}">
+                    <a16:rowId xmlns:a16="http://schemas.microsoft.com/office/drawing/2014/main" val="10002"/>
+                  </a:ext>
+                </a:extLst>
               </a:tr>
               <a:tr h="441960">
                 <a:tc>
@@ -6099,7 +5749,7 @@
                     <a:bodyPr/>
                     <a:lstStyle/>
                     <a:p>
-                      <a:pPr algn="ctr" indent="0" marL="0">
+                      <a:pPr marL="0" indent="0" algn="ctr">
                         <a:buNone/>
                       </a:pPr>
                       <a:r>
@@ -6120,7 +5770,7 @@
                       </a:endParaRPr>
                     </a:p>
                   </a:txBody>
-                  <a:tcPr marL="91440" marR="91440" marT="45720" marB="45720" anchor="ctr">
+                  <a:tcPr anchor="ctr">
                     <a:lnL w="6350" cap="flat" cmpd="sng" algn="ctr">
                       <a:solidFill>
                         <a:srgbClr val="E2E8F0"/>
@@ -6167,7 +5817,7 @@
                     <a:bodyPr/>
                     <a:lstStyle/>
                     <a:p>
-                      <a:pPr algn="ctr" indent="0" marL="0">
+                      <a:pPr marL="0" indent="0" algn="ctr">
                         <a:buNone/>
                       </a:pPr>
                       <a:r>
@@ -6188,7 +5838,7 @@
                       </a:endParaRPr>
                     </a:p>
                   </a:txBody>
-                  <a:tcPr marL="91440" marR="91440" marT="45720" marB="45720" anchor="ctr">
+                  <a:tcPr anchor="ctr">
                     <a:lnL w="6350" cap="flat" cmpd="sng" algn="ctr">
                       <a:solidFill>
                         <a:srgbClr val="E2E8F0"/>
@@ -6235,7 +5885,7 @@
                     <a:bodyPr/>
                     <a:lstStyle/>
                     <a:p>
-                      <a:pPr algn="ctr" indent="0" marL="0">
+                      <a:pPr marL="0" indent="0" algn="ctr">
                         <a:buNone/>
                       </a:pPr>
                       <a:r>
@@ -6256,7 +5906,7 @@
                       </a:endParaRPr>
                     </a:p>
                   </a:txBody>
-                  <a:tcPr marL="91440" marR="91440" marT="45720" marB="45720" anchor="ctr">
+                  <a:tcPr anchor="ctr">
                     <a:lnL w="6350" cap="flat" cmpd="sng" algn="ctr">
                       <a:solidFill>
                         <a:srgbClr val="E2E8F0"/>
@@ -6298,6 +5948,11 @@
                     </a:solidFill>
                   </a:tcPr>
                 </a:tc>
+                <a:extLst>
+                  <a:ext uri="{0D108BD9-81ED-4DB2-BD59-A6C34878D82A}">
+                    <a16:rowId xmlns:a16="http://schemas.microsoft.com/office/drawing/2014/main" val="10003"/>
+                  </a:ext>
+                </a:extLst>
               </a:tr>
               <a:tr h="441960">
                 <a:tc>
@@ -6305,7 +5960,7 @@
                     <a:bodyPr/>
                     <a:lstStyle/>
                     <a:p>
-                      <a:pPr algn="ctr" indent="0" marL="0">
+                      <a:pPr marL="0" indent="0" algn="ctr">
                         <a:buNone/>
                       </a:pPr>
                       <a:r>
@@ -6326,7 +5981,7 @@
                       </a:endParaRPr>
                     </a:p>
                   </a:txBody>
-                  <a:tcPr marL="91440" marR="91440" marT="45720" marB="45720" anchor="ctr">
+                  <a:tcPr anchor="ctr">
                     <a:lnL w="6350" cap="flat" cmpd="sng" algn="ctr">
                       <a:solidFill>
                         <a:srgbClr val="E2E8F0"/>
@@ -6373,7 +6028,7 @@
                     <a:bodyPr/>
                     <a:lstStyle/>
                     <a:p>
-                      <a:pPr algn="ctr" indent="0" marL="0">
+                      <a:pPr marL="0" indent="0" algn="ctr">
                         <a:buNone/>
                       </a:pPr>
                       <a:r>
@@ -6394,7 +6049,7 @@
                       </a:endParaRPr>
                     </a:p>
                   </a:txBody>
-                  <a:tcPr marL="91440" marR="91440" marT="45720" marB="45720" anchor="ctr">
+                  <a:tcPr anchor="ctr">
                     <a:lnL w="6350" cap="flat" cmpd="sng" algn="ctr">
                       <a:solidFill>
                         <a:srgbClr val="E2E8F0"/>
@@ -6441,7 +6096,7 @@
                     <a:bodyPr/>
                     <a:lstStyle/>
                     <a:p>
-                      <a:pPr algn="ctr" indent="0" marL="0">
+                      <a:pPr marL="0" indent="0" algn="ctr">
                         <a:buNone/>
                       </a:pPr>
                       <a:r>
@@ -6462,7 +6117,7 @@
                       </a:endParaRPr>
                     </a:p>
                   </a:txBody>
-                  <a:tcPr marL="91440" marR="91440" marT="45720" marB="45720" anchor="ctr">
+                  <a:tcPr anchor="ctr">
                     <a:lnL w="6350" cap="flat" cmpd="sng" algn="ctr">
                       <a:solidFill>
                         <a:srgbClr val="E2E8F0"/>
@@ -6504,6 +6159,11 @@
                     </a:solidFill>
                   </a:tcPr>
                 </a:tc>
+                <a:extLst>
+                  <a:ext uri="{0D108BD9-81ED-4DB2-BD59-A6C34878D82A}">
+                    <a16:rowId xmlns:a16="http://schemas.microsoft.com/office/drawing/2014/main" val="10004"/>
+                  </a:ext>
+                </a:extLst>
               </a:tr>
               <a:tr h="441960">
                 <a:tc>
@@ -6511,7 +6171,7 @@
                     <a:bodyPr/>
                     <a:lstStyle/>
                     <a:p>
-                      <a:pPr algn="ctr" indent="0" marL="0">
+                      <a:pPr marL="0" indent="0" algn="ctr">
                         <a:buNone/>
                       </a:pPr>
                       <a:r>
@@ -6532,7 +6192,7 @@
                       </a:endParaRPr>
                     </a:p>
                   </a:txBody>
-                  <a:tcPr marL="91440" marR="91440" marT="45720" marB="45720" anchor="ctr">
+                  <a:tcPr anchor="ctr">
                     <a:lnL w="6350" cap="flat" cmpd="sng" algn="ctr">
                       <a:solidFill>
                         <a:srgbClr val="E2E8F0"/>
@@ -6579,7 +6239,7 @@
                     <a:bodyPr/>
                     <a:lstStyle/>
                     <a:p>
-                      <a:pPr algn="ctr" indent="0" marL="0">
+                      <a:pPr marL="0" indent="0" algn="ctr">
                         <a:buNone/>
                       </a:pPr>
                       <a:r>
@@ -6600,7 +6260,7 @@
                       </a:endParaRPr>
                     </a:p>
                   </a:txBody>
-                  <a:tcPr marL="91440" marR="91440" marT="45720" marB="45720" anchor="ctr">
+                  <a:tcPr anchor="ctr">
                     <a:lnL w="6350" cap="flat" cmpd="sng" algn="ctr">
                       <a:solidFill>
                         <a:srgbClr val="E2E8F0"/>
@@ -6647,7 +6307,7 @@
                     <a:bodyPr/>
                     <a:lstStyle/>
                     <a:p>
-                      <a:pPr algn="ctr" indent="0" marL="0">
+                      <a:pPr marL="0" indent="0" algn="ctr">
                         <a:buNone/>
                       </a:pPr>
                       <a:r>
@@ -6668,7 +6328,7 @@
                       </a:endParaRPr>
                     </a:p>
                   </a:txBody>
-                  <a:tcPr marL="91440" marR="91440" marT="45720" marB="45720" anchor="ctr">
+                  <a:tcPr anchor="ctr">
                     <a:lnL w="6350" cap="flat" cmpd="sng" algn="ctr">
                       <a:solidFill>
                         <a:srgbClr val="E2E8F0"/>
@@ -6710,6 +6370,11 @@
                     </a:solidFill>
                   </a:tcPr>
                 </a:tc>
+                <a:extLst>
+                  <a:ext uri="{0D108BD9-81ED-4DB2-BD59-A6C34878D82A}">
+                    <a16:rowId xmlns:a16="http://schemas.microsoft.com/office/drawing/2014/main" val="10005"/>
+                  </a:ext>
+                </a:extLst>
               </a:tr>
             </a:tbl>
           </a:graphicData>
@@ -6763,14 +6428,11 @@
           <a:bodyPr wrap="square" lIns="0" tIns="0" rIns="0" bIns="0" rtlCol="0" anchor="ctr"/>
           <a:lstStyle/>
           <a:p>
-            <a:pPr indent="0" marL="0">
+            <a:pPr marL="0" indent="0">
               <a:buNone/>
             </a:pPr>
             <a:r>
               <a:rPr lang="en-US" sz="1100" b="1" dirty="0">
-                <a:solidFill>
-                  <a:srgbClr val="1E3A8A"/>
-                </a:solidFill>
                 <a:latin typeface="Cambria" pitchFamily="34" charset="0"/>
                 <a:ea typeface="Cambria" pitchFamily="34" charset="-122"/>
                 <a:cs typeface="Cambria" pitchFamily="34" charset="-120"/>
@@ -6802,7 +6464,7 @@
           <a:bodyPr wrap="square" lIns="0" tIns="0" rIns="0" bIns="0" rtlCol="0" anchor="ctr"/>
           <a:lstStyle/>
           <a:p>
-            <a:pPr indent="0" marL="0">
+            <a:pPr marL="0" indent="0">
               <a:spcAft>
                 <a:spcPts val="1000"/>
               </a:spcAft>
@@ -6810,9 +6472,6 @@
             </a:pPr>
             <a:r>
               <a:rPr lang="en-US" sz="950" dirty="0">
-                <a:solidFill>
-                  <a:srgbClr val="334155"/>
-                </a:solidFill>
                 <a:latin typeface="Calibri" pitchFamily="34" charset="0"/>
                 <a:ea typeface="Calibri" pitchFamily="34" charset="-122"/>
                 <a:cs typeface="Calibri" pitchFamily="34" charset="-120"/>
@@ -6822,7 +6481,7 @@
             <a:endParaRPr lang="en-US" sz="950" dirty="0"/>
           </a:p>
           <a:p>
-            <a:pPr indent="0" marL="0">
+            <a:pPr marL="0" indent="0">
               <a:spcAft>
                 <a:spcPts val="1000"/>
               </a:spcAft>
@@ -6830,9 +6489,6 @@
             </a:pPr>
             <a:r>
               <a:rPr lang="en-US" sz="950" dirty="0">
-                <a:solidFill>
-                  <a:srgbClr val="334155"/>
-                </a:solidFill>
                 <a:latin typeface="Calibri" pitchFamily="34" charset="0"/>
                 <a:ea typeface="Calibri" pitchFamily="34" charset="-122"/>
                 <a:cs typeface="Calibri" pitchFamily="34" charset="-120"/>
@@ -6842,7 +6498,7 @@
             <a:endParaRPr lang="en-US" sz="950" dirty="0"/>
           </a:p>
           <a:p>
-            <a:pPr indent="0" marL="0">
+            <a:pPr marL="0" indent="0">
               <a:spcAft>
                 <a:spcPts val="1000"/>
               </a:spcAft>
@@ -6850,9 +6506,6 @@
             </a:pPr>
             <a:r>
               <a:rPr lang="en-US" sz="950" dirty="0">
-                <a:solidFill>
-                  <a:srgbClr val="334155"/>
-                </a:solidFill>
                 <a:latin typeface="Calibri" pitchFamily="34" charset="0"/>
                 <a:ea typeface="Calibri" pitchFamily="34" charset="-122"/>
                 <a:cs typeface="Calibri" pitchFamily="34" charset="-120"/>
@@ -6879,6 +6532,7 @@
         <a:solidFill>
           <a:srgbClr val="FFFFFF"/>
         </a:solidFill>
+        <a:effectLst/>
       </p:bgPr>
     </p:bg>
     <p:spTree>
@@ -6897,272 +6551,7 @@
       </p:grpSpPr>
       <p:pic>
         <p:nvPicPr>
-          <p:cNvPr id="2" name="Image 0" descr="d:\resrtorant\presentation_assets\tcet_header.jpeg">    </p:cNvPr>
-          <p:cNvPicPr>
-            <a:picLocks noChangeAspect="1"/>
-          </p:cNvPicPr>
-          <p:nvPr/>
-        </p:nvPicPr>
-        <p:blipFill>
-          <a:blip r:embed="rId1"/>
-          <a:stretch>
-            <a:fillRect/>
-          </a:stretch>
-        </p:blipFill>
-        <p:spPr>
-          <a:xfrm>
-            <a:off x="0" y="0"/>
-            <a:ext cx="9144000" cy="749808"/>
-          </a:xfrm>
-          <a:prstGeom prst="rect">
-            <a:avLst/>
-          </a:prstGeom>
-        </p:spPr>
-      </p:pic>
-      <p:sp>
-        <p:nvSpPr>
-          <p:cNvPr id="3" name="Text 0"/>
-          <p:cNvSpPr/>
-          <p:nvPr/>
-        </p:nvSpPr>
-        <p:spPr>
-          <a:xfrm>
-            <a:off x="548640" y="822960"/>
-            <a:ext cx="5943600" cy="329184"/>
-          </a:xfrm>
-          <a:prstGeom prst="rect">
-            <a:avLst/>
-          </a:prstGeom>
-          <a:noFill/>
-          <a:ln/>
-        </p:spPr>
-        <p:txBody>
-          <a:bodyPr wrap="square" lIns="0" tIns="0" rIns="0" bIns="0" rtlCol="0" anchor="ctr"/>
-          <a:lstStyle/>
-          <a:p>
-            <a:pPr indent="0" marL="0">
-              <a:buNone/>
-            </a:pPr>
-            <a:r>
-              <a:rPr lang="en-US" sz="1650" b="1" dirty="0">
-                <a:solidFill>
-                  <a:srgbClr val="1E3A8A"/>
-                </a:solidFill>
-                <a:latin typeface="Cambria" pitchFamily="34" charset="0"/>
-                <a:ea typeface="Cambria" pitchFamily="34" charset="-122"/>
-                <a:cs typeface="Cambria" pitchFamily="34" charset="-120"/>
-              </a:rPr>
-              <a:t>100% Implementation: Working Modules &amp; Live Proof</a:t>
-            </a:r>
-            <a:endParaRPr lang="en-US" sz="1650" dirty="0"/>
-          </a:p>
-        </p:txBody>
-      </p:sp>
-      <p:sp>
-        <p:nvSpPr>
-          <p:cNvPr id="4" name="Text 1"/>
-          <p:cNvSpPr/>
-          <p:nvPr/>
-        </p:nvSpPr>
-        <p:spPr>
-          <a:xfrm>
-            <a:off x="6492240" y="841248"/>
-            <a:ext cx="2103120" cy="274320"/>
-          </a:xfrm>
-          <a:prstGeom prst="rect">
-            <a:avLst/>
-          </a:prstGeom>
-          <a:noFill/>
-          <a:ln/>
-        </p:spPr>
-        <p:txBody>
-          <a:bodyPr wrap="square" lIns="0" tIns="0" rIns="0" bIns="0" rtlCol="0" anchor="ctr"/>
-          <a:lstStyle/>
-          <a:p>
-            <a:pPr algn="r" indent="0" marL="0">
-              <a:buNone/>
-            </a:pPr>
-            <a:r>
-              <a:rPr lang="en-US" sz="950" b="1" dirty="0">
-                <a:solidFill>
-                  <a:srgbClr val="2563EB"/>
-                </a:solidFill>
-                <a:latin typeface="Calibri" pitchFamily="34" charset="0"/>
-                <a:ea typeface="Calibri" pitchFamily="34" charset="-122"/>
-                <a:cs typeface="Calibri" pitchFamily="34" charset="-120"/>
-              </a:rPr>
-              <a:t>Rubric Criterion 7 (30 Marks)</a:t>
-            </a:r>
-            <a:endParaRPr lang="en-US" sz="950" dirty="0"/>
-          </a:p>
-        </p:txBody>
-      </p:sp>
-      <p:sp>
-        <p:nvSpPr>
-          <p:cNvPr id="5" name="Text 2"/>
-          <p:cNvSpPr/>
-          <p:nvPr/>
-        </p:nvSpPr>
-        <p:spPr>
-          <a:xfrm>
-            <a:off x="548640" y="4800600"/>
-            <a:ext cx="5486400" cy="228600"/>
-          </a:xfrm>
-          <a:prstGeom prst="rect">
-            <a:avLst/>
-          </a:prstGeom>
-          <a:noFill/>
-          <a:ln/>
-        </p:spPr>
-        <p:txBody>
-          <a:bodyPr wrap="square" lIns="0" tIns="0" rIns="0" bIns="0" rtlCol="0" anchor="ctr"/>
-          <a:lstStyle/>
-          <a:p>
-            <a:pPr indent="0" marL="0">
-              <a:buNone/>
-            </a:pPr>
-            <a:r>
-              <a:rPr lang="en-US" sz="900" dirty="0">
-                <a:solidFill>
-                  <a:srgbClr val="64748B"/>
-                </a:solidFill>
-                <a:latin typeface="Calibri" pitchFamily="34" charset="0"/>
-                <a:ea typeface="Calibri" pitchFamily="34" charset="-122"/>
-                <a:cs typeface="Calibri" pitchFamily="34" charset="-120"/>
-              </a:rPr>
-              <a:t>Department of Computer Engineering, TCET | A.Y. 2026–27 | Presentation III</a:t>
-            </a:r>
-            <a:endParaRPr lang="en-US" sz="900" dirty="0"/>
-          </a:p>
-        </p:txBody>
-      </p:sp>
-      <p:sp>
-        <p:nvSpPr>
-          <p:cNvPr id="6" name="Text 3"/>
-          <p:cNvSpPr/>
-          <p:nvPr/>
-        </p:nvSpPr>
-        <p:spPr>
-          <a:xfrm>
-            <a:off x="6217920" y="4800600"/>
-            <a:ext cx="2377440" cy="228600"/>
-          </a:xfrm>
-          <a:prstGeom prst="rect">
-            <a:avLst/>
-          </a:prstGeom>
-          <a:noFill/>
-          <a:ln/>
-        </p:spPr>
-        <p:txBody>
-          <a:bodyPr wrap="square" lIns="0" tIns="0" rIns="0" bIns="0" rtlCol="0" anchor="ctr"/>
-          <a:lstStyle/>
-          <a:p>
-            <a:pPr algn="r" indent="0" marL="0">
-              <a:buNone/>
-            </a:pPr>
-            <a:r>
-              <a:rPr lang="en-US" sz="900" dirty="0">
-                <a:solidFill>
-                  <a:srgbClr val="2563EB"/>
-                </a:solidFill>
-                <a:latin typeface="Calibri" pitchFamily="34" charset="0"/>
-                <a:ea typeface="Calibri" pitchFamily="34" charset="-122"/>
-                <a:cs typeface="Calibri" pitchFamily="34" charset="-120"/>
-              </a:rPr>
-              <a:t>https://smart-restaurant-2za8.vercel.app/</a:t>
-            </a:r>
-            <a:endParaRPr lang="en-US" sz="900" dirty="0"/>
-          </a:p>
-        </p:txBody>
-      </p:sp>
-      <p:pic>
-        <p:nvPicPr>
-          <p:cNvPr id="7" name="Image 1" descr="d:\resrtorant\presentation_assets\back_to_menu_1790013320137.png">    </p:cNvPr>
-          <p:cNvPicPr>
-            <a:picLocks noChangeAspect="1"/>
-          </p:cNvPicPr>
-          <p:nvPr/>
-        </p:nvPicPr>
-        <p:blipFill>
-          <a:blip r:embed="rId2"/>
-          <a:stretch>
-            <a:fillRect/>
-          </a:stretch>
-        </p:blipFill>
-        <p:spPr>
-          <a:xfrm>
-            <a:off x="548640" y="1188720"/>
-            <a:ext cx="3291840" cy="2103120"/>
-          </a:xfrm>
-          <a:prstGeom prst="rect">
-            <a:avLst/>
-          </a:prstGeom>
-        </p:spPr>
-      </p:pic>
-      <p:sp>
-        <p:nvSpPr>
-          <p:cNvPr id="8" name="Shape 4"/>
-          <p:cNvSpPr/>
-          <p:nvPr/>
-        </p:nvSpPr>
-        <p:spPr>
-          <a:xfrm>
-            <a:off x="548640" y="1188720"/>
-            <a:ext cx="3291840" cy="2103120"/>
-          </a:xfrm>
-          <a:prstGeom prst="rect">
-            <a:avLst/>
-          </a:prstGeom>
-          <a:ln w="12700">
-            <a:solidFill>
-              <a:srgbClr val="E2E8F0"/>
-            </a:solidFill>
-            <a:prstDash val="solid"/>
-          </a:ln>
-        </p:spPr>
-      </p:sp>
-      <p:sp>
-        <p:nvSpPr>
-          <p:cNvPr id="9" name="Text 5"/>
-          <p:cNvSpPr/>
-          <p:nvPr/>
-        </p:nvSpPr>
-        <p:spPr>
-          <a:xfrm>
-            <a:off x="548640" y="3310128"/>
-            <a:ext cx="3291840" cy="201168"/>
-          </a:xfrm>
-          <a:prstGeom prst="rect">
-            <a:avLst/>
-          </a:prstGeom>
-          <a:noFill/>
-          <a:ln/>
-        </p:spPr>
-        <p:txBody>
-          <a:bodyPr wrap="square" lIns="0" tIns="0" rIns="0" bIns="0" rtlCol="0" anchor="ctr"/>
-          <a:lstStyle/>
-          <a:p>
-            <a:pPr algn="ctr" indent="0" marL="0">
-              <a:buNone/>
-            </a:pPr>
-            <a:r>
-              <a:rPr lang="en-US" sz="800" dirty="0">
-                <a:solidFill>
-                  <a:srgbClr val="64748B"/>
-                </a:solidFill>
-                <a:latin typeface="Calibri" pitchFamily="34" charset="0"/>
-                <a:ea typeface="Calibri" pitchFamily="34" charset="-122"/>
-                <a:cs typeface="Calibri" pitchFamily="34" charset="-120"/>
-              </a:rPr>
-              <a:t>Figure 1: Live Menu Interface with Dietary Badges &amp; Calorie Counters</a:t>
-            </a:r>
-            <a:endParaRPr lang="en-US" sz="800" dirty="0"/>
-          </a:p>
-        </p:txBody>
-      </p:sp>
-      <p:pic>
-        <p:nvPicPr>
-          <p:cNvPr id="10" name="Image 2" descr="d:\resrtorant\presentation_assets\dish_anchored_placed_1790012727681.png">    </p:cNvPr>
+          <p:cNvPr id="2" name="Image 0" descr="d:\resrtorant\presentation_assets\tcet_header.jpeg"/>
           <p:cNvPicPr>
             <a:picLocks noChangeAspect="1"/>
           </p:cNvPicPr>
@@ -7176,8 +6565,8 @@
         </p:blipFill>
         <p:spPr>
           <a:xfrm>
-            <a:off x="4023360" y="1188720"/>
-            <a:ext cx="4572000" cy="2103120"/>
+            <a:off x="0" y="0"/>
+            <a:ext cx="9144000" cy="749808"/>
           </a:xfrm>
           <a:prstGeom prst="rect">
             <a:avLst/>
@@ -7186,14 +6575,188 @@
       </p:pic>
       <p:sp>
         <p:nvSpPr>
-          <p:cNvPr id="11" name="Shape 6"/>
-          <p:cNvSpPr/>
-          <p:nvPr/>
-        </p:nvSpPr>
-        <p:spPr>
-          <a:xfrm>
-            <a:off x="4023360" y="1188720"/>
-            <a:ext cx="4572000" cy="2103120"/>
+          <p:cNvPr id="3" name="Text 0"/>
+          <p:cNvSpPr/>
+          <p:nvPr/>
+        </p:nvSpPr>
+        <p:spPr>
+          <a:xfrm>
+            <a:off x="548640" y="822960"/>
+            <a:ext cx="5943600" cy="329184"/>
+          </a:xfrm>
+          <a:prstGeom prst="rect">
+            <a:avLst/>
+          </a:prstGeom>
+          <a:noFill/>
+          <a:ln/>
+        </p:spPr>
+        <p:txBody>
+          <a:bodyPr wrap="square" lIns="0" tIns="0" rIns="0" bIns="0" rtlCol="0" anchor="ctr"/>
+          <a:lstStyle/>
+          <a:p>
+            <a:pPr marL="0" indent="0">
+              <a:buNone/>
+            </a:pPr>
+            <a:r>
+              <a:rPr lang="en-US" sz="1650" b="1" dirty="0">
+                <a:latin typeface="Cambria" pitchFamily="34" charset="0"/>
+                <a:ea typeface="Cambria" pitchFamily="34" charset="-122"/>
+                <a:cs typeface="Cambria" pitchFamily="34" charset="-120"/>
+              </a:rPr>
+              <a:t>100% Implementation: Working Modules &amp; Live Proof</a:t>
+            </a:r>
+            <a:endParaRPr lang="en-US" sz="1650" dirty="0"/>
+          </a:p>
+        </p:txBody>
+      </p:sp>
+      <p:sp>
+        <p:nvSpPr>
+          <p:cNvPr id="4" name="Text 1"/>
+          <p:cNvSpPr/>
+          <p:nvPr/>
+        </p:nvSpPr>
+        <p:spPr>
+          <a:xfrm>
+            <a:off x="6492240" y="841248"/>
+            <a:ext cx="2103120" cy="274320"/>
+          </a:xfrm>
+          <a:prstGeom prst="rect">
+            <a:avLst/>
+          </a:prstGeom>
+          <a:noFill/>
+          <a:ln/>
+        </p:spPr>
+        <p:txBody>
+          <a:bodyPr wrap="square" lIns="0" tIns="0" rIns="0" bIns="0" rtlCol="0" anchor="ctr"/>
+          <a:lstStyle/>
+          <a:p>
+            <a:pPr marL="0" indent="0" algn="r">
+              <a:buNone/>
+            </a:pPr>
+            <a:r>
+              <a:rPr lang="en-US" sz="950" b="1" dirty="0">
+                <a:latin typeface="Calibri" pitchFamily="34" charset="0"/>
+                <a:ea typeface="Calibri" pitchFamily="34" charset="-122"/>
+                <a:cs typeface="Calibri" pitchFamily="34" charset="-120"/>
+              </a:rPr>
+              <a:t>Rubric Criterion 7 (30 Marks)</a:t>
+            </a:r>
+            <a:endParaRPr lang="en-US" sz="950" dirty="0"/>
+          </a:p>
+        </p:txBody>
+      </p:sp>
+      <p:sp>
+        <p:nvSpPr>
+          <p:cNvPr id="5" name="Text 2"/>
+          <p:cNvSpPr/>
+          <p:nvPr/>
+        </p:nvSpPr>
+        <p:spPr>
+          <a:xfrm>
+            <a:off x="548640" y="4800600"/>
+            <a:ext cx="5486400" cy="228600"/>
+          </a:xfrm>
+          <a:prstGeom prst="rect">
+            <a:avLst/>
+          </a:prstGeom>
+          <a:noFill/>
+          <a:ln/>
+        </p:spPr>
+        <p:txBody>
+          <a:bodyPr wrap="square" lIns="0" tIns="0" rIns="0" bIns="0" rtlCol="0" anchor="ctr"/>
+          <a:lstStyle/>
+          <a:p>
+            <a:pPr marL="0" indent="0">
+              <a:buNone/>
+            </a:pPr>
+            <a:r>
+              <a:rPr lang="en-US" sz="900" dirty="0">
+                <a:solidFill>
+                  <a:srgbClr val="64748B"/>
+                </a:solidFill>
+                <a:latin typeface="Calibri" pitchFamily="34" charset="0"/>
+                <a:ea typeface="Calibri" pitchFamily="34" charset="-122"/>
+                <a:cs typeface="Calibri" pitchFamily="34" charset="-120"/>
+              </a:rPr>
+              <a:t>Department of Computer Engineering, TCET | A.Y. 2026–27 | Presentation III</a:t>
+            </a:r>
+            <a:endParaRPr lang="en-US" sz="900" dirty="0"/>
+          </a:p>
+        </p:txBody>
+      </p:sp>
+      <p:sp>
+        <p:nvSpPr>
+          <p:cNvPr id="6" name="Text 3"/>
+          <p:cNvSpPr/>
+          <p:nvPr/>
+        </p:nvSpPr>
+        <p:spPr>
+          <a:xfrm>
+            <a:off x="6217920" y="4800600"/>
+            <a:ext cx="2377440" cy="228600"/>
+          </a:xfrm>
+          <a:prstGeom prst="rect">
+            <a:avLst/>
+          </a:prstGeom>
+          <a:noFill/>
+          <a:ln/>
+        </p:spPr>
+        <p:txBody>
+          <a:bodyPr wrap="square" lIns="0" tIns="0" rIns="0" bIns="0" rtlCol="0" anchor="ctr"/>
+          <a:lstStyle/>
+          <a:p>
+            <a:pPr marL="0" indent="0" algn="r">
+              <a:buNone/>
+            </a:pPr>
+            <a:r>
+              <a:rPr lang="en-US" sz="900" dirty="0">
+                <a:solidFill>
+                  <a:srgbClr val="2563EB"/>
+                </a:solidFill>
+                <a:latin typeface="Calibri" pitchFamily="34" charset="0"/>
+                <a:ea typeface="Calibri" pitchFamily="34" charset="-122"/>
+                <a:cs typeface="Calibri" pitchFamily="34" charset="-120"/>
+              </a:rPr>
+              <a:t>https://smart-restaurant-2za8.vercel.app/</a:t>
+            </a:r>
+            <a:endParaRPr lang="en-US" sz="900" dirty="0"/>
+          </a:p>
+        </p:txBody>
+      </p:sp>
+      <p:pic>
+        <p:nvPicPr>
+          <p:cNvPr id="7" name="Image 1" descr="d:\resrtorant\presentation_assets\back_to_menu_1790013320137.png"/>
+          <p:cNvPicPr>
+            <a:picLocks noChangeAspect="1"/>
+          </p:cNvPicPr>
+          <p:nvPr/>
+        </p:nvPicPr>
+        <p:blipFill>
+          <a:blip r:embed="rId4"/>
+          <a:stretch>
+            <a:fillRect/>
+          </a:stretch>
+        </p:blipFill>
+        <p:spPr>
+          <a:xfrm>
+            <a:off x="548640" y="1188720"/>
+            <a:ext cx="3291840" cy="2103120"/>
+          </a:xfrm>
+          <a:prstGeom prst="rect">
+            <a:avLst/>
+          </a:prstGeom>
+        </p:spPr>
+      </p:pic>
+      <p:sp>
+        <p:nvSpPr>
+          <p:cNvPr id="8" name="Shape 4"/>
+          <p:cNvSpPr/>
+          <p:nvPr/>
+        </p:nvSpPr>
+        <p:spPr>
+          <a:xfrm>
+            <a:off x="548640" y="1188720"/>
+            <a:ext cx="3291840" cy="2103120"/>
           </a:xfrm>
           <a:prstGeom prst="rect">
             <a:avLst/>
@@ -7208,6 +6771,91 @@
       </p:sp>
       <p:sp>
         <p:nvSpPr>
+          <p:cNvPr id="9" name="Text 5"/>
+          <p:cNvSpPr/>
+          <p:nvPr/>
+        </p:nvSpPr>
+        <p:spPr>
+          <a:xfrm>
+            <a:off x="548640" y="3310128"/>
+            <a:ext cx="3291840" cy="201168"/>
+          </a:xfrm>
+          <a:prstGeom prst="rect">
+            <a:avLst/>
+          </a:prstGeom>
+          <a:noFill/>
+          <a:ln/>
+        </p:spPr>
+        <p:txBody>
+          <a:bodyPr wrap="square" lIns="0" tIns="0" rIns="0" bIns="0" rtlCol="0" anchor="ctr"/>
+          <a:lstStyle/>
+          <a:p>
+            <a:pPr marL="0" indent="0" algn="ctr">
+              <a:buNone/>
+            </a:pPr>
+            <a:r>
+              <a:rPr lang="en-US" sz="800" dirty="0">
+                <a:solidFill>
+                  <a:srgbClr val="64748B"/>
+                </a:solidFill>
+                <a:latin typeface="Calibri" pitchFamily="34" charset="0"/>
+                <a:ea typeface="Calibri" pitchFamily="34" charset="-122"/>
+                <a:cs typeface="Calibri" pitchFamily="34" charset="-120"/>
+              </a:rPr>
+              <a:t>Figure 1: Live Menu Interface with Dietary Badges &amp; Calorie Counters</a:t>
+            </a:r>
+            <a:endParaRPr lang="en-US" sz="800" dirty="0"/>
+          </a:p>
+        </p:txBody>
+      </p:sp>
+      <p:pic>
+        <p:nvPicPr>
+          <p:cNvPr id="10" name="Image 2" descr="d:\resrtorant\presentation_assets\dish_anchored_placed_1790012727681.png"/>
+          <p:cNvPicPr>
+            <a:picLocks noChangeAspect="1"/>
+          </p:cNvPicPr>
+          <p:nvPr/>
+        </p:nvPicPr>
+        <p:blipFill>
+          <a:blip r:embed="rId5"/>
+          <a:stretch>
+            <a:fillRect/>
+          </a:stretch>
+        </p:blipFill>
+        <p:spPr>
+          <a:xfrm>
+            <a:off x="4023360" y="1188720"/>
+            <a:ext cx="4572000" cy="2103120"/>
+          </a:xfrm>
+          <a:prstGeom prst="rect">
+            <a:avLst/>
+          </a:prstGeom>
+        </p:spPr>
+      </p:pic>
+      <p:sp>
+        <p:nvSpPr>
+          <p:cNvPr id="11" name="Shape 6"/>
+          <p:cNvSpPr/>
+          <p:nvPr/>
+        </p:nvSpPr>
+        <p:spPr>
+          <a:xfrm>
+            <a:off x="4023360" y="1188720"/>
+            <a:ext cx="4572000" cy="2103120"/>
+          </a:xfrm>
+          <a:prstGeom prst="rect">
+            <a:avLst/>
+          </a:prstGeom>
+          <a:ln w="12700">
+            <a:solidFill>
+              <a:srgbClr val="E2E8F0"/>
+            </a:solidFill>
+            <a:prstDash val="solid"/>
+          </a:ln>
+        </p:spPr>
+      </p:sp>
+      <p:sp>
+        <p:nvSpPr>
           <p:cNvPr id="12" name="Text 7"/>
           <p:cNvSpPr/>
           <p:nvPr/>
@@ -7227,7 +6875,7 @@
           <a:bodyPr wrap="square" lIns="0" tIns="0" rIns="0" bIns="0" rtlCol="0" anchor="ctr"/>
           <a:lstStyle/>
           <a:p>
-            <a:pPr algn="ctr" indent="0" marL="0">
+            <a:pPr marL="0" indent="0" algn="ctr">
               <a:buNone/>
             </a:pPr>
             <a:r>
@@ -7293,7 +6941,7 @@
           <a:bodyPr wrap="square" lIns="0" tIns="0" rIns="0" bIns="0" rtlCol="0" anchor="ctr"/>
           <a:lstStyle/>
           <a:p>
-            <a:pPr indent="0" marL="0">
+            <a:pPr marL="0" indent="0">
               <a:buNone/>
             </a:pPr>
             <a:r>
@@ -7332,7 +6980,7 @@
           <a:bodyPr wrap="square" lIns="0" tIns="0" rIns="0" bIns="0" rtlCol="0" anchor="ctr"/>
           <a:lstStyle/>
           <a:p>
-            <a:pPr indent="0" marL="0">
+            <a:pPr marL="0" indent="0">
               <a:spcAft>
                 <a:spcPts val="200"/>
               </a:spcAft>
@@ -7352,7 +7000,7 @@
             <a:endParaRPr lang="en-US" sz="900" dirty="0"/>
           </a:p>
           <a:p>
-            <a:pPr indent="0" marL="0">
+            <a:pPr marL="0" indent="0">
               <a:spcAft>
                 <a:spcPts val="200"/>
               </a:spcAft>
@@ -7372,7 +7020,7 @@
             <a:endParaRPr lang="en-US" sz="900" dirty="0"/>
           </a:p>
           <a:p>
-            <a:pPr indent="0" marL="0">
+            <a:pPr marL="0" indent="0">
               <a:spcAft>
                 <a:spcPts val="200"/>
               </a:spcAft>
@@ -7392,7 +7040,7 @@
             <a:endParaRPr lang="en-US" sz="900" dirty="0"/>
           </a:p>
           <a:p>
-            <a:pPr indent="0" marL="0">
+            <a:pPr marL="0" indent="0">
               <a:spcAft>
                 <a:spcPts val="200"/>
               </a:spcAft>
@@ -7412,7 +7060,7 @@
             <a:endParaRPr lang="en-US" sz="900" dirty="0"/>
           </a:p>
           <a:p>
-            <a:pPr indent="0" marL="0">
+            <a:pPr marL="0" indent="0">
               <a:spcAft>
                 <a:spcPts val="200"/>
               </a:spcAft>
@@ -7449,6 +7097,7 @@
         <a:solidFill>
           <a:srgbClr val="FFFFFF"/>
         </a:solidFill>
+        <a:effectLst/>
       </p:bgPr>
     </p:bg>
     <p:spTree>
@@ -7467,272 +7116,7 @@
       </p:grpSpPr>
       <p:pic>
         <p:nvPicPr>
-          <p:cNvPr id="2" name="Image 0" descr="d:\resrtorant\presentation_assets\tcet_header.jpeg">    </p:cNvPr>
-          <p:cNvPicPr>
-            <a:picLocks noChangeAspect="1"/>
-          </p:cNvPicPr>
-          <p:nvPr/>
-        </p:nvPicPr>
-        <p:blipFill>
-          <a:blip r:embed="rId1"/>
-          <a:stretch>
-            <a:fillRect/>
-          </a:stretch>
-        </p:blipFill>
-        <p:spPr>
-          <a:xfrm>
-            <a:off x="0" y="0"/>
-            <a:ext cx="9144000" cy="749808"/>
-          </a:xfrm>
-          <a:prstGeom prst="rect">
-            <a:avLst/>
-          </a:prstGeom>
-        </p:spPr>
-      </p:pic>
-      <p:sp>
-        <p:nvSpPr>
-          <p:cNvPr id="3" name="Text 0"/>
-          <p:cNvSpPr/>
-          <p:nvPr/>
-        </p:nvSpPr>
-        <p:spPr>
-          <a:xfrm>
-            <a:off x="548640" y="822960"/>
-            <a:ext cx="5943600" cy="329184"/>
-          </a:xfrm>
-          <a:prstGeom prst="rect">
-            <a:avLst/>
-          </a:prstGeom>
-          <a:noFill/>
-          <a:ln/>
-        </p:spPr>
-        <p:txBody>
-          <a:bodyPr wrap="square" lIns="0" tIns="0" rIns="0" bIns="0" rtlCol="0" anchor="ctr"/>
-          <a:lstStyle/>
-          <a:p>
-            <a:pPr indent="0" marL="0">
-              <a:buNone/>
-            </a:pPr>
-            <a:r>
-              <a:rPr lang="en-US" sz="1650" b="1" dirty="0">
-                <a:solidFill>
-                  <a:srgbClr val="1E3A8A"/>
-                </a:solidFill>
-                <a:latin typeface="Cambria" pitchFamily="34" charset="0"/>
-                <a:ea typeface="Cambria" pitchFamily="34" charset="-122"/>
-                <a:cs typeface="Cambria" pitchFamily="34" charset="-120"/>
-              </a:rPr>
-              <a:t>Operational Workflow &amp; Step-by-Step Diner Journey</a:t>
-            </a:r>
-            <a:endParaRPr lang="en-US" sz="1650" dirty="0"/>
-          </a:p>
-        </p:txBody>
-      </p:sp>
-      <p:sp>
-        <p:nvSpPr>
-          <p:cNvPr id="4" name="Text 1"/>
-          <p:cNvSpPr/>
-          <p:nvPr/>
-        </p:nvSpPr>
-        <p:spPr>
-          <a:xfrm>
-            <a:off x="6492240" y="841248"/>
-            <a:ext cx="2103120" cy="274320"/>
-          </a:xfrm>
-          <a:prstGeom prst="rect">
-            <a:avLst/>
-          </a:prstGeom>
-          <a:noFill/>
-          <a:ln/>
-        </p:spPr>
-        <p:txBody>
-          <a:bodyPr wrap="square" lIns="0" tIns="0" rIns="0" bIns="0" rtlCol="0" anchor="ctr"/>
-          <a:lstStyle/>
-          <a:p>
-            <a:pPr algn="r" indent="0" marL="0">
-              <a:buNone/>
-            </a:pPr>
-            <a:r>
-              <a:rPr lang="en-US" sz="950" b="1" dirty="0">
-                <a:solidFill>
-                  <a:srgbClr val="2563EB"/>
-                </a:solidFill>
-                <a:latin typeface="Calibri" pitchFamily="34" charset="0"/>
-                <a:ea typeface="Calibri" pitchFamily="34" charset="-122"/>
-                <a:cs typeface="Calibri" pitchFamily="34" charset="-120"/>
-              </a:rPr>
-              <a:t>Live Model Demonstration</a:t>
-            </a:r>
-            <a:endParaRPr lang="en-US" sz="950" dirty="0"/>
-          </a:p>
-        </p:txBody>
-      </p:sp>
-      <p:sp>
-        <p:nvSpPr>
-          <p:cNvPr id="5" name="Text 2"/>
-          <p:cNvSpPr/>
-          <p:nvPr/>
-        </p:nvSpPr>
-        <p:spPr>
-          <a:xfrm>
-            <a:off x="548640" y="4800600"/>
-            <a:ext cx="5486400" cy="228600"/>
-          </a:xfrm>
-          <a:prstGeom prst="rect">
-            <a:avLst/>
-          </a:prstGeom>
-          <a:noFill/>
-          <a:ln/>
-        </p:spPr>
-        <p:txBody>
-          <a:bodyPr wrap="square" lIns="0" tIns="0" rIns="0" bIns="0" rtlCol="0" anchor="ctr"/>
-          <a:lstStyle/>
-          <a:p>
-            <a:pPr indent="0" marL="0">
-              <a:buNone/>
-            </a:pPr>
-            <a:r>
-              <a:rPr lang="en-US" sz="900" dirty="0">
-                <a:solidFill>
-                  <a:srgbClr val="64748B"/>
-                </a:solidFill>
-                <a:latin typeface="Calibri" pitchFamily="34" charset="0"/>
-                <a:ea typeface="Calibri" pitchFamily="34" charset="-122"/>
-                <a:cs typeface="Calibri" pitchFamily="34" charset="-120"/>
-              </a:rPr>
-              <a:t>Department of Computer Engineering, TCET | A.Y. 2026–27 | Presentation III</a:t>
-            </a:r>
-            <a:endParaRPr lang="en-US" sz="900" dirty="0"/>
-          </a:p>
-        </p:txBody>
-      </p:sp>
-      <p:sp>
-        <p:nvSpPr>
-          <p:cNvPr id="6" name="Text 3"/>
-          <p:cNvSpPr/>
-          <p:nvPr/>
-        </p:nvSpPr>
-        <p:spPr>
-          <a:xfrm>
-            <a:off x="6217920" y="4800600"/>
-            <a:ext cx="2377440" cy="228600"/>
-          </a:xfrm>
-          <a:prstGeom prst="rect">
-            <a:avLst/>
-          </a:prstGeom>
-          <a:noFill/>
-          <a:ln/>
-        </p:spPr>
-        <p:txBody>
-          <a:bodyPr wrap="square" lIns="0" tIns="0" rIns="0" bIns="0" rtlCol="0" anchor="ctr"/>
-          <a:lstStyle/>
-          <a:p>
-            <a:pPr algn="r" indent="0" marL="0">
-              <a:buNone/>
-            </a:pPr>
-            <a:r>
-              <a:rPr lang="en-US" sz="900" dirty="0">
-                <a:solidFill>
-                  <a:srgbClr val="2563EB"/>
-                </a:solidFill>
-                <a:latin typeface="Calibri" pitchFamily="34" charset="0"/>
-                <a:ea typeface="Calibri" pitchFamily="34" charset="-122"/>
-                <a:cs typeface="Calibri" pitchFamily="34" charset="-120"/>
-              </a:rPr>
-              <a:t>https://smart-restaurant-2za8.vercel.app/</a:t>
-            </a:r>
-            <a:endParaRPr lang="en-US" sz="900" dirty="0"/>
-          </a:p>
-        </p:txBody>
-      </p:sp>
-      <p:pic>
-        <p:nvPicPr>
-          <p:cNvPr id="7" name="Image 1" descr="d:\resrtorant\presentation_assets\qr_handoff_modal_1790013103448.png">    </p:cNvPr>
-          <p:cNvPicPr>
-            <a:picLocks noChangeAspect="1"/>
-          </p:cNvPicPr>
-          <p:nvPr/>
-        </p:nvPicPr>
-        <p:blipFill>
-          <a:blip r:embed="rId2"/>
-          <a:stretch>
-            <a:fillRect/>
-          </a:stretch>
-        </p:blipFill>
-        <p:spPr>
-          <a:xfrm>
-            <a:off x="548640" y="1188720"/>
-            <a:ext cx="3108960" cy="2057400"/>
-          </a:xfrm>
-          <a:prstGeom prst="rect">
-            <a:avLst/>
-          </a:prstGeom>
-        </p:spPr>
-      </p:pic>
-      <p:sp>
-        <p:nvSpPr>
-          <p:cNvPr id="8" name="Shape 4"/>
-          <p:cNvSpPr/>
-          <p:nvPr/>
-        </p:nvSpPr>
-        <p:spPr>
-          <a:xfrm>
-            <a:off x="548640" y="1188720"/>
-            <a:ext cx="3108960" cy="2057400"/>
-          </a:xfrm>
-          <a:prstGeom prst="rect">
-            <a:avLst/>
-          </a:prstGeom>
-          <a:ln w="12700">
-            <a:solidFill>
-              <a:srgbClr val="E2E8F0"/>
-            </a:solidFill>
-            <a:prstDash val="solid"/>
-          </a:ln>
-        </p:spPr>
-      </p:sp>
-      <p:sp>
-        <p:nvSpPr>
-          <p:cNvPr id="9" name="Text 5"/>
-          <p:cNvSpPr/>
-          <p:nvPr/>
-        </p:nvSpPr>
-        <p:spPr>
-          <a:xfrm>
-            <a:off x="548640" y="3273552"/>
-            <a:ext cx="3108960" cy="182880"/>
-          </a:xfrm>
-          <a:prstGeom prst="rect">
-            <a:avLst/>
-          </a:prstGeom>
-          <a:noFill/>
-          <a:ln/>
-        </p:spPr>
-        <p:txBody>
-          <a:bodyPr wrap="square" lIns="0" tIns="0" rIns="0" bIns="0" rtlCol="0" anchor="ctr"/>
-          <a:lstStyle/>
-          <a:p>
-            <a:pPr algn="ctr" indent="0" marL="0">
-              <a:buNone/>
-            </a:pPr>
-            <a:r>
-              <a:rPr lang="en-US" sz="800" dirty="0">
-                <a:solidFill>
-                  <a:srgbClr val="64748B"/>
-                </a:solidFill>
-                <a:latin typeface="Calibri" pitchFamily="34" charset="0"/>
-                <a:ea typeface="Calibri" pitchFamily="34" charset="-122"/>
-                <a:cs typeface="Calibri" pitchFamily="34" charset="-120"/>
-              </a:rPr>
-              <a:t>Figure 3: Instant Mobile QR Handoff Modal</a:t>
-            </a:r>
-            <a:endParaRPr lang="en-US" sz="800" dirty="0"/>
-          </a:p>
-        </p:txBody>
-      </p:sp>
-      <p:pic>
-        <p:nvPicPr>
-          <p:cNvPr id="10" name="Image 2" descr="d:\resrtorant\presentation_assets\model_rotated_66deg_1790012883322.png">    </p:cNvPr>
+          <p:cNvPr id="2" name="Image 0" descr="d:\resrtorant\presentation_assets\tcet_header.jpeg"/>
           <p:cNvPicPr>
             <a:picLocks noChangeAspect="1"/>
           </p:cNvPicPr>
@@ -7746,8 +7130,8 @@
         </p:blipFill>
         <p:spPr>
           <a:xfrm>
-            <a:off x="3840480" y="1188720"/>
-            <a:ext cx="4754880" cy="2057400"/>
+            <a:off x="0" y="0"/>
+            <a:ext cx="9144000" cy="749808"/>
           </a:xfrm>
           <a:prstGeom prst="rect">
             <a:avLst/>
@@ -7756,14 +7140,188 @@
       </p:pic>
       <p:sp>
         <p:nvSpPr>
-          <p:cNvPr id="11" name="Shape 6"/>
-          <p:cNvSpPr/>
-          <p:nvPr/>
-        </p:nvSpPr>
-        <p:spPr>
-          <a:xfrm>
-            <a:off x="3840480" y="1188720"/>
-            <a:ext cx="4754880" cy="2057400"/>
+          <p:cNvPr id="3" name="Text 0"/>
+          <p:cNvSpPr/>
+          <p:nvPr/>
+        </p:nvSpPr>
+        <p:spPr>
+          <a:xfrm>
+            <a:off x="548640" y="822960"/>
+            <a:ext cx="5943600" cy="329184"/>
+          </a:xfrm>
+          <a:prstGeom prst="rect">
+            <a:avLst/>
+          </a:prstGeom>
+          <a:noFill/>
+          <a:ln/>
+        </p:spPr>
+        <p:txBody>
+          <a:bodyPr wrap="square" lIns="0" tIns="0" rIns="0" bIns="0" rtlCol="0" anchor="ctr"/>
+          <a:lstStyle/>
+          <a:p>
+            <a:pPr marL="0" indent="0">
+              <a:buNone/>
+            </a:pPr>
+            <a:r>
+              <a:rPr lang="en-US" sz="1650" b="1" dirty="0">
+                <a:latin typeface="Cambria" pitchFamily="34" charset="0"/>
+                <a:ea typeface="Cambria" pitchFamily="34" charset="-122"/>
+                <a:cs typeface="Cambria" pitchFamily="34" charset="-120"/>
+              </a:rPr>
+              <a:t>Operational Workflow &amp; Step-by-Step Diner Journey</a:t>
+            </a:r>
+            <a:endParaRPr lang="en-US" sz="1650" dirty="0"/>
+          </a:p>
+        </p:txBody>
+      </p:sp>
+      <p:sp>
+        <p:nvSpPr>
+          <p:cNvPr id="4" name="Text 1"/>
+          <p:cNvSpPr/>
+          <p:nvPr/>
+        </p:nvSpPr>
+        <p:spPr>
+          <a:xfrm>
+            <a:off x="6492240" y="841248"/>
+            <a:ext cx="2103120" cy="274320"/>
+          </a:xfrm>
+          <a:prstGeom prst="rect">
+            <a:avLst/>
+          </a:prstGeom>
+          <a:noFill/>
+          <a:ln/>
+        </p:spPr>
+        <p:txBody>
+          <a:bodyPr wrap="square" lIns="0" tIns="0" rIns="0" bIns="0" rtlCol="0" anchor="ctr"/>
+          <a:lstStyle/>
+          <a:p>
+            <a:pPr marL="0" indent="0" algn="r">
+              <a:buNone/>
+            </a:pPr>
+            <a:r>
+              <a:rPr lang="en-US" sz="950" b="1" dirty="0">
+                <a:latin typeface="Calibri" pitchFamily="34" charset="0"/>
+                <a:ea typeface="Calibri" pitchFamily="34" charset="-122"/>
+                <a:cs typeface="Calibri" pitchFamily="34" charset="-120"/>
+              </a:rPr>
+              <a:t>Live Model Demonstration</a:t>
+            </a:r>
+            <a:endParaRPr lang="en-US" sz="950" dirty="0"/>
+          </a:p>
+        </p:txBody>
+      </p:sp>
+      <p:sp>
+        <p:nvSpPr>
+          <p:cNvPr id="5" name="Text 2"/>
+          <p:cNvSpPr/>
+          <p:nvPr/>
+        </p:nvSpPr>
+        <p:spPr>
+          <a:xfrm>
+            <a:off x="548640" y="4800600"/>
+            <a:ext cx="5486400" cy="228600"/>
+          </a:xfrm>
+          <a:prstGeom prst="rect">
+            <a:avLst/>
+          </a:prstGeom>
+          <a:noFill/>
+          <a:ln/>
+        </p:spPr>
+        <p:txBody>
+          <a:bodyPr wrap="square" lIns="0" tIns="0" rIns="0" bIns="0" rtlCol="0" anchor="ctr"/>
+          <a:lstStyle/>
+          <a:p>
+            <a:pPr marL="0" indent="0">
+              <a:buNone/>
+            </a:pPr>
+            <a:r>
+              <a:rPr lang="en-US" sz="900" dirty="0">
+                <a:solidFill>
+                  <a:srgbClr val="64748B"/>
+                </a:solidFill>
+                <a:latin typeface="Calibri" pitchFamily="34" charset="0"/>
+                <a:ea typeface="Calibri" pitchFamily="34" charset="-122"/>
+                <a:cs typeface="Calibri" pitchFamily="34" charset="-120"/>
+              </a:rPr>
+              <a:t>Department of Computer Engineering, TCET | A.Y. 2026–27 | Presentation III</a:t>
+            </a:r>
+            <a:endParaRPr lang="en-US" sz="900" dirty="0"/>
+          </a:p>
+        </p:txBody>
+      </p:sp>
+      <p:sp>
+        <p:nvSpPr>
+          <p:cNvPr id="6" name="Text 3"/>
+          <p:cNvSpPr/>
+          <p:nvPr/>
+        </p:nvSpPr>
+        <p:spPr>
+          <a:xfrm>
+            <a:off x="6217920" y="4800600"/>
+            <a:ext cx="2377440" cy="228600"/>
+          </a:xfrm>
+          <a:prstGeom prst="rect">
+            <a:avLst/>
+          </a:prstGeom>
+          <a:noFill/>
+          <a:ln/>
+        </p:spPr>
+        <p:txBody>
+          <a:bodyPr wrap="square" lIns="0" tIns="0" rIns="0" bIns="0" rtlCol="0" anchor="ctr"/>
+          <a:lstStyle/>
+          <a:p>
+            <a:pPr marL="0" indent="0" algn="r">
+              <a:buNone/>
+            </a:pPr>
+            <a:r>
+              <a:rPr lang="en-US" sz="900" dirty="0">
+                <a:solidFill>
+                  <a:srgbClr val="2563EB"/>
+                </a:solidFill>
+                <a:latin typeface="Calibri" pitchFamily="34" charset="0"/>
+                <a:ea typeface="Calibri" pitchFamily="34" charset="-122"/>
+                <a:cs typeface="Calibri" pitchFamily="34" charset="-120"/>
+              </a:rPr>
+              <a:t>https://smart-restaurant-2za8.vercel.app/</a:t>
+            </a:r>
+            <a:endParaRPr lang="en-US" sz="900" dirty="0"/>
+          </a:p>
+        </p:txBody>
+      </p:sp>
+      <p:pic>
+        <p:nvPicPr>
+          <p:cNvPr id="7" name="Image 1" descr="d:\resrtorant\presentation_assets\qr_handoff_modal_1790013103448.png"/>
+          <p:cNvPicPr>
+            <a:picLocks noChangeAspect="1"/>
+          </p:cNvPicPr>
+          <p:nvPr/>
+        </p:nvPicPr>
+        <p:blipFill>
+          <a:blip r:embed="rId4"/>
+          <a:stretch>
+            <a:fillRect/>
+          </a:stretch>
+        </p:blipFill>
+        <p:spPr>
+          <a:xfrm>
+            <a:off x="548640" y="1188720"/>
+            <a:ext cx="3108960" cy="2057400"/>
+          </a:xfrm>
+          <a:prstGeom prst="rect">
+            <a:avLst/>
+          </a:prstGeom>
+        </p:spPr>
+      </p:pic>
+      <p:sp>
+        <p:nvSpPr>
+          <p:cNvPr id="8" name="Shape 4"/>
+          <p:cNvSpPr/>
+          <p:nvPr/>
+        </p:nvSpPr>
+        <p:spPr>
+          <a:xfrm>
+            <a:off x="548640" y="1188720"/>
+            <a:ext cx="3108960" cy="2057400"/>
           </a:xfrm>
           <a:prstGeom prst="rect">
             <a:avLst/>
@@ -7778,6 +7336,91 @@
       </p:sp>
       <p:sp>
         <p:nvSpPr>
+          <p:cNvPr id="9" name="Text 5"/>
+          <p:cNvSpPr/>
+          <p:nvPr/>
+        </p:nvSpPr>
+        <p:spPr>
+          <a:xfrm>
+            <a:off x="548640" y="3273552"/>
+            <a:ext cx="3108960" cy="182880"/>
+          </a:xfrm>
+          <a:prstGeom prst="rect">
+            <a:avLst/>
+          </a:prstGeom>
+          <a:noFill/>
+          <a:ln/>
+        </p:spPr>
+        <p:txBody>
+          <a:bodyPr wrap="square" lIns="0" tIns="0" rIns="0" bIns="0" rtlCol="0" anchor="ctr"/>
+          <a:lstStyle/>
+          <a:p>
+            <a:pPr marL="0" indent="0" algn="ctr">
+              <a:buNone/>
+            </a:pPr>
+            <a:r>
+              <a:rPr lang="en-US" sz="800" dirty="0">
+                <a:solidFill>
+                  <a:srgbClr val="64748B"/>
+                </a:solidFill>
+                <a:latin typeface="Calibri" pitchFamily="34" charset="0"/>
+                <a:ea typeface="Calibri" pitchFamily="34" charset="-122"/>
+                <a:cs typeface="Calibri" pitchFamily="34" charset="-120"/>
+              </a:rPr>
+              <a:t>Figure 3: Instant Mobile QR Handoff Modal</a:t>
+            </a:r>
+            <a:endParaRPr lang="en-US" sz="800" dirty="0"/>
+          </a:p>
+        </p:txBody>
+      </p:sp>
+      <p:pic>
+        <p:nvPicPr>
+          <p:cNvPr id="10" name="Image 2" descr="d:\resrtorant\presentation_assets\model_rotated_66deg_1790012883322.png"/>
+          <p:cNvPicPr>
+            <a:picLocks noChangeAspect="1"/>
+          </p:cNvPicPr>
+          <p:nvPr/>
+        </p:nvPicPr>
+        <p:blipFill>
+          <a:blip r:embed="rId5"/>
+          <a:stretch>
+            <a:fillRect/>
+          </a:stretch>
+        </p:blipFill>
+        <p:spPr>
+          <a:xfrm>
+            <a:off x="3840480" y="1188720"/>
+            <a:ext cx="4754880" cy="2057400"/>
+          </a:xfrm>
+          <a:prstGeom prst="rect">
+            <a:avLst/>
+          </a:prstGeom>
+        </p:spPr>
+      </p:pic>
+      <p:sp>
+        <p:nvSpPr>
+          <p:cNvPr id="11" name="Shape 6"/>
+          <p:cNvSpPr/>
+          <p:nvPr/>
+        </p:nvSpPr>
+        <p:spPr>
+          <a:xfrm>
+            <a:off x="3840480" y="1188720"/>
+            <a:ext cx="4754880" cy="2057400"/>
+          </a:xfrm>
+          <a:prstGeom prst="rect">
+            <a:avLst/>
+          </a:prstGeom>
+          <a:ln w="12700">
+            <a:solidFill>
+              <a:srgbClr val="E2E8F0"/>
+            </a:solidFill>
+            <a:prstDash val="solid"/>
+          </a:ln>
+        </p:spPr>
+      </p:sp>
+      <p:sp>
+        <p:nvSpPr>
           <p:cNvPr id="12" name="Text 7"/>
           <p:cNvSpPr/>
           <p:nvPr/>
@@ -7797,7 +7440,7 @@
           <a:bodyPr wrap="square" lIns="0" tIns="0" rIns="0" bIns="0" rtlCol="0" anchor="ctr"/>
           <a:lstStyle/>
           <a:p>
-            <a:pPr algn="ctr" indent="0" marL="0">
+            <a:pPr marL="0" indent="0" algn="ctr">
               <a:buNone/>
             </a:pPr>
             <a:r>
@@ -7863,7 +7506,7 @@
           <a:bodyPr wrap="square" lIns="0" tIns="0" rIns="0" bIns="0" rtlCol="0" anchor="ctr"/>
           <a:lstStyle/>
           <a:p>
-            <a:pPr indent="0" marL="0">
+            <a:pPr marL="0" indent="0">
               <a:buNone/>
             </a:pPr>
             <a:r>
@@ -7902,7 +7545,7 @@
           <a:bodyPr wrap="square" lIns="0" tIns="0" rIns="0" bIns="0" rtlCol="0" anchor="ctr"/>
           <a:lstStyle/>
           <a:p>
-            <a:pPr indent="0" marL="0">
+            <a:pPr marL="0" indent="0">
               <a:spcAft>
                 <a:spcPts val="200"/>
               </a:spcAft>
@@ -7922,7 +7565,7 @@
             <a:endParaRPr lang="en-US" sz="850" dirty="0"/>
           </a:p>
           <a:p>
-            <a:pPr indent="0" marL="0">
+            <a:pPr marL="0" indent="0">
               <a:spcAft>
                 <a:spcPts val="200"/>
               </a:spcAft>
@@ -7942,7 +7585,7 @@
             <a:endParaRPr lang="en-US" sz="850" dirty="0"/>
           </a:p>
           <a:p>
-            <a:pPr indent="0" marL="0">
+            <a:pPr marL="0" indent="0">
               <a:spcAft>
                 <a:spcPts val="200"/>
               </a:spcAft>
@@ -7962,7 +7605,7 @@
             <a:endParaRPr lang="en-US" sz="850" dirty="0"/>
           </a:p>
           <a:p>
-            <a:pPr indent="0" marL="0">
+            <a:pPr marL="0" indent="0">
               <a:spcAft>
                 <a:spcPts val="200"/>
               </a:spcAft>
@@ -7982,7 +7625,7 @@
             <a:endParaRPr lang="en-US" sz="850" dirty="0"/>
           </a:p>
           <a:p>
-            <a:pPr indent="0" marL="0">
+            <a:pPr marL="0" indent="0">
               <a:spcAft>
                 <a:spcPts val="200"/>
               </a:spcAft>
@@ -8002,7 +7645,7 @@
             <a:endParaRPr lang="en-US" sz="850" dirty="0"/>
           </a:p>
           <a:p>
-            <a:pPr indent="0" marL="0">
+            <a:pPr marL="0" indent="0">
               <a:spcAft>
                 <a:spcPts val="200"/>
               </a:spcAft>
@@ -8039,6 +7682,7 @@
         <a:solidFill>
           <a:srgbClr val="FFFFFF"/>
         </a:solidFill>
+        <a:effectLst/>
       </p:bgPr>
     </p:bg>
     <p:spTree>
@@ -8057,14 +7701,14 @@
       </p:grpSpPr>
       <p:pic>
         <p:nvPicPr>
-          <p:cNvPr id="2" name="Image 0" descr="d:\resrtorant\presentation_assets\tcet_header.jpeg">    </p:cNvPr>
+          <p:cNvPr id="2" name="Image 0" descr="d:\resrtorant\presentation_assets\tcet_header.jpeg"/>
           <p:cNvPicPr>
             <a:picLocks noChangeAspect="1"/>
           </p:cNvPicPr>
           <p:nvPr/>
         </p:nvPicPr>
         <p:blipFill>
-          <a:blip r:embed="rId1"/>
+          <a:blip r:embed="rId3"/>
           <a:stretch>
             <a:fillRect/>
           </a:stretch>
@@ -8100,14 +7744,11 @@
           <a:bodyPr wrap="square" lIns="0" tIns="0" rIns="0" bIns="0" rtlCol="0" anchor="ctr"/>
           <a:lstStyle/>
           <a:p>
-            <a:pPr indent="0" marL="0">
+            <a:pPr marL="0" indent="0">
               <a:buNone/>
             </a:pPr>
             <a:r>
               <a:rPr lang="en-US" sz="1650" b="1" dirty="0">
-                <a:solidFill>
-                  <a:srgbClr val="1E3A8A"/>
-                </a:solidFill>
                 <a:latin typeface="Cambria" pitchFamily="34" charset="0"/>
                 <a:ea typeface="Cambria" pitchFamily="34" charset="-122"/>
                 <a:cs typeface="Cambria" pitchFamily="34" charset="-120"/>
@@ -8139,14 +7780,11 @@
           <a:bodyPr wrap="square" lIns="0" tIns="0" rIns="0" bIns="0" rtlCol="0" anchor="ctr"/>
           <a:lstStyle/>
           <a:p>
-            <a:pPr algn="r" indent="0" marL="0">
+            <a:pPr marL="0" indent="0" algn="r">
               <a:buNone/>
             </a:pPr>
             <a:r>
               <a:rPr lang="en-US" sz="950" b="1" dirty="0">
-                <a:solidFill>
-                  <a:srgbClr val="2563EB"/>
-                </a:solidFill>
                 <a:latin typeface="Calibri" pitchFamily="34" charset="0"/>
                 <a:ea typeface="Calibri" pitchFamily="34" charset="-122"/>
                 <a:cs typeface="Calibri" pitchFamily="34" charset="-120"/>
@@ -8178,7 +7816,7 @@
           <a:bodyPr wrap="square" lIns="0" tIns="0" rIns="0" bIns="0" rtlCol="0" anchor="ctr"/>
           <a:lstStyle/>
           <a:p>
-            <a:pPr indent="0" marL="0">
+            <a:pPr marL="0" indent="0">
               <a:buNone/>
             </a:pPr>
             <a:r>
@@ -8217,7 +7855,7 @@
           <a:bodyPr wrap="square" lIns="0" tIns="0" rIns="0" bIns="0" rtlCol="0" anchor="ctr"/>
           <a:lstStyle/>
           <a:p>
-            <a:pPr algn="r" indent="0" marL="0">
+            <a:pPr marL="0" indent="0" algn="r">
               <a:buNone/>
             </a:pPr>
             <a:r>
@@ -8251,19 +7889,55 @@
         </p:nvGraphicFramePr>
         <p:xfrm>
           <a:off x="548640" y="1188720"/>
-          <a:ext cx="8046720" cy="2377440"/>
+          <a:ext cx="8046720" cy="2455816"/>
         </p:xfrm>
         <a:graphic>
           <a:graphicData uri="http://schemas.openxmlformats.org/drawingml/2006/table">
             <a:tbl>
               <a:tblPr/>
               <a:tblGrid>
-                <a:gridCol w="1341120"/>
-                <a:gridCol w="1341120"/>
-                <a:gridCol w="1341120"/>
-                <a:gridCol w="1341120"/>
-                <a:gridCol w="1341120"/>
-                <a:gridCol w="1341120"/>
+                <a:gridCol w="1341120">
+                  <a:extLst>
+                    <a:ext uri="{9D8B030D-6E8A-4147-A177-3AD203B41FA5}">
+                      <a16:colId xmlns:a16="http://schemas.microsoft.com/office/drawing/2014/main" val="20000"/>
+                    </a:ext>
+                  </a:extLst>
+                </a:gridCol>
+                <a:gridCol w="1341120">
+                  <a:extLst>
+                    <a:ext uri="{9D8B030D-6E8A-4147-A177-3AD203B41FA5}">
+                      <a16:colId xmlns:a16="http://schemas.microsoft.com/office/drawing/2014/main" val="20001"/>
+                    </a:ext>
+                  </a:extLst>
+                </a:gridCol>
+                <a:gridCol w="1341120">
+                  <a:extLst>
+                    <a:ext uri="{9D8B030D-6E8A-4147-A177-3AD203B41FA5}">
+                      <a16:colId xmlns:a16="http://schemas.microsoft.com/office/drawing/2014/main" val="20002"/>
+                    </a:ext>
+                  </a:extLst>
+                </a:gridCol>
+                <a:gridCol w="1341120">
+                  <a:extLst>
+                    <a:ext uri="{9D8B030D-6E8A-4147-A177-3AD203B41FA5}">
+                      <a16:colId xmlns:a16="http://schemas.microsoft.com/office/drawing/2014/main" val="20003"/>
+                    </a:ext>
+                  </a:extLst>
+                </a:gridCol>
+                <a:gridCol w="1341120">
+                  <a:extLst>
+                    <a:ext uri="{9D8B030D-6E8A-4147-A177-3AD203B41FA5}">
+                      <a16:colId xmlns:a16="http://schemas.microsoft.com/office/drawing/2014/main" val="20004"/>
+                    </a:ext>
+                  </a:extLst>
+                </a:gridCol>
+                <a:gridCol w="1341120">
+                  <a:extLst>
+                    <a:ext uri="{9D8B030D-6E8A-4147-A177-3AD203B41FA5}">
+                      <a16:colId xmlns:a16="http://schemas.microsoft.com/office/drawing/2014/main" val="20005"/>
+                    </a:ext>
+                  </a:extLst>
+                </a:gridCol>
               </a:tblGrid>
               <a:tr h="339634">
                 <a:tc>
@@ -8271,7 +7945,7 @@
                     <a:bodyPr/>
                     <a:lstStyle/>
                     <a:p>
-                      <a:pPr algn="ctr" indent="0" marL="0">
+                      <a:pPr marL="0" indent="0" algn="ctr">
                         <a:buNone/>
                       </a:pPr>
                       <a:r>
@@ -8292,7 +7966,7 @@
                       </a:endParaRPr>
                     </a:p>
                   </a:txBody>
-                  <a:tcPr marL="91440" marR="91440" marT="45720" marB="45720" anchor="ctr">
+                  <a:tcPr anchor="ctr">
                     <a:lnL w="6350" cap="flat" cmpd="sng" algn="ctr">
                       <a:solidFill>
                         <a:srgbClr val="E2E8F0"/>
@@ -8339,7 +8013,7 @@
                     <a:bodyPr/>
                     <a:lstStyle/>
                     <a:p>
-                      <a:pPr algn="ctr" indent="0" marL="0">
+                      <a:pPr marL="0" indent="0" algn="ctr">
                         <a:buNone/>
                       </a:pPr>
                       <a:r>
@@ -8360,7 +8034,7 @@
                       </a:endParaRPr>
                     </a:p>
                   </a:txBody>
-                  <a:tcPr marL="91440" marR="91440" marT="45720" marB="45720" anchor="ctr">
+                  <a:tcPr anchor="ctr">
                     <a:lnL w="6350" cap="flat" cmpd="sng" algn="ctr">
                       <a:solidFill>
                         <a:srgbClr val="E2E8F0"/>
@@ -8407,7 +8081,7 @@
                     <a:bodyPr/>
                     <a:lstStyle/>
                     <a:p>
-                      <a:pPr algn="ctr" indent="0" marL="0">
+                      <a:pPr marL="0" indent="0" algn="ctr">
                         <a:buNone/>
                       </a:pPr>
                       <a:r>
@@ -8428,7 +8102,7 @@
                       </a:endParaRPr>
                     </a:p>
                   </a:txBody>
-                  <a:tcPr marL="91440" marR="91440" marT="45720" marB="45720" anchor="ctr">
+                  <a:tcPr anchor="ctr">
                     <a:lnL w="6350" cap="flat" cmpd="sng" algn="ctr">
                       <a:solidFill>
                         <a:srgbClr val="E2E8F0"/>
@@ -8475,7 +8149,7 @@
                     <a:bodyPr/>
                     <a:lstStyle/>
                     <a:p>
-                      <a:pPr algn="ctr" indent="0" marL="0">
+                      <a:pPr marL="0" indent="0" algn="ctr">
                         <a:buNone/>
                       </a:pPr>
                       <a:r>
@@ -8496,7 +8170,7 @@
                       </a:endParaRPr>
                     </a:p>
                   </a:txBody>
-                  <a:tcPr marL="91440" marR="91440" marT="45720" marB="45720" anchor="ctr">
+                  <a:tcPr anchor="ctr">
                     <a:lnL w="6350" cap="flat" cmpd="sng" algn="ctr">
                       <a:solidFill>
                         <a:srgbClr val="E2E8F0"/>
@@ -8543,7 +8217,7 @@
                     <a:bodyPr/>
                     <a:lstStyle/>
                     <a:p>
-                      <a:pPr algn="ctr" indent="0" marL="0">
+                      <a:pPr marL="0" indent="0" algn="ctr">
                         <a:buNone/>
                       </a:pPr>
                       <a:r>
@@ -8564,7 +8238,7 @@
                       </a:endParaRPr>
                     </a:p>
                   </a:txBody>
-                  <a:tcPr marL="91440" marR="91440" marT="45720" marB="45720" anchor="ctr">
+                  <a:tcPr anchor="ctr">
                     <a:lnL w="6350" cap="flat" cmpd="sng" algn="ctr">
                       <a:solidFill>
                         <a:srgbClr val="E2E8F0"/>
@@ -8611,7 +8285,7 @@
                     <a:bodyPr/>
                     <a:lstStyle/>
                     <a:p>
-                      <a:pPr algn="ctr" indent="0" marL="0">
+                      <a:pPr marL="0" indent="0" algn="ctr">
                         <a:buNone/>
                       </a:pPr>
                       <a:r>
@@ -8632,7 +8306,7 @@
                       </a:endParaRPr>
                     </a:p>
                   </a:txBody>
-                  <a:tcPr marL="91440" marR="91440" marT="45720" marB="45720" anchor="ctr">
+                  <a:tcPr anchor="ctr">
                     <a:lnL w="6350" cap="flat" cmpd="sng" algn="ctr">
                       <a:solidFill>
                         <a:srgbClr val="E2E8F0"/>
@@ -8674,6 +8348,11 @@
                     </a:solidFill>
                   </a:tcPr>
                 </a:tc>
+                <a:extLst>
+                  <a:ext uri="{0D108BD9-81ED-4DB2-BD59-A6C34878D82A}">
+                    <a16:rowId xmlns:a16="http://schemas.microsoft.com/office/drawing/2014/main" val="10000"/>
+                  </a:ext>
+                </a:extLst>
               </a:tr>
               <a:tr h="339634">
                 <a:tc>
@@ -8681,7 +8360,7 @@
                     <a:bodyPr/>
                     <a:lstStyle/>
                     <a:p>
-                      <a:pPr algn="ctr" indent="0" marL="0">
+                      <a:pPr marL="0" indent="0" algn="ctr">
                         <a:buNone/>
                       </a:pPr>
                       <a:r>
@@ -8702,7 +8381,7 @@
                       </a:endParaRPr>
                     </a:p>
                   </a:txBody>
-                  <a:tcPr marL="91440" marR="91440" marT="45720" marB="45720" anchor="ctr">
+                  <a:tcPr anchor="ctr">
                     <a:lnL w="6350" cap="flat" cmpd="sng" algn="ctr">
                       <a:solidFill>
                         <a:srgbClr val="E2E8F0"/>
@@ -8749,7 +8428,7 @@
                     <a:bodyPr/>
                     <a:lstStyle/>
                     <a:p>
-                      <a:pPr algn="ctr" indent="0" marL="0">
+                      <a:pPr marL="0" indent="0" algn="ctr">
                         <a:buNone/>
                       </a:pPr>
                       <a:r>
@@ -8770,7 +8449,7 @@
                       </a:endParaRPr>
                     </a:p>
                   </a:txBody>
-                  <a:tcPr marL="91440" marR="91440" marT="45720" marB="45720" anchor="ctr">
+                  <a:tcPr anchor="ctr">
                     <a:lnL w="6350" cap="flat" cmpd="sng" algn="ctr">
                       <a:solidFill>
                         <a:srgbClr val="E2E8F0"/>
@@ -8817,7 +8496,7 @@
                     <a:bodyPr/>
                     <a:lstStyle/>
                     <a:p>
-                      <a:pPr algn="ctr" indent="0" marL="0">
+                      <a:pPr marL="0" indent="0" algn="ctr">
                         <a:buNone/>
                       </a:pPr>
                       <a:r>
@@ -8838,7 +8517,7 @@
                       </a:endParaRPr>
                     </a:p>
                   </a:txBody>
-                  <a:tcPr marL="91440" marR="91440" marT="45720" marB="45720" anchor="ctr">
+                  <a:tcPr anchor="ctr">
                     <a:lnL w="6350" cap="flat" cmpd="sng" algn="ctr">
                       <a:solidFill>
                         <a:srgbClr val="E2E8F0"/>
@@ -8885,7 +8564,7 @@
                     <a:bodyPr/>
                     <a:lstStyle/>
                     <a:p>
-                      <a:pPr algn="ctr" indent="0" marL="0">
+                      <a:pPr marL="0" indent="0" algn="ctr">
                         <a:buNone/>
                       </a:pPr>
                       <a:r>
@@ -8906,7 +8585,7 @@
                       </a:endParaRPr>
                     </a:p>
                   </a:txBody>
-                  <a:tcPr marL="91440" marR="91440" marT="45720" marB="45720" anchor="ctr">
+                  <a:tcPr anchor="ctr">
                     <a:lnL w="6350" cap="flat" cmpd="sng" algn="ctr">
                       <a:solidFill>
                         <a:srgbClr val="E2E8F0"/>
@@ -8953,7 +8632,7 @@
                     <a:bodyPr/>
                     <a:lstStyle/>
                     <a:p>
-                      <a:pPr algn="ctr" indent="0" marL="0">
+                      <a:pPr marL="0" indent="0" algn="ctr">
                         <a:buNone/>
                       </a:pPr>
                       <a:r>
@@ -8974,7 +8653,7 @@
                       </a:endParaRPr>
                     </a:p>
                   </a:txBody>
-                  <a:tcPr marL="91440" marR="91440" marT="45720" marB="45720" anchor="ctr">
+                  <a:tcPr anchor="ctr">
                     <a:lnL w="6350" cap="flat" cmpd="sng" algn="ctr">
                       <a:solidFill>
                         <a:srgbClr val="E2E8F0"/>
@@ -9021,7 +8700,7 @@
                     <a:bodyPr/>
                     <a:lstStyle/>
                     <a:p>
-                      <a:pPr algn="ctr" indent="0" marL="0">
+                      <a:pPr marL="0" indent="0" algn="ctr">
                         <a:buNone/>
                       </a:pPr>
                       <a:r>
@@ -9042,7 +8721,7 @@
                       </a:endParaRPr>
                     </a:p>
                   </a:txBody>
-                  <a:tcPr marL="91440" marR="91440" marT="45720" marB="45720" anchor="ctr">
+                  <a:tcPr anchor="ctr">
                     <a:lnL w="6350" cap="flat" cmpd="sng" algn="ctr">
                       <a:solidFill>
                         <a:srgbClr val="E2E8F0"/>
@@ -9084,6 +8763,11 @@
                     </a:solidFill>
                   </a:tcPr>
                 </a:tc>
+                <a:extLst>
+                  <a:ext uri="{0D108BD9-81ED-4DB2-BD59-A6C34878D82A}">
+                    <a16:rowId xmlns:a16="http://schemas.microsoft.com/office/drawing/2014/main" val="10001"/>
+                  </a:ext>
+                </a:extLst>
               </a:tr>
               <a:tr h="339634">
                 <a:tc>
@@ -9091,7 +8775,7 @@
                     <a:bodyPr/>
                     <a:lstStyle/>
                     <a:p>
-                      <a:pPr algn="ctr" indent="0" marL="0">
+                      <a:pPr marL="0" indent="0" algn="ctr">
                         <a:buNone/>
                       </a:pPr>
                       <a:r>
@@ -9112,7 +8796,7 @@
                       </a:endParaRPr>
                     </a:p>
                   </a:txBody>
-                  <a:tcPr marL="91440" marR="91440" marT="45720" marB="45720" anchor="ctr">
+                  <a:tcPr anchor="ctr">
                     <a:lnL w="6350" cap="flat" cmpd="sng" algn="ctr">
                       <a:solidFill>
                         <a:srgbClr val="E2E8F0"/>
@@ -9159,7 +8843,7 @@
                     <a:bodyPr/>
                     <a:lstStyle/>
                     <a:p>
-                      <a:pPr algn="ctr" indent="0" marL="0">
+                      <a:pPr marL="0" indent="0" algn="ctr">
                         <a:buNone/>
                       </a:pPr>
                       <a:r>
@@ -9180,7 +8864,7 @@
                       </a:endParaRPr>
                     </a:p>
                   </a:txBody>
-                  <a:tcPr marL="91440" marR="91440" marT="45720" marB="45720" anchor="ctr">
+                  <a:tcPr anchor="ctr">
                     <a:lnL w="6350" cap="flat" cmpd="sng" algn="ctr">
                       <a:solidFill>
                         <a:srgbClr val="E2E8F0"/>
@@ -9227,7 +8911,7 @@
                     <a:bodyPr/>
                     <a:lstStyle/>
                     <a:p>
-                      <a:pPr algn="ctr" indent="0" marL="0">
+                      <a:pPr marL="0" indent="0" algn="ctr">
                         <a:buNone/>
                       </a:pPr>
                       <a:r>
@@ -9248,7 +8932,7 @@
                       </a:endParaRPr>
                     </a:p>
                   </a:txBody>
-                  <a:tcPr marL="91440" marR="91440" marT="45720" marB="45720" anchor="ctr">
+                  <a:tcPr anchor="ctr">
                     <a:lnL w="6350" cap="flat" cmpd="sng" algn="ctr">
                       <a:solidFill>
                         <a:srgbClr val="E2E8F0"/>
@@ -9295,7 +8979,7 @@
                     <a:bodyPr/>
                     <a:lstStyle/>
                     <a:p>
-                      <a:pPr algn="ctr" indent="0" marL="0">
+                      <a:pPr marL="0" indent="0" algn="ctr">
                         <a:buNone/>
                       </a:pPr>
                       <a:r>
@@ -9316,7 +9000,7 @@
                       </a:endParaRPr>
                     </a:p>
                   </a:txBody>
-                  <a:tcPr marL="91440" marR="91440" marT="45720" marB="45720" anchor="ctr">
+                  <a:tcPr anchor="ctr">
                     <a:lnL w="6350" cap="flat" cmpd="sng" algn="ctr">
                       <a:solidFill>
                         <a:srgbClr val="E2E8F0"/>
@@ -9363,7 +9047,7 @@
                     <a:bodyPr/>
                     <a:lstStyle/>
                     <a:p>
-                      <a:pPr algn="ctr" indent="0" marL="0">
+                      <a:pPr marL="0" indent="0" algn="ctr">
                         <a:buNone/>
                       </a:pPr>
                       <a:r>
@@ -9384,7 +9068,7 @@
                       </a:endParaRPr>
                     </a:p>
                   </a:txBody>
-                  <a:tcPr marL="91440" marR="91440" marT="45720" marB="45720" anchor="ctr">
+                  <a:tcPr anchor="ctr">
                     <a:lnL w="6350" cap="flat" cmpd="sng" algn="ctr">
                       <a:solidFill>
                         <a:srgbClr val="E2E8F0"/>
@@ -9431,7 +9115,7 @@
                     <a:bodyPr/>
                     <a:lstStyle/>
                     <a:p>
-                      <a:pPr algn="ctr" indent="0" marL="0">
+                      <a:pPr marL="0" indent="0" algn="ctr">
                         <a:buNone/>
                       </a:pPr>
                       <a:r>
@@ -9452,7 +9136,7 @@
                       </a:endParaRPr>
                     </a:p>
                   </a:txBody>
-                  <a:tcPr marL="91440" marR="91440" marT="45720" marB="45720" anchor="ctr">
+                  <a:tcPr anchor="ctr">
                     <a:lnL w="6350" cap="flat" cmpd="sng" algn="ctr">
                       <a:solidFill>
                         <a:srgbClr val="E2E8F0"/>
@@ -9494,6 +9178,11 @@
                     </a:solidFill>
                   </a:tcPr>
                 </a:tc>
+                <a:extLst>
+                  <a:ext uri="{0D108BD9-81ED-4DB2-BD59-A6C34878D82A}">
+                    <a16:rowId xmlns:a16="http://schemas.microsoft.com/office/drawing/2014/main" val="10002"/>
+                  </a:ext>
+                </a:extLst>
               </a:tr>
               <a:tr h="339634">
                 <a:tc>
@@ -9501,7 +9190,7 @@
                     <a:bodyPr/>
                     <a:lstStyle/>
                     <a:p>
-                      <a:pPr algn="ctr" indent="0" marL="0">
+                      <a:pPr marL="0" indent="0" algn="ctr">
                         <a:buNone/>
                       </a:pPr>
                       <a:r>
@@ -9522,7 +9211,7 @@
                       </a:endParaRPr>
                     </a:p>
                   </a:txBody>
-                  <a:tcPr marL="91440" marR="91440" marT="45720" marB="45720" anchor="ctr">
+                  <a:tcPr anchor="ctr">
                     <a:lnL w="6350" cap="flat" cmpd="sng" algn="ctr">
                       <a:solidFill>
                         <a:srgbClr val="E2E8F0"/>
@@ -9569,7 +9258,7 @@
                     <a:bodyPr/>
                     <a:lstStyle/>
                     <a:p>
-                      <a:pPr algn="ctr" indent="0" marL="0">
+                      <a:pPr marL="0" indent="0" algn="ctr">
                         <a:buNone/>
                       </a:pPr>
                       <a:r>
@@ -9590,7 +9279,7 @@
                       </a:endParaRPr>
                     </a:p>
                   </a:txBody>
-                  <a:tcPr marL="91440" marR="91440" marT="45720" marB="45720" anchor="ctr">
+                  <a:tcPr anchor="ctr">
                     <a:lnL w="6350" cap="flat" cmpd="sng" algn="ctr">
                       <a:solidFill>
                         <a:srgbClr val="E2E8F0"/>
@@ -9637,7 +9326,7 @@
                     <a:bodyPr/>
                     <a:lstStyle/>
                     <a:p>
-                      <a:pPr algn="ctr" indent="0" marL="0">
+                      <a:pPr marL="0" indent="0" algn="ctr">
                         <a:buNone/>
                       </a:pPr>
                       <a:r>
@@ -9658,7 +9347,7 @@
                       </a:endParaRPr>
                     </a:p>
                   </a:txBody>
-                  <a:tcPr marL="91440" marR="91440" marT="45720" marB="45720" anchor="ctr">
+                  <a:tcPr anchor="ctr">
                     <a:lnL w="6350" cap="flat" cmpd="sng" algn="ctr">
                       <a:solidFill>
                         <a:srgbClr val="E2E8F0"/>
@@ -9705,7 +9394,7 @@
                     <a:bodyPr/>
                     <a:lstStyle/>
                     <a:p>
-                      <a:pPr algn="ctr" indent="0" marL="0">
+                      <a:pPr marL="0" indent="0" algn="ctr">
                         <a:buNone/>
                       </a:pPr>
                       <a:r>
@@ -9726,7 +9415,7 @@
                       </a:endParaRPr>
                     </a:p>
                   </a:txBody>
-                  <a:tcPr marL="91440" marR="91440" marT="45720" marB="45720" anchor="ctr">
+                  <a:tcPr anchor="ctr">
                     <a:lnL w="6350" cap="flat" cmpd="sng" algn="ctr">
                       <a:solidFill>
                         <a:srgbClr val="E2E8F0"/>
@@ -9773,7 +9462,7 @@
                     <a:bodyPr/>
                     <a:lstStyle/>
                     <a:p>
-                      <a:pPr algn="ctr" indent="0" marL="0">
+                      <a:pPr marL="0" indent="0" algn="ctr">
                         <a:buNone/>
                       </a:pPr>
                       <a:r>
@@ -9794,7 +9483,7 @@
                       </a:endParaRPr>
                     </a:p>
                   </a:txBody>
-                  <a:tcPr marL="91440" marR="91440" marT="45720" marB="45720" anchor="ctr">
+                  <a:tcPr anchor="ctr">
                     <a:lnL w="6350" cap="flat" cmpd="sng" algn="ctr">
                       <a:solidFill>
                         <a:srgbClr val="E2E8F0"/>
@@ -9841,7 +9530,7 @@
                     <a:bodyPr/>
                     <a:lstStyle/>
                     <a:p>
-                      <a:pPr algn="ctr" indent="0" marL="0">
+                      <a:pPr marL="0" indent="0" algn="ctr">
                         <a:buNone/>
                       </a:pPr>
                       <a:r>
@@ -9862,7 +9551,7 @@
                       </a:endParaRPr>
                     </a:p>
                   </a:txBody>
-                  <a:tcPr marL="91440" marR="91440" marT="45720" marB="45720" anchor="ctr">
+                  <a:tcPr anchor="ctr">
                     <a:lnL w="6350" cap="flat" cmpd="sng" algn="ctr">
                       <a:solidFill>
                         <a:srgbClr val="E2E8F0"/>
@@ -9904,6 +9593,11 @@
                     </a:solidFill>
                   </a:tcPr>
                 </a:tc>
+                <a:extLst>
+                  <a:ext uri="{0D108BD9-81ED-4DB2-BD59-A6C34878D82A}">
+                    <a16:rowId xmlns:a16="http://schemas.microsoft.com/office/drawing/2014/main" val="10003"/>
+                  </a:ext>
+                </a:extLst>
               </a:tr>
               <a:tr h="339634">
                 <a:tc>
@@ -9911,7 +9605,7 @@
                     <a:bodyPr/>
                     <a:lstStyle/>
                     <a:p>
-                      <a:pPr algn="ctr" indent="0" marL="0">
+                      <a:pPr marL="0" indent="0" algn="ctr">
                         <a:buNone/>
                       </a:pPr>
                       <a:r>
@@ -9932,7 +9626,7 @@
                       </a:endParaRPr>
                     </a:p>
                   </a:txBody>
-                  <a:tcPr marL="91440" marR="91440" marT="45720" marB="45720" anchor="ctr">
+                  <a:tcPr anchor="ctr">
                     <a:lnL w="6350" cap="flat" cmpd="sng" algn="ctr">
                       <a:solidFill>
                         <a:srgbClr val="E2E8F0"/>
@@ -9979,7 +9673,7 @@
                     <a:bodyPr/>
                     <a:lstStyle/>
                     <a:p>
-                      <a:pPr algn="ctr" indent="0" marL="0">
+                      <a:pPr marL="0" indent="0" algn="ctr">
                         <a:buNone/>
                       </a:pPr>
                       <a:r>
@@ -10000,7 +9694,7 @@
                       </a:endParaRPr>
                     </a:p>
                   </a:txBody>
-                  <a:tcPr marL="91440" marR="91440" marT="45720" marB="45720" anchor="ctr">
+                  <a:tcPr anchor="ctr">
                     <a:lnL w="6350" cap="flat" cmpd="sng" algn="ctr">
                       <a:solidFill>
                         <a:srgbClr val="E2E8F0"/>
@@ -10047,7 +9741,7 @@
                     <a:bodyPr/>
                     <a:lstStyle/>
                     <a:p>
-                      <a:pPr algn="ctr" indent="0" marL="0">
+                      <a:pPr marL="0" indent="0" algn="ctr">
                         <a:buNone/>
                       </a:pPr>
                       <a:r>
@@ -10068,7 +9762,7 @@
                       </a:endParaRPr>
                     </a:p>
                   </a:txBody>
-                  <a:tcPr marL="91440" marR="91440" marT="45720" marB="45720" anchor="ctr">
+                  <a:tcPr anchor="ctr">
                     <a:lnL w="6350" cap="flat" cmpd="sng" algn="ctr">
                       <a:solidFill>
                         <a:srgbClr val="E2E8F0"/>
@@ -10115,7 +9809,7 @@
                     <a:bodyPr/>
                     <a:lstStyle/>
                     <a:p>
-                      <a:pPr algn="ctr" indent="0" marL="0">
+                      <a:pPr marL="0" indent="0" algn="ctr">
                         <a:buNone/>
                       </a:pPr>
                       <a:r>
@@ -10136,7 +9830,7 @@
                       </a:endParaRPr>
                     </a:p>
                   </a:txBody>
-                  <a:tcPr marL="91440" marR="91440" marT="45720" marB="45720" anchor="ctr">
+                  <a:tcPr anchor="ctr">
                     <a:lnL w="6350" cap="flat" cmpd="sng" algn="ctr">
                       <a:solidFill>
                         <a:srgbClr val="E2E8F0"/>
@@ -10183,7 +9877,7 @@
                     <a:bodyPr/>
                     <a:lstStyle/>
                     <a:p>
-                      <a:pPr algn="ctr" indent="0" marL="0">
+                      <a:pPr marL="0" indent="0" algn="ctr">
                         <a:buNone/>
                       </a:pPr>
                       <a:r>
@@ -10204,7 +9898,7 @@
                       </a:endParaRPr>
                     </a:p>
                   </a:txBody>
-                  <a:tcPr marL="91440" marR="91440" marT="45720" marB="45720" anchor="ctr">
+                  <a:tcPr anchor="ctr">
                     <a:lnL w="6350" cap="flat" cmpd="sng" algn="ctr">
                       <a:solidFill>
                         <a:srgbClr val="E2E8F0"/>
@@ -10251,7 +9945,7 @@
                     <a:bodyPr/>
                     <a:lstStyle/>
                     <a:p>
-                      <a:pPr algn="ctr" indent="0" marL="0">
+                      <a:pPr marL="0" indent="0" algn="ctr">
                         <a:buNone/>
                       </a:pPr>
                       <a:r>
@@ -10272,7 +9966,7 @@
                       </a:endParaRPr>
                     </a:p>
                   </a:txBody>
-                  <a:tcPr marL="91440" marR="91440" marT="45720" marB="45720" anchor="ctr">
+                  <a:tcPr anchor="ctr">
                     <a:lnL w="6350" cap="flat" cmpd="sng" algn="ctr">
                       <a:solidFill>
                         <a:srgbClr val="E2E8F0"/>
@@ -10314,6 +10008,11 @@
                     </a:solidFill>
                   </a:tcPr>
                 </a:tc>
+                <a:extLst>
+                  <a:ext uri="{0D108BD9-81ED-4DB2-BD59-A6C34878D82A}">
+                    <a16:rowId xmlns:a16="http://schemas.microsoft.com/office/drawing/2014/main" val="10004"/>
+                  </a:ext>
+                </a:extLst>
               </a:tr>
               <a:tr h="339634">
                 <a:tc>
@@ -10321,7 +10020,7 @@
                     <a:bodyPr/>
                     <a:lstStyle/>
                     <a:p>
-                      <a:pPr algn="ctr" indent="0" marL="0">
+                      <a:pPr marL="0" indent="0" algn="ctr">
                         <a:buNone/>
                       </a:pPr>
                       <a:r>
@@ -10342,7 +10041,7 @@
                       </a:endParaRPr>
                     </a:p>
                   </a:txBody>
-                  <a:tcPr marL="91440" marR="91440" marT="45720" marB="45720" anchor="ctr">
+                  <a:tcPr anchor="ctr">
                     <a:lnL w="6350" cap="flat" cmpd="sng" algn="ctr">
                       <a:solidFill>
                         <a:srgbClr val="E2E8F0"/>
@@ -10389,7 +10088,7 @@
                     <a:bodyPr/>
                     <a:lstStyle/>
                     <a:p>
-                      <a:pPr algn="ctr" indent="0" marL="0">
+                      <a:pPr marL="0" indent="0" algn="ctr">
                         <a:buNone/>
                       </a:pPr>
                       <a:r>
@@ -10410,7 +10109,7 @@
                       </a:endParaRPr>
                     </a:p>
                   </a:txBody>
-                  <a:tcPr marL="91440" marR="91440" marT="45720" marB="45720" anchor="ctr">
+                  <a:tcPr anchor="ctr">
                     <a:lnL w="6350" cap="flat" cmpd="sng" algn="ctr">
                       <a:solidFill>
                         <a:srgbClr val="E2E8F0"/>
@@ -10457,7 +10156,7 @@
                     <a:bodyPr/>
                     <a:lstStyle/>
                     <a:p>
-                      <a:pPr algn="ctr" indent="0" marL="0">
+                      <a:pPr marL="0" indent="0" algn="ctr">
                         <a:buNone/>
                       </a:pPr>
                       <a:r>
@@ -10478,7 +10177,7 @@
                       </a:endParaRPr>
                     </a:p>
                   </a:txBody>
-                  <a:tcPr marL="91440" marR="91440" marT="45720" marB="45720" anchor="ctr">
+                  <a:tcPr anchor="ctr">
                     <a:lnL w="6350" cap="flat" cmpd="sng" algn="ctr">
                       <a:solidFill>
                         <a:srgbClr val="E2E8F0"/>
@@ -10525,7 +10224,7 @@
                     <a:bodyPr/>
                     <a:lstStyle/>
                     <a:p>
-                      <a:pPr algn="ctr" indent="0" marL="0">
+                      <a:pPr marL="0" indent="0" algn="ctr">
                         <a:buNone/>
                       </a:pPr>
                       <a:r>
@@ -10546,7 +10245,7 @@
                       </a:endParaRPr>
                     </a:p>
                   </a:txBody>
-                  <a:tcPr marL="91440" marR="91440" marT="45720" marB="45720" anchor="ctr">
+                  <a:tcPr anchor="ctr">
                     <a:lnL w="6350" cap="flat" cmpd="sng" algn="ctr">
                       <a:solidFill>
                         <a:srgbClr val="E2E8F0"/>
@@ -10593,7 +10292,7 @@
                     <a:bodyPr/>
                     <a:lstStyle/>
                     <a:p>
-                      <a:pPr algn="ctr" indent="0" marL="0">
+                      <a:pPr marL="0" indent="0" algn="ctr">
                         <a:buNone/>
                       </a:pPr>
                       <a:r>
@@ -10614,7 +10313,7 @@
                       </a:endParaRPr>
                     </a:p>
                   </a:txBody>
-                  <a:tcPr marL="91440" marR="91440" marT="45720" marB="45720" anchor="ctr">
+                  <a:tcPr anchor="ctr">
                     <a:lnL w="6350" cap="flat" cmpd="sng" algn="ctr">
                       <a:solidFill>
                         <a:srgbClr val="E2E8F0"/>
@@ -10661,7 +10360,7 @@
                     <a:bodyPr/>
                     <a:lstStyle/>
                     <a:p>
-                      <a:pPr algn="ctr" indent="0" marL="0">
+                      <a:pPr marL="0" indent="0" algn="ctr">
                         <a:buNone/>
                       </a:pPr>
                       <a:r>
@@ -10682,7 +10381,7 @@
                       </a:endParaRPr>
                     </a:p>
                   </a:txBody>
-                  <a:tcPr marL="91440" marR="91440" marT="45720" marB="45720" anchor="ctr">
+                  <a:tcPr anchor="ctr">
                     <a:lnL w="6350" cap="flat" cmpd="sng" algn="ctr">
                       <a:solidFill>
                         <a:srgbClr val="E2E8F0"/>
@@ -10724,6 +10423,11 @@
                     </a:solidFill>
                   </a:tcPr>
                 </a:tc>
+                <a:extLst>
+                  <a:ext uri="{0D108BD9-81ED-4DB2-BD59-A6C34878D82A}">
+                    <a16:rowId xmlns:a16="http://schemas.microsoft.com/office/drawing/2014/main" val="10005"/>
+                  </a:ext>
+                </a:extLst>
               </a:tr>
               <a:tr h="339634">
                 <a:tc>
@@ -10731,7 +10435,7 @@
                     <a:bodyPr/>
                     <a:lstStyle/>
                     <a:p>
-                      <a:pPr algn="ctr" indent="0" marL="0">
+                      <a:pPr marL="0" indent="0" algn="ctr">
                         <a:buNone/>
                       </a:pPr>
                       <a:r>
@@ -10752,7 +10456,7 @@
                       </a:endParaRPr>
                     </a:p>
                   </a:txBody>
-                  <a:tcPr marL="91440" marR="91440" marT="45720" marB="45720" anchor="ctr">
+                  <a:tcPr anchor="ctr">
                     <a:lnL w="6350" cap="flat" cmpd="sng" algn="ctr">
                       <a:solidFill>
                         <a:srgbClr val="E2E8F0"/>
@@ -10799,7 +10503,7 @@
                     <a:bodyPr/>
                     <a:lstStyle/>
                     <a:p>
-                      <a:pPr algn="ctr" indent="0" marL="0">
+                      <a:pPr marL="0" indent="0" algn="ctr">
                         <a:buNone/>
                       </a:pPr>
                       <a:r>
@@ -10820,7 +10524,7 @@
                       </a:endParaRPr>
                     </a:p>
                   </a:txBody>
-                  <a:tcPr marL="91440" marR="91440" marT="45720" marB="45720" anchor="ctr">
+                  <a:tcPr anchor="ctr">
                     <a:lnL w="6350" cap="flat" cmpd="sng" algn="ctr">
                       <a:solidFill>
                         <a:srgbClr val="E2E8F0"/>
@@ -10867,7 +10571,7 @@
                     <a:bodyPr/>
                     <a:lstStyle/>
                     <a:p>
-                      <a:pPr algn="ctr" indent="0" marL="0">
+                      <a:pPr marL="0" indent="0" algn="ctr">
                         <a:buNone/>
                       </a:pPr>
                       <a:r>
@@ -10888,7 +10592,7 @@
                       </a:endParaRPr>
                     </a:p>
                   </a:txBody>
-                  <a:tcPr marL="91440" marR="91440" marT="45720" marB="45720" anchor="ctr">
+                  <a:tcPr anchor="ctr">
                     <a:lnL w="6350" cap="flat" cmpd="sng" algn="ctr">
                       <a:solidFill>
                         <a:srgbClr val="E2E8F0"/>
@@ -10935,7 +10639,7 @@
                     <a:bodyPr/>
                     <a:lstStyle/>
                     <a:p>
-                      <a:pPr algn="ctr" indent="0" marL="0">
+                      <a:pPr marL="0" indent="0" algn="ctr">
                         <a:buNone/>
                       </a:pPr>
                       <a:r>
@@ -10956,7 +10660,7 @@
                       </a:endParaRPr>
                     </a:p>
                   </a:txBody>
-                  <a:tcPr marL="91440" marR="91440" marT="45720" marB="45720" anchor="ctr">
+                  <a:tcPr anchor="ctr">
                     <a:lnL w="6350" cap="flat" cmpd="sng" algn="ctr">
                       <a:solidFill>
                         <a:srgbClr val="E2E8F0"/>
@@ -11003,7 +10707,7 @@
                     <a:bodyPr/>
                     <a:lstStyle/>
                     <a:p>
-                      <a:pPr algn="ctr" indent="0" marL="0">
+                      <a:pPr marL="0" indent="0" algn="ctr">
                         <a:buNone/>
                       </a:pPr>
                       <a:r>
@@ -11024,7 +10728,7 @@
                       </a:endParaRPr>
                     </a:p>
                   </a:txBody>
-                  <a:tcPr marL="91440" marR="91440" marT="45720" marB="45720" anchor="ctr">
+                  <a:tcPr anchor="ctr">
                     <a:lnL w="6350" cap="flat" cmpd="sng" algn="ctr">
                       <a:solidFill>
                         <a:srgbClr val="E2E8F0"/>
@@ -11071,7 +10775,7 @@
                     <a:bodyPr/>
                     <a:lstStyle/>
                     <a:p>
-                      <a:pPr algn="ctr" indent="0" marL="0">
+                      <a:pPr marL="0" indent="0" algn="ctr">
                         <a:buNone/>
                       </a:pPr>
                       <a:r>
@@ -11092,7 +10796,7 @@
                       </a:endParaRPr>
                     </a:p>
                   </a:txBody>
-                  <a:tcPr marL="91440" marR="91440" marT="45720" marB="45720" anchor="ctr">
+                  <a:tcPr anchor="ctr">
                     <a:lnL w="6350" cap="flat" cmpd="sng" algn="ctr">
                       <a:solidFill>
                         <a:srgbClr val="E2E8F0"/>
@@ -11134,6 +10838,11 @@
                     </a:solidFill>
                   </a:tcPr>
                 </a:tc>
+                <a:extLst>
+                  <a:ext uri="{0D108BD9-81ED-4DB2-BD59-A6C34878D82A}">
+                    <a16:rowId xmlns:a16="http://schemas.microsoft.com/office/drawing/2014/main" val="10006"/>
+                  </a:ext>
+                </a:extLst>
               </a:tr>
             </a:tbl>
           </a:graphicData>
@@ -11187,14 +10896,11 @@
           <a:bodyPr wrap="square" lIns="0" tIns="0" rIns="0" bIns="0" rtlCol="0" anchor="ctr"/>
           <a:lstStyle/>
           <a:p>
-            <a:pPr indent="0" marL="0">
+            <a:pPr marL="0" indent="0">
               <a:buNone/>
             </a:pPr>
             <a:r>
               <a:rPr lang="en-US" sz="950" b="1" dirty="0">
-                <a:solidFill>
-                  <a:srgbClr val="1E3A8A"/>
-                </a:solidFill>
                 <a:latin typeface="Calibri" pitchFamily="34" charset="0"/>
                 <a:ea typeface="Calibri" pitchFamily="34" charset="-122"/>
                 <a:cs typeface="Calibri" pitchFamily="34" charset="-120"/>
@@ -11235,9 +10941,6 @@
             </a:pPr>
             <a:r>
               <a:rPr lang="en-US" sz="880" dirty="0">
-                <a:solidFill>
-                  <a:srgbClr val="334155"/>
-                </a:solidFill>
                 <a:latin typeface="Calibri" pitchFamily="34" charset="0"/>
                 <a:ea typeface="Calibri" pitchFamily="34" charset="-122"/>
                 <a:cs typeface="Calibri" pitchFamily="34" charset="-120"/>
@@ -11256,9 +10959,6 @@
             </a:pPr>
             <a:r>
               <a:rPr lang="en-US" sz="880" dirty="0">
-                <a:solidFill>
-                  <a:srgbClr val="334155"/>
-                </a:solidFill>
                 <a:latin typeface="Calibri" pitchFamily="34" charset="0"/>
                 <a:ea typeface="Calibri" pitchFamily="34" charset="-122"/>
                 <a:cs typeface="Calibri" pitchFamily="34" charset="-120"/>
@@ -11277,9 +10977,6 @@
             </a:pPr>
             <a:r>
               <a:rPr lang="en-US" sz="880" dirty="0">
-                <a:solidFill>
-                  <a:srgbClr val="334155"/>
-                </a:solidFill>
                 <a:latin typeface="Calibri" pitchFamily="34" charset="0"/>
                 <a:ea typeface="Calibri" pitchFamily="34" charset="-122"/>
                 <a:cs typeface="Calibri" pitchFamily="34" charset="-120"/>
@@ -11306,6 +11003,7 @@
         <a:solidFill>
           <a:srgbClr val="FFFFFF"/>
         </a:solidFill>
+        <a:effectLst/>
       </p:bgPr>
     </p:bg>
     <p:spTree>
@@ -11324,14 +11022,14 @@
       </p:grpSpPr>
       <p:pic>
         <p:nvPicPr>
-          <p:cNvPr id="2" name="Image 0" descr="d:\resrtorant\presentation_assets\tcet_header.jpeg">    </p:cNvPr>
+          <p:cNvPr id="2" name="Image 0" descr="d:\resrtorant\presentation_assets\tcet_header.jpeg"/>
           <p:cNvPicPr>
             <a:picLocks noChangeAspect="1"/>
           </p:cNvPicPr>
           <p:nvPr/>
         </p:nvPicPr>
         <p:blipFill>
-          <a:blip r:embed="rId1"/>
+          <a:blip r:embed="rId3"/>
           <a:stretch>
             <a:fillRect/>
           </a:stretch>
@@ -11367,14 +11065,11 @@
           <a:bodyPr wrap="square" lIns="0" tIns="0" rIns="0" bIns="0" rtlCol="0" anchor="ctr"/>
           <a:lstStyle/>
           <a:p>
-            <a:pPr indent="0" marL="0">
+            <a:pPr marL="0" indent="0">
               <a:buNone/>
             </a:pPr>
             <a:r>
               <a:rPr lang="en-US" sz="1650" b="1" dirty="0">
-                <a:solidFill>
-                  <a:srgbClr val="1E3A8A"/>
-                </a:solidFill>
                 <a:latin typeface="Cambria" pitchFamily="34" charset="0"/>
                 <a:ea typeface="Cambria" pitchFamily="34" charset="-122"/>
                 <a:cs typeface="Cambria" pitchFamily="34" charset="-120"/>
@@ -11406,14 +11101,11 @@
           <a:bodyPr wrap="square" lIns="0" tIns="0" rIns="0" bIns="0" rtlCol="0" anchor="ctr"/>
           <a:lstStyle/>
           <a:p>
-            <a:pPr algn="r" indent="0" marL="0">
+            <a:pPr marL="0" indent="0" algn="r">
               <a:buNone/>
             </a:pPr>
             <a:r>
               <a:rPr lang="en-US" sz="950" b="1" dirty="0">
-                <a:solidFill>
-                  <a:srgbClr val="2563EB"/>
-                </a:solidFill>
                 <a:latin typeface="Calibri" pitchFamily="34" charset="0"/>
                 <a:ea typeface="Calibri" pitchFamily="34" charset="-122"/>
                 <a:cs typeface="Calibri" pitchFamily="34" charset="-120"/>
@@ -11445,7 +11137,7 @@
           <a:bodyPr wrap="square" lIns="0" tIns="0" rIns="0" bIns="0" rtlCol="0" anchor="ctr"/>
           <a:lstStyle/>
           <a:p>
-            <a:pPr indent="0" marL="0">
+            <a:pPr marL="0" indent="0">
               <a:buNone/>
             </a:pPr>
             <a:r>
@@ -11484,7 +11176,7 @@
           <a:bodyPr wrap="square" lIns="0" tIns="0" rIns="0" bIns="0" rtlCol="0" anchor="ctr"/>
           <a:lstStyle/>
           <a:p>
-            <a:pPr algn="r" indent="0" marL="0">
+            <a:pPr marL="0" indent="0" algn="r">
               <a:buNone/>
             </a:pPr>
             <a:r>
@@ -11504,7 +11196,7 @@
       </p:sp>
       <p:graphicFrame>
         <p:nvGraphicFramePr>
-          <p:cNvPr id="7" name="Chart 0" descr=""/>
+          <p:cNvPr id="7" name="Chart 0"/>
           <p:cNvGraphicFramePr/>
           <p:nvPr/>
         </p:nvGraphicFramePr>
@@ -11512,9 +11204,9 @@
           <a:off x="548640" y="1188720"/>
           <a:ext cx="4389120" cy="3429000"/>
         </p:xfrm>
-        <a:graphic xmlns:a="http://schemas.openxmlformats.org/drawingml/2006/main">
+        <a:graphic>
           <a:graphicData uri="http://schemas.openxmlformats.org/drawingml/2006/chart">
-            <c:chart xmlns:c="http://schemas.openxmlformats.org/drawingml/2006/chart" r:id="rId2"/>
+            <c:chart xmlns:c="http://schemas.openxmlformats.org/drawingml/2006/chart" xmlns:r="http://schemas.openxmlformats.org/officeDocument/2006/relationships" r:id="rId4"/>
           </a:graphicData>
         </a:graphic>
       </p:graphicFrame>
@@ -11566,7 +11258,7 @@
           <a:bodyPr wrap="square" lIns="0" tIns="0" rIns="0" bIns="0" rtlCol="0" anchor="ctr"/>
           <a:lstStyle/>
           <a:p>
-            <a:pPr indent="0" marL="0">
+            <a:pPr marL="0" indent="0">
               <a:buNone/>
             </a:pPr>
             <a:r>
@@ -11605,7 +11297,7 @@
           <a:bodyPr wrap="square" lIns="0" tIns="0" rIns="0" bIns="0" rtlCol="0" anchor="ctr"/>
           <a:lstStyle/>
           <a:p>
-            <a:pPr algn="r" indent="0" marL="0">
+            <a:pPr marL="0" indent="0" algn="r">
               <a:buNone/>
             </a:pPr>
             <a:r>
@@ -11644,7 +11336,7 @@
           <a:bodyPr wrap="square" lIns="0" tIns="0" rIns="0" bIns="0" rtlCol="0" anchor="ctr"/>
           <a:lstStyle/>
           <a:p>
-            <a:pPr indent="0" marL="0">
+            <a:pPr marL="0" indent="0">
               <a:buNone/>
             </a:pPr>
             <a:r>
@@ -11710,7 +11402,7 @@
           <a:bodyPr wrap="square" lIns="0" tIns="0" rIns="0" bIns="0" rtlCol="0" anchor="ctr"/>
           <a:lstStyle/>
           <a:p>
-            <a:pPr indent="0" marL="0">
+            <a:pPr marL="0" indent="0">
               <a:buNone/>
             </a:pPr>
             <a:r>
@@ -11749,7 +11441,7 @@
           <a:bodyPr wrap="square" lIns="0" tIns="0" rIns="0" bIns="0" rtlCol="0" anchor="ctr"/>
           <a:lstStyle/>
           <a:p>
-            <a:pPr algn="r" indent="0" marL="0">
+            <a:pPr marL="0" indent="0" algn="r">
               <a:buNone/>
             </a:pPr>
             <a:r>
@@ -11788,7 +11480,7 @@
           <a:bodyPr wrap="square" lIns="0" tIns="0" rIns="0" bIns="0" rtlCol="0" anchor="ctr"/>
           <a:lstStyle/>
           <a:p>
-            <a:pPr indent="0" marL="0">
+            <a:pPr marL="0" indent="0">
               <a:buNone/>
             </a:pPr>
             <a:r>
@@ -11854,7 +11546,7 @@
           <a:bodyPr wrap="square" lIns="0" tIns="0" rIns="0" bIns="0" rtlCol="0" anchor="ctr"/>
           <a:lstStyle/>
           <a:p>
-            <a:pPr indent="0" marL="0">
+            <a:pPr marL="0" indent="0">
               <a:buNone/>
             </a:pPr>
             <a:r>
@@ -11893,7 +11585,7 @@
           <a:bodyPr wrap="square" lIns="0" tIns="0" rIns="0" bIns="0" rtlCol="0" anchor="ctr"/>
           <a:lstStyle/>
           <a:p>
-            <a:pPr algn="r" indent="0" marL="0">
+            <a:pPr marL="0" indent="0" algn="r">
               <a:buNone/>
             </a:pPr>
             <a:r>
@@ -11932,7 +11624,7 @@
           <a:bodyPr wrap="square" lIns="0" tIns="0" rIns="0" bIns="0" rtlCol="0" anchor="ctr"/>
           <a:lstStyle/>
           <a:p>
-            <a:pPr indent="0" marL="0">
+            <a:pPr marL="0" indent="0">
               <a:buNone/>
             </a:pPr>
             <a:r>
@@ -11998,7 +11690,7 @@
           <a:bodyPr wrap="square" lIns="0" tIns="0" rIns="0" bIns="0" rtlCol="0" anchor="ctr"/>
           <a:lstStyle/>
           <a:p>
-            <a:pPr indent="0" marL="0">
+            <a:pPr marL="0" indent="0">
               <a:buNone/>
             </a:pPr>
             <a:r>
@@ -12037,7 +11729,7 @@
           <a:bodyPr wrap="square" lIns="0" tIns="0" rIns="0" bIns="0" rtlCol="0" anchor="ctr"/>
           <a:lstStyle/>
           <a:p>
-            <a:pPr algn="r" indent="0" marL="0">
+            <a:pPr marL="0" indent="0" algn="r">
               <a:buNone/>
             </a:pPr>
             <a:r>
@@ -12076,7 +11768,7 @@
           <a:bodyPr wrap="square" lIns="0" tIns="0" rIns="0" bIns="0" rtlCol="0" anchor="ctr"/>
           <a:lstStyle/>
           <a:p>
-            <a:pPr indent="0" marL="0">
+            <a:pPr marL="0" indent="0">
               <a:buNone/>
             </a:pPr>
             <a:r>
@@ -12110,6 +11802,7 @@
         <a:solidFill>
           <a:srgbClr val="FFFFFF"/>
         </a:solidFill>
+        <a:effectLst/>
       </p:bgPr>
     </p:bg>
     <p:spTree>
@@ -12128,14 +11821,14 @@
       </p:grpSpPr>
       <p:pic>
         <p:nvPicPr>
-          <p:cNvPr id="2" name="Image 0" descr="d:\resrtorant\presentation_assets\tcet_header.jpeg">    </p:cNvPr>
+          <p:cNvPr id="2" name="Image 0" descr="d:\resrtorant\presentation_assets\tcet_header.jpeg"/>
           <p:cNvPicPr>
             <a:picLocks noChangeAspect="1"/>
           </p:cNvPicPr>
           <p:nvPr/>
         </p:nvPicPr>
         <p:blipFill>
-          <a:blip r:embed="rId1"/>
+          <a:blip r:embed="rId3"/>
           <a:stretch>
             <a:fillRect/>
           </a:stretch>
@@ -12171,14 +11864,11 @@
           <a:bodyPr wrap="square" lIns="0" tIns="0" rIns="0" bIns="0" rtlCol="0" anchor="ctr"/>
           <a:lstStyle/>
           <a:p>
-            <a:pPr indent="0" marL="0">
+            <a:pPr marL="0" indent="0">
               <a:buNone/>
             </a:pPr>
             <a:r>
               <a:rPr lang="en-US" sz="1650" b="1" dirty="0">
-                <a:solidFill>
-                  <a:srgbClr val="1E3A8A"/>
-                </a:solidFill>
                 <a:latin typeface="Cambria" pitchFamily="34" charset="0"/>
                 <a:ea typeface="Cambria" pitchFamily="34" charset="-122"/>
                 <a:cs typeface="Cambria" pitchFamily="34" charset="-120"/>
@@ -12210,14 +11900,11 @@
           <a:bodyPr wrap="square" lIns="0" tIns="0" rIns="0" bIns="0" rtlCol="0" anchor="ctr"/>
           <a:lstStyle/>
           <a:p>
-            <a:pPr algn="r" indent="0" marL="0">
+            <a:pPr marL="0" indent="0" algn="r">
               <a:buNone/>
             </a:pPr>
             <a:r>
               <a:rPr lang="en-US" sz="950" b="1" dirty="0">
-                <a:solidFill>
-                  <a:srgbClr val="2563EB"/>
-                </a:solidFill>
                 <a:latin typeface="Calibri" pitchFamily="34" charset="0"/>
                 <a:ea typeface="Calibri" pitchFamily="34" charset="-122"/>
                 <a:cs typeface="Calibri" pitchFamily="34" charset="-120"/>
@@ -12249,7 +11936,7 @@
           <a:bodyPr wrap="square" lIns="0" tIns="0" rIns="0" bIns="0" rtlCol="0" anchor="ctr"/>
           <a:lstStyle/>
           <a:p>
-            <a:pPr indent="0" marL="0">
+            <a:pPr marL="0" indent="0">
               <a:buNone/>
             </a:pPr>
             <a:r>
@@ -12288,7 +11975,7 @@
           <a:bodyPr wrap="square" lIns="0" tIns="0" rIns="0" bIns="0" rtlCol="0" anchor="ctr"/>
           <a:lstStyle/>
           <a:p>
-            <a:pPr algn="r" indent="0" marL="0">
+            <a:pPr marL="0" indent="0" algn="r">
               <a:buNone/>
             </a:pPr>
             <a:r>
@@ -12354,14 +12041,11 @@
           <a:bodyPr wrap="square" lIns="0" tIns="0" rIns="0" bIns="0" rtlCol="0" anchor="ctr"/>
           <a:lstStyle/>
           <a:p>
-            <a:pPr indent="0" marL="0">
+            <a:pPr marL="0" indent="0">
               <a:buNone/>
             </a:pPr>
             <a:r>
               <a:rPr lang="en-US" sz="900" b="1" dirty="0">
-                <a:solidFill>
-                  <a:srgbClr val="2563EB"/>
-                </a:solidFill>
                 <a:latin typeface="Calibri" pitchFamily="34" charset="0"/>
                 <a:ea typeface="Calibri" pitchFamily="34" charset="-122"/>
                 <a:cs typeface="Calibri" pitchFamily="34" charset="-120"/>
@@ -12393,14 +12077,11 @@
           <a:bodyPr wrap="square" lIns="0" tIns="0" rIns="0" bIns="0" rtlCol="0" anchor="ctr"/>
           <a:lstStyle/>
           <a:p>
-            <a:pPr indent="0" marL="0">
+            <a:pPr marL="0" indent="0">
               <a:buNone/>
             </a:pPr>
             <a:r>
               <a:rPr lang="en-US" sz="1300" b="1" dirty="0">
-                <a:solidFill>
-                  <a:srgbClr val="1E3A8A"/>
-                </a:solidFill>
                 <a:latin typeface="Cambria" pitchFamily="34" charset="0"/>
                 <a:ea typeface="Cambria" pitchFamily="34" charset="-122"/>
                 <a:cs typeface="Cambria" pitchFamily="34" charset="-120"/>
@@ -12432,14 +12113,11 @@
           <a:bodyPr wrap="square" lIns="0" tIns="0" rIns="0" bIns="0" rtlCol="0" anchor="ctr"/>
           <a:lstStyle/>
           <a:p>
-            <a:pPr indent="0" marL="0">
+            <a:pPr marL="0" indent="0">
               <a:buNone/>
             </a:pPr>
             <a:r>
               <a:rPr lang="en-US" sz="950" dirty="0">
-                <a:solidFill>
-                  <a:srgbClr val="64748B"/>
-                </a:solidFill>
                 <a:latin typeface="Calibri" pitchFamily="34" charset="0"/>
                 <a:ea typeface="Calibri" pitchFamily="34" charset="-122"/>
                 <a:cs typeface="Calibri" pitchFamily="34" charset="-120"/>
@@ -12498,14 +12176,11 @@
           <a:bodyPr wrap="square" lIns="0" tIns="0" rIns="0" bIns="0" rtlCol="0" anchor="ctr"/>
           <a:lstStyle/>
           <a:p>
-            <a:pPr indent="0" marL="0">
+            <a:pPr marL="0" indent="0">
               <a:buNone/>
             </a:pPr>
             <a:r>
               <a:rPr lang="en-US" sz="1200" b="1" dirty="0">
-                <a:solidFill>
-                  <a:srgbClr val="1E3A8A"/>
-                </a:solidFill>
                 <a:latin typeface="Cambria" pitchFamily="34" charset="0"/>
                 <a:ea typeface="Cambria" pitchFamily="34" charset="-122"/>
                 <a:cs typeface="Cambria" pitchFamily="34" charset="-120"/>
@@ -12546,9 +12221,6 @@
             </a:pPr>
             <a:r>
               <a:rPr lang="en-US" sz="950" dirty="0">
-                <a:solidFill>
-                  <a:srgbClr val="334155"/>
-                </a:solidFill>
                 <a:latin typeface="Calibri" pitchFamily="34" charset="0"/>
                 <a:ea typeface="Calibri" pitchFamily="34" charset="-122"/>
                 <a:cs typeface="Calibri" pitchFamily="34" charset="-120"/>
@@ -12567,9 +12239,6 @@
             </a:pPr>
             <a:r>
               <a:rPr lang="en-US" sz="950" dirty="0">
-                <a:solidFill>
-                  <a:srgbClr val="334155"/>
-                </a:solidFill>
                 <a:latin typeface="Calibri" pitchFamily="34" charset="0"/>
                 <a:ea typeface="Calibri" pitchFamily="34" charset="-122"/>
                 <a:cs typeface="Calibri" pitchFamily="34" charset="-120"/>
@@ -12588,9 +12257,6 @@
             </a:pPr>
             <a:r>
               <a:rPr lang="en-US" sz="950" dirty="0">
-                <a:solidFill>
-                  <a:srgbClr val="334155"/>
-                </a:solidFill>
                 <a:latin typeface="Calibri" pitchFamily="34" charset="0"/>
                 <a:ea typeface="Calibri" pitchFamily="34" charset="-122"/>
                 <a:cs typeface="Calibri" pitchFamily="34" charset="-120"/>
@@ -12649,14 +12315,11 @@
           <a:bodyPr wrap="square" lIns="0" tIns="0" rIns="0" bIns="0" rtlCol="0" anchor="ctr"/>
           <a:lstStyle/>
           <a:p>
-            <a:pPr indent="0" marL="0">
+            <a:pPr marL="0" indent="0">
               <a:buNone/>
             </a:pPr>
             <a:r>
               <a:rPr lang="en-US" sz="1200" b="1" dirty="0">
-                <a:solidFill>
-                  <a:srgbClr val="1E3A8A"/>
-                </a:solidFill>
                 <a:latin typeface="Cambria" pitchFamily="34" charset="0"/>
                 <a:ea typeface="Cambria" pitchFamily="34" charset="-122"/>
                 <a:cs typeface="Cambria" pitchFamily="34" charset="-120"/>
@@ -12697,9 +12360,6 @@
             </a:pPr>
             <a:r>
               <a:rPr lang="en-US" sz="950" dirty="0">
-                <a:solidFill>
-                  <a:srgbClr val="334155"/>
-                </a:solidFill>
                 <a:latin typeface="Calibri" pitchFamily="34" charset="0"/>
                 <a:ea typeface="Calibri" pitchFamily="34" charset="-122"/>
                 <a:cs typeface="Calibri" pitchFamily="34" charset="-120"/>
@@ -12718,9 +12378,6 @@
             </a:pPr>
             <a:r>
               <a:rPr lang="en-US" sz="950" dirty="0">
-                <a:solidFill>
-                  <a:srgbClr val="334155"/>
-                </a:solidFill>
                 <a:latin typeface="Calibri" pitchFamily="34" charset="0"/>
                 <a:ea typeface="Calibri" pitchFamily="34" charset="-122"/>
                 <a:cs typeface="Calibri" pitchFamily="34" charset="-120"/>
@@ -12739,9 +12396,6 @@
             </a:pPr>
             <a:r>
               <a:rPr lang="en-US" sz="950" dirty="0">
-                <a:solidFill>
-                  <a:srgbClr val="334155"/>
-                </a:solidFill>
                 <a:latin typeface="Calibri" pitchFamily="34" charset="0"/>
                 <a:ea typeface="Calibri" pitchFamily="34" charset="-122"/>
                 <a:cs typeface="Calibri" pitchFamily="34" charset="-120"/>
@@ -12800,14 +12454,11 @@
           <a:bodyPr wrap="square" lIns="0" tIns="0" rIns="0" bIns="0" rtlCol="0" anchor="ctr"/>
           <a:lstStyle/>
           <a:p>
-            <a:pPr indent="0" marL="0">
+            <a:pPr marL="0" indent="0">
               <a:buNone/>
             </a:pPr>
             <a:r>
               <a:rPr lang="en-US" sz="1200" b="1" dirty="0">
-                <a:solidFill>
-                  <a:srgbClr val="1E3A8A"/>
-                </a:solidFill>
                 <a:latin typeface="Cambria" pitchFamily="34" charset="0"/>
                 <a:ea typeface="Cambria" pitchFamily="34" charset="-122"/>
                 <a:cs typeface="Cambria" pitchFamily="34" charset="-120"/>
@@ -12848,9 +12499,6 @@
             </a:pPr>
             <a:r>
               <a:rPr lang="en-US" sz="950" dirty="0">
-                <a:solidFill>
-                  <a:srgbClr val="334155"/>
-                </a:solidFill>
                 <a:latin typeface="Calibri" pitchFamily="34" charset="0"/>
                 <a:ea typeface="Calibri" pitchFamily="34" charset="-122"/>
                 <a:cs typeface="Calibri" pitchFamily="34" charset="-120"/>
@@ -12869,9 +12517,6 @@
             </a:pPr>
             <a:r>
               <a:rPr lang="en-US" sz="950" dirty="0">
-                <a:solidFill>
-                  <a:srgbClr val="334155"/>
-                </a:solidFill>
                 <a:latin typeface="Calibri" pitchFamily="34" charset="0"/>
                 <a:ea typeface="Calibri" pitchFamily="34" charset="-122"/>
                 <a:cs typeface="Calibri" pitchFamily="34" charset="-120"/>
@@ -12890,9 +12535,6 @@
             </a:pPr>
             <a:r>
               <a:rPr lang="en-US" sz="950" dirty="0">
-                <a:solidFill>
-                  <a:srgbClr val="334155"/>
-                </a:solidFill>
                 <a:latin typeface="Calibri" pitchFamily="34" charset="0"/>
                 <a:ea typeface="Calibri" pitchFamily="34" charset="-122"/>
                 <a:cs typeface="Calibri" pitchFamily="34" charset="-120"/>
@@ -12919,6 +12561,7 @@
         <a:solidFill>
           <a:srgbClr val="FFFFFF"/>
         </a:solidFill>
+        <a:effectLst/>
       </p:bgPr>
     </p:bg>
     <p:spTree>
@@ -12937,14 +12580,14 @@
       </p:grpSpPr>
       <p:pic>
         <p:nvPicPr>
-          <p:cNvPr id="2" name="Image 0" descr="d:\resrtorant\presentation_assets\tcet_header.jpeg">    </p:cNvPr>
+          <p:cNvPr id="2" name="Image 0" descr="d:\resrtorant\presentation_assets\tcet_header.jpeg"/>
           <p:cNvPicPr>
             <a:picLocks noChangeAspect="1"/>
           </p:cNvPicPr>
           <p:nvPr/>
         </p:nvPicPr>
         <p:blipFill>
-          <a:blip r:embed="rId1"/>
+          <a:blip r:embed="rId3"/>
           <a:stretch>
             <a:fillRect/>
           </a:stretch>
@@ -12980,14 +12623,11 @@
           <a:bodyPr wrap="square" lIns="0" tIns="0" rIns="0" bIns="0" rtlCol="0" anchor="ctr"/>
           <a:lstStyle/>
           <a:p>
-            <a:pPr indent="0" marL="0">
+            <a:pPr marL="0" indent="0">
               <a:buNone/>
             </a:pPr>
             <a:r>
               <a:rPr lang="en-US" sz="1650" b="1" dirty="0">
-                <a:solidFill>
-                  <a:srgbClr val="1E3A8A"/>
-                </a:solidFill>
                 <a:latin typeface="Cambria" pitchFamily="34" charset="0"/>
                 <a:ea typeface="Cambria" pitchFamily="34" charset="-122"/>
                 <a:cs typeface="Cambria" pitchFamily="34" charset="-120"/>
@@ -13019,14 +12659,11 @@
           <a:bodyPr wrap="square" lIns="0" tIns="0" rIns="0" bIns="0" rtlCol="0" anchor="ctr"/>
           <a:lstStyle/>
           <a:p>
-            <a:pPr algn="r" indent="0" marL="0">
+            <a:pPr marL="0" indent="0" algn="r">
               <a:buNone/>
             </a:pPr>
             <a:r>
               <a:rPr lang="en-US" sz="950" b="1" dirty="0">
-                <a:solidFill>
-                  <a:srgbClr val="2563EB"/>
-                </a:solidFill>
                 <a:latin typeface="Calibri" pitchFamily="34" charset="0"/>
                 <a:ea typeface="Calibri" pitchFamily="34" charset="-122"/>
                 <a:cs typeface="Calibri" pitchFamily="34" charset="-120"/>
@@ -13058,7 +12695,7 @@
           <a:bodyPr wrap="square" lIns="0" tIns="0" rIns="0" bIns="0" rtlCol="0" anchor="ctr"/>
           <a:lstStyle/>
           <a:p>
-            <a:pPr indent="0" marL="0">
+            <a:pPr marL="0" indent="0">
               <a:buNone/>
             </a:pPr>
             <a:r>
@@ -13097,7 +12734,7 @@
           <a:bodyPr wrap="square" lIns="0" tIns="0" rIns="0" bIns="0" rtlCol="0" anchor="ctr"/>
           <a:lstStyle/>
           <a:p>
-            <a:pPr algn="r" indent="0" marL="0">
+            <a:pPr marL="0" indent="0" algn="r">
               <a:buNone/>
             </a:pPr>
             <a:r>
@@ -13163,14 +12800,11 @@
           <a:bodyPr wrap="square" lIns="0" tIns="0" rIns="0" bIns="0" rtlCol="0" anchor="ctr"/>
           <a:lstStyle/>
           <a:p>
-            <a:pPr indent="0" marL="0">
+            <a:pPr marL="0" indent="0">
               <a:buNone/>
             </a:pPr>
             <a:r>
               <a:rPr lang="en-US" sz="1250" b="1" dirty="0">
-                <a:solidFill>
-                  <a:srgbClr val="1E3A8A"/>
-                </a:solidFill>
                 <a:latin typeface="Cambria" pitchFamily="34" charset="0"/>
                 <a:ea typeface="Cambria" pitchFamily="34" charset="-122"/>
                 <a:cs typeface="Cambria" pitchFamily="34" charset="-120"/>
@@ -13202,14 +12836,11 @@
           <a:bodyPr wrap="square" lIns="0" tIns="0" rIns="0" bIns="0" rtlCol="0" anchor="ctr"/>
           <a:lstStyle/>
           <a:p>
-            <a:pPr indent="0" marL="0">
+            <a:pPr marL="0" indent="0">
               <a:buNone/>
             </a:pPr>
             <a:r>
               <a:rPr lang="en-US" sz="950" dirty="0">
-                <a:solidFill>
-                  <a:srgbClr val="334155"/>
-                </a:solidFill>
                 <a:latin typeface="Calibri" pitchFamily="34" charset="0"/>
                 <a:ea typeface="Calibri" pitchFamily="34" charset="-122"/>
                 <a:cs typeface="Calibri" pitchFamily="34" charset="-120"/>
@@ -13268,14 +12899,11 @@
           <a:bodyPr wrap="square" lIns="0" tIns="0" rIns="0" bIns="0" rtlCol="0" anchor="ctr"/>
           <a:lstStyle/>
           <a:p>
-            <a:pPr indent="0" marL="0">
+            <a:pPr marL="0" indent="0">
               <a:buNone/>
             </a:pPr>
             <a:r>
               <a:rPr lang="en-US" sz="1250" b="1" dirty="0">
-                <a:solidFill>
-                  <a:srgbClr val="1E3A8A"/>
-                </a:solidFill>
                 <a:latin typeface="Cambria" pitchFamily="34" charset="0"/>
                 <a:ea typeface="Cambria" pitchFamily="34" charset="-122"/>
                 <a:cs typeface="Cambria" pitchFamily="34" charset="-120"/>
@@ -13307,14 +12935,11 @@
           <a:bodyPr wrap="square" lIns="0" tIns="0" rIns="0" bIns="0" rtlCol="0" anchor="ctr"/>
           <a:lstStyle/>
           <a:p>
-            <a:pPr indent="0" marL="0">
+            <a:pPr marL="0" indent="0">
               <a:buNone/>
             </a:pPr>
             <a:r>
               <a:rPr lang="en-US" sz="950" dirty="0">
-                <a:solidFill>
-                  <a:srgbClr val="334155"/>
-                </a:solidFill>
                 <a:latin typeface="Calibri" pitchFamily="34" charset="0"/>
                 <a:ea typeface="Calibri" pitchFamily="34" charset="-122"/>
                 <a:cs typeface="Calibri" pitchFamily="34" charset="-120"/>
@@ -13373,14 +12998,11 @@
           <a:bodyPr wrap="square" lIns="0" tIns="0" rIns="0" bIns="0" rtlCol="0" anchor="ctr"/>
           <a:lstStyle/>
           <a:p>
-            <a:pPr indent="0" marL="0">
+            <a:pPr marL="0" indent="0">
               <a:buNone/>
             </a:pPr>
             <a:r>
               <a:rPr lang="en-US" sz="1250" b="1" dirty="0">
-                <a:solidFill>
-                  <a:srgbClr val="1E3A8A"/>
-                </a:solidFill>
                 <a:latin typeface="Cambria" pitchFamily="34" charset="0"/>
                 <a:ea typeface="Cambria" pitchFamily="34" charset="-122"/>
                 <a:cs typeface="Cambria" pitchFamily="34" charset="-120"/>
@@ -13412,14 +13034,11 @@
           <a:bodyPr wrap="square" lIns="0" tIns="0" rIns="0" bIns="0" rtlCol="0" anchor="ctr"/>
           <a:lstStyle/>
           <a:p>
-            <a:pPr indent="0" marL="0">
+            <a:pPr marL="0" indent="0">
               <a:buNone/>
             </a:pPr>
             <a:r>
               <a:rPr lang="en-US" sz="950" dirty="0">
-                <a:solidFill>
-                  <a:srgbClr val="334155"/>
-                </a:solidFill>
                 <a:latin typeface="Calibri" pitchFamily="34" charset="0"/>
                 <a:ea typeface="Calibri" pitchFamily="34" charset="-122"/>
                 <a:cs typeface="Calibri" pitchFamily="34" charset="-120"/>
@@ -13478,14 +13097,11 @@
           <a:bodyPr wrap="square" lIns="0" tIns="0" rIns="0" bIns="0" rtlCol="0" anchor="ctr"/>
           <a:lstStyle/>
           <a:p>
-            <a:pPr indent="0" marL="0">
+            <a:pPr marL="0" indent="0">
               <a:buNone/>
             </a:pPr>
             <a:r>
               <a:rPr lang="en-US" sz="1250" b="1" dirty="0">
-                <a:solidFill>
-                  <a:srgbClr val="1E3A8A"/>
-                </a:solidFill>
                 <a:latin typeface="Cambria" pitchFamily="34" charset="0"/>
                 <a:ea typeface="Cambria" pitchFamily="34" charset="-122"/>
                 <a:cs typeface="Cambria" pitchFamily="34" charset="-120"/>
@@ -13517,14 +13133,11 @@
           <a:bodyPr wrap="square" lIns="0" tIns="0" rIns="0" bIns="0" rtlCol="0" anchor="ctr"/>
           <a:lstStyle/>
           <a:p>
-            <a:pPr indent="0" marL="0">
+            <a:pPr marL="0" indent="0">
               <a:buNone/>
             </a:pPr>
             <a:r>
               <a:rPr lang="en-US" sz="950" dirty="0">
-                <a:solidFill>
-                  <a:srgbClr val="334155"/>
-                </a:solidFill>
                 <a:latin typeface="Calibri" pitchFamily="34" charset="0"/>
                 <a:ea typeface="Calibri" pitchFamily="34" charset="-122"/>
                 <a:cs typeface="Calibri" pitchFamily="34" charset="-120"/>
@@ -13551,6 +13164,7 @@
         <a:solidFill>
           <a:srgbClr val="FFFFFF"/>
         </a:solidFill>
+        <a:effectLst/>
       </p:bgPr>
     </p:bg>
     <p:spTree>
@@ -13569,14 +13183,14 @@
       </p:grpSpPr>
       <p:pic>
         <p:nvPicPr>
-          <p:cNvPr id="2" name="Image 0" descr="d:\resrtorant\presentation_assets\tcet_header.jpeg">    </p:cNvPr>
+          <p:cNvPr id="2" name="Image 0" descr="d:\resrtorant\presentation_assets\tcet_header.jpeg"/>
           <p:cNvPicPr>
             <a:picLocks noChangeAspect="1"/>
           </p:cNvPicPr>
           <p:nvPr/>
         </p:nvPicPr>
         <p:blipFill>
-          <a:blip r:embed="rId1"/>
+          <a:blip r:embed="rId3"/>
           <a:stretch>
             <a:fillRect/>
           </a:stretch>
@@ -13612,14 +13226,11 @@
           <a:bodyPr wrap="square" lIns="0" tIns="0" rIns="0" bIns="0" rtlCol="0" anchor="ctr"/>
           <a:lstStyle/>
           <a:p>
-            <a:pPr indent="0" marL="0">
+            <a:pPr marL="0" indent="0">
               <a:buNone/>
             </a:pPr>
             <a:r>
               <a:rPr lang="en-US" sz="1650" b="1" dirty="0">
-                <a:solidFill>
-                  <a:srgbClr val="1E3A8A"/>
-                </a:solidFill>
                 <a:latin typeface="Cambria" pitchFamily="34" charset="0"/>
                 <a:ea typeface="Cambria" pitchFamily="34" charset="-122"/>
                 <a:cs typeface="Cambria" pitchFamily="34" charset="-120"/>
@@ -13651,7 +13262,7 @@
           <a:bodyPr wrap="square" lIns="0" tIns="0" rIns="0" bIns="0" rtlCol="0" anchor="ctr"/>
           <a:lstStyle/>
           <a:p>
-            <a:pPr algn="r" indent="0" marL="0">
+            <a:pPr marL="0" indent="0" algn="r">
               <a:buNone/>
             </a:pPr>
             <a:r>
@@ -13690,7 +13301,7 @@
           <a:bodyPr wrap="square" lIns="0" tIns="0" rIns="0" bIns="0" rtlCol="0" anchor="ctr"/>
           <a:lstStyle/>
           <a:p>
-            <a:pPr indent="0" marL="0">
+            <a:pPr marL="0" indent="0">
               <a:buNone/>
             </a:pPr>
             <a:r>
@@ -13729,7 +13340,7 @@
           <a:bodyPr wrap="square" lIns="0" tIns="0" rIns="0" bIns="0" rtlCol="0" anchor="ctr"/>
           <a:lstStyle/>
           <a:p>
-            <a:pPr algn="r" indent="0" marL="0">
+            <a:pPr marL="0" indent="0" algn="r">
               <a:buNone/>
             </a:pPr>
             <a:r>
@@ -13795,14 +13406,11 @@
           <a:bodyPr wrap="square" lIns="0" tIns="0" rIns="0" bIns="0" rtlCol="0" anchor="ctr"/>
           <a:lstStyle/>
           <a:p>
-            <a:pPr indent="0" marL="0">
+            <a:pPr marL="0" indent="0">
               <a:buNone/>
             </a:pPr>
             <a:r>
               <a:rPr lang="en-US" sz="1300" b="1" dirty="0">
-                <a:solidFill>
-                  <a:srgbClr val="1E3A8A"/>
-                </a:solidFill>
                 <a:latin typeface="Cambria" pitchFamily="34" charset="0"/>
                 <a:ea typeface="Cambria" pitchFamily="34" charset="-122"/>
                 <a:cs typeface="Cambria" pitchFamily="34" charset="-120"/>
@@ -13834,14 +13442,11 @@
           <a:bodyPr wrap="square" lIns="0" tIns="0" rIns="0" bIns="0" rtlCol="0" anchor="ctr"/>
           <a:lstStyle/>
           <a:p>
-            <a:pPr indent="0" marL="0">
+            <a:pPr marL="0" indent="0">
               <a:buNone/>
             </a:pPr>
             <a:r>
               <a:rPr lang="en-US" sz="950" dirty="0">
-                <a:solidFill>
-                  <a:srgbClr val="334155"/>
-                </a:solidFill>
                 <a:latin typeface="Calibri" pitchFamily="34" charset="0"/>
                 <a:ea typeface="Calibri" pitchFamily="34" charset="-122"/>
                 <a:cs typeface="Calibri" pitchFamily="34" charset="-120"/>
@@ -13900,14 +13505,11 @@
           <a:bodyPr wrap="square" lIns="0" tIns="0" rIns="0" bIns="0" rtlCol="0" anchor="ctr"/>
           <a:lstStyle/>
           <a:p>
-            <a:pPr indent="0" marL="0">
+            <a:pPr marL="0" indent="0">
               <a:buNone/>
             </a:pPr>
             <a:r>
               <a:rPr lang="en-US" sz="1300" b="1" dirty="0">
-                <a:solidFill>
-                  <a:srgbClr val="1E3A8A"/>
-                </a:solidFill>
                 <a:latin typeface="Cambria" pitchFamily="34" charset="0"/>
                 <a:ea typeface="Cambria" pitchFamily="34" charset="-122"/>
                 <a:cs typeface="Cambria" pitchFamily="34" charset="-120"/>
@@ -13939,14 +13541,11 @@
           <a:bodyPr wrap="square" lIns="0" tIns="0" rIns="0" bIns="0" rtlCol="0" anchor="ctr"/>
           <a:lstStyle/>
           <a:p>
-            <a:pPr indent="0" marL="0">
+            <a:pPr marL="0" indent="0">
               <a:buNone/>
             </a:pPr>
             <a:r>
               <a:rPr lang="en-US" sz="950" dirty="0">
-                <a:solidFill>
-                  <a:srgbClr val="334155"/>
-                </a:solidFill>
                 <a:latin typeface="Calibri" pitchFamily="34" charset="0"/>
                 <a:ea typeface="Calibri" pitchFamily="34" charset="-122"/>
                 <a:cs typeface="Calibri" pitchFamily="34" charset="-120"/>
@@ -14005,14 +13604,11 @@
           <a:bodyPr wrap="square" lIns="0" tIns="0" rIns="0" bIns="0" rtlCol="0" anchor="ctr"/>
           <a:lstStyle/>
           <a:p>
-            <a:pPr indent="0" marL="0">
+            <a:pPr marL="0" indent="0">
               <a:buNone/>
             </a:pPr>
             <a:r>
               <a:rPr lang="en-US" sz="1300" b="1" dirty="0">
-                <a:solidFill>
-                  <a:srgbClr val="1E3A8A"/>
-                </a:solidFill>
                 <a:latin typeface="Cambria" pitchFamily="34" charset="0"/>
                 <a:ea typeface="Cambria" pitchFamily="34" charset="-122"/>
                 <a:cs typeface="Cambria" pitchFamily="34" charset="-120"/>
@@ -14044,14 +13640,11 @@
           <a:bodyPr wrap="square" lIns="0" tIns="0" rIns="0" bIns="0" rtlCol="0" anchor="ctr"/>
           <a:lstStyle/>
           <a:p>
-            <a:pPr indent="0" marL="0">
+            <a:pPr marL="0" indent="0">
               <a:buNone/>
             </a:pPr>
             <a:r>
               <a:rPr lang="en-US" sz="950" dirty="0">
-                <a:solidFill>
-                  <a:srgbClr val="334155"/>
-                </a:solidFill>
                 <a:latin typeface="Calibri" pitchFamily="34" charset="0"/>
                 <a:ea typeface="Calibri" pitchFamily="34" charset="-122"/>
                 <a:cs typeface="Calibri" pitchFamily="34" charset="-120"/>
@@ -14110,14 +13703,11 @@
           <a:bodyPr wrap="square" lIns="0" tIns="0" rIns="0" bIns="0" rtlCol="0" anchor="ctr"/>
           <a:lstStyle/>
           <a:p>
-            <a:pPr indent="0" marL="0">
+            <a:pPr marL="0" indent="0">
               <a:buNone/>
             </a:pPr>
             <a:r>
               <a:rPr lang="en-US" sz="1300" b="1" dirty="0">
-                <a:solidFill>
-                  <a:srgbClr val="1E3A8A"/>
-                </a:solidFill>
                 <a:latin typeface="Cambria" pitchFamily="34" charset="0"/>
                 <a:ea typeface="Cambria" pitchFamily="34" charset="-122"/>
                 <a:cs typeface="Cambria" pitchFamily="34" charset="-120"/>
@@ -14149,14 +13739,11 @@
           <a:bodyPr wrap="square" lIns="0" tIns="0" rIns="0" bIns="0" rtlCol="0" anchor="ctr"/>
           <a:lstStyle/>
           <a:p>
-            <a:pPr indent="0" marL="0">
+            <a:pPr marL="0" indent="0">
               <a:buNone/>
             </a:pPr>
             <a:r>
               <a:rPr lang="en-US" sz="950" dirty="0">
-                <a:solidFill>
-                  <a:srgbClr val="334155"/>
-                </a:solidFill>
                 <a:latin typeface="Calibri" pitchFamily="34" charset="0"/>
                 <a:ea typeface="Calibri" pitchFamily="34" charset="-122"/>
                 <a:cs typeface="Calibri" pitchFamily="34" charset="-120"/>
@@ -14183,6 +13770,7 @@
         <a:solidFill>
           <a:srgbClr val="FFFFFF"/>
         </a:solidFill>
+        <a:effectLst/>
       </p:bgPr>
     </p:bg>
     <p:spTree>
@@ -14201,14 +13789,14 @@
       </p:grpSpPr>
       <p:pic>
         <p:nvPicPr>
-          <p:cNvPr id="2" name="Image 0" descr="d:\resrtorant\presentation_assets\tcet_header.jpeg">    </p:cNvPr>
+          <p:cNvPr id="2" name="Image 0" descr="d:\resrtorant\presentation_assets\tcet_header.jpeg"/>
           <p:cNvPicPr>
             <a:picLocks noChangeAspect="1"/>
           </p:cNvPicPr>
           <p:nvPr/>
         </p:nvPicPr>
         <p:blipFill>
-          <a:blip r:embed="rId1"/>
+          <a:blip r:embed="rId3"/>
           <a:stretch>
             <a:fillRect/>
           </a:stretch>
@@ -14244,14 +13832,11 @@
           <a:bodyPr wrap="square" lIns="0" tIns="0" rIns="0" bIns="0" rtlCol="0" anchor="ctr"/>
           <a:lstStyle/>
           <a:p>
-            <a:pPr indent="0" marL="0">
+            <a:pPr marL="0" indent="0">
               <a:buNone/>
             </a:pPr>
             <a:r>
               <a:rPr lang="en-US" sz="1650" b="1" dirty="0">
-                <a:solidFill>
-                  <a:srgbClr val="1E3A8A"/>
-                </a:solidFill>
                 <a:latin typeface="Cambria" pitchFamily="34" charset="0"/>
                 <a:ea typeface="Cambria" pitchFamily="34" charset="-122"/>
                 <a:cs typeface="Cambria" pitchFamily="34" charset="-120"/>
@@ -14283,14 +13868,11 @@
           <a:bodyPr wrap="square" lIns="0" tIns="0" rIns="0" bIns="0" rtlCol="0" anchor="ctr"/>
           <a:lstStyle/>
           <a:p>
-            <a:pPr algn="r" indent="0" marL="0">
+            <a:pPr marL="0" indent="0" algn="r">
               <a:buNone/>
             </a:pPr>
             <a:r>
               <a:rPr lang="en-US" sz="950" b="1" dirty="0">
-                <a:solidFill>
-                  <a:srgbClr val="2563EB"/>
-                </a:solidFill>
                 <a:latin typeface="Calibri" pitchFamily="34" charset="0"/>
                 <a:ea typeface="Calibri" pitchFamily="34" charset="-122"/>
                 <a:cs typeface="Calibri" pitchFamily="34" charset="-120"/>
@@ -14322,7 +13904,7 @@
           <a:bodyPr wrap="square" lIns="0" tIns="0" rIns="0" bIns="0" rtlCol="0" anchor="ctr"/>
           <a:lstStyle/>
           <a:p>
-            <a:pPr indent="0" marL="0">
+            <a:pPr marL="0" indent="0">
               <a:buNone/>
             </a:pPr>
             <a:r>
@@ -14361,7 +13943,7 @@
           <a:bodyPr wrap="square" lIns="0" tIns="0" rIns="0" bIns="0" rtlCol="0" anchor="ctr"/>
           <a:lstStyle/>
           <a:p>
-            <a:pPr algn="r" indent="0" marL="0">
+            <a:pPr marL="0" indent="0" algn="r">
               <a:buNone/>
             </a:pPr>
             <a:r>
@@ -14427,14 +14009,11 @@
           <a:bodyPr wrap="square" lIns="0" tIns="0" rIns="0" bIns="0" rtlCol="0" anchor="ctr"/>
           <a:lstStyle/>
           <a:p>
-            <a:pPr indent="0" marL="0">
+            <a:pPr marL="0" indent="0">
               <a:buNone/>
             </a:pPr>
             <a:r>
               <a:rPr lang="en-US" sz="1200" b="1" dirty="0">
-                <a:solidFill>
-                  <a:srgbClr val="1E3A8A"/>
-                </a:solidFill>
                 <a:latin typeface="Cambria" pitchFamily="34" charset="0"/>
                 <a:ea typeface="Cambria" pitchFamily="34" charset="-122"/>
                 <a:cs typeface="Cambria" pitchFamily="34" charset="-120"/>
@@ -14466,7 +14045,7 @@
           <a:bodyPr wrap="square" lIns="0" tIns="0" rIns="0" bIns="0" rtlCol="0" anchor="ctr"/>
           <a:lstStyle/>
           <a:p>
-            <a:pPr indent="0" marL="0">
+            <a:pPr marL="0" indent="0">
               <a:spcAft>
                 <a:spcPts val="700"/>
               </a:spcAft>
@@ -14474,9 +14053,6 @@
             </a:pPr>
             <a:r>
               <a:rPr lang="en-US" sz="950" dirty="0">
-                <a:solidFill>
-                  <a:srgbClr val="334155"/>
-                </a:solidFill>
                 <a:latin typeface="Calibri" pitchFamily="34" charset="0"/>
                 <a:ea typeface="Calibri" pitchFamily="34" charset="-122"/>
                 <a:cs typeface="Calibri" pitchFamily="34" charset="-120"/>
@@ -14486,7 +14062,7 @@
             <a:endParaRPr lang="en-US" sz="950" dirty="0"/>
           </a:p>
           <a:p>
-            <a:pPr indent="0" marL="0">
+            <a:pPr marL="0" indent="0">
               <a:spcAft>
                 <a:spcPts val="700"/>
               </a:spcAft>
@@ -14494,9 +14070,6 @@
             </a:pPr>
             <a:r>
               <a:rPr lang="en-US" sz="950" dirty="0">
-                <a:solidFill>
-                  <a:srgbClr val="334155"/>
-                </a:solidFill>
                 <a:latin typeface="Calibri" pitchFamily="34" charset="0"/>
                 <a:ea typeface="Calibri" pitchFamily="34" charset="-122"/>
                 <a:cs typeface="Calibri" pitchFamily="34" charset="-120"/>
@@ -14506,7 +14079,7 @@
             <a:endParaRPr lang="en-US" sz="950" dirty="0"/>
           </a:p>
           <a:p>
-            <a:pPr indent="0" marL="0">
+            <a:pPr marL="0" indent="0">
               <a:spcAft>
                 <a:spcPts val="700"/>
               </a:spcAft>
@@ -14514,9 +14087,6 @@
             </a:pPr>
             <a:r>
               <a:rPr lang="en-US" sz="950" dirty="0">
-                <a:solidFill>
-                  <a:srgbClr val="334155"/>
-                </a:solidFill>
                 <a:latin typeface="Calibri" pitchFamily="34" charset="0"/>
                 <a:ea typeface="Calibri" pitchFamily="34" charset="-122"/>
                 <a:cs typeface="Calibri" pitchFamily="34" charset="-120"/>
@@ -14526,7 +14096,7 @@
             <a:endParaRPr lang="en-US" sz="950" dirty="0"/>
           </a:p>
           <a:p>
-            <a:pPr indent="0" marL="0">
+            <a:pPr marL="0" indent="0">
               <a:spcAft>
                 <a:spcPts val="700"/>
               </a:spcAft>
@@ -14534,9 +14104,6 @@
             </a:pPr>
             <a:r>
               <a:rPr lang="en-US" sz="950" dirty="0">
-                <a:solidFill>
-                  <a:srgbClr val="334155"/>
-                </a:solidFill>
                 <a:latin typeface="Calibri" pitchFamily="34" charset="0"/>
                 <a:ea typeface="Calibri" pitchFamily="34" charset="-122"/>
                 <a:cs typeface="Calibri" pitchFamily="34" charset="-120"/>
@@ -14546,7 +14113,7 @@
             <a:endParaRPr lang="en-US" sz="950" dirty="0"/>
           </a:p>
           <a:p>
-            <a:pPr indent="0" marL="0">
+            <a:pPr marL="0" indent="0">
               <a:spcAft>
                 <a:spcPts val="700"/>
               </a:spcAft>
@@ -14554,9 +14121,6 @@
             </a:pPr>
             <a:r>
               <a:rPr lang="en-US" sz="950" dirty="0">
-                <a:solidFill>
-                  <a:srgbClr val="334155"/>
-                </a:solidFill>
                 <a:latin typeface="Calibri" pitchFamily="34" charset="0"/>
                 <a:ea typeface="Calibri" pitchFamily="34" charset="-122"/>
                 <a:cs typeface="Calibri" pitchFamily="34" charset="-120"/>
@@ -14566,7 +14130,7 @@
             <a:endParaRPr lang="en-US" sz="950" dirty="0"/>
           </a:p>
           <a:p>
-            <a:pPr indent="0" marL="0">
+            <a:pPr marL="0" indent="0">
               <a:spcAft>
                 <a:spcPts val="700"/>
               </a:spcAft>
@@ -14574,9 +14138,6 @@
             </a:pPr>
             <a:r>
               <a:rPr lang="en-US" sz="950" dirty="0">
-                <a:solidFill>
-                  <a:srgbClr val="334155"/>
-                </a:solidFill>
                 <a:latin typeface="Calibri" pitchFamily="34" charset="0"/>
                 <a:ea typeface="Calibri" pitchFamily="34" charset="-122"/>
                 <a:cs typeface="Calibri" pitchFamily="34" charset="-120"/>
@@ -14635,14 +14196,11 @@
           <a:bodyPr wrap="square" lIns="0" tIns="0" rIns="0" bIns="0" rtlCol="0" anchor="ctr"/>
           <a:lstStyle/>
           <a:p>
-            <a:pPr indent="0" marL="0">
+            <a:pPr marL="0" indent="0">
               <a:buNone/>
             </a:pPr>
             <a:r>
               <a:rPr lang="en-US" sz="1800" b="1" dirty="0">
-                <a:solidFill>
-                  <a:srgbClr val="DC2626"/>
-                </a:solidFill>
                 <a:latin typeface="Cambria" pitchFamily="34" charset="0"/>
                 <a:ea typeface="Cambria" pitchFamily="34" charset="-122"/>
                 <a:cs typeface="Cambria" pitchFamily="34" charset="-120"/>
@@ -14674,14 +14232,11 @@
           <a:bodyPr wrap="square" lIns="0" tIns="0" rIns="0" bIns="0" rtlCol="0" anchor="ctr"/>
           <a:lstStyle/>
           <a:p>
-            <a:pPr indent="0" marL="0">
+            <a:pPr marL="0" indent="0">
               <a:buNone/>
             </a:pPr>
             <a:r>
               <a:rPr lang="en-US" sz="950" b="1" dirty="0">
-                <a:solidFill>
-                  <a:srgbClr val="0F172A"/>
-                </a:solidFill>
                 <a:latin typeface="Calibri" pitchFamily="34" charset="0"/>
                 <a:ea typeface="Calibri" pitchFamily="34" charset="-122"/>
                 <a:cs typeface="Calibri" pitchFamily="34" charset="-120"/>
@@ -14713,14 +14268,11 @@
           <a:bodyPr wrap="square" lIns="0" tIns="0" rIns="0" bIns="0" rtlCol="0" anchor="ctr"/>
           <a:lstStyle/>
           <a:p>
-            <a:pPr indent="0" marL="0">
+            <a:pPr marL="0" indent="0">
               <a:buNone/>
             </a:pPr>
             <a:r>
               <a:rPr lang="en-US" sz="850" dirty="0">
-                <a:solidFill>
-                  <a:srgbClr val="64748B"/>
-                </a:solidFill>
                 <a:latin typeface="Calibri" pitchFamily="34" charset="0"/>
                 <a:ea typeface="Calibri" pitchFamily="34" charset="-122"/>
                 <a:cs typeface="Calibri" pitchFamily="34" charset="-120"/>
@@ -14779,14 +14331,11 @@
           <a:bodyPr wrap="square" lIns="0" tIns="0" rIns="0" bIns="0" rtlCol="0" anchor="ctr"/>
           <a:lstStyle/>
           <a:p>
-            <a:pPr indent="0" marL="0">
+            <a:pPr marL="0" indent="0">
               <a:buNone/>
             </a:pPr>
             <a:r>
               <a:rPr lang="en-US" sz="1800" b="1" dirty="0">
-                <a:solidFill>
-                  <a:srgbClr val="2563EB"/>
-                </a:solidFill>
                 <a:latin typeface="Cambria" pitchFamily="34" charset="0"/>
                 <a:ea typeface="Cambria" pitchFamily="34" charset="-122"/>
                 <a:cs typeface="Cambria" pitchFamily="34" charset="-120"/>
@@ -14818,14 +14367,11 @@
           <a:bodyPr wrap="square" lIns="0" tIns="0" rIns="0" bIns="0" rtlCol="0" anchor="ctr"/>
           <a:lstStyle/>
           <a:p>
-            <a:pPr indent="0" marL="0">
+            <a:pPr marL="0" indent="0">
               <a:buNone/>
             </a:pPr>
             <a:r>
               <a:rPr lang="en-US" sz="950" b="1" dirty="0">
-                <a:solidFill>
-                  <a:srgbClr val="0F172A"/>
-                </a:solidFill>
                 <a:latin typeface="Calibri" pitchFamily="34" charset="0"/>
                 <a:ea typeface="Calibri" pitchFamily="34" charset="-122"/>
                 <a:cs typeface="Calibri" pitchFamily="34" charset="-120"/>
@@ -14857,14 +14403,11 @@
           <a:bodyPr wrap="square" lIns="0" tIns="0" rIns="0" bIns="0" rtlCol="0" anchor="ctr"/>
           <a:lstStyle/>
           <a:p>
-            <a:pPr indent="0" marL="0">
+            <a:pPr marL="0" indent="0">
               <a:buNone/>
             </a:pPr>
             <a:r>
               <a:rPr lang="en-US" sz="850" dirty="0">
-                <a:solidFill>
-                  <a:srgbClr val="64748B"/>
-                </a:solidFill>
                 <a:latin typeface="Calibri" pitchFamily="34" charset="0"/>
                 <a:ea typeface="Calibri" pitchFamily="34" charset="-122"/>
                 <a:cs typeface="Calibri" pitchFamily="34" charset="-120"/>
@@ -14923,14 +14466,11 @@
           <a:bodyPr wrap="square" lIns="0" tIns="0" rIns="0" bIns="0" rtlCol="0" anchor="ctr"/>
           <a:lstStyle/>
           <a:p>
-            <a:pPr indent="0" marL="0">
+            <a:pPr marL="0" indent="0">
               <a:buNone/>
             </a:pPr>
             <a:r>
               <a:rPr lang="en-US" sz="1800" b="1" dirty="0">
-                <a:solidFill>
-                  <a:srgbClr val="059669"/>
-                </a:solidFill>
                 <a:latin typeface="Cambria" pitchFamily="34" charset="0"/>
                 <a:ea typeface="Cambria" pitchFamily="34" charset="-122"/>
                 <a:cs typeface="Cambria" pitchFamily="34" charset="-120"/>
@@ -14962,14 +14502,11 @@
           <a:bodyPr wrap="square" lIns="0" tIns="0" rIns="0" bIns="0" rtlCol="0" anchor="ctr"/>
           <a:lstStyle/>
           <a:p>
-            <a:pPr indent="0" marL="0">
+            <a:pPr marL="0" indent="0">
               <a:buNone/>
             </a:pPr>
             <a:r>
               <a:rPr lang="en-US" sz="950" b="1" dirty="0">
-                <a:solidFill>
-                  <a:srgbClr val="0F172A"/>
-                </a:solidFill>
                 <a:latin typeface="Calibri" pitchFamily="34" charset="0"/>
                 <a:ea typeface="Calibri" pitchFamily="34" charset="-122"/>
                 <a:cs typeface="Calibri" pitchFamily="34" charset="-120"/>
@@ -15001,14 +14538,11 @@
           <a:bodyPr wrap="square" lIns="0" tIns="0" rIns="0" bIns="0" rtlCol="0" anchor="ctr"/>
           <a:lstStyle/>
           <a:p>
-            <a:pPr indent="0" marL="0">
+            <a:pPr marL="0" indent="0">
               <a:buNone/>
             </a:pPr>
             <a:r>
               <a:rPr lang="en-US" sz="850" dirty="0">
-                <a:solidFill>
-                  <a:srgbClr val="64748B"/>
-                </a:solidFill>
                 <a:latin typeface="Calibri" pitchFamily="34" charset="0"/>
                 <a:ea typeface="Calibri" pitchFamily="34" charset="-122"/>
                 <a:cs typeface="Calibri" pitchFamily="34" charset="-120"/>
@@ -15035,6 +14569,7 @@
         <a:solidFill>
           <a:srgbClr val="FFFFFF"/>
         </a:solidFill>
+        <a:effectLst/>
       </p:bgPr>
     </p:bg>
     <p:spTree>
@@ -15053,14 +14588,14 @@
       </p:grpSpPr>
       <p:pic>
         <p:nvPicPr>
-          <p:cNvPr id="2" name="Image 0" descr="d:\resrtorant\presentation_assets\tcet_header.jpeg">    </p:cNvPr>
+          <p:cNvPr id="2" name="Image 0" descr="d:\resrtorant\presentation_assets\tcet_header.jpeg"/>
           <p:cNvPicPr>
             <a:picLocks noChangeAspect="1"/>
           </p:cNvPicPr>
           <p:nvPr/>
         </p:nvPicPr>
         <p:blipFill>
-          <a:blip r:embed="rId1"/>
+          <a:blip r:embed="rId3"/>
           <a:stretch>
             <a:fillRect/>
           </a:stretch>
@@ -15096,14 +14631,11 @@
           <a:bodyPr wrap="square" lIns="0" tIns="0" rIns="0" bIns="0" rtlCol="0" anchor="ctr"/>
           <a:lstStyle/>
           <a:p>
-            <a:pPr indent="0" marL="0">
+            <a:pPr marL="0" indent="0">
               <a:buNone/>
             </a:pPr>
             <a:r>
               <a:rPr lang="en-US" sz="1650" b="1" dirty="0">
-                <a:solidFill>
-                  <a:srgbClr val="1E3A8A"/>
-                </a:solidFill>
                 <a:latin typeface="Cambria" pitchFamily="34" charset="0"/>
                 <a:ea typeface="Cambria" pitchFamily="34" charset="-122"/>
                 <a:cs typeface="Cambria" pitchFamily="34" charset="-120"/>
@@ -15135,7 +14667,7 @@
           <a:bodyPr wrap="square" lIns="0" tIns="0" rIns="0" bIns="0" rtlCol="0" anchor="ctr"/>
           <a:lstStyle/>
           <a:p>
-            <a:pPr algn="r" indent="0" marL="0">
+            <a:pPr marL="0" indent="0" algn="r">
               <a:buNone/>
             </a:pPr>
             <a:r>
@@ -15174,7 +14706,7 @@
           <a:bodyPr wrap="square" lIns="0" tIns="0" rIns="0" bIns="0" rtlCol="0" anchor="ctr"/>
           <a:lstStyle/>
           <a:p>
-            <a:pPr indent="0" marL="0">
+            <a:pPr marL="0" indent="0">
               <a:buNone/>
             </a:pPr>
             <a:r>
@@ -15213,7 +14745,7 @@
           <a:bodyPr wrap="square" lIns="0" tIns="0" rIns="0" bIns="0" rtlCol="0" anchor="ctr"/>
           <a:lstStyle/>
           <a:p>
-            <a:pPr algn="r" indent="0" marL="0">
+            <a:pPr marL="0" indent="0" algn="r">
               <a:buNone/>
             </a:pPr>
             <a:r>
@@ -15279,7 +14811,7 @@
           <a:bodyPr wrap="square" lIns="0" tIns="0" rIns="0" bIns="0" rtlCol="0" anchor="ctr"/>
           <a:lstStyle/>
           <a:p>
-            <a:pPr indent="0" marL="0">
+            <a:pPr marL="0" indent="0">
               <a:spcAft>
                 <a:spcPts val="800"/>
               </a:spcAft>
@@ -15299,7 +14831,7 @@
             <a:endParaRPr lang="en-US" sz="950" dirty="0"/>
           </a:p>
           <a:p>
-            <a:pPr indent="0" marL="0">
+            <a:pPr marL="0" indent="0">
               <a:spcAft>
                 <a:spcPts val="800"/>
               </a:spcAft>
@@ -15319,7 +14851,7 @@
             <a:endParaRPr lang="en-US" sz="950" dirty="0"/>
           </a:p>
           <a:p>
-            <a:pPr indent="0" marL="0">
+            <a:pPr marL="0" indent="0">
               <a:spcAft>
                 <a:spcPts val="800"/>
               </a:spcAft>
@@ -15339,7 +14871,7 @@
             <a:endParaRPr lang="en-US" sz="950" dirty="0"/>
           </a:p>
           <a:p>
-            <a:pPr indent="0" marL="0">
+            <a:pPr marL="0" indent="0">
               <a:spcAft>
                 <a:spcPts val="800"/>
               </a:spcAft>
@@ -15359,7 +14891,7 @@
             <a:endParaRPr lang="en-US" sz="950" dirty="0"/>
           </a:p>
           <a:p>
-            <a:pPr indent="0" marL="0">
+            <a:pPr marL="0" indent="0">
               <a:spcAft>
                 <a:spcPts val="800"/>
               </a:spcAft>
@@ -15379,7 +14911,7 @@
             <a:endParaRPr lang="en-US" sz="950" dirty="0"/>
           </a:p>
           <a:p>
-            <a:pPr indent="0" marL="0">
+            <a:pPr marL="0" indent="0">
               <a:spcAft>
                 <a:spcPts val="800"/>
               </a:spcAft>
@@ -15416,6 +14948,7 @@
         <a:solidFill>
           <a:srgbClr val="FFFFFF"/>
         </a:solidFill>
+        <a:effectLst/>
       </p:bgPr>
     </p:bg>
     <p:spTree>
@@ -15434,14 +14967,14 @@
       </p:grpSpPr>
       <p:pic>
         <p:nvPicPr>
-          <p:cNvPr id="2" name="Image 0" descr="d:\resrtorant\presentation_assets\tcet_header.jpeg">    </p:cNvPr>
+          <p:cNvPr id="2" name="Image 0" descr="d:\resrtorant\presentation_assets\tcet_header.jpeg"/>
           <p:cNvPicPr>
             <a:picLocks noChangeAspect="1"/>
           </p:cNvPicPr>
           <p:nvPr/>
         </p:nvPicPr>
         <p:blipFill>
-          <a:blip r:embed="rId1"/>
+          <a:blip r:embed="rId3"/>
           <a:stretch>
             <a:fillRect/>
           </a:stretch>
@@ -15477,14 +15010,11 @@
           <a:bodyPr wrap="square" lIns="0" tIns="0" rIns="0" bIns="0" rtlCol="0" anchor="ctr"/>
           <a:lstStyle/>
           <a:p>
-            <a:pPr indent="0" marL="0">
+            <a:pPr marL="0" indent="0">
               <a:buNone/>
             </a:pPr>
             <a:r>
               <a:rPr lang="en-US" sz="1650" b="1" dirty="0">
-                <a:solidFill>
-                  <a:srgbClr val="1E3A8A"/>
-                </a:solidFill>
                 <a:latin typeface="Cambria" pitchFamily="34" charset="0"/>
                 <a:ea typeface="Cambria" pitchFamily="34" charset="-122"/>
                 <a:cs typeface="Cambria" pitchFamily="34" charset="-120"/>
@@ -15516,14 +15046,11 @@
           <a:bodyPr wrap="square" lIns="0" tIns="0" rIns="0" bIns="0" rtlCol="0" anchor="ctr"/>
           <a:lstStyle/>
           <a:p>
-            <a:pPr algn="r" indent="0" marL="0">
+            <a:pPr marL="0" indent="0" algn="r">
               <a:buNone/>
             </a:pPr>
             <a:r>
               <a:rPr lang="en-US" sz="950" b="1" dirty="0">
-                <a:solidFill>
-                  <a:srgbClr val="2563EB"/>
-                </a:solidFill>
                 <a:latin typeface="Calibri" pitchFamily="34" charset="0"/>
                 <a:ea typeface="Calibri" pitchFamily="34" charset="-122"/>
                 <a:cs typeface="Calibri" pitchFamily="34" charset="-120"/>
@@ -15555,7 +15082,7 @@
           <a:bodyPr wrap="square" lIns="0" tIns="0" rIns="0" bIns="0" rtlCol="0" anchor="ctr"/>
           <a:lstStyle/>
           <a:p>
-            <a:pPr indent="0" marL="0">
+            <a:pPr marL="0" indent="0">
               <a:buNone/>
             </a:pPr>
             <a:r>
@@ -15594,7 +15121,7 @@
           <a:bodyPr wrap="square" lIns="0" tIns="0" rIns="0" bIns="0" rtlCol="0" anchor="ctr"/>
           <a:lstStyle/>
           <a:p>
-            <a:pPr algn="r" indent="0" marL="0">
+            <a:pPr marL="0" indent="0" algn="r">
               <a:buNone/>
             </a:pPr>
             <a:r>
@@ -15660,14 +15187,11 @@
           <a:bodyPr wrap="square" lIns="0" tIns="0" rIns="0" bIns="0" rtlCol="0" anchor="ctr"/>
           <a:lstStyle/>
           <a:p>
-            <a:pPr indent="0" marL="0">
+            <a:pPr marL="0" indent="0">
               <a:buNone/>
             </a:pPr>
             <a:r>
               <a:rPr lang="en-US" sz="1300" b="1" dirty="0">
-                <a:solidFill>
-                  <a:srgbClr val="1E3A8A"/>
-                </a:solidFill>
                 <a:latin typeface="Cambria" pitchFamily="34" charset="0"/>
                 <a:ea typeface="Cambria" pitchFamily="34" charset="-122"/>
                 <a:cs typeface="Cambria" pitchFamily="34" charset="-120"/>
@@ -15708,9 +15232,6 @@
             </a:pPr>
             <a:r>
               <a:rPr lang="en-US" sz="950" dirty="0">
-                <a:solidFill>
-                  <a:srgbClr val="334155"/>
-                </a:solidFill>
                 <a:latin typeface="Calibri" pitchFamily="34" charset="0"/>
                 <a:ea typeface="Calibri" pitchFamily="34" charset="-122"/>
                 <a:cs typeface="Calibri" pitchFamily="34" charset="-120"/>
@@ -15729,9 +15250,6 @@
             </a:pPr>
             <a:r>
               <a:rPr lang="en-US" sz="950" dirty="0">
-                <a:solidFill>
-                  <a:srgbClr val="334155"/>
-                </a:solidFill>
                 <a:latin typeface="Calibri" pitchFamily="34" charset="0"/>
                 <a:ea typeface="Calibri" pitchFamily="34" charset="-122"/>
                 <a:cs typeface="Calibri" pitchFamily="34" charset="-120"/>
@@ -15750,9 +15268,6 @@
             </a:pPr>
             <a:r>
               <a:rPr lang="en-US" sz="950" dirty="0">
-                <a:solidFill>
-                  <a:srgbClr val="334155"/>
-                </a:solidFill>
                 <a:latin typeface="Calibri" pitchFamily="34" charset="0"/>
                 <a:ea typeface="Calibri" pitchFamily="34" charset="-122"/>
                 <a:cs typeface="Calibri" pitchFamily="34" charset="-120"/>
@@ -15811,14 +15326,11 @@
           <a:bodyPr wrap="square" lIns="0" tIns="0" rIns="0" bIns="0" rtlCol="0" anchor="ctr"/>
           <a:lstStyle/>
           <a:p>
-            <a:pPr indent="0" marL="0">
+            <a:pPr marL="0" indent="0">
               <a:buNone/>
             </a:pPr>
             <a:r>
               <a:rPr lang="en-US" sz="1300" b="1" dirty="0">
-                <a:solidFill>
-                  <a:srgbClr val="1E3A8A"/>
-                </a:solidFill>
                 <a:latin typeface="Cambria" pitchFamily="34" charset="0"/>
                 <a:ea typeface="Cambria" pitchFamily="34" charset="-122"/>
                 <a:cs typeface="Cambria" pitchFamily="34" charset="-120"/>
@@ -15859,9 +15371,6 @@
             </a:pPr>
             <a:r>
               <a:rPr lang="en-US" sz="950" dirty="0">
-                <a:solidFill>
-                  <a:srgbClr val="334155"/>
-                </a:solidFill>
                 <a:latin typeface="Calibri" pitchFamily="34" charset="0"/>
                 <a:ea typeface="Calibri" pitchFamily="34" charset="-122"/>
                 <a:cs typeface="Calibri" pitchFamily="34" charset="-120"/>
@@ -15880,9 +15389,6 @@
             </a:pPr>
             <a:r>
               <a:rPr lang="en-US" sz="950" dirty="0">
-                <a:solidFill>
-                  <a:srgbClr val="334155"/>
-                </a:solidFill>
                 <a:latin typeface="Calibri" pitchFamily="34" charset="0"/>
                 <a:ea typeface="Calibri" pitchFamily="34" charset="-122"/>
                 <a:cs typeface="Calibri" pitchFamily="34" charset="-120"/>
@@ -15901,9 +15407,6 @@
             </a:pPr>
             <a:r>
               <a:rPr lang="en-US" sz="950" dirty="0">
-                <a:solidFill>
-                  <a:srgbClr val="334155"/>
-                </a:solidFill>
                 <a:latin typeface="Calibri" pitchFamily="34" charset="0"/>
                 <a:ea typeface="Calibri" pitchFamily="34" charset="-122"/>
                 <a:cs typeface="Calibri" pitchFamily="34" charset="-120"/>
@@ -15962,14 +15465,11 @@
           <a:bodyPr wrap="square" lIns="0" tIns="0" rIns="0" bIns="0" rtlCol="0" anchor="ctr"/>
           <a:lstStyle/>
           <a:p>
-            <a:pPr indent="0" marL="0">
+            <a:pPr marL="0" indent="0">
               <a:buNone/>
             </a:pPr>
             <a:r>
               <a:rPr lang="en-US" sz="1300" b="1" dirty="0">
-                <a:solidFill>
-                  <a:srgbClr val="1E3A8A"/>
-                </a:solidFill>
                 <a:latin typeface="Cambria" pitchFamily="34" charset="0"/>
                 <a:ea typeface="Cambria" pitchFamily="34" charset="-122"/>
                 <a:cs typeface="Cambria" pitchFamily="34" charset="-120"/>
@@ -16010,9 +15510,6 @@
             </a:pPr>
             <a:r>
               <a:rPr lang="en-US" sz="950" dirty="0">
-                <a:solidFill>
-                  <a:srgbClr val="334155"/>
-                </a:solidFill>
                 <a:latin typeface="Calibri" pitchFamily="34" charset="0"/>
                 <a:ea typeface="Calibri" pitchFamily="34" charset="-122"/>
                 <a:cs typeface="Calibri" pitchFamily="34" charset="-120"/>
@@ -16031,9 +15528,6 @@
             </a:pPr>
             <a:r>
               <a:rPr lang="en-US" sz="950" dirty="0">
-                <a:solidFill>
-                  <a:srgbClr val="334155"/>
-                </a:solidFill>
                 <a:latin typeface="Calibri" pitchFamily="34" charset="0"/>
                 <a:ea typeface="Calibri" pitchFamily="34" charset="-122"/>
                 <a:cs typeface="Calibri" pitchFamily="34" charset="-120"/>
@@ -16052,9 +15546,6 @@
             </a:pPr>
             <a:r>
               <a:rPr lang="en-US" sz="950" dirty="0">
-                <a:solidFill>
-                  <a:srgbClr val="334155"/>
-                </a:solidFill>
                 <a:latin typeface="Calibri" pitchFamily="34" charset="0"/>
                 <a:ea typeface="Calibri" pitchFamily="34" charset="-122"/>
                 <a:cs typeface="Calibri" pitchFamily="34" charset="-120"/>
@@ -16113,14 +15604,11 @@
           <a:bodyPr wrap="square" lIns="0" tIns="0" rIns="0" bIns="0" rtlCol="0" anchor="ctr"/>
           <a:lstStyle/>
           <a:p>
-            <a:pPr indent="0" marL="0">
+            <a:pPr marL="0" indent="0">
               <a:buNone/>
             </a:pPr>
             <a:r>
               <a:rPr lang="en-US" sz="950" b="1" dirty="0">
-                <a:solidFill>
-                  <a:srgbClr val="1E3A8A"/>
-                </a:solidFill>
                 <a:latin typeface="Calibri" pitchFamily="34" charset="0"/>
                 <a:ea typeface="Calibri" pitchFamily="34" charset="-122"/>
                 <a:cs typeface="Calibri" pitchFamily="34" charset="-120"/>
@@ -16161,9 +15649,6 @@
             </a:pPr>
             <a:r>
               <a:rPr lang="en-US" sz="900" dirty="0">
-                <a:solidFill>
-                  <a:srgbClr val="334155"/>
-                </a:solidFill>
                 <a:latin typeface="Calibri" pitchFamily="34" charset="0"/>
                 <a:ea typeface="Calibri" pitchFamily="34" charset="-122"/>
                 <a:cs typeface="Calibri" pitchFamily="34" charset="-120"/>
@@ -16182,9 +15667,6 @@
             </a:pPr>
             <a:r>
               <a:rPr lang="en-US" sz="900" dirty="0">
-                <a:solidFill>
-                  <a:srgbClr val="334155"/>
-                </a:solidFill>
                 <a:latin typeface="Calibri" pitchFamily="34" charset="0"/>
                 <a:ea typeface="Calibri" pitchFamily="34" charset="-122"/>
                 <a:cs typeface="Calibri" pitchFamily="34" charset="-120"/>
@@ -16203,9 +15685,6 @@
             </a:pPr>
             <a:r>
               <a:rPr lang="en-US" sz="900" dirty="0">
-                <a:solidFill>
-                  <a:srgbClr val="334155"/>
-                </a:solidFill>
                 <a:latin typeface="Calibri" pitchFamily="34" charset="0"/>
                 <a:ea typeface="Calibri" pitchFamily="34" charset="-122"/>
                 <a:cs typeface="Calibri" pitchFamily="34" charset="-120"/>
@@ -16232,6 +15711,7 @@
         <a:solidFill>
           <a:srgbClr val="FFFFFF"/>
         </a:solidFill>
+        <a:effectLst/>
       </p:bgPr>
     </p:bg>
     <p:spTree>
@@ -16250,14 +15730,14 @@
       </p:grpSpPr>
       <p:pic>
         <p:nvPicPr>
-          <p:cNvPr id="2" name="Image 0" descr="d:\resrtorant\presentation_assets\tcet_header.jpeg">    </p:cNvPr>
+          <p:cNvPr id="2" name="Image 0" descr="d:\resrtorant\presentation_assets\tcet_header.jpeg"/>
           <p:cNvPicPr>
             <a:picLocks noChangeAspect="1"/>
           </p:cNvPicPr>
           <p:nvPr/>
         </p:nvPicPr>
         <p:blipFill>
-          <a:blip r:embed="rId1"/>
+          <a:blip r:embed="rId3"/>
           <a:stretch>
             <a:fillRect/>
           </a:stretch>
@@ -16293,14 +15773,11 @@
           <a:bodyPr wrap="square" lIns="0" tIns="0" rIns="0" bIns="0" rtlCol="0" anchor="ctr"/>
           <a:lstStyle/>
           <a:p>
-            <a:pPr indent="0" marL="0">
+            <a:pPr marL="0" indent="0">
               <a:buNone/>
             </a:pPr>
             <a:r>
               <a:rPr lang="en-US" sz="1650" b="1" dirty="0">
-                <a:solidFill>
-                  <a:srgbClr val="1E3A8A"/>
-                </a:solidFill>
                 <a:latin typeface="Cambria" pitchFamily="34" charset="0"/>
                 <a:ea typeface="Cambria" pitchFamily="34" charset="-122"/>
                 <a:cs typeface="Cambria" pitchFamily="34" charset="-120"/>
@@ -16332,14 +15809,11 @@
           <a:bodyPr wrap="square" lIns="0" tIns="0" rIns="0" bIns="0" rtlCol="0" anchor="ctr"/>
           <a:lstStyle/>
           <a:p>
-            <a:pPr algn="r" indent="0" marL="0">
+            <a:pPr marL="0" indent="0" algn="r">
               <a:buNone/>
             </a:pPr>
             <a:r>
               <a:rPr lang="en-US" sz="950" b="1" dirty="0">
-                <a:solidFill>
-                  <a:srgbClr val="2563EB"/>
-                </a:solidFill>
                 <a:latin typeface="Calibri" pitchFamily="34" charset="0"/>
                 <a:ea typeface="Calibri" pitchFamily="34" charset="-122"/>
                 <a:cs typeface="Calibri" pitchFamily="34" charset="-120"/>
@@ -16371,7 +15845,7 @@
           <a:bodyPr wrap="square" lIns="0" tIns="0" rIns="0" bIns="0" rtlCol="0" anchor="ctr"/>
           <a:lstStyle/>
           <a:p>
-            <a:pPr indent="0" marL="0">
+            <a:pPr marL="0" indent="0">
               <a:buNone/>
             </a:pPr>
             <a:r>
@@ -16410,7 +15884,7 @@
           <a:bodyPr wrap="square" lIns="0" tIns="0" rIns="0" bIns="0" rtlCol="0" anchor="ctr"/>
           <a:lstStyle/>
           <a:p>
-            <a:pPr algn="r" indent="0" marL="0">
+            <a:pPr marL="0" indent="0" algn="r">
               <a:buNone/>
             </a:pPr>
             <a:r>
@@ -16476,14 +15950,11 @@
           <a:bodyPr wrap="square" lIns="0" tIns="0" rIns="0" bIns="0" rtlCol="0" anchor="ctr"/>
           <a:lstStyle/>
           <a:p>
-            <a:pPr indent="0" marL="0">
+            <a:pPr marL="0" indent="0">
               <a:buNone/>
             </a:pPr>
             <a:r>
               <a:rPr lang="en-US" sz="1300" b="1" dirty="0">
-                <a:solidFill>
-                  <a:srgbClr val="1E3A8A"/>
-                </a:solidFill>
                 <a:latin typeface="Cambria" pitchFamily="34" charset="0"/>
                 <a:ea typeface="Cambria" pitchFamily="34" charset="-122"/>
                 <a:cs typeface="Cambria" pitchFamily="34" charset="-120"/>
@@ -16524,9 +15995,6 @@
             </a:pPr>
             <a:r>
               <a:rPr lang="en-US" sz="950" dirty="0">
-                <a:solidFill>
-                  <a:srgbClr val="334155"/>
-                </a:solidFill>
                 <a:latin typeface="Calibri" pitchFamily="34" charset="0"/>
                 <a:ea typeface="Calibri" pitchFamily="34" charset="-122"/>
                 <a:cs typeface="Calibri" pitchFamily="34" charset="-120"/>
@@ -16545,9 +16013,6 @@
             </a:pPr>
             <a:r>
               <a:rPr lang="en-US" sz="950" dirty="0">
-                <a:solidFill>
-                  <a:srgbClr val="334155"/>
-                </a:solidFill>
                 <a:latin typeface="Calibri" pitchFamily="34" charset="0"/>
                 <a:ea typeface="Calibri" pitchFamily="34" charset="-122"/>
                 <a:cs typeface="Calibri" pitchFamily="34" charset="-120"/>
@@ -16566,9 +16031,6 @@
             </a:pPr>
             <a:r>
               <a:rPr lang="en-US" sz="950" dirty="0">
-                <a:solidFill>
-                  <a:srgbClr val="334155"/>
-                </a:solidFill>
                 <a:latin typeface="Calibri" pitchFamily="34" charset="0"/>
                 <a:ea typeface="Calibri" pitchFamily="34" charset="-122"/>
                 <a:cs typeface="Calibri" pitchFamily="34" charset="-120"/>
@@ -16587,9 +16049,6 @@
             </a:pPr>
             <a:r>
               <a:rPr lang="en-US" sz="950" dirty="0">
-                <a:solidFill>
-                  <a:srgbClr val="334155"/>
-                </a:solidFill>
                 <a:latin typeface="Calibri" pitchFamily="34" charset="0"/>
                 <a:ea typeface="Calibri" pitchFamily="34" charset="-122"/>
                 <a:cs typeface="Calibri" pitchFamily="34" charset="-120"/>
@@ -16608,9 +16067,6 @@
             </a:pPr>
             <a:r>
               <a:rPr lang="en-US" sz="950" dirty="0">
-                <a:solidFill>
-                  <a:srgbClr val="334155"/>
-                </a:solidFill>
                 <a:latin typeface="Calibri" pitchFamily="34" charset="0"/>
                 <a:ea typeface="Calibri" pitchFamily="34" charset="-122"/>
                 <a:cs typeface="Calibri" pitchFamily="34" charset="-120"/>
@@ -16669,14 +16125,11 @@
           <a:bodyPr wrap="square" lIns="0" tIns="0" rIns="0" bIns="0" rtlCol="0" anchor="ctr"/>
           <a:lstStyle/>
           <a:p>
-            <a:pPr indent="0" marL="0">
+            <a:pPr marL="0" indent="0">
               <a:buNone/>
             </a:pPr>
             <a:r>
               <a:rPr lang="en-US" sz="1300" b="1" dirty="0">
-                <a:solidFill>
-                  <a:srgbClr val="1E3A8A"/>
-                </a:solidFill>
                 <a:latin typeface="Cambria" pitchFamily="34" charset="0"/>
                 <a:ea typeface="Cambria" pitchFamily="34" charset="-122"/>
                 <a:cs typeface="Cambria" pitchFamily="34" charset="-120"/>
@@ -16717,9 +16170,6 @@
             </a:pPr>
             <a:r>
               <a:rPr lang="en-US" sz="950" dirty="0">
-                <a:solidFill>
-                  <a:srgbClr val="334155"/>
-                </a:solidFill>
                 <a:latin typeface="Calibri" pitchFamily="34" charset="0"/>
                 <a:ea typeface="Calibri" pitchFamily="34" charset="-122"/>
                 <a:cs typeface="Calibri" pitchFamily="34" charset="-120"/>
@@ -16738,9 +16188,6 @@
             </a:pPr>
             <a:r>
               <a:rPr lang="en-US" sz="950" dirty="0">
-                <a:solidFill>
-                  <a:srgbClr val="334155"/>
-                </a:solidFill>
                 <a:latin typeface="Calibri" pitchFamily="34" charset="0"/>
                 <a:ea typeface="Calibri" pitchFamily="34" charset="-122"/>
                 <a:cs typeface="Calibri" pitchFamily="34" charset="-120"/>
@@ -16759,9 +16206,6 @@
             </a:pPr>
             <a:r>
               <a:rPr lang="en-US" sz="950" dirty="0">
-                <a:solidFill>
-                  <a:srgbClr val="334155"/>
-                </a:solidFill>
                 <a:latin typeface="Calibri" pitchFamily="34" charset="0"/>
                 <a:ea typeface="Calibri" pitchFamily="34" charset="-122"/>
                 <a:cs typeface="Calibri" pitchFamily="34" charset="-120"/>
@@ -16780,9 +16224,6 @@
             </a:pPr>
             <a:r>
               <a:rPr lang="en-US" sz="950" dirty="0">
-                <a:solidFill>
-                  <a:srgbClr val="334155"/>
-                </a:solidFill>
                 <a:latin typeface="Calibri" pitchFamily="34" charset="0"/>
                 <a:ea typeface="Calibri" pitchFamily="34" charset="-122"/>
                 <a:cs typeface="Calibri" pitchFamily="34" charset="-120"/>
@@ -16801,9 +16242,6 @@
             </a:pPr>
             <a:r>
               <a:rPr lang="en-US" sz="950" dirty="0">
-                <a:solidFill>
-                  <a:srgbClr val="334155"/>
-                </a:solidFill>
                 <a:latin typeface="Calibri" pitchFamily="34" charset="0"/>
                 <a:ea typeface="Calibri" pitchFamily="34" charset="-122"/>
                 <a:cs typeface="Calibri" pitchFamily="34" charset="-120"/>
@@ -16830,6 +16268,7 @@
         <a:solidFill>
           <a:srgbClr val="FFFFFF"/>
         </a:solidFill>
+        <a:effectLst/>
       </p:bgPr>
     </p:bg>
     <p:spTree>
@@ -16848,14 +16287,14 @@
       </p:grpSpPr>
       <p:pic>
         <p:nvPicPr>
-          <p:cNvPr id="2" name="Image 0" descr="d:\resrtorant\presentation_assets\tcet_header.jpeg">    </p:cNvPr>
+          <p:cNvPr id="2" name="Image 0" descr="d:\resrtorant\presentation_assets\tcet_header.jpeg"/>
           <p:cNvPicPr>
             <a:picLocks noChangeAspect="1"/>
           </p:cNvPicPr>
           <p:nvPr/>
         </p:nvPicPr>
         <p:blipFill>
-          <a:blip r:embed="rId1"/>
+          <a:blip r:embed="rId3"/>
           <a:stretch>
             <a:fillRect/>
           </a:stretch>
@@ -16891,14 +16330,11 @@
           <a:bodyPr wrap="square" lIns="0" tIns="0" rIns="0" bIns="0" rtlCol="0" anchor="ctr"/>
           <a:lstStyle/>
           <a:p>
-            <a:pPr indent="0" marL="0">
+            <a:pPr marL="0" indent="0">
               <a:buNone/>
             </a:pPr>
             <a:r>
               <a:rPr lang="en-US" sz="1650" b="1" dirty="0">
-                <a:solidFill>
-                  <a:srgbClr val="1E3A8A"/>
-                </a:solidFill>
                 <a:latin typeface="Cambria" pitchFamily="34" charset="0"/>
                 <a:ea typeface="Cambria" pitchFamily="34" charset="-122"/>
                 <a:cs typeface="Cambria" pitchFamily="34" charset="-120"/>
@@ -16930,7 +16366,7 @@
           <a:bodyPr wrap="square" lIns="0" tIns="0" rIns="0" bIns="0" rtlCol="0" anchor="ctr"/>
           <a:lstStyle/>
           <a:p>
-            <a:pPr algn="r" indent="0" marL="0">
+            <a:pPr marL="0" indent="0" algn="r">
               <a:buNone/>
             </a:pPr>
             <a:r>
@@ -16969,7 +16405,7 @@
           <a:bodyPr wrap="square" lIns="0" tIns="0" rIns="0" bIns="0" rtlCol="0" anchor="ctr"/>
           <a:lstStyle/>
           <a:p>
-            <a:pPr indent="0" marL="0">
+            <a:pPr marL="0" indent="0">
               <a:buNone/>
             </a:pPr>
             <a:r>
@@ -17008,7 +16444,7 @@
           <a:bodyPr wrap="square" lIns="0" tIns="0" rIns="0" bIns="0" rtlCol="0" anchor="ctr"/>
           <a:lstStyle/>
           <a:p>
-            <a:pPr algn="r" indent="0" marL="0">
+            <a:pPr marL="0" indent="0" algn="r">
               <a:buNone/>
             </a:pPr>
             <a:r>
@@ -17028,14 +16464,14 @@
       </p:sp>
       <p:graphicFrame>
         <p:nvGraphicFramePr>
-          <p:cNvPr id="6" name="Table 0"/>
+          <p:cNvPr id="7" name="Table 0"/>
           <p:cNvGraphicFramePr>
             <a:graphicFrameLocks noGrp="1"/>
           </p:cNvGraphicFramePr>
           <p:nvPr>
             <p:extLst>
               <p:ext uri="{D42A27DB-BD31-4B8C-83A1-F6EECF244321}">
-                <p14:modId xmlns:p14="http://schemas.microsoft.com/office/powerpoint/2010/main" val="1579011935"/>
+                <p14:modId xmlns:p14="http://schemas.microsoft.com/office/powerpoint/2010/main" val="428478962"/>
               </p:ext>
             </p:extLst>
           </p:nvPr>
@@ -17049,11 +16485,41 @@
             <a:tbl>
               <a:tblPr/>
               <a:tblGrid>
-                <a:gridCol w="1609344"/>
-                <a:gridCol w="1609344"/>
-                <a:gridCol w="1609344"/>
-                <a:gridCol w="1609344"/>
-                <a:gridCol w="1609344"/>
+                <a:gridCol w="1609344">
+                  <a:extLst>
+                    <a:ext uri="{9D8B030D-6E8A-4147-A177-3AD203B41FA5}">
+                      <a16:colId xmlns:a16="http://schemas.microsoft.com/office/drawing/2014/main" val="20000"/>
+                    </a:ext>
+                  </a:extLst>
+                </a:gridCol>
+                <a:gridCol w="1609344">
+                  <a:extLst>
+                    <a:ext uri="{9D8B030D-6E8A-4147-A177-3AD203B41FA5}">
+                      <a16:colId xmlns:a16="http://schemas.microsoft.com/office/drawing/2014/main" val="20001"/>
+                    </a:ext>
+                  </a:extLst>
+                </a:gridCol>
+                <a:gridCol w="1609344">
+                  <a:extLst>
+                    <a:ext uri="{9D8B030D-6E8A-4147-A177-3AD203B41FA5}">
+                      <a16:colId xmlns:a16="http://schemas.microsoft.com/office/drawing/2014/main" val="20002"/>
+                    </a:ext>
+                  </a:extLst>
+                </a:gridCol>
+                <a:gridCol w="1609344">
+                  <a:extLst>
+                    <a:ext uri="{9D8B030D-6E8A-4147-A177-3AD203B41FA5}">
+                      <a16:colId xmlns:a16="http://schemas.microsoft.com/office/drawing/2014/main" val="20003"/>
+                    </a:ext>
+                  </a:extLst>
+                </a:gridCol>
+                <a:gridCol w="1609344">
+                  <a:extLst>
+                    <a:ext uri="{9D8B030D-6E8A-4147-A177-3AD203B41FA5}">
+                      <a16:colId xmlns:a16="http://schemas.microsoft.com/office/drawing/2014/main" val="20004"/>
+                    </a:ext>
+                  </a:extLst>
+                </a:gridCol>
               </a:tblGrid>
               <a:tr h="335280">
                 <a:tc>
@@ -17061,7 +16527,7 @@
                     <a:bodyPr/>
                     <a:lstStyle/>
                     <a:p>
-                      <a:pPr algn="ctr" indent="0" marL="0">
+                      <a:pPr marL="0" indent="0" algn="ctr">
                         <a:buNone/>
                       </a:pPr>
                       <a:r>
@@ -17082,7 +16548,7 @@
                       </a:endParaRPr>
                     </a:p>
                   </a:txBody>
-                  <a:tcPr marL="91440" marR="91440" marT="45720" marB="45720" anchor="ctr">
+                  <a:tcPr anchor="ctr">
                     <a:lnL w="6350" cap="flat" cmpd="sng" algn="ctr">
                       <a:solidFill>
                         <a:srgbClr val="E2E8F0"/>
@@ -17129,7 +16595,7 @@
                     <a:bodyPr/>
                     <a:lstStyle/>
                     <a:p>
-                      <a:pPr algn="ctr" indent="0" marL="0">
+                      <a:pPr marL="0" indent="0" algn="ctr">
                         <a:buNone/>
                       </a:pPr>
                       <a:r>
@@ -17150,7 +16616,7 @@
                       </a:endParaRPr>
                     </a:p>
                   </a:txBody>
-                  <a:tcPr marL="91440" marR="91440" marT="45720" marB="45720" anchor="ctr">
+                  <a:tcPr anchor="ctr">
                     <a:lnL w="6350" cap="flat" cmpd="sng" algn="ctr">
                       <a:solidFill>
                         <a:srgbClr val="E2E8F0"/>
@@ -17197,7 +16663,7 @@
                     <a:bodyPr/>
                     <a:lstStyle/>
                     <a:p>
-                      <a:pPr algn="ctr" indent="0" marL="0">
+                      <a:pPr marL="0" indent="0" algn="ctr">
                         <a:buNone/>
                       </a:pPr>
                       <a:r>
@@ -17218,7 +16684,7 @@
                       </a:endParaRPr>
                     </a:p>
                   </a:txBody>
-                  <a:tcPr marL="91440" marR="91440" marT="45720" marB="45720" anchor="ctr">
+                  <a:tcPr anchor="ctr">
                     <a:lnL w="6350" cap="flat" cmpd="sng" algn="ctr">
                       <a:solidFill>
                         <a:srgbClr val="E2E8F0"/>
@@ -17265,7 +16731,7 @@
                     <a:bodyPr/>
                     <a:lstStyle/>
                     <a:p>
-                      <a:pPr algn="ctr" indent="0" marL="0">
+                      <a:pPr marL="0" indent="0" algn="ctr">
                         <a:buNone/>
                       </a:pPr>
                       <a:r>
@@ -17286,7 +16752,7 @@
                       </a:endParaRPr>
                     </a:p>
                   </a:txBody>
-                  <a:tcPr marL="91440" marR="91440" marT="45720" marB="45720" anchor="ctr">
+                  <a:tcPr anchor="ctr">
                     <a:lnL w="6350" cap="flat" cmpd="sng" algn="ctr">
                       <a:solidFill>
                         <a:srgbClr val="E2E8F0"/>
@@ -17333,7 +16799,7 @@
                     <a:bodyPr/>
                     <a:lstStyle/>
                     <a:p>
-                      <a:pPr algn="ctr" indent="0" marL="0">
+                      <a:pPr marL="0" indent="0" algn="ctr">
                         <a:buNone/>
                       </a:pPr>
                       <a:r>
@@ -17354,7 +16820,7 @@
                       </a:endParaRPr>
                     </a:p>
                   </a:txBody>
-                  <a:tcPr marL="91440" marR="91440" marT="45720" marB="45720" anchor="ctr">
+                  <a:tcPr anchor="ctr">
                     <a:lnL w="6350" cap="flat" cmpd="sng" algn="ctr">
                       <a:solidFill>
                         <a:srgbClr val="E2E8F0"/>
@@ -17396,6 +16862,11 @@
                     </a:solidFill>
                   </a:tcPr>
                 </a:tc>
+                <a:extLst>
+                  <a:ext uri="{0D108BD9-81ED-4DB2-BD59-A6C34878D82A}">
+                    <a16:rowId xmlns:a16="http://schemas.microsoft.com/office/drawing/2014/main" val="10000"/>
+                  </a:ext>
+                </a:extLst>
               </a:tr>
               <a:tr h="335280">
                 <a:tc>
@@ -17403,7 +16874,7 @@
                     <a:bodyPr/>
                     <a:lstStyle/>
                     <a:p>
-                      <a:pPr algn="ctr" indent="0" marL="0">
+                      <a:pPr marL="0" indent="0" algn="ctr">
                         <a:buNone/>
                       </a:pPr>
                       <a:r>
@@ -17424,7 +16895,7 @@
                       </a:endParaRPr>
                     </a:p>
                   </a:txBody>
-                  <a:tcPr marL="91440" marR="91440" marT="45720" marB="45720" anchor="ctr">
+                  <a:tcPr anchor="ctr">
                     <a:lnL w="6350" cap="flat" cmpd="sng" algn="ctr">
                       <a:solidFill>
                         <a:srgbClr val="E2E8F0"/>
@@ -17471,7 +16942,7 @@
                     <a:bodyPr/>
                     <a:lstStyle/>
                     <a:p>
-                      <a:pPr algn="ctr" indent="0" marL="0">
+                      <a:pPr marL="0" indent="0" algn="ctr">
                         <a:buNone/>
                       </a:pPr>
                       <a:r>
@@ -17492,7 +16963,7 @@
                       </a:endParaRPr>
                     </a:p>
                   </a:txBody>
-                  <a:tcPr marL="91440" marR="91440" marT="45720" marB="45720" anchor="ctr">
+                  <a:tcPr anchor="ctr">
                     <a:lnL w="6350" cap="flat" cmpd="sng" algn="ctr">
                       <a:solidFill>
                         <a:srgbClr val="E2E8F0"/>
@@ -17539,7 +17010,7 @@
                     <a:bodyPr/>
                     <a:lstStyle/>
                     <a:p>
-                      <a:pPr algn="ctr" indent="0" marL="0">
+                      <a:pPr marL="0" indent="0" algn="ctr">
                         <a:buNone/>
                       </a:pPr>
                       <a:r>
@@ -17560,7 +17031,7 @@
                       </a:endParaRPr>
                     </a:p>
                   </a:txBody>
-                  <a:tcPr marL="91440" marR="91440" marT="45720" marB="45720" anchor="ctr">
+                  <a:tcPr anchor="ctr">
                     <a:lnL w="6350" cap="flat" cmpd="sng" algn="ctr">
                       <a:solidFill>
                         <a:srgbClr val="E2E8F0"/>
@@ -17607,7 +17078,7 @@
                     <a:bodyPr/>
                     <a:lstStyle/>
                     <a:p>
-                      <a:pPr algn="ctr" indent="0" marL="0">
+                      <a:pPr marL="0" indent="0" algn="ctr">
                         <a:buNone/>
                       </a:pPr>
                       <a:r>
@@ -17628,7 +17099,7 @@
                       </a:endParaRPr>
                     </a:p>
                   </a:txBody>
-                  <a:tcPr marL="91440" marR="91440" marT="45720" marB="45720" anchor="ctr">
+                  <a:tcPr anchor="ctr">
                     <a:lnL w="6350" cap="flat" cmpd="sng" algn="ctr">
                       <a:solidFill>
                         <a:srgbClr val="E2E8F0"/>
@@ -17675,7 +17146,7 @@
                     <a:bodyPr/>
                     <a:lstStyle/>
                     <a:p>
-                      <a:pPr algn="ctr" indent="0" marL="0">
+                      <a:pPr marL="0" indent="0" algn="ctr">
                         <a:buNone/>
                       </a:pPr>
                       <a:r>
@@ -17696,7 +17167,7 @@
                       </a:endParaRPr>
                     </a:p>
                   </a:txBody>
-                  <a:tcPr marL="91440" marR="91440" marT="45720" marB="45720" anchor="ctr">
+                  <a:tcPr anchor="ctr">
                     <a:lnL w="6350" cap="flat" cmpd="sng" algn="ctr">
                       <a:solidFill>
                         <a:srgbClr val="E2E8F0"/>
@@ -17738,6 +17209,11 @@
                     </a:solidFill>
                   </a:tcPr>
                 </a:tc>
+                <a:extLst>
+                  <a:ext uri="{0D108BD9-81ED-4DB2-BD59-A6C34878D82A}">
+                    <a16:rowId xmlns:a16="http://schemas.microsoft.com/office/drawing/2014/main" val="10001"/>
+                  </a:ext>
+                </a:extLst>
               </a:tr>
               <a:tr h="335280">
                 <a:tc>
@@ -17745,7 +17221,7 @@
                     <a:bodyPr/>
                     <a:lstStyle/>
                     <a:p>
-                      <a:pPr algn="ctr" indent="0" marL="0">
+                      <a:pPr marL="0" indent="0" algn="ctr">
                         <a:buNone/>
                       </a:pPr>
                       <a:r>
@@ -17766,7 +17242,7 @@
                       </a:endParaRPr>
                     </a:p>
                   </a:txBody>
-                  <a:tcPr marL="91440" marR="91440" marT="45720" marB="45720" anchor="ctr">
+                  <a:tcPr anchor="ctr">
                     <a:lnL w="6350" cap="flat" cmpd="sng" algn="ctr">
                       <a:solidFill>
                         <a:srgbClr val="E2E8F0"/>
@@ -17813,7 +17289,7 @@
                     <a:bodyPr/>
                     <a:lstStyle/>
                     <a:p>
-                      <a:pPr algn="ctr" indent="0" marL="0">
+                      <a:pPr marL="0" indent="0" algn="ctr">
                         <a:buNone/>
                       </a:pPr>
                       <a:r>
@@ -17834,7 +17310,7 @@
                       </a:endParaRPr>
                     </a:p>
                   </a:txBody>
-                  <a:tcPr marL="91440" marR="91440" marT="45720" marB="45720" anchor="ctr">
+                  <a:tcPr anchor="ctr">
                     <a:lnL w="6350" cap="flat" cmpd="sng" algn="ctr">
                       <a:solidFill>
                         <a:srgbClr val="E2E8F0"/>
@@ -17881,7 +17357,7 @@
                     <a:bodyPr/>
                     <a:lstStyle/>
                     <a:p>
-                      <a:pPr algn="ctr" indent="0" marL="0">
+                      <a:pPr marL="0" indent="0" algn="ctr">
                         <a:buNone/>
                       </a:pPr>
                       <a:r>
@@ -17902,7 +17378,7 @@
                       </a:endParaRPr>
                     </a:p>
                   </a:txBody>
-                  <a:tcPr marL="91440" marR="91440" marT="45720" marB="45720" anchor="ctr">
+                  <a:tcPr anchor="ctr">
                     <a:lnL w="6350" cap="flat" cmpd="sng" algn="ctr">
                       <a:solidFill>
                         <a:srgbClr val="E2E8F0"/>
@@ -17949,7 +17425,7 @@
                     <a:bodyPr/>
                     <a:lstStyle/>
                     <a:p>
-                      <a:pPr algn="ctr" indent="0" marL="0">
+                      <a:pPr marL="0" indent="0" algn="ctr">
                         <a:buNone/>
                       </a:pPr>
                       <a:r>
@@ -17970,7 +17446,7 @@
                       </a:endParaRPr>
                     </a:p>
                   </a:txBody>
-                  <a:tcPr marL="91440" marR="91440" marT="45720" marB="45720" anchor="ctr">
+                  <a:tcPr anchor="ctr">
                     <a:lnL w="6350" cap="flat" cmpd="sng" algn="ctr">
                       <a:solidFill>
                         <a:srgbClr val="E2E8F0"/>
@@ -18017,7 +17493,7 @@
                     <a:bodyPr/>
                     <a:lstStyle/>
                     <a:p>
-                      <a:pPr algn="ctr" indent="0" marL="0">
+                      <a:pPr marL="0" indent="0" algn="ctr">
                         <a:buNone/>
                       </a:pPr>
                       <a:r>
@@ -18038,7 +17514,7 @@
                       </a:endParaRPr>
                     </a:p>
                   </a:txBody>
-                  <a:tcPr marL="91440" marR="91440" marT="45720" marB="45720" anchor="ctr">
+                  <a:tcPr anchor="ctr">
                     <a:lnL w="6350" cap="flat" cmpd="sng" algn="ctr">
                       <a:solidFill>
                         <a:srgbClr val="E2E8F0"/>
@@ -18080,6 +17556,11 @@
                     </a:solidFill>
                   </a:tcPr>
                 </a:tc>
+                <a:extLst>
+                  <a:ext uri="{0D108BD9-81ED-4DB2-BD59-A6C34878D82A}">
+                    <a16:rowId xmlns:a16="http://schemas.microsoft.com/office/drawing/2014/main" val="10002"/>
+                  </a:ext>
+                </a:extLst>
               </a:tr>
               <a:tr h="335280">
                 <a:tc>
@@ -18087,7 +17568,7 @@
                     <a:bodyPr/>
                     <a:lstStyle/>
                     <a:p>
-                      <a:pPr algn="ctr" indent="0" marL="0">
+                      <a:pPr marL="0" indent="0" algn="ctr">
                         <a:buNone/>
                       </a:pPr>
                       <a:r>
@@ -18108,7 +17589,7 @@
                       </a:endParaRPr>
                     </a:p>
                   </a:txBody>
-                  <a:tcPr marL="91440" marR="91440" marT="45720" marB="45720" anchor="ctr">
+                  <a:tcPr anchor="ctr">
                     <a:lnL w="6350" cap="flat" cmpd="sng" algn="ctr">
                       <a:solidFill>
                         <a:srgbClr val="E2E8F0"/>
@@ -18155,7 +17636,7 @@
                     <a:bodyPr/>
                     <a:lstStyle/>
                     <a:p>
-                      <a:pPr algn="ctr" indent="0" marL="0">
+                      <a:pPr marL="0" indent="0" algn="ctr">
                         <a:buNone/>
                       </a:pPr>
                       <a:r>
@@ -18176,7 +17657,7 @@
                       </a:endParaRPr>
                     </a:p>
                   </a:txBody>
-                  <a:tcPr marL="91440" marR="91440" marT="45720" marB="45720" anchor="ctr">
+                  <a:tcPr anchor="ctr">
                     <a:lnL w="6350" cap="flat" cmpd="sng" algn="ctr">
                       <a:solidFill>
                         <a:srgbClr val="E2E8F0"/>
@@ -18223,7 +17704,7 @@
                     <a:bodyPr/>
                     <a:lstStyle/>
                     <a:p>
-                      <a:pPr algn="ctr" indent="0" marL="0">
+                      <a:pPr marL="0" indent="0" algn="ctr">
                         <a:buNone/>
                       </a:pPr>
                       <a:r>
@@ -18244,7 +17725,7 @@
                       </a:endParaRPr>
                     </a:p>
                   </a:txBody>
-                  <a:tcPr marL="91440" marR="91440" marT="45720" marB="45720" anchor="ctr">
+                  <a:tcPr anchor="ctr">
                     <a:lnL w="6350" cap="flat" cmpd="sng" algn="ctr">
                       <a:solidFill>
                         <a:srgbClr val="E2E8F0"/>
@@ -18291,7 +17772,7 @@
                     <a:bodyPr/>
                     <a:lstStyle/>
                     <a:p>
-                      <a:pPr algn="ctr" indent="0" marL="0">
+                      <a:pPr marL="0" indent="0" algn="ctr">
                         <a:buNone/>
                       </a:pPr>
                       <a:r>
@@ -18312,7 +17793,7 @@
                       </a:endParaRPr>
                     </a:p>
                   </a:txBody>
-                  <a:tcPr marL="91440" marR="91440" marT="45720" marB="45720" anchor="ctr">
+                  <a:tcPr anchor="ctr">
                     <a:lnL w="6350" cap="flat" cmpd="sng" algn="ctr">
                       <a:solidFill>
                         <a:srgbClr val="E2E8F0"/>
@@ -18359,7 +17840,7 @@
                     <a:bodyPr/>
                     <a:lstStyle/>
                     <a:p>
-                      <a:pPr algn="ctr" indent="0" marL="0">
+                      <a:pPr marL="0" indent="0" algn="ctr">
                         <a:buNone/>
                       </a:pPr>
                       <a:r>
@@ -18380,7 +17861,7 @@
                       </a:endParaRPr>
                     </a:p>
                   </a:txBody>
-                  <a:tcPr marL="91440" marR="91440" marT="45720" marB="45720" anchor="ctr">
+                  <a:tcPr anchor="ctr">
                     <a:lnL w="6350" cap="flat" cmpd="sng" algn="ctr">
                       <a:solidFill>
                         <a:srgbClr val="E2E8F0"/>
@@ -18422,6 +17903,11 @@
                     </a:solidFill>
                   </a:tcPr>
                 </a:tc>
+                <a:extLst>
+                  <a:ext uri="{0D108BD9-81ED-4DB2-BD59-A6C34878D82A}">
+                    <a16:rowId xmlns:a16="http://schemas.microsoft.com/office/drawing/2014/main" val="10003"/>
+                  </a:ext>
+                </a:extLst>
               </a:tr>
               <a:tr h="335280">
                 <a:tc>
@@ -18429,7 +17915,7 @@
                     <a:bodyPr/>
                     <a:lstStyle/>
                     <a:p>
-                      <a:pPr algn="ctr" indent="0" marL="0">
+                      <a:pPr marL="0" indent="0" algn="ctr">
                         <a:buNone/>
                       </a:pPr>
                       <a:r>
@@ -18450,7 +17936,7 @@
                       </a:endParaRPr>
                     </a:p>
                   </a:txBody>
-                  <a:tcPr marL="91440" marR="91440" marT="45720" marB="45720" anchor="ctr">
+                  <a:tcPr anchor="ctr">
                     <a:lnL w="6350" cap="flat" cmpd="sng" algn="ctr">
                       <a:solidFill>
                         <a:srgbClr val="E2E8F0"/>
@@ -18497,7 +17983,7 @@
                     <a:bodyPr/>
                     <a:lstStyle/>
                     <a:p>
-                      <a:pPr algn="ctr" indent="0" marL="0">
+                      <a:pPr marL="0" indent="0" algn="ctr">
                         <a:buNone/>
                       </a:pPr>
                       <a:r>
@@ -18518,7 +18004,7 @@
                       </a:endParaRPr>
                     </a:p>
                   </a:txBody>
-                  <a:tcPr marL="91440" marR="91440" marT="45720" marB="45720" anchor="ctr">
+                  <a:tcPr anchor="ctr">
                     <a:lnL w="6350" cap="flat" cmpd="sng" algn="ctr">
                       <a:solidFill>
                         <a:srgbClr val="E2E8F0"/>
@@ -18565,7 +18051,7 @@
                     <a:bodyPr/>
                     <a:lstStyle/>
                     <a:p>
-                      <a:pPr algn="ctr" indent="0" marL="0">
+                      <a:pPr marL="0" indent="0" algn="ctr">
                         <a:buNone/>
                       </a:pPr>
                       <a:r>
@@ -18586,7 +18072,7 @@
                       </a:endParaRPr>
                     </a:p>
                   </a:txBody>
-                  <a:tcPr marL="91440" marR="91440" marT="45720" marB="45720" anchor="ctr">
+                  <a:tcPr anchor="ctr">
                     <a:lnL w="6350" cap="flat" cmpd="sng" algn="ctr">
                       <a:solidFill>
                         <a:srgbClr val="E2E8F0"/>
@@ -18633,7 +18119,7 @@
                     <a:bodyPr/>
                     <a:lstStyle/>
                     <a:p>
-                      <a:pPr algn="ctr" indent="0" marL="0">
+                      <a:pPr marL="0" indent="0" algn="ctr">
                         <a:buNone/>
                       </a:pPr>
                       <a:r>
@@ -18654,7 +18140,7 @@
                       </a:endParaRPr>
                     </a:p>
                   </a:txBody>
-                  <a:tcPr marL="91440" marR="91440" marT="45720" marB="45720" anchor="ctr">
+                  <a:tcPr anchor="ctr">
                     <a:lnL w="6350" cap="flat" cmpd="sng" algn="ctr">
                       <a:solidFill>
                         <a:srgbClr val="E2E8F0"/>
@@ -18701,7 +18187,7 @@
                     <a:bodyPr/>
                     <a:lstStyle/>
                     <a:p>
-                      <a:pPr algn="ctr" indent="0" marL="0">
+                      <a:pPr marL="0" indent="0" algn="ctr">
                         <a:buNone/>
                       </a:pPr>
                       <a:r>
@@ -18722,7 +18208,7 @@
                       </a:endParaRPr>
                     </a:p>
                   </a:txBody>
-                  <a:tcPr marL="91440" marR="91440" marT="45720" marB="45720" anchor="ctr">
+                  <a:tcPr anchor="ctr">
                     <a:lnL w="6350" cap="flat" cmpd="sng" algn="ctr">
                       <a:solidFill>
                         <a:srgbClr val="E2E8F0"/>
@@ -18764,6 +18250,11 @@
                     </a:solidFill>
                   </a:tcPr>
                 </a:tc>
+                <a:extLst>
+                  <a:ext uri="{0D108BD9-81ED-4DB2-BD59-A6C34878D82A}">
+                    <a16:rowId xmlns:a16="http://schemas.microsoft.com/office/drawing/2014/main" val="10004"/>
+                  </a:ext>
+                </a:extLst>
               </a:tr>
               <a:tr h="335280">
                 <a:tc>
@@ -18771,7 +18262,7 @@
                     <a:bodyPr/>
                     <a:lstStyle/>
                     <a:p>
-                      <a:pPr algn="ctr" indent="0" marL="0">
+                      <a:pPr marL="0" indent="0" algn="ctr">
                         <a:buNone/>
                       </a:pPr>
                       <a:r>
@@ -18792,7 +18283,7 @@
                       </a:endParaRPr>
                     </a:p>
                   </a:txBody>
-                  <a:tcPr marL="91440" marR="91440" marT="45720" marB="45720" anchor="ctr">
+                  <a:tcPr anchor="ctr">
                     <a:lnL w="6350" cap="flat" cmpd="sng" algn="ctr">
                       <a:solidFill>
                         <a:srgbClr val="E2E8F0"/>
@@ -18839,7 +18330,7 @@
                     <a:bodyPr/>
                     <a:lstStyle/>
                     <a:p>
-                      <a:pPr algn="ctr" indent="0" marL="0">
+                      <a:pPr marL="0" indent="0" algn="ctr">
                         <a:buNone/>
                       </a:pPr>
                       <a:r>
@@ -18860,7 +18351,7 @@
                       </a:endParaRPr>
                     </a:p>
                   </a:txBody>
-                  <a:tcPr marL="91440" marR="91440" marT="45720" marB="45720" anchor="ctr">
+                  <a:tcPr anchor="ctr">
                     <a:lnL w="6350" cap="flat" cmpd="sng" algn="ctr">
                       <a:solidFill>
                         <a:srgbClr val="E2E8F0"/>
@@ -18907,7 +18398,7 @@
                     <a:bodyPr/>
                     <a:lstStyle/>
                     <a:p>
-                      <a:pPr algn="ctr" indent="0" marL="0">
+                      <a:pPr marL="0" indent="0" algn="ctr">
                         <a:buNone/>
                       </a:pPr>
                       <a:r>
@@ -18928,7 +18419,7 @@
                       </a:endParaRPr>
                     </a:p>
                   </a:txBody>
-                  <a:tcPr marL="91440" marR="91440" marT="45720" marB="45720" anchor="ctr">
+                  <a:tcPr anchor="ctr">
                     <a:lnL w="6350" cap="flat" cmpd="sng" algn="ctr">
                       <a:solidFill>
                         <a:srgbClr val="E2E8F0"/>
@@ -18975,7 +18466,7 @@
                     <a:bodyPr/>
                     <a:lstStyle/>
                     <a:p>
-                      <a:pPr algn="ctr" indent="0" marL="0">
+                      <a:pPr marL="0" indent="0" algn="ctr">
                         <a:buNone/>
                       </a:pPr>
                       <a:r>
@@ -18996,7 +18487,7 @@
                       </a:endParaRPr>
                     </a:p>
                   </a:txBody>
-                  <a:tcPr marL="91440" marR="91440" marT="45720" marB="45720" anchor="ctr">
+                  <a:tcPr anchor="ctr">
                     <a:lnL w="6350" cap="flat" cmpd="sng" algn="ctr">
                       <a:solidFill>
                         <a:srgbClr val="E2E8F0"/>
@@ -19043,7 +18534,7 @@
                     <a:bodyPr/>
                     <a:lstStyle/>
                     <a:p>
-                      <a:pPr algn="ctr" indent="0" marL="0">
+                      <a:pPr marL="0" indent="0" algn="ctr">
                         <a:buNone/>
                       </a:pPr>
                       <a:r>
@@ -19055,7 +18546,7 @@
                           <a:ea typeface="Calibri" pitchFamily="34" charset="-122"/>
                           <a:cs typeface="Calibri" pitchFamily="34" charset="-120"/>
                         </a:rPr>
-                        <a:t>Zero Friction (Instant)</a:t>
+                        <a:t>Zero Friction </a:t>
                       </a:r>
                       <a:endParaRPr lang="en-US" sz="950" dirty="0">
                         <a:latin typeface="Calibri" charset="0"/>
@@ -19064,7 +18555,7 @@
                       </a:endParaRPr>
                     </a:p>
                   </a:txBody>
-                  <a:tcPr marL="91440" marR="91440" marT="45720" marB="45720" anchor="ctr">
+                  <a:tcPr anchor="ctr">
                     <a:lnL w="6350" cap="flat" cmpd="sng" algn="ctr">
                       <a:solidFill>
                         <a:srgbClr val="E2E8F0"/>
@@ -19106,6 +18597,11 @@
                     </a:solidFill>
                   </a:tcPr>
                 </a:tc>
+                <a:extLst>
+                  <a:ext uri="{0D108BD9-81ED-4DB2-BD59-A6C34878D82A}">
+                    <a16:rowId xmlns:a16="http://schemas.microsoft.com/office/drawing/2014/main" val="10005"/>
+                  </a:ext>
+                </a:extLst>
               </a:tr>
             </a:tbl>
           </a:graphicData>
@@ -19159,14 +18655,11 @@
           <a:bodyPr wrap="square" lIns="0" tIns="0" rIns="0" bIns="0" rtlCol="0" anchor="ctr"/>
           <a:lstStyle/>
           <a:p>
-            <a:pPr indent="0" marL="0">
+            <a:pPr marL="0" indent="0">
               <a:buNone/>
             </a:pPr>
             <a:r>
               <a:rPr lang="en-US" sz="1000" b="1" dirty="0">
-                <a:solidFill>
-                  <a:srgbClr val="1E3A8A"/>
-                </a:solidFill>
                 <a:latin typeface="Calibri" pitchFamily="34" charset="0"/>
                 <a:ea typeface="Calibri" pitchFamily="34" charset="-122"/>
                 <a:cs typeface="Calibri" pitchFamily="34" charset="-120"/>
@@ -19198,7 +18691,7 @@
           <a:bodyPr wrap="square" lIns="0" tIns="0" rIns="0" bIns="0" rtlCol="0" anchor="ctr"/>
           <a:lstStyle/>
           <a:p>
-            <a:pPr indent="0" marL="0">
+            <a:pPr marL="0" indent="0">
               <a:spcAft>
                 <a:spcPts val="400"/>
               </a:spcAft>
@@ -19206,63 +18699,39 @@
             </a:pPr>
             <a:r>
               <a:rPr lang="en-US" sz="950" b="1" dirty="0">
-                <a:solidFill>
-                  <a:srgbClr val="0F172A"/>
-                </a:solidFill>
                 <a:latin typeface="Calibri" pitchFamily="34" charset="0"/>
                 <a:ea typeface="Calibri" pitchFamily="34" charset="-122"/>
                 <a:cs typeface="Calibri" pitchFamily="34" charset="-120"/>
               </a:rPr>
               <a:t>• Literature Analysis: </a:t>
             </a:r>
-            <a:pPr indent="0" marL="0">
+            <a:r>
+              <a:rPr lang="en-US" sz="950" dirty="0">
+                <a:latin typeface="Calibri" pitchFamily="34" charset="0"/>
+                <a:ea typeface="Calibri" pitchFamily="34" charset="-122"/>
+                <a:cs typeface="Calibri" pitchFamily="34" charset="-120"/>
+              </a:rPr>
+              <a:t>While spatial computing offers documented benefits in e-commerce, previous hospitality deployments required proprietary native apps, causing severe patron drop-off during ephemeral restaurant dining.</a:t>
+            </a:r>
+            <a:endParaRPr lang="en-US" sz="950" dirty="0"/>
+          </a:p>
+          <a:p>
+            <a:pPr marL="0" indent="0">
               <a:spcAft>
                 <a:spcPts val="400"/>
               </a:spcAft>
               <a:buNone/>
             </a:pPr>
             <a:r>
+              <a:rPr lang="en-US" sz="950" b="1" dirty="0">
+                <a:latin typeface="Calibri" pitchFamily="34" charset="0"/>
+                <a:ea typeface="Calibri" pitchFamily="34" charset="-122"/>
+                <a:cs typeface="Calibri" pitchFamily="34" charset="-120"/>
+              </a:rPr>
+              <a:t>• Engineering Imperative: </a:t>
+            </a:r>
+            <a:r>
               <a:rPr lang="en-US" sz="950" dirty="0">
-                <a:solidFill>
-                  <a:srgbClr val="334155"/>
-                </a:solidFill>
-                <a:latin typeface="Calibri" pitchFamily="34" charset="0"/>
-                <a:ea typeface="Calibri" pitchFamily="34" charset="-122"/>
-                <a:cs typeface="Calibri" pitchFamily="34" charset="-120"/>
-              </a:rPr>
-              <a:t>While spatial computing offers documented benefits in e-commerce, previous hospitality deployments required proprietary native apps, causing severe patron drop-off during ephemeral restaurant dining.</a:t>
-            </a:r>
-            <a:endParaRPr lang="en-US" sz="950" dirty="0"/>
-          </a:p>
-          <a:p>
-            <a:pPr indent="0" marL="0">
-              <a:spcAft>
-                <a:spcPts val="400"/>
-              </a:spcAft>
-              <a:buNone/>
-            </a:pPr>
-            <a:r>
-              <a:rPr lang="en-US" sz="950" b="1" dirty="0">
-                <a:solidFill>
-                  <a:srgbClr val="0F172A"/>
-                </a:solidFill>
-                <a:latin typeface="Calibri" pitchFamily="34" charset="0"/>
-                <a:ea typeface="Calibri" pitchFamily="34" charset="-122"/>
-                <a:cs typeface="Calibri" pitchFamily="34" charset="-120"/>
-              </a:rPr>
-              <a:t>• Engineering Imperative: </a:t>
-            </a:r>
-            <a:pPr indent="0" marL="0">
-              <a:spcAft>
-                <a:spcPts val="400"/>
-              </a:spcAft>
-              <a:buNone/>
-            </a:pPr>
-            <a:r>
-              <a:rPr lang="en-US" sz="950" dirty="0">
-                <a:solidFill>
-                  <a:srgbClr val="334155"/>
-                </a:solidFill>
                 <a:latin typeface="Calibri" pitchFamily="34" charset="0"/>
                 <a:ea typeface="Calibri" pitchFamily="34" charset="-122"/>
                 <a:cs typeface="Calibri" pitchFamily="34" charset="-120"/>
@@ -19289,6 +18758,7 @@
         <a:solidFill>
           <a:srgbClr val="FFFFFF"/>
         </a:solidFill>
+        <a:effectLst/>
       </p:bgPr>
     </p:bg>
     <p:spTree>
@@ -19307,14 +18777,14 @@
       </p:grpSpPr>
       <p:pic>
         <p:nvPicPr>
-          <p:cNvPr id="2" name="Image 0" descr="d:\resrtorant\presentation_assets\tcet_header.jpeg">    </p:cNvPr>
+          <p:cNvPr id="2" name="Image 0" descr="d:\resrtorant\presentation_assets\tcet_header.jpeg"/>
           <p:cNvPicPr>
             <a:picLocks noChangeAspect="1"/>
           </p:cNvPicPr>
           <p:nvPr/>
         </p:nvPicPr>
         <p:blipFill>
-          <a:blip r:embed="rId1"/>
+          <a:blip r:embed="rId3"/>
           <a:stretch>
             <a:fillRect/>
           </a:stretch>
@@ -19350,14 +18820,11 @@
           <a:bodyPr wrap="square" lIns="0" tIns="0" rIns="0" bIns="0" rtlCol="0" anchor="ctr"/>
           <a:lstStyle/>
           <a:p>
-            <a:pPr indent="0" marL="0">
+            <a:pPr marL="0" indent="0">
               <a:buNone/>
             </a:pPr>
             <a:r>
               <a:rPr lang="en-US" sz="1650" b="1" dirty="0">
-                <a:solidFill>
-                  <a:srgbClr val="1E3A8A"/>
-                </a:solidFill>
                 <a:latin typeface="Cambria" pitchFamily="34" charset="0"/>
                 <a:ea typeface="Cambria" pitchFamily="34" charset="-122"/>
                 <a:cs typeface="Cambria" pitchFamily="34" charset="-120"/>
@@ -19389,7 +18856,7 @@
           <a:bodyPr wrap="square" lIns="0" tIns="0" rIns="0" bIns="0" rtlCol="0" anchor="ctr"/>
           <a:lstStyle/>
           <a:p>
-            <a:pPr algn="r" indent="0" marL="0">
+            <a:pPr marL="0" indent="0" algn="r">
               <a:buNone/>
             </a:pPr>
             <a:r>
@@ -19428,7 +18895,7 @@
           <a:bodyPr wrap="square" lIns="0" tIns="0" rIns="0" bIns="0" rtlCol="0" anchor="ctr"/>
           <a:lstStyle/>
           <a:p>
-            <a:pPr indent="0" marL="0">
+            <a:pPr marL="0" indent="0">
               <a:buNone/>
             </a:pPr>
             <a:r>
@@ -19467,7 +18934,7 @@
           <a:bodyPr wrap="square" lIns="0" tIns="0" rIns="0" bIns="0" rtlCol="0" anchor="ctr"/>
           <a:lstStyle/>
           <a:p>
-            <a:pPr algn="r" indent="0" marL="0">
+            <a:pPr marL="0" indent="0" algn="r">
               <a:buNone/>
             </a:pPr>
             <a:r>
@@ -19533,14 +19000,11 @@
           <a:bodyPr wrap="square" lIns="0" tIns="0" rIns="0" bIns="0" rtlCol="0" anchor="ctr"/>
           <a:lstStyle/>
           <a:p>
-            <a:pPr indent="0" marL="0">
+            <a:pPr marL="0" indent="0">
               <a:buNone/>
             </a:pPr>
             <a:r>
               <a:rPr lang="en-US" sz="900" b="1" dirty="0">
-                <a:solidFill>
-                  <a:srgbClr val="2563EB"/>
-                </a:solidFill>
                 <a:latin typeface="Calibri" pitchFamily="34" charset="0"/>
                 <a:ea typeface="Calibri" pitchFamily="34" charset="-122"/>
                 <a:cs typeface="Calibri" pitchFamily="34" charset="-120"/>
@@ -19572,14 +19036,11 @@
           <a:bodyPr wrap="square" lIns="0" tIns="0" rIns="0" bIns="0" rtlCol="0" anchor="ctr"/>
           <a:lstStyle/>
           <a:p>
-            <a:pPr indent="0" marL="0">
+            <a:pPr marL="0" indent="0">
               <a:buNone/>
             </a:pPr>
             <a:r>
               <a:rPr lang="en-US" sz="1150" b="1" dirty="0">
-                <a:solidFill>
-                  <a:srgbClr val="1E3A8A"/>
-                </a:solidFill>
                 <a:latin typeface="Cambria" pitchFamily="34" charset="0"/>
                 <a:ea typeface="Cambria" pitchFamily="34" charset="-122"/>
                 <a:cs typeface="Cambria" pitchFamily="34" charset="-120"/>
@@ -19611,14 +19072,11 @@
           <a:bodyPr wrap="square" lIns="0" tIns="0" rIns="0" bIns="0" rtlCol="0" anchor="ctr"/>
           <a:lstStyle/>
           <a:p>
-            <a:pPr indent="0" marL="0">
+            <a:pPr marL="0" indent="0">
               <a:buNone/>
             </a:pPr>
             <a:r>
               <a:rPr lang="en-US" sz="850" dirty="0">
-                <a:solidFill>
-                  <a:srgbClr val="334155"/>
-                </a:solidFill>
                 <a:latin typeface="Calibri" pitchFamily="34" charset="0"/>
                 <a:ea typeface="Calibri" pitchFamily="34" charset="-122"/>
                 <a:cs typeface="Calibri" pitchFamily="34" charset="-120"/>
@@ -19677,14 +19135,11 @@
           <a:bodyPr wrap="square" lIns="0" tIns="0" rIns="0" bIns="0" rtlCol="0" anchor="ctr"/>
           <a:lstStyle/>
           <a:p>
-            <a:pPr indent="0" marL="0">
+            <a:pPr marL="0" indent="0">
               <a:buNone/>
             </a:pPr>
             <a:r>
               <a:rPr lang="en-US" sz="900" b="1" dirty="0">
-                <a:solidFill>
-                  <a:srgbClr val="2563EB"/>
-                </a:solidFill>
                 <a:latin typeface="Calibri" pitchFamily="34" charset="0"/>
                 <a:ea typeface="Calibri" pitchFamily="34" charset="-122"/>
                 <a:cs typeface="Calibri" pitchFamily="34" charset="-120"/>
@@ -19716,14 +19171,11 @@
           <a:bodyPr wrap="square" lIns="0" tIns="0" rIns="0" bIns="0" rtlCol="0" anchor="ctr"/>
           <a:lstStyle/>
           <a:p>
-            <a:pPr indent="0" marL="0">
+            <a:pPr marL="0" indent="0">
               <a:buNone/>
             </a:pPr>
             <a:r>
               <a:rPr lang="en-US" sz="1150" b="1" dirty="0">
-                <a:solidFill>
-                  <a:srgbClr val="1E3A8A"/>
-                </a:solidFill>
                 <a:latin typeface="Cambria" pitchFamily="34" charset="0"/>
                 <a:ea typeface="Cambria" pitchFamily="34" charset="-122"/>
                 <a:cs typeface="Cambria" pitchFamily="34" charset="-120"/>
@@ -19755,14 +19207,11 @@
           <a:bodyPr wrap="square" lIns="0" tIns="0" rIns="0" bIns="0" rtlCol="0" anchor="ctr"/>
           <a:lstStyle/>
           <a:p>
-            <a:pPr indent="0" marL="0">
+            <a:pPr marL="0" indent="0">
               <a:buNone/>
             </a:pPr>
             <a:r>
               <a:rPr lang="en-US" sz="850" dirty="0">
-                <a:solidFill>
-                  <a:srgbClr val="334155"/>
-                </a:solidFill>
                 <a:latin typeface="Calibri" pitchFamily="34" charset="0"/>
                 <a:ea typeface="Calibri" pitchFamily="34" charset="-122"/>
                 <a:cs typeface="Calibri" pitchFamily="34" charset="-120"/>
@@ -19821,14 +19270,11 @@
           <a:bodyPr wrap="square" lIns="0" tIns="0" rIns="0" bIns="0" rtlCol="0" anchor="ctr"/>
           <a:lstStyle/>
           <a:p>
-            <a:pPr indent="0" marL="0">
+            <a:pPr marL="0" indent="0">
               <a:buNone/>
             </a:pPr>
             <a:r>
               <a:rPr lang="en-US" sz="900" b="1" dirty="0">
-                <a:solidFill>
-                  <a:srgbClr val="2563EB"/>
-                </a:solidFill>
                 <a:latin typeface="Calibri" pitchFamily="34" charset="0"/>
                 <a:ea typeface="Calibri" pitchFamily="34" charset="-122"/>
                 <a:cs typeface="Calibri" pitchFamily="34" charset="-120"/>
@@ -19860,14 +19306,11 @@
           <a:bodyPr wrap="square" lIns="0" tIns="0" rIns="0" bIns="0" rtlCol="0" anchor="ctr"/>
           <a:lstStyle/>
           <a:p>
-            <a:pPr indent="0" marL="0">
+            <a:pPr marL="0" indent="0">
               <a:buNone/>
             </a:pPr>
             <a:r>
               <a:rPr lang="en-US" sz="1150" b="1" dirty="0">
-                <a:solidFill>
-                  <a:srgbClr val="1E3A8A"/>
-                </a:solidFill>
                 <a:latin typeface="Cambria" pitchFamily="34" charset="0"/>
                 <a:ea typeface="Cambria" pitchFamily="34" charset="-122"/>
                 <a:cs typeface="Cambria" pitchFamily="34" charset="-120"/>
@@ -19899,14 +19342,11 @@
           <a:bodyPr wrap="square" lIns="0" tIns="0" rIns="0" bIns="0" rtlCol="0" anchor="ctr"/>
           <a:lstStyle/>
           <a:p>
-            <a:pPr indent="0" marL="0">
+            <a:pPr marL="0" indent="0">
               <a:buNone/>
             </a:pPr>
             <a:r>
               <a:rPr lang="en-US" sz="850" dirty="0">
-                <a:solidFill>
-                  <a:srgbClr val="334155"/>
-                </a:solidFill>
                 <a:latin typeface="Calibri" pitchFamily="34" charset="0"/>
                 <a:ea typeface="Calibri" pitchFamily="34" charset="-122"/>
                 <a:cs typeface="Calibri" pitchFamily="34" charset="-120"/>
@@ -19965,14 +19405,11 @@
           <a:bodyPr wrap="square" lIns="0" tIns="0" rIns="0" bIns="0" rtlCol="0" anchor="ctr"/>
           <a:lstStyle/>
           <a:p>
-            <a:pPr indent="0" marL="0">
+            <a:pPr marL="0" indent="0">
               <a:buNone/>
             </a:pPr>
             <a:r>
               <a:rPr lang="en-US" sz="900" b="1" dirty="0">
-                <a:solidFill>
-                  <a:srgbClr val="2563EB"/>
-                </a:solidFill>
                 <a:latin typeface="Calibri" pitchFamily="34" charset="0"/>
                 <a:ea typeface="Calibri" pitchFamily="34" charset="-122"/>
                 <a:cs typeface="Calibri" pitchFamily="34" charset="-120"/>
@@ -20004,14 +19441,11 @@
           <a:bodyPr wrap="square" lIns="0" tIns="0" rIns="0" bIns="0" rtlCol="0" anchor="ctr"/>
           <a:lstStyle/>
           <a:p>
-            <a:pPr indent="0" marL="0">
+            <a:pPr marL="0" indent="0">
               <a:buNone/>
             </a:pPr>
             <a:r>
               <a:rPr lang="en-US" sz="1150" b="1" dirty="0">
-                <a:solidFill>
-                  <a:srgbClr val="1E3A8A"/>
-                </a:solidFill>
                 <a:latin typeface="Cambria" pitchFamily="34" charset="0"/>
                 <a:ea typeface="Cambria" pitchFamily="34" charset="-122"/>
                 <a:cs typeface="Cambria" pitchFamily="34" charset="-120"/>
@@ -20043,14 +19477,11 @@
           <a:bodyPr wrap="square" lIns="0" tIns="0" rIns="0" bIns="0" rtlCol="0" anchor="ctr"/>
           <a:lstStyle/>
           <a:p>
-            <a:pPr indent="0" marL="0">
+            <a:pPr marL="0" indent="0">
               <a:buNone/>
             </a:pPr>
             <a:r>
               <a:rPr lang="en-US" sz="850" dirty="0">
-                <a:solidFill>
-                  <a:srgbClr val="334155"/>
-                </a:solidFill>
                 <a:latin typeface="Calibri" pitchFamily="34" charset="0"/>
                 <a:ea typeface="Calibri" pitchFamily="34" charset="-122"/>
                 <a:cs typeface="Calibri" pitchFamily="34" charset="-120"/>
@@ -20109,14 +19540,11 @@
           <a:bodyPr wrap="square" lIns="0" tIns="0" rIns="0" bIns="0" rtlCol="0" anchor="ctr"/>
           <a:lstStyle/>
           <a:p>
-            <a:pPr indent="0" marL="0">
+            <a:pPr marL="0" indent="0">
               <a:buNone/>
             </a:pPr>
             <a:r>
               <a:rPr lang="en-US" sz="1250" b="1" dirty="0">
-                <a:solidFill>
-                  <a:srgbClr val="1E3A8A"/>
-                </a:solidFill>
                 <a:latin typeface="Cambria" pitchFamily="34" charset="0"/>
                 <a:ea typeface="Cambria" pitchFamily="34" charset="-122"/>
                 <a:cs typeface="Cambria" pitchFamily="34" charset="-120"/>
@@ -20157,9 +19585,6 @@
             </a:pPr>
             <a:r>
               <a:rPr lang="en-US" sz="950" dirty="0">
-                <a:solidFill>
-                  <a:srgbClr val="334155"/>
-                </a:solidFill>
                 <a:latin typeface="Calibri" pitchFamily="34" charset="0"/>
                 <a:ea typeface="Calibri" pitchFamily="34" charset="-122"/>
                 <a:cs typeface="Calibri" pitchFamily="34" charset="-120"/>
@@ -20178,9 +19603,6 @@
             </a:pPr>
             <a:r>
               <a:rPr lang="en-US" sz="950" dirty="0">
-                <a:solidFill>
-                  <a:srgbClr val="334155"/>
-                </a:solidFill>
                 <a:latin typeface="Calibri" pitchFamily="34" charset="0"/>
                 <a:ea typeface="Calibri" pitchFamily="34" charset="-122"/>
                 <a:cs typeface="Calibri" pitchFamily="34" charset="-120"/>
@@ -20199,9 +19621,6 @@
             </a:pPr>
             <a:r>
               <a:rPr lang="en-US" sz="950" dirty="0">
-                <a:solidFill>
-                  <a:srgbClr val="334155"/>
-                </a:solidFill>
                 <a:latin typeface="Calibri" pitchFamily="34" charset="0"/>
                 <a:ea typeface="Calibri" pitchFamily="34" charset="-122"/>
                 <a:cs typeface="Calibri" pitchFamily="34" charset="-120"/>
@@ -20260,14 +19679,11 @@
           <a:bodyPr wrap="square" lIns="0" tIns="0" rIns="0" bIns="0" rtlCol="0" anchor="ctr"/>
           <a:lstStyle/>
           <a:p>
-            <a:pPr indent="0" marL="0">
+            <a:pPr marL="0" indent="0">
               <a:buNone/>
             </a:pPr>
             <a:r>
               <a:rPr lang="en-US" sz="1250" b="1" dirty="0">
-                <a:solidFill>
-                  <a:srgbClr val="1E3A8A"/>
-                </a:solidFill>
                 <a:latin typeface="Cambria" pitchFamily="34" charset="0"/>
                 <a:ea typeface="Cambria" pitchFamily="34" charset="-122"/>
                 <a:cs typeface="Cambria" pitchFamily="34" charset="-120"/>
@@ -20308,9 +19724,6 @@
             </a:pPr>
             <a:r>
               <a:rPr lang="en-US" sz="950" dirty="0">
-                <a:solidFill>
-                  <a:srgbClr val="334155"/>
-                </a:solidFill>
                 <a:latin typeface="Calibri" pitchFamily="34" charset="0"/>
                 <a:ea typeface="Calibri" pitchFamily="34" charset="-122"/>
                 <a:cs typeface="Calibri" pitchFamily="34" charset="-120"/>
@@ -20329,9 +19742,6 @@
             </a:pPr>
             <a:r>
               <a:rPr lang="en-US" sz="950" dirty="0">
-                <a:solidFill>
-                  <a:srgbClr val="334155"/>
-                </a:solidFill>
                 <a:latin typeface="Calibri" pitchFamily="34" charset="0"/>
                 <a:ea typeface="Calibri" pitchFamily="34" charset="-122"/>
                 <a:cs typeface="Calibri" pitchFamily="34" charset="-120"/>
@@ -20350,9 +19760,6 @@
             </a:pPr>
             <a:r>
               <a:rPr lang="en-US" sz="950" dirty="0">
-                <a:solidFill>
-                  <a:srgbClr val="334155"/>
-                </a:solidFill>
                 <a:latin typeface="Calibri" pitchFamily="34" charset="0"/>
                 <a:ea typeface="Calibri" pitchFamily="34" charset="-122"/>
                 <a:cs typeface="Calibri" pitchFamily="34" charset="-120"/>
@@ -20379,6 +19786,7 @@
         <a:solidFill>
           <a:srgbClr val="FFFFFF"/>
         </a:solidFill>
+        <a:effectLst/>
       </p:bgPr>
     </p:bg>
     <p:spTree>
@@ -20397,14 +19805,14 @@
       </p:grpSpPr>
       <p:pic>
         <p:nvPicPr>
-          <p:cNvPr id="2" name="Image 0" descr="d:\resrtorant\presentation_assets\tcet_header.jpeg">    </p:cNvPr>
+          <p:cNvPr id="2" name="Image 0" descr="d:\resrtorant\presentation_assets\tcet_header.jpeg"/>
           <p:cNvPicPr>
             <a:picLocks noChangeAspect="1"/>
           </p:cNvPicPr>
           <p:nvPr/>
         </p:nvPicPr>
         <p:blipFill>
-          <a:blip r:embed="rId1"/>
+          <a:blip r:embed="rId3"/>
           <a:stretch>
             <a:fillRect/>
           </a:stretch>
@@ -20440,14 +19848,11 @@
           <a:bodyPr wrap="square" lIns="0" tIns="0" rIns="0" bIns="0" rtlCol="0" anchor="ctr"/>
           <a:lstStyle/>
           <a:p>
-            <a:pPr indent="0" marL="0">
+            <a:pPr marL="0" indent="0">
               <a:buNone/>
             </a:pPr>
             <a:r>
               <a:rPr lang="en-US" sz="1650" b="1" dirty="0">
-                <a:solidFill>
-                  <a:srgbClr val="1E3A8A"/>
-                </a:solidFill>
                 <a:latin typeface="Cambria" pitchFamily="34" charset="0"/>
                 <a:ea typeface="Cambria" pitchFamily="34" charset="-122"/>
                 <a:cs typeface="Cambria" pitchFamily="34" charset="-120"/>
@@ -20479,14 +19884,11 @@
           <a:bodyPr wrap="square" lIns="0" tIns="0" rIns="0" bIns="0" rtlCol="0" anchor="ctr"/>
           <a:lstStyle/>
           <a:p>
-            <a:pPr algn="r" indent="0" marL="0">
+            <a:pPr marL="0" indent="0" algn="r">
               <a:buNone/>
             </a:pPr>
             <a:r>
               <a:rPr lang="en-US" sz="950" b="1" dirty="0">
-                <a:solidFill>
-                  <a:srgbClr val="2563EB"/>
-                </a:solidFill>
                 <a:latin typeface="Calibri" pitchFamily="34" charset="0"/>
                 <a:ea typeface="Calibri" pitchFamily="34" charset="-122"/>
                 <a:cs typeface="Calibri" pitchFamily="34" charset="-120"/>
@@ -20518,7 +19920,7 @@
           <a:bodyPr wrap="square" lIns="0" tIns="0" rIns="0" bIns="0" rtlCol="0" anchor="ctr"/>
           <a:lstStyle/>
           <a:p>
-            <a:pPr indent="0" marL="0">
+            <a:pPr marL="0" indent="0">
               <a:buNone/>
             </a:pPr>
             <a:r>
@@ -20557,7 +19959,7 @@
           <a:bodyPr wrap="square" lIns="0" tIns="0" rIns="0" bIns="0" rtlCol="0" anchor="ctr"/>
           <a:lstStyle/>
           <a:p>
-            <a:pPr algn="r" indent="0" marL="0">
+            <a:pPr marL="0" indent="0" algn="r">
               <a:buNone/>
             </a:pPr>
             <a:r>
@@ -20623,14 +20025,11 @@
           <a:bodyPr wrap="square" lIns="0" tIns="0" rIns="0" bIns="0" rtlCol="0" anchor="ctr"/>
           <a:lstStyle/>
           <a:p>
-            <a:pPr indent="0" marL="0">
+            <a:pPr marL="0" indent="0">
               <a:buNone/>
             </a:pPr>
             <a:r>
               <a:rPr lang="en-US" sz="850" b="1" dirty="0">
-                <a:solidFill>
-                  <a:srgbClr val="2563EB"/>
-                </a:solidFill>
                 <a:latin typeface="Calibri" pitchFamily="34" charset="0"/>
                 <a:ea typeface="Calibri" pitchFamily="34" charset="-122"/>
                 <a:cs typeface="Calibri" pitchFamily="34" charset="-120"/>
@@ -20662,14 +20061,11 @@
           <a:bodyPr wrap="square" lIns="0" tIns="0" rIns="0" bIns="0" rtlCol="0" anchor="ctr"/>
           <a:lstStyle/>
           <a:p>
-            <a:pPr indent="0" marL="0">
+            <a:pPr marL="0" indent="0">
               <a:buNone/>
             </a:pPr>
             <a:r>
               <a:rPr lang="en-US" sz="1150" b="1" dirty="0">
-                <a:solidFill>
-                  <a:srgbClr val="1E3A8A"/>
-                </a:solidFill>
                 <a:latin typeface="Cambria" pitchFamily="34" charset="0"/>
                 <a:ea typeface="Cambria" pitchFamily="34" charset="-122"/>
                 <a:cs typeface="Cambria" pitchFamily="34" charset="-120"/>
@@ -20701,28 +20097,19 @@
           <a:bodyPr wrap="square" lIns="0" tIns="0" rIns="0" bIns="0" rtlCol="0" anchor="ctr"/>
           <a:lstStyle/>
           <a:p>
-            <a:pPr indent="0" marL="0">
+            <a:pPr marL="0" indent="0">
               <a:buNone/>
             </a:pPr>
             <a:r>
               <a:rPr lang="en-US" sz="850" b="1" dirty="0">
-                <a:solidFill>
-                  <a:srgbClr val="DC2626"/>
-                </a:solidFill>
                 <a:latin typeface="Calibri" pitchFamily="34" charset="0"/>
                 <a:ea typeface="Calibri" pitchFamily="34" charset="-122"/>
                 <a:cs typeface="Calibri" pitchFamily="34" charset="-120"/>
               </a:rPr>
               <a:t>Problem: </a:t>
             </a:r>
-            <a:pPr indent="0" marL="0">
-              <a:buNone/>
-            </a:pPr>
             <a:r>
               <a:rPr lang="en-US" sz="850" dirty="0">
-                <a:solidFill>
-                  <a:srgbClr val="334155"/>
-                </a:solidFill>
                 <a:latin typeface="Calibri" pitchFamily="34" charset="0"/>
                 <a:ea typeface="Calibri" pitchFamily="34" charset="-122"/>
                 <a:cs typeface="Calibri" pitchFamily="34" charset="-120"/>
@@ -20730,28 +20117,16 @@
               <a:t>Initial Vulnerability: Using raw phone IMU orientation caused 3D food models to float and drift whenever the user shifted posture.
 </a:t>
             </a:r>
-            <a:pPr indent="0" marL="0">
-              <a:buNone/>
-            </a:pPr>
             <a:r>
               <a:rPr lang="en-US" sz="850" b="1" dirty="0">
-                <a:solidFill>
-                  <a:srgbClr val="059669"/>
-                </a:solidFill>
                 <a:latin typeface="Calibri" pitchFamily="34" charset="0"/>
                 <a:ea typeface="Calibri" pitchFamily="34" charset="-122"/>
                 <a:cs typeface="Calibri" pitchFamily="34" charset="-120"/>
               </a:rPr>
               <a:t>Resolution: </a:t>
             </a:r>
-            <a:pPr indent="0" marL="0">
-              <a:buNone/>
-            </a:pPr>
             <a:r>
               <a:rPr lang="en-US" sz="850" dirty="0">
-                <a:solidFill>
-                  <a:srgbClr val="334155"/>
-                </a:solidFill>
                 <a:latin typeface="Calibri" pitchFamily="34" charset="0"/>
                 <a:ea typeface="Calibri" pitchFamily="34" charset="-122"/>
                 <a:cs typeface="Calibri" pitchFamily="34" charset="-120"/>
@@ -20810,14 +20185,11 @@
           <a:bodyPr wrap="square" lIns="0" tIns="0" rIns="0" bIns="0" rtlCol="0" anchor="ctr"/>
           <a:lstStyle/>
           <a:p>
-            <a:pPr indent="0" marL="0">
+            <a:pPr marL="0" indent="0">
               <a:buNone/>
             </a:pPr>
             <a:r>
               <a:rPr lang="en-US" sz="850" b="1" dirty="0">
-                <a:solidFill>
-                  <a:srgbClr val="2563EB"/>
-                </a:solidFill>
                 <a:latin typeface="Calibri" pitchFamily="34" charset="0"/>
                 <a:ea typeface="Calibri" pitchFamily="34" charset="-122"/>
                 <a:cs typeface="Calibri" pitchFamily="34" charset="-120"/>
@@ -20849,14 +20221,11 @@
           <a:bodyPr wrap="square" lIns="0" tIns="0" rIns="0" bIns="0" rtlCol="0" anchor="ctr"/>
           <a:lstStyle/>
           <a:p>
-            <a:pPr indent="0" marL="0">
+            <a:pPr marL="0" indent="0">
               <a:buNone/>
             </a:pPr>
             <a:r>
               <a:rPr lang="en-US" sz="1150" b="1" dirty="0">
-                <a:solidFill>
-                  <a:srgbClr val="1E3A8A"/>
-                </a:solidFill>
                 <a:latin typeface="Cambria" pitchFamily="34" charset="0"/>
                 <a:ea typeface="Cambria" pitchFamily="34" charset="-122"/>
                 <a:cs typeface="Cambria" pitchFamily="34" charset="-120"/>
@@ -20888,28 +20257,19 @@
           <a:bodyPr wrap="square" lIns="0" tIns="0" rIns="0" bIns="0" rtlCol="0" anchor="ctr"/>
           <a:lstStyle/>
           <a:p>
-            <a:pPr indent="0" marL="0">
+            <a:pPr marL="0" indent="0">
               <a:buNone/>
             </a:pPr>
             <a:r>
               <a:rPr lang="en-US" sz="850" b="1" dirty="0">
-                <a:solidFill>
-                  <a:srgbClr val="DC2626"/>
-                </a:solidFill>
                 <a:latin typeface="Calibri" pitchFamily="34" charset="0"/>
                 <a:ea typeface="Calibri" pitchFamily="34" charset="-122"/>
                 <a:cs typeface="Calibri" pitchFamily="34" charset="-120"/>
               </a:rPr>
               <a:t>Problem: </a:t>
             </a:r>
-            <a:pPr indent="0" marL="0">
-              <a:buNone/>
-            </a:pPr>
             <a:r>
               <a:rPr lang="en-US" sz="850" dirty="0">
-                <a:solidFill>
-                  <a:srgbClr val="334155"/>
-                </a:solidFill>
                 <a:latin typeface="Calibri" pitchFamily="34" charset="0"/>
                 <a:ea typeface="Calibri" pitchFamily="34" charset="-122"/>
                 <a:cs typeface="Calibri" pitchFamily="34" charset="-120"/>
@@ -20917,28 +20277,16 @@
               <a:t>Initial Vulnerability: Raw 3D models with 8K textures exceeded 46 MB, taking over 14 seconds to load and triggering mobile browser Out-Of-Memory (OOM) crashes.
 </a:t>
             </a:r>
-            <a:pPr indent="0" marL="0">
-              <a:buNone/>
-            </a:pPr>
             <a:r>
               <a:rPr lang="en-US" sz="850" b="1" dirty="0">
-                <a:solidFill>
-                  <a:srgbClr val="059669"/>
-                </a:solidFill>
                 <a:latin typeface="Calibri" pitchFamily="34" charset="0"/>
                 <a:ea typeface="Calibri" pitchFamily="34" charset="-122"/>
                 <a:cs typeface="Calibri" pitchFamily="34" charset="-120"/>
               </a:rPr>
               <a:t>Resolution: </a:t>
             </a:r>
-            <a:pPr indent="0" marL="0">
-              <a:buNone/>
-            </a:pPr>
             <a:r>
               <a:rPr lang="en-US" sz="850" dirty="0">
-                <a:solidFill>
-                  <a:srgbClr val="334155"/>
-                </a:solidFill>
                 <a:latin typeface="Calibri" pitchFamily="34" charset="0"/>
                 <a:ea typeface="Calibri" pitchFamily="34" charset="-122"/>
                 <a:cs typeface="Calibri" pitchFamily="34" charset="-120"/>
@@ -20997,14 +20345,11 @@
           <a:bodyPr wrap="square" lIns="0" tIns="0" rIns="0" bIns="0" rtlCol="0" anchor="ctr"/>
           <a:lstStyle/>
           <a:p>
-            <a:pPr indent="0" marL="0">
+            <a:pPr marL="0" indent="0">
               <a:buNone/>
             </a:pPr>
             <a:r>
               <a:rPr lang="en-US" sz="850" b="1" dirty="0">
-                <a:solidFill>
-                  <a:srgbClr val="2563EB"/>
-                </a:solidFill>
                 <a:latin typeface="Calibri" pitchFamily="34" charset="0"/>
                 <a:ea typeface="Calibri" pitchFamily="34" charset="-122"/>
                 <a:cs typeface="Calibri" pitchFamily="34" charset="-120"/>
@@ -21036,14 +20381,11 @@
           <a:bodyPr wrap="square" lIns="0" tIns="0" rIns="0" bIns="0" rtlCol="0" anchor="ctr"/>
           <a:lstStyle/>
           <a:p>
-            <a:pPr indent="0" marL="0">
+            <a:pPr marL="0" indent="0">
               <a:buNone/>
             </a:pPr>
             <a:r>
               <a:rPr lang="en-US" sz="1150" b="1" dirty="0">
-                <a:solidFill>
-                  <a:srgbClr val="1E3A8A"/>
-                </a:solidFill>
                 <a:latin typeface="Cambria" pitchFamily="34" charset="0"/>
                 <a:ea typeface="Cambria" pitchFamily="34" charset="-122"/>
                 <a:cs typeface="Cambria" pitchFamily="34" charset="-120"/>
@@ -21075,28 +20417,19 @@
           <a:bodyPr wrap="square" lIns="0" tIns="0" rIns="0" bIns="0" rtlCol="0" anchor="ctr"/>
           <a:lstStyle/>
           <a:p>
-            <a:pPr indent="0" marL="0">
+            <a:pPr marL="0" indent="0">
               <a:buNone/>
             </a:pPr>
             <a:r>
               <a:rPr lang="en-US" sz="850" b="1" dirty="0">
-                <a:solidFill>
-                  <a:srgbClr val="DC2626"/>
-                </a:solidFill>
                 <a:latin typeface="Calibri" pitchFamily="34" charset="0"/>
                 <a:ea typeface="Calibri" pitchFamily="34" charset="-122"/>
                 <a:cs typeface="Calibri" pitchFamily="34" charset="-120"/>
               </a:rPr>
               <a:t>Problem: </a:t>
             </a:r>
-            <a:pPr indent="0" marL="0">
-              <a:buNone/>
-            </a:pPr>
             <a:r>
               <a:rPr lang="en-US" sz="850" dirty="0">
-                <a:solidFill>
-                  <a:srgbClr val="334155"/>
-                </a:solidFill>
                 <a:latin typeface="Calibri" pitchFamily="34" charset="0"/>
                 <a:ea typeface="Calibri" pitchFamily="34" charset="-122"/>
                 <a:cs typeface="Calibri" pitchFamily="34" charset="-120"/>
@@ -21104,28 +20437,16 @@
               <a:t>Initial Vulnerability: Older smartphone browsers lack full WebXR AR session support, which would alienate patrons.
 </a:t>
             </a:r>
-            <a:pPr indent="0" marL="0">
-              <a:buNone/>
-            </a:pPr>
             <a:r>
               <a:rPr lang="en-US" sz="850" b="1" dirty="0">
-                <a:solidFill>
-                  <a:srgbClr val="059669"/>
-                </a:solidFill>
                 <a:latin typeface="Calibri" pitchFamily="34" charset="0"/>
                 <a:ea typeface="Calibri" pitchFamily="34" charset="-122"/>
                 <a:cs typeface="Calibri" pitchFamily="34" charset="-120"/>
               </a:rPr>
               <a:t>Resolution: </a:t>
             </a:r>
-            <a:pPr indent="0" marL="0">
-              <a:buNone/>
-            </a:pPr>
             <a:r>
               <a:rPr lang="en-US" sz="850" dirty="0">
-                <a:solidFill>
-                  <a:srgbClr val="334155"/>
-                </a:solidFill>
                 <a:latin typeface="Calibri" pitchFamily="34" charset="0"/>
                 <a:ea typeface="Calibri" pitchFamily="34" charset="-122"/>
                 <a:cs typeface="Calibri" pitchFamily="34" charset="-120"/>
@@ -21184,14 +20505,11 @@
           <a:bodyPr wrap="square" lIns="0" tIns="0" rIns="0" bIns="0" rtlCol="0" anchor="ctr"/>
           <a:lstStyle/>
           <a:p>
-            <a:pPr indent="0" marL="0">
+            <a:pPr marL="0" indent="0">
               <a:buNone/>
             </a:pPr>
             <a:r>
               <a:rPr lang="en-US" sz="850" b="1" dirty="0">
-                <a:solidFill>
-                  <a:srgbClr val="2563EB"/>
-                </a:solidFill>
                 <a:latin typeface="Calibri" pitchFamily="34" charset="0"/>
                 <a:ea typeface="Calibri" pitchFamily="34" charset="-122"/>
                 <a:cs typeface="Calibri" pitchFamily="34" charset="-120"/>
@@ -21223,14 +20541,11 @@
           <a:bodyPr wrap="square" lIns="0" tIns="0" rIns="0" bIns="0" rtlCol="0" anchor="ctr"/>
           <a:lstStyle/>
           <a:p>
-            <a:pPr indent="0" marL="0">
+            <a:pPr marL="0" indent="0">
               <a:buNone/>
             </a:pPr>
             <a:r>
               <a:rPr lang="en-US" sz="1150" b="1" dirty="0">
-                <a:solidFill>
-                  <a:srgbClr val="1E3A8A"/>
-                </a:solidFill>
                 <a:latin typeface="Cambria" pitchFamily="34" charset="0"/>
                 <a:ea typeface="Cambria" pitchFamily="34" charset="-122"/>
                 <a:cs typeface="Cambria" pitchFamily="34" charset="-120"/>
@@ -21262,28 +20577,19 @@
           <a:bodyPr wrap="square" lIns="0" tIns="0" rIns="0" bIns="0" rtlCol="0" anchor="ctr"/>
           <a:lstStyle/>
           <a:p>
-            <a:pPr indent="0" marL="0">
+            <a:pPr marL="0" indent="0">
               <a:buNone/>
             </a:pPr>
             <a:r>
               <a:rPr lang="en-US" sz="850" b="1" dirty="0">
-                <a:solidFill>
-                  <a:srgbClr val="DC2626"/>
-                </a:solidFill>
                 <a:latin typeface="Calibri" pitchFamily="34" charset="0"/>
                 <a:ea typeface="Calibri" pitchFamily="34" charset="-122"/>
                 <a:cs typeface="Calibri" pitchFamily="34" charset="-120"/>
               </a:rPr>
               <a:t>Problem: </a:t>
             </a:r>
-            <a:pPr indent="0" marL="0">
-              <a:buNone/>
-            </a:pPr>
             <a:r>
               <a:rPr lang="en-US" sz="850" dirty="0">
-                <a:solidFill>
-                  <a:srgbClr val="334155"/>
-                </a:solidFill>
                 <a:latin typeface="Calibri" pitchFamily="34" charset="0"/>
                 <a:ea typeface="Calibri" pitchFamily="34" charset="-122"/>
                 <a:cs typeface="Calibri" pitchFamily="34" charset="-120"/>
@@ -21291,28 +20597,16 @@
               <a:t>Initial Vulnerability: Mobile AR viewers refused to stream 3D GLB assets from standard cloud buckets due to strict cross-origin CORS and missing MIME types.
 </a:t>
             </a:r>
-            <a:pPr indent="0" marL="0">
-              <a:buNone/>
-            </a:pPr>
             <a:r>
               <a:rPr lang="en-US" sz="850" b="1" dirty="0">
-                <a:solidFill>
-                  <a:srgbClr val="059669"/>
-                </a:solidFill>
                 <a:latin typeface="Calibri" pitchFamily="34" charset="0"/>
                 <a:ea typeface="Calibri" pitchFamily="34" charset="-122"/>
                 <a:cs typeface="Calibri" pitchFamily="34" charset="-120"/>
               </a:rPr>
               <a:t>Resolution: </a:t>
             </a:r>
-            <a:pPr indent="0" marL="0">
-              <a:buNone/>
-            </a:pPr>
             <a:r>
               <a:rPr lang="en-US" sz="850" dirty="0">
-                <a:solidFill>
-                  <a:srgbClr val="334155"/>
-                </a:solidFill>
                 <a:latin typeface="Calibri" pitchFamily="34" charset="0"/>
                 <a:ea typeface="Calibri" pitchFamily="34" charset="-122"/>
                 <a:cs typeface="Calibri" pitchFamily="34" charset="-120"/>
@@ -21339,6 +20633,7 @@
         <a:solidFill>
           <a:srgbClr val="FFFFFF"/>
         </a:solidFill>
+        <a:effectLst/>
       </p:bgPr>
     </p:bg>
     <p:spTree>
@@ -21357,14 +20652,14 @@
       </p:grpSpPr>
       <p:pic>
         <p:nvPicPr>
-          <p:cNvPr id="2" name="Image 0" descr="d:\resrtorant\presentation_assets\tcet_header.jpeg">    </p:cNvPr>
+          <p:cNvPr id="2" name="Image 0" descr="d:\resrtorant\presentation_assets\tcet_header.jpeg"/>
           <p:cNvPicPr>
             <a:picLocks noChangeAspect="1"/>
           </p:cNvPicPr>
           <p:nvPr/>
         </p:nvPicPr>
         <p:blipFill>
-          <a:blip r:embed="rId1"/>
+          <a:blip r:embed="rId3"/>
           <a:stretch>
             <a:fillRect/>
           </a:stretch>
@@ -21400,14 +20695,11 @@
           <a:bodyPr wrap="square" lIns="0" tIns="0" rIns="0" bIns="0" rtlCol="0" anchor="ctr"/>
           <a:lstStyle/>
           <a:p>
-            <a:pPr indent="0" marL="0">
+            <a:pPr marL="0" indent="0">
               <a:buNone/>
             </a:pPr>
             <a:r>
               <a:rPr lang="en-US" sz="1650" b="1" dirty="0">
-                <a:solidFill>
-                  <a:srgbClr val="1E3A8A"/>
-                </a:solidFill>
                 <a:latin typeface="Cambria" pitchFamily="34" charset="0"/>
                 <a:ea typeface="Cambria" pitchFamily="34" charset="-122"/>
                 <a:cs typeface="Cambria" pitchFamily="34" charset="-120"/>
@@ -21439,7 +20731,7 @@
           <a:bodyPr wrap="square" lIns="0" tIns="0" rIns="0" bIns="0" rtlCol="0" anchor="ctr"/>
           <a:lstStyle/>
           <a:p>
-            <a:pPr algn="r" indent="0" marL="0">
+            <a:pPr marL="0" indent="0" algn="r">
               <a:buNone/>
             </a:pPr>
             <a:r>
@@ -21478,7 +20770,7 @@
           <a:bodyPr wrap="square" lIns="0" tIns="0" rIns="0" bIns="0" rtlCol="0" anchor="ctr"/>
           <a:lstStyle/>
           <a:p>
-            <a:pPr indent="0" marL="0">
+            <a:pPr marL="0" indent="0">
               <a:buNone/>
             </a:pPr>
             <a:r>
@@ -21517,7 +20809,7 @@
           <a:bodyPr wrap="square" lIns="0" tIns="0" rIns="0" bIns="0" rtlCol="0" anchor="ctr"/>
           <a:lstStyle/>
           <a:p>
-            <a:pPr algn="r" indent="0" marL="0">
+            <a:pPr marL="0" indent="0" algn="r">
               <a:buNone/>
             </a:pPr>
             <a:r>
@@ -21583,14 +20875,11 @@
           <a:bodyPr wrap="square" lIns="0" tIns="0" rIns="0" bIns="0" rtlCol="0" anchor="ctr"/>
           <a:lstStyle/>
           <a:p>
-            <a:pPr indent="0" marL="0">
+            <a:pPr marL="0" indent="0">
               <a:buNone/>
             </a:pPr>
             <a:r>
               <a:rPr lang="en-US" sz="1200" b="1" dirty="0">
-                <a:solidFill>
-                  <a:srgbClr val="1E3A8A"/>
-                </a:solidFill>
                 <a:latin typeface="Cambria" pitchFamily="34" charset="0"/>
                 <a:ea typeface="Cambria" pitchFamily="34" charset="-122"/>
                 <a:cs typeface="Cambria" pitchFamily="34" charset="-120"/>
@@ -21622,14 +20911,11 @@
           <a:bodyPr wrap="square" lIns="0" tIns="0" rIns="0" bIns="0" rtlCol="0" anchor="ctr"/>
           <a:lstStyle/>
           <a:p>
-            <a:pPr algn="r" indent="0" marL="0">
+            <a:pPr marL="0" indent="0" algn="r">
               <a:buNone/>
             </a:pPr>
             <a:r>
               <a:rPr lang="en-US" sz="950" b="1" dirty="0">
-                <a:solidFill>
-                  <a:srgbClr val="2563EB"/>
-                </a:solidFill>
                 <a:latin typeface="Calibri" pitchFamily="34" charset="0"/>
                 <a:ea typeface="Calibri" pitchFamily="34" charset="-122"/>
                 <a:cs typeface="Calibri" pitchFamily="34" charset="-120"/>
@@ -21661,14 +20947,11 @@
           <a:bodyPr wrap="square" lIns="0" tIns="0" rIns="0" bIns="0" rtlCol="0" anchor="ctr"/>
           <a:lstStyle/>
           <a:p>
-            <a:pPr indent="0" marL="0">
+            <a:pPr marL="0" indent="0">
               <a:buNone/>
             </a:pPr>
             <a:r>
               <a:rPr lang="en-US" sz="950" dirty="0">
-                <a:solidFill>
-                  <a:srgbClr val="334155"/>
-                </a:solidFill>
                 <a:latin typeface="Calibri" pitchFamily="34" charset="0"/>
                 <a:ea typeface="Calibri" pitchFamily="34" charset="-122"/>
                 <a:cs typeface="Calibri" pitchFamily="34" charset="-120"/>
@@ -21727,14 +21010,11 @@
           <a:bodyPr wrap="square" lIns="0" tIns="0" rIns="0" bIns="0" rtlCol="0" anchor="ctr"/>
           <a:lstStyle/>
           <a:p>
-            <a:pPr indent="0" marL="0">
+            <a:pPr marL="0" indent="0">
               <a:buNone/>
             </a:pPr>
             <a:r>
               <a:rPr lang="en-US" sz="1200" b="1" dirty="0">
-                <a:solidFill>
-                  <a:srgbClr val="1E3A8A"/>
-                </a:solidFill>
                 <a:latin typeface="Cambria" pitchFamily="34" charset="0"/>
                 <a:ea typeface="Cambria" pitchFamily="34" charset="-122"/>
                 <a:cs typeface="Cambria" pitchFamily="34" charset="-120"/>
@@ -21766,14 +21046,11 @@
           <a:bodyPr wrap="square" lIns="0" tIns="0" rIns="0" bIns="0" rtlCol="0" anchor="ctr"/>
           <a:lstStyle/>
           <a:p>
-            <a:pPr algn="r" indent="0" marL="0">
+            <a:pPr marL="0" indent="0" algn="r">
               <a:buNone/>
             </a:pPr>
             <a:r>
               <a:rPr lang="en-US" sz="950" b="1" dirty="0">
-                <a:solidFill>
-                  <a:srgbClr val="2563EB"/>
-                </a:solidFill>
                 <a:latin typeface="Calibri" pitchFamily="34" charset="0"/>
                 <a:ea typeface="Calibri" pitchFamily="34" charset="-122"/>
                 <a:cs typeface="Calibri" pitchFamily="34" charset="-120"/>
@@ -21805,14 +21082,11 @@
           <a:bodyPr wrap="square" lIns="0" tIns="0" rIns="0" bIns="0" rtlCol="0" anchor="ctr"/>
           <a:lstStyle/>
           <a:p>
-            <a:pPr indent="0" marL="0">
+            <a:pPr marL="0" indent="0">
               <a:buNone/>
             </a:pPr>
             <a:r>
               <a:rPr lang="en-US" sz="950" dirty="0">
-                <a:solidFill>
-                  <a:srgbClr val="334155"/>
-                </a:solidFill>
                 <a:latin typeface="Calibri" pitchFamily="34" charset="0"/>
                 <a:ea typeface="Calibri" pitchFamily="34" charset="-122"/>
                 <a:cs typeface="Calibri" pitchFamily="34" charset="-120"/>
@@ -21871,14 +21145,11 @@
           <a:bodyPr wrap="square" lIns="0" tIns="0" rIns="0" bIns="0" rtlCol="0" anchor="ctr"/>
           <a:lstStyle/>
           <a:p>
-            <a:pPr indent="0" marL="0">
+            <a:pPr marL="0" indent="0">
               <a:buNone/>
             </a:pPr>
             <a:r>
               <a:rPr lang="en-US" sz="1200" b="1" dirty="0">
-                <a:solidFill>
-                  <a:srgbClr val="1E3A8A"/>
-                </a:solidFill>
                 <a:latin typeface="Cambria" pitchFamily="34" charset="0"/>
                 <a:ea typeface="Cambria" pitchFamily="34" charset="-122"/>
                 <a:cs typeface="Cambria" pitchFamily="34" charset="-120"/>
@@ -21910,14 +21181,11 @@
           <a:bodyPr wrap="square" lIns="0" tIns="0" rIns="0" bIns="0" rtlCol="0" anchor="ctr"/>
           <a:lstStyle/>
           <a:p>
-            <a:pPr algn="r" indent="0" marL="0">
+            <a:pPr marL="0" indent="0" algn="r">
               <a:buNone/>
             </a:pPr>
             <a:r>
               <a:rPr lang="en-US" sz="950" b="1" dirty="0">
-                <a:solidFill>
-                  <a:srgbClr val="2563EB"/>
-                </a:solidFill>
                 <a:latin typeface="Calibri" pitchFamily="34" charset="0"/>
                 <a:ea typeface="Calibri" pitchFamily="34" charset="-122"/>
                 <a:cs typeface="Calibri" pitchFamily="34" charset="-120"/>
@@ -21949,14 +21217,11 @@
           <a:bodyPr wrap="square" lIns="0" tIns="0" rIns="0" bIns="0" rtlCol="0" anchor="ctr"/>
           <a:lstStyle/>
           <a:p>
-            <a:pPr indent="0" marL="0">
+            <a:pPr marL="0" indent="0">
               <a:buNone/>
             </a:pPr>
             <a:r>
               <a:rPr lang="en-US" sz="950" dirty="0">
-                <a:solidFill>
-                  <a:srgbClr val="334155"/>
-                </a:solidFill>
                 <a:latin typeface="Calibri" pitchFamily="34" charset="0"/>
                 <a:ea typeface="Calibri" pitchFamily="34" charset="-122"/>
                 <a:cs typeface="Calibri" pitchFamily="34" charset="-120"/>
@@ -22015,14 +21280,11 @@
           <a:bodyPr wrap="square" lIns="0" tIns="0" rIns="0" bIns="0" rtlCol="0" anchor="ctr"/>
           <a:lstStyle/>
           <a:p>
-            <a:pPr indent="0" marL="0">
+            <a:pPr marL="0" indent="0">
               <a:buNone/>
             </a:pPr>
             <a:r>
               <a:rPr lang="en-US" sz="1200" b="1" dirty="0">
-                <a:solidFill>
-                  <a:srgbClr val="1E3A8A"/>
-                </a:solidFill>
                 <a:latin typeface="Cambria" pitchFamily="34" charset="0"/>
                 <a:ea typeface="Cambria" pitchFamily="34" charset="-122"/>
                 <a:cs typeface="Cambria" pitchFamily="34" charset="-120"/>
@@ -22054,14 +21316,11 @@
           <a:bodyPr wrap="square" lIns="0" tIns="0" rIns="0" bIns="0" rtlCol="0" anchor="ctr"/>
           <a:lstStyle/>
           <a:p>
-            <a:pPr algn="r" indent="0" marL="0">
+            <a:pPr marL="0" indent="0" algn="r">
               <a:buNone/>
             </a:pPr>
             <a:r>
               <a:rPr lang="en-US" sz="950" b="1" dirty="0">
-                <a:solidFill>
-                  <a:srgbClr val="2563EB"/>
-                </a:solidFill>
                 <a:latin typeface="Calibri" pitchFamily="34" charset="0"/>
                 <a:ea typeface="Calibri" pitchFamily="34" charset="-122"/>
                 <a:cs typeface="Calibri" pitchFamily="34" charset="-120"/>
@@ -22093,14 +21352,11 @@
           <a:bodyPr wrap="square" lIns="0" tIns="0" rIns="0" bIns="0" rtlCol="0" anchor="ctr"/>
           <a:lstStyle/>
           <a:p>
-            <a:pPr indent="0" marL="0">
+            <a:pPr marL="0" indent="0">
               <a:buNone/>
             </a:pPr>
             <a:r>
               <a:rPr lang="en-US" sz="950" dirty="0">
-                <a:solidFill>
-                  <a:srgbClr val="334155"/>
-                </a:solidFill>
                 <a:latin typeface="Calibri" pitchFamily="34" charset="0"/>
                 <a:ea typeface="Calibri" pitchFamily="34" charset="-122"/>
                 <a:cs typeface="Calibri" pitchFamily="34" charset="-120"/>
@@ -22127,6 +21383,7 @@
         <a:solidFill>
           <a:srgbClr val="FFFFFF"/>
         </a:solidFill>
+        <a:effectLst/>
       </p:bgPr>
     </p:bg>
     <p:spTree>
@@ -22145,14 +21402,14 @@
       </p:grpSpPr>
       <p:pic>
         <p:nvPicPr>
-          <p:cNvPr id="2" name="Image 0" descr="d:\resrtorant\presentation_assets\tcet_header.jpeg">    </p:cNvPr>
+          <p:cNvPr id="2" name="Image 0" descr="d:\resrtorant\presentation_assets\tcet_header.jpeg"/>
           <p:cNvPicPr>
             <a:picLocks noChangeAspect="1"/>
           </p:cNvPicPr>
           <p:nvPr/>
         </p:nvPicPr>
         <p:blipFill>
-          <a:blip r:embed="rId1"/>
+          <a:blip r:embed="rId3"/>
           <a:stretch>
             <a:fillRect/>
           </a:stretch>
@@ -22188,14 +21445,11 @@
           <a:bodyPr wrap="square" lIns="0" tIns="0" rIns="0" bIns="0" rtlCol="0" anchor="ctr"/>
           <a:lstStyle/>
           <a:p>
-            <a:pPr indent="0" marL="0">
+            <a:pPr marL="0" indent="0">
               <a:buNone/>
             </a:pPr>
             <a:r>
               <a:rPr lang="en-US" sz="1650" b="1" dirty="0">
-                <a:solidFill>
-                  <a:srgbClr val="1E3A8A"/>
-                </a:solidFill>
                 <a:latin typeface="Cambria" pitchFamily="34" charset="0"/>
                 <a:ea typeface="Cambria" pitchFamily="34" charset="-122"/>
                 <a:cs typeface="Cambria" pitchFamily="34" charset="-120"/>
@@ -22227,14 +21481,11 @@
           <a:bodyPr wrap="square" lIns="0" tIns="0" rIns="0" bIns="0" rtlCol="0" anchor="ctr"/>
           <a:lstStyle/>
           <a:p>
-            <a:pPr algn="r" indent="0" marL="0">
+            <a:pPr marL="0" indent="0" algn="r">
               <a:buNone/>
             </a:pPr>
             <a:r>
               <a:rPr lang="en-US" sz="950" b="1" dirty="0">
-                <a:solidFill>
-                  <a:srgbClr val="2563EB"/>
-                </a:solidFill>
                 <a:latin typeface="Calibri" pitchFamily="34" charset="0"/>
                 <a:ea typeface="Calibri" pitchFamily="34" charset="-122"/>
                 <a:cs typeface="Calibri" pitchFamily="34" charset="-120"/>
@@ -22266,7 +21517,7 @@
           <a:bodyPr wrap="square" lIns="0" tIns="0" rIns="0" bIns="0" rtlCol="0" anchor="ctr"/>
           <a:lstStyle/>
           <a:p>
-            <a:pPr indent="0" marL="0">
+            <a:pPr marL="0" indent="0">
               <a:buNone/>
             </a:pPr>
             <a:r>
@@ -22305,7 +21556,7 @@
           <a:bodyPr wrap="square" lIns="0" tIns="0" rIns="0" bIns="0" rtlCol="0" anchor="ctr"/>
           <a:lstStyle/>
           <a:p>
-            <a:pPr algn="r" indent="0" marL="0">
+            <a:pPr marL="0" indent="0" algn="r">
               <a:buNone/>
             </a:pPr>
             <a:r>
@@ -22371,14 +21622,11 @@
           <a:bodyPr wrap="square" lIns="0" tIns="0" rIns="0" bIns="0" rtlCol="0" anchor="ctr"/>
           <a:lstStyle/>
           <a:p>
-            <a:pPr indent="0" marL="0">
+            <a:pPr marL="0" indent="0">
               <a:buNone/>
             </a:pPr>
             <a:r>
               <a:rPr lang="en-US" sz="1200" b="1" dirty="0">
-                <a:solidFill>
-                  <a:srgbClr val="1E3A8A"/>
-                </a:solidFill>
                 <a:latin typeface="Cambria" pitchFamily="34" charset="0"/>
                 <a:ea typeface="Cambria" pitchFamily="34" charset="-122"/>
                 <a:cs typeface="Cambria" pitchFamily="34" charset="-120"/>
@@ -22410,14 +21658,11 @@
           <a:bodyPr wrap="square" lIns="0" tIns="0" rIns="0" bIns="0" rtlCol="0" anchor="ctr"/>
           <a:lstStyle/>
           <a:p>
-            <a:pPr indent="0" marL="0">
+            <a:pPr marL="0" indent="0">
               <a:buNone/>
             </a:pPr>
             <a:r>
               <a:rPr lang="en-US" sz="900" b="1" dirty="0">
-                <a:solidFill>
-                  <a:srgbClr val="2563EB"/>
-                </a:solidFill>
                 <a:latin typeface="Calibri" pitchFamily="34" charset="0"/>
                 <a:ea typeface="Calibri" pitchFamily="34" charset="-122"/>
                 <a:cs typeface="Calibri" pitchFamily="34" charset="-120"/>
@@ -22458,9 +21703,6 @@
             </a:pPr>
             <a:r>
               <a:rPr lang="en-US" sz="950" dirty="0">
-                <a:solidFill>
-                  <a:srgbClr val="334155"/>
-                </a:solidFill>
                 <a:latin typeface="Calibri" pitchFamily="34" charset="0"/>
                 <a:ea typeface="Calibri" pitchFamily="34" charset="-122"/>
                 <a:cs typeface="Calibri" pitchFamily="34" charset="-120"/>
@@ -22479,9 +21721,6 @@
             </a:pPr>
             <a:r>
               <a:rPr lang="en-US" sz="950" dirty="0">
-                <a:solidFill>
-                  <a:srgbClr val="334155"/>
-                </a:solidFill>
                 <a:latin typeface="Calibri" pitchFamily="34" charset="0"/>
                 <a:ea typeface="Calibri" pitchFamily="34" charset="-122"/>
                 <a:cs typeface="Calibri" pitchFamily="34" charset="-120"/>
@@ -22500,9 +21739,6 @@
             </a:pPr>
             <a:r>
               <a:rPr lang="en-US" sz="950" dirty="0">
-                <a:solidFill>
-                  <a:srgbClr val="334155"/>
-                </a:solidFill>
                 <a:latin typeface="Calibri" pitchFamily="34" charset="0"/>
                 <a:ea typeface="Calibri" pitchFamily="34" charset="-122"/>
                 <a:cs typeface="Calibri" pitchFamily="34" charset="-120"/>
@@ -22561,14 +21797,11 @@
           <a:bodyPr wrap="square" lIns="0" tIns="0" rIns="0" bIns="0" rtlCol="0" anchor="ctr"/>
           <a:lstStyle/>
           <a:p>
-            <a:pPr indent="0" marL="0">
+            <a:pPr marL="0" indent="0">
               <a:buNone/>
             </a:pPr>
             <a:r>
               <a:rPr lang="en-US" sz="1200" b="1" dirty="0">
-                <a:solidFill>
-                  <a:srgbClr val="1E3A8A"/>
-                </a:solidFill>
                 <a:latin typeface="Cambria" pitchFamily="34" charset="0"/>
                 <a:ea typeface="Cambria" pitchFamily="34" charset="-122"/>
                 <a:cs typeface="Cambria" pitchFamily="34" charset="-120"/>
@@ -22600,14 +21833,11 @@
           <a:bodyPr wrap="square" lIns="0" tIns="0" rIns="0" bIns="0" rtlCol="0" anchor="ctr"/>
           <a:lstStyle/>
           <a:p>
-            <a:pPr indent="0" marL="0">
+            <a:pPr marL="0" indent="0">
               <a:buNone/>
             </a:pPr>
             <a:r>
               <a:rPr lang="en-US" sz="900" b="1" dirty="0">
-                <a:solidFill>
-                  <a:srgbClr val="2563EB"/>
-                </a:solidFill>
                 <a:latin typeface="Calibri" pitchFamily="34" charset="0"/>
                 <a:ea typeface="Calibri" pitchFamily="34" charset="-122"/>
                 <a:cs typeface="Calibri" pitchFamily="34" charset="-120"/>
@@ -22648,9 +21878,6 @@
             </a:pPr>
             <a:r>
               <a:rPr lang="en-US" sz="950" dirty="0">
-                <a:solidFill>
-                  <a:srgbClr val="334155"/>
-                </a:solidFill>
                 <a:latin typeface="Calibri" pitchFamily="34" charset="0"/>
                 <a:ea typeface="Calibri" pitchFamily="34" charset="-122"/>
                 <a:cs typeface="Calibri" pitchFamily="34" charset="-120"/>
@@ -22669,9 +21896,6 @@
             </a:pPr>
             <a:r>
               <a:rPr lang="en-US" sz="950" dirty="0">
-                <a:solidFill>
-                  <a:srgbClr val="334155"/>
-                </a:solidFill>
                 <a:latin typeface="Calibri" pitchFamily="34" charset="0"/>
                 <a:ea typeface="Calibri" pitchFamily="34" charset="-122"/>
                 <a:cs typeface="Calibri" pitchFamily="34" charset="-120"/>
@@ -22690,9 +21914,6 @@
             </a:pPr>
             <a:r>
               <a:rPr lang="en-US" sz="950" dirty="0">
-                <a:solidFill>
-                  <a:srgbClr val="334155"/>
-                </a:solidFill>
                 <a:latin typeface="Calibri" pitchFamily="34" charset="0"/>
                 <a:ea typeface="Calibri" pitchFamily="34" charset="-122"/>
                 <a:cs typeface="Calibri" pitchFamily="34" charset="-120"/>
@@ -22751,14 +21972,11 @@
           <a:bodyPr wrap="square" lIns="0" tIns="0" rIns="0" bIns="0" rtlCol="0" anchor="ctr"/>
           <a:lstStyle/>
           <a:p>
-            <a:pPr indent="0" marL="0">
+            <a:pPr marL="0" indent="0">
               <a:buNone/>
             </a:pPr>
             <a:r>
               <a:rPr lang="en-US" sz="1200" b="1" dirty="0">
-                <a:solidFill>
-                  <a:srgbClr val="1E3A8A"/>
-                </a:solidFill>
                 <a:latin typeface="Cambria" pitchFamily="34" charset="0"/>
                 <a:ea typeface="Cambria" pitchFamily="34" charset="-122"/>
                 <a:cs typeface="Cambria" pitchFamily="34" charset="-120"/>
@@ -22790,14 +22008,11 @@
           <a:bodyPr wrap="square" lIns="0" tIns="0" rIns="0" bIns="0" rtlCol="0" anchor="ctr"/>
           <a:lstStyle/>
           <a:p>
-            <a:pPr indent="0" marL="0">
+            <a:pPr marL="0" indent="0">
               <a:buNone/>
             </a:pPr>
             <a:r>
               <a:rPr lang="en-US" sz="900" b="1" dirty="0">
-                <a:solidFill>
-                  <a:srgbClr val="2563EB"/>
-                </a:solidFill>
                 <a:latin typeface="Calibri" pitchFamily="34" charset="0"/>
                 <a:ea typeface="Calibri" pitchFamily="34" charset="-122"/>
                 <a:cs typeface="Calibri" pitchFamily="34" charset="-120"/>
@@ -22838,9 +22053,6 @@
             </a:pPr>
             <a:r>
               <a:rPr lang="en-US" sz="950" dirty="0">
-                <a:solidFill>
-                  <a:srgbClr val="334155"/>
-                </a:solidFill>
                 <a:latin typeface="Calibri" pitchFamily="34" charset="0"/>
                 <a:ea typeface="Calibri" pitchFamily="34" charset="-122"/>
                 <a:cs typeface="Calibri" pitchFamily="34" charset="-120"/>
@@ -22859,9 +22071,6 @@
             </a:pPr>
             <a:r>
               <a:rPr lang="en-US" sz="950" dirty="0">
-                <a:solidFill>
-                  <a:srgbClr val="334155"/>
-                </a:solidFill>
                 <a:latin typeface="Calibri" pitchFamily="34" charset="0"/>
                 <a:ea typeface="Calibri" pitchFamily="34" charset="-122"/>
                 <a:cs typeface="Calibri" pitchFamily="34" charset="-120"/>
@@ -22880,9 +22089,6 @@
             </a:pPr>
             <a:r>
               <a:rPr lang="en-US" sz="950" dirty="0">
-                <a:solidFill>
-                  <a:srgbClr val="334155"/>
-                </a:solidFill>
                 <a:latin typeface="Calibri" pitchFamily="34" charset="0"/>
                 <a:ea typeface="Calibri" pitchFamily="34" charset="-122"/>
                 <a:cs typeface="Calibri" pitchFamily="34" charset="-120"/>
@@ -22941,14 +22147,11 @@
           <a:bodyPr wrap="square" lIns="0" tIns="0" rIns="0" bIns="0" rtlCol="0" anchor="ctr"/>
           <a:lstStyle/>
           <a:p>
-            <a:pPr indent="0" marL="0">
+            <a:pPr marL="0" indent="0">
               <a:buNone/>
             </a:pPr>
             <a:r>
               <a:rPr lang="en-US" sz="1200" b="1" dirty="0">
-                <a:solidFill>
-                  <a:srgbClr val="1E3A8A"/>
-                </a:solidFill>
                 <a:latin typeface="Cambria" pitchFamily="34" charset="0"/>
                 <a:ea typeface="Cambria" pitchFamily="34" charset="-122"/>
                 <a:cs typeface="Cambria" pitchFamily="34" charset="-120"/>
@@ -22980,14 +22183,11 @@
           <a:bodyPr wrap="square" lIns="0" tIns="0" rIns="0" bIns="0" rtlCol="0" anchor="ctr"/>
           <a:lstStyle/>
           <a:p>
-            <a:pPr indent="0" marL="0">
+            <a:pPr marL="0" indent="0">
               <a:buNone/>
             </a:pPr>
             <a:r>
               <a:rPr lang="en-US" sz="900" b="1" dirty="0">
-                <a:solidFill>
-                  <a:srgbClr val="2563EB"/>
-                </a:solidFill>
                 <a:latin typeface="Calibri" pitchFamily="34" charset="0"/>
                 <a:ea typeface="Calibri" pitchFamily="34" charset="-122"/>
                 <a:cs typeface="Calibri" pitchFamily="34" charset="-120"/>
@@ -23028,9 +22228,6 @@
             </a:pPr>
             <a:r>
               <a:rPr lang="en-US" sz="950" dirty="0">
-                <a:solidFill>
-                  <a:srgbClr val="334155"/>
-                </a:solidFill>
                 <a:latin typeface="Calibri" pitchFamily="34" charset="0"/>
                 <a:ea typeface="Calibri" pitchFamily="34" charset="-122"/>
                 <a:cs typeface="Calibri" pitchFamily="34" charset="-120"/>
@@ -23049,9 +22246,6 @@
             </a:pPr>
             <a:r>
               <a:rPr lang="en-US" sz="950" dirty="0">
-                <a:solidFill>
-                  <a:srgbClr val="334155"/>
-                </a:solidFill>
                 <a:latin typeface="Calibri" pitchFamily="34" charset="0"/>
                 <a:ea typeface="Calibri" pitchFamily="34" charset="-122"/>
                 <a:cs typeface="Calibri" pitchFamily="34" charset="-120"/>
@@ -23070,9 +22264,6 @@
             </a:pPr>
             <a:r>
               <a:rPr lang="en-US" sz="950" dirty="0">
-                <a:solidFill>
-                  <a:srgbClr val="334155"/>
-                </a:solidFill>
                 <a:latin typeface="Calibri" pitchFamily="34" charset="0"/>
                 <a:ea typeface="Calibri" pitchFamily="34" charset="-122"/>
                 <a:cs typeface="Calibri" pitchFamily="34" charset="-120"/>
@@ -23384,4 +22575,299 @@
     </a:ext>
   </a:extLst>
 </a:theme>
+</file>
+
+<file path=ppt/theme/theme2.xml><?xml version="1.0" encoding="utf-8"?>
+<a:theme xmlns:a="http://schemas.openxmlformats.org/drawingml/2006/main" name="Office Theme">
+  <a:themeElements>
+    <a:clrScheme name="Office">
+      <a:dk1>
+        <a:sysClr val="windowText" lastClr="000000"/>
+      </a:dk1>
+      <a:lt1>
+        <a:sysClr val="window" lastClr="FFFFFF"/>
+      </a:lt1>
+      <a:dk2>
+        <a:srgbClr val="44546A"/>
+      </a:dk2>
+      <a:lt2>
+        <a:srgbClr val="E7E6E6"/>
+      </a:lt2>
+      <a:accent1>
+        <a:srgbClr val="4472C4"/>
+      </a:accent1>
+      <a:accent2>
+        <a:srgbClr val="ED7D31"/>
+      </a:accent2>
+      <a:accent3>
+        <a:srgbClr val="A5A5A5"/>
+      </a:accent3>
+      <a:accent4>
+        <a:srgbClr val="FFC000"/>
+      </a:accent4>
+      <a:accent5>
+        <a:srgbClr val="5B9BD5"/>
+      </a:accent5>
+      <a:accent6>
+        <a:srgbClr val="70AD47"/>
+      </a:accent6>
+      <a:hlink>
+        <a:srgbClr val="0563C1"/>
+      </a:hlink>
+      <a:folHlink>
+        <a:srgbClr val="954F72"/>
+      </a:folHlink>
+    </a:clrScheme>
+    <a:fontScheme name="Office">
+      <a:majorFont>
+        <a:latin typeface="Calibri Light" panose="020F0302020204030204"/>
+        <a:ea typeface=""/>
+        <a:cs typeface=""/>
+        <a:font script="Jpan" typeface="游ゴシック Light"/>
+        <a:font script="Hang" typeface="맑은 고딕"/>
+        <a:font script="Hans" typeface="等线 Light"/>
+        <a:font script="Hant" typeface="新細明體"/>
+        <a:font script="Arab" typeface="Times New Roman"/>
+        <a:font script="Hebr" typeface="Times New Roman"/>
+        <a:font script="Thai" typeface="Angsana New"/>
+        <a:font script="Ethi" typeface="Nyala"/>
+        <a:font script="Beng" typeface="Vrinda"/>
+        <a:font script="Gujr" typeface="Shruti"/>
+        <a:font script="Khmr" typeface="MoolBoran"/>
+        <a:font script="Knda" typeface="Tunga"/>
+        <a:font script="Guru" typeface="Raavi"/>
+        <a:font script="Cans" typeface="Euphemia"/>
+        <a:font script="Cher" typeface="Plantagenet Cherokee"/>
+        <a:font script="Yiii" typeface="Microsoft Yi Baiti"/>
+        <a:font script="Tibt" typeface="Microsoft Himalaya"/>
+        <a:font script="Thaa" typeface="MV Boli"/>
+        <a:font script="Deva" typeface="Mangal"/>
+        <a:font script="Telu" typeface="Gautami"/>
+        <a:font script="Taml" typeface="Latha"/>
+        <a:font script="Syrc" typeface="Estrangelo Edessa"/>
+        <a:font script="Orya" typeface="Kalinga"/>
+        <a:font script="Mlym" typeface="Kartika"/>
+        <a:font script="Laoo" typeface="DokChampa"/>
+        <a:font script="Sinh" typeface="Iskoola Pota"/>
+        <a:font script="Mong" typeface="Mongolian Baiti"/>
+        <a:font script="Viet" typeface="Times New Roman"/>
+        <a:font script="Uigh" typeface="Microsoft Uighur"/>
+        <a:font script="Geor" typeface="Sylfaen"/>
+        <a:font script="Armn" typeface="Arial"/>
+        <a:font script="Bugi" typeface="Leelawadee UI"/>
+        <a:font script="Bopo" typeface="Microsoft JhengHei"/>
+        <a:font script="Java" typeface="Javanese Text"/>
+        <a:font script="Lisu" typeface="Segoe UI"/>
+        <a:font script="Mymr" typeface="Myanmar Text"/>
+        <a:font script="Nkoo" typeface="Ebrima"/>
+        <a:font script="Olck" typeface="Nirmala UI"/>
+        <a:font script="Osma" typeface="Ebrima"/>
+        <a:font script="Phag" typeface="Phagspa"/>
+        <a:font script="Syrn" typeface="Estrangelo Edessa"/>
+        <a:font script="Syrj" typeface="Estrangelo Edessa"/>
+        <a:font script="Syre" typeface="Estrangelo Edessa"/>
+        <a:font script="Sora" typeface="Nirmala UI"/>
+        <a:font script="Tale" typeface="Microsoft Tai Le"/>
+        <a:font script="Talu" typeface="Microsoft New Tai Lue"/>
+        <a:font script="Tfng" typeface="Ebrima"/>
+      </a:majorFont>
+      <a:minorFont>
+        <a:latin typeface="Calibri" panose="020F0502020204030204"/>
+        <a:ea typeface=""/>
+        <a:cs typeface=""/>
+        <a:font script="Jpan" typeface="游ゴシック"/>
+        <a:font script="Hang" typeface="맑은 고딕"/>
+        <a:font script="Hans" typeface="等线"/>
+        <a:font script="Hant" typeface="新細明體"/>
+        <a:font script="Arab" typeface="Arial"/>
+        <a:font script="Hebr" typeface="Arial"/>
+        <a:font script="Thai" typeface="Cordia New"/>
+        <a:font script="Ethi" typeface="Nyala"/>
+        <a:font script="Beng" typeface="Vrinda"/>
+        <a:font script="Gujr" typeface="Shruti"/>
+        <a:font script="Khmr" typeface="DaunPenh"/>
+        <a:font script="Knda" typeface="Tunga"/>
+        <a:font script="Guru" typeface="Raavi"/>
+        <a:font script="Cans" typeface="Euphemia"/>
+        <a:font script="Cher" typeface="Plantagenet Cherokee"/>
+        <a:font script="Yiii" typeface="Microsoft Yi Baiti"/>
+        <a:font script="Tibt" typeface="Microsoft Himalaya"/>
+        <a:font script="Thaa" typeface="MV Boli"/>
+        <a:font script="Deva" typeface="Mangal"/>
+        <a:font script="Telu" typeface="Gautami"/>
+        <a:font script="Taml" typeface="Latha"/>
+        <a:font script="Syrc" typeface="Estrangelo Edessa"/>
+        <a:font script="Orya" typeface="Kalinga"/>
+        <a:font script="Mlym" typeface="Kartika"/>
+        <a:font script="Laoo" typeface="DokChampa"/>
+        <a:font script="Sinh" typeface="Iskoola Pota"/>
+        <a:font script="Mong" typeface="Mongolian Baiti"/>
+        <a:font script="Viet" typeface="Arial"/>
+        <a:font script="Uigh" typeface="Microsoft Uighur"/>
+        <a:font script="Geor" typeface="Sylfaen"/>
+        <a:font script="Armn" typeface="Arial"/>
+        <a:font script="Bugi" typeface="Leelawadee UI"/>
+        <a:font script="Bopo" typeface="Microsoft JhengHei"/>
+        <a:font script="Java" typeface="Javanese Text"/>
+        <a:font script="Lisu" typeface="Segoe UI"/>
+        <a:font script="Mymr" typeface="Myanmar Text"/>
+        <a:font script="Nkoo" typeface="Ebrima"/>
+        <a:font script="Olck" typeface="Nirmala UI"/>
+        <a:font script="Osma" typeface="Ebrima"/>
+        <a:font script="Phag" typeface="Phagspa"/>
+        <a:font script="Syrn" typeface="Estrangelo Edessa"/>
+        <a:font script="Syrj" typeface="Estrangelo Edessa"/>
+        <a:font script="Syre" typeface="Estrangelo Edessa"/>
+        <a:font script="Sora" typeface="Nirmala UI"/>
+        <a:font script="Tale" typeface="Microsoft Tai Le"/>
+        <a:font script="Talu" typeface="Microsoft New Tai Lue"/>
+        <a:font script="Tfng" typeface="Ebrima"/>
+      </a:minorFont>
+    </a:fontScheme>
+    <a:fmtScheme name="Office">
+      <a:fillStyleLst>
+        <a:solidFill>
+          <a:schemeClr val="phClr"/>
+        </a:solidFill>
+        <a:gradFill rotWithShape="1">
+          <a:gsLst>
+            <a:gs pos="0">
+              <a:schemeClr val="phClr">
+                <a:lumMod val="110000"/>
+                <a:satMod val="105000"/>
+                <a:tint val="67000"/>
+              </a:schemeClr>
+            </a:gs>
+            <a:gs pos="50000">
+              <a:schemeClr val="phClr">
+                <a:lumMod val="105000"/>
+                <a:satMod val="103000"/>
+                <a:tint val="73000"/>
+              </a:schemeClr>
+            </a:gs>
+            <a:gs pos="100000">
+              <a:schemeClr val="phClr">
+                <a:lumMod val="105000"/>
+                <a:satMod val="109000"/>
+                <a:tint val="81000"/>
+              </a:schemeClr>
+            </a:gs>
+          </a:gsLst>
+          <a:lin ang="5400000" scaled="0"/>
+        </a:gradFill>
+        <a:gradFill rotWithShape="1">
+          <a:gsLst>
+            <a:gs pos="0">
+              <a:schemeClr val="phClr">
+                <a:satMod val="103000"/>
+                <a:lumMod val="102000"/>
+                <a:tint val="94000"/>
+              </a:schemeClr>
+            </a:gs>
+            <a:gs pos="50000">
+              <a:schemeClr val="phClr">
+                <a:satMod val="110000"/>
+                <a:lumMod val="100000"/>
+                <a:shade val="100000"/>
+              </a:schemeClr>
+            </a:gs>
+            <a:gs pos="100000">
+              <a:schemeClr val="phClr">
+                <a:lumMod val="99000"/>
+                <a:satMod val="120000"/>
+                <a:shade val="78000"/>
+              </a:schemeClr>
+            </a:gs>
+          </a:gsLst>
+          <a:lin ang="5400000" scaled="0"/>
+        </a:gradFill>
+      </a:fillStyleLst>
+      <a:lnStyleLst>
+        <a:ln w="6350" cap="flat" cmpd="sng" algn="ctr">
+          <a:solidFill>
+            <a:schemeClr val="phClr"/>
+          </a:solidFill>
+          <a:prstDash val="solid"/>
+          <a:miter lim="800000"/>
+        </a:ln>
+        <a:ln w="12700" cap="flat" cmpd="sng" algn="ctr">
+          <a:solidFill>
+            <a:schemeClr val="phClr"/>
+          </a:solidFill>
+          <a:prstDash val="solid"/>
+          <a:miter lim="800000"/>
+        </a:ln>
+        <a:ln w="19050" cap="flat" cmpd="sng" algn="ctr">
+          <a:solidFill>
+            <a:schemeClr val="phClr"/>
+          </a:solidFill>
+          <a:prstDash val="solid"/>
+          <a:miter lim="800000"/>
+        </a:ln>
+      </a:lnStyleLst>
+      <a:effectStyleLst>
+        <a:effectStyle>
+          <a:effectLst/>
+        </a:effectStyle>
+        <a:effectStyle>
+          <a:effectLst/>
+        </a:effectStyle>
+        <a:effectStyle>
+          <a:effectLst>
+            <a:outerShdw blurRad="57150" dist="19050" dir="5400000" algn="ctr" rotWithShape="0">
+              <a:srgbClr val="000000">
+                <a:alpha val="63000"/>
+              </a:srgbClr>
+            </a:outerShdw>
+          </a:effectLst>
+        </a:effectStyle>
+      </a:effectStyleLst>
+      <a:bgFillStyleLst>
+        <a:solidFill>
+          <a:schemeClr val="phClr"/>
+        </a:solidFill>
+        <a:solidFill>
+          <a:schemeClr val="phClr">
+            <a:tint val="95000"/>
+            <a:satMod val="170000"/>
+          </a:schemeClr>
+        </a:solidFill>
+        <a:gradFill rotWithShape="1">
+          <a:gsLst>
+            <a:gs pos="0">
+              <a:schemeClr val="phClr">
+                <a:tint val="93000"/>
+                <a:satMod val="150000"/>
+                <a:shade val="98000"/>
+                <a:lumMod val="102000"/>
+              </a:schemeClr>
+            </a:gs>
+            <a:gs pos="50000">
+              <a:schemeClr val="phClr">
+                <a:tint val="98000"/>
+                <a:satMod val="130000"/>
+                <a:shade val="90000"/>
+                <a:lumMod val="103000"/>
+              </a:schemeClr>
+            </a:gs>
+            <a:gs pos="100000">
+              <a:schemeClr val="phClr">
+                <a:shade val="63000"/>
+                <a:satMod val="120000"/>
+              </a:schemeClr>
+            </a:gs>
+          </a:gsLst>
+          <a:lin ang="5400000" scaled="0"/>
+        </a:gradFill>
+      </a:bgFillStyleLst>
+    </a:fmtScheme>
+  </a:themeElements>
+  <a:objectDefaults/>
+  <a:extraClrSchemeLst/>
+  <a:extLst>
+    <a:ext uri="{05A4C25C-085E-4340-85A3-A5531E510DB2}">
+      <thm15:themeFamily xmlns:thm15="http://schemas.microsoft.com/office/thememl/2012/main" name="Office Theme" id="{62F939B6-93AF-4DB8-9C6B-D6C7DFDC589F}" vid="{4A3C46E8-61CC-4603-A589-7422A47A8E4A}"/>
+    </a:ext>
+  </a:extLst>
+</a:theme>
 </file>